--- a/docs/pptx/whole/jx-linsubhr-ratio-hosp7.pptx
+++ b/docs/pptx/whole/jx-linsubhr-ratio-hosp7.pptx
@@ -2271,7 +2271,7 @@
           </p:nvSpPr>
           <p:spPr>
             <a:xfrm>
-              <a:off x="817517" y="5114368"/>
+              <a:off x="817517" y="5142518"/>
               <a:ext cx="7799693" cy="0"/>
             </a:xfrm>
             <a:custGeom>
@@ -2314,7 +2314,7 @@
           </p:nvSpPr>
           <p:spPr>
             <a:xfrm>
-              <a:off x="817517" y="4244691"/>
+              <a:off x="817517" y="4313054"/>
               <a:ext cx="7799693" cy="0"/>
             </a:xfrm>
             <a:custGeom>
@@ -2357,7 +2357,7 @@
           </p:nvSpPr>
           <p:spPr>
             <a:xfrm>
-              <a:off x="817517" y="3375014"/>
+              <a:off x="817517" y="3483591"/>
               <a:ext cx="7799693" cy="0"/>
             </a:xfrm>
             <a:custGeom>
@@ -2400,7 +2400,7 @@
           </p:nvSpPr>
           <p:spPr>
             <a:xfrm>
-              <a:off x="817517" y="2505337"/>
+              <a:off x="817517" y="2654127"/>
               <a:ext cx="7799693" cy="0"/>
             </a:xfrm>
             <a:custGeom>
@@ -2443,15 +2443,15 @@
           </p:nvSpPr>
           <p:spPr>
             <a:xfrm>
-              <a:off x="1615213" y="1896563"/>
-              <a:ext cx="0" cy="3826579"/>
+              <a:off x="1615213" y="2073503"/>
+              <a:ext cx="0" cy="3649639"/>
             </a:xfrm>
             <a:custGeom>
               <a:avLst/>
               <a:pathLst>
-                <a:path w="0" h="3826579">
+                <a:path w="0" h="3649639">
                   <a:moveTo>
-                    <a:pt x="0" y="3826579"/>
+                    <a:pt x="0" y="3649639"/>
                   </a:moveTo>
                   <a:lnTo>
                     <a:pt x="0" y="0"/>
@@ -2486,15 +2486,15 @@
           </p:nvSpPr>
           <p:spPr>
             <a:xfrm>
-              <a:off x="3387871" y="1896563"/>
-              <a:ext cx="0" cy="3826579"/>
+              <a:off x="3387871" y="2073503"/>
+              <a:ext cx="0" cy="3649639"/>
             </a:xfrm>
             <a:custGeom>
               <a:avLst/>
               <a:pathLst>
-                <a:path w="0" h="3826579">
+                <a:path w="0" h="3649639">
                   <a:moveTo>
-                    <a:pt x="0" y="3826579"/>
+                    <a:pt x="0" y="3649639"/>
                   </a:moveTo>
                   <a:lnTo>
                     <a:pt x="0" y="0"/>
@@ -2529,15 +2529,15 @@
           </p:nvSpPr>
           <p:spPr>
             <a:xfrm>
-              <a:off x="5160528" y="1896563"/>
-              <a:ext cx="0" cy="3826579"/>
+              <a:off x="5160528" y="2073503"/>
+              <a:ext cx="0" cy="3649639"/>
             </a:xfrm>
             <a:custGeom>
               <a:avLst/>
               <a:pathLst>
-                <a:path w="0" h="3826579">
+                <a:path w="0" h="3649639">
                   <a:moveTo>
-                    <a:pt x="0" y="3826579"/>
+                    <a:pt x="0" y="3649639"/>
                   </a:moveTo>
                   <a:lnTo>
                     <a:pt x="0" y="0"/>
@@ -2572,15 +2572,15 @@
           </p:nvSpPr>
           <p:spPr>
             <a:xfrm>
-              <a:off x="6933186" y="1896563"/>
-              <a:ext cx="0" cy="3826579"/>
+              <a:off x="6933186" y="2073503"/>
+              <a:ext cx="0" cy="3649639"/>
             </a:xfrm>
             <a:custGeom>
               <a:avLst/>
               <a:pathLst>
-                <a:path w="0" h="3826579">
+                <a:path w="0" h="3649639">
                   <a:moveTo>
-                    <a:pt x="0" y="3826579"/>
+                    <a:pt x="0" y="3649639"/>
                   </a:moveTo>
                   <a:lnTo>
                     <a:pt x="0" y="0"/>
@@ -2615,7 +2615,7 @@
           </p:nvSpPr>
           <p:spPr>
             <a:xfrm>
-              <a:off x="817517" y="5549207"/>
+              <a:off x="817517" y="5557249"/>
               <a:ext cx="7799693" cy="0"/>
             </a:xfrm>
             <a:custGeom>
@@ -2658,7 +2658,7 @@
           </p:nvSpPr>
           <p:spPr>
             <a:xfrm>
-              <a:off x="817517" y="4679530"/>
+              <a:off x="817517" y="4727786"/>
               <a:ext cx="7799693" cy="0"/>
             </a:xfrm>
             <a:custGeom>
@@ -2701,7 +2701,7 @@
           </p:nvSpPr>
           <p:spPr>
             <a:xfrm>
-              <a:off x="817517" y="3809853"/>
+              <a:off x="817517" y="3898322"/>
               <a:ext cx="7799693" cy="0"/>
             </a:xfrm>
             <a:custGeom>
@@ -2744,7 +2744,7 @@
           </p:nvSpPr>
           <p:spPr>
             <a:xfrm>
-              <a:off x="817517" y="2940175"/>
+              <a:off x="817517" y="3068859"/>
               <a:ext cx="7799693" cy="0"/>
             </a:xfrm>
             <a:custGeom>
@@ -2787,7 +2787,7 @@
           </p:nvSpPr>
           <p:spPr>
             <a:xfrm>
-              <a:off x="817517" y="2070498"/>
+              <a:off x="817517" y="2239395"/>
               <a:ext cx="7799693" cy="0"/>
             </a:xfrm>
             <a:custGeom>
@@ -2830,15 +2830,15 @@
           </p:nvSpPr>
           <p:spPr>
             <a:xfrm>
-              <a:off x="2501542" y="1896563"/>
-              <a:ext cx="0" cy="3826579"/>
+              <a:off x="2501542" y="2073503"/>
+              <a:ext cx="0" cy="3649639"/>
             </a:xfrm>
             <a:custGeom>
               <a:avLst/>
               <a:pathLst>
-                <a:path w="0" h="3826579">
+                <a:path w="0" h="3649639">
                   <a:moveTo>
-                    <a:pt x="0" y="3826579"/>
+                    <a:pt x="0" y="3649639"/>
                   </a:moveTo>
                   <a:lnTo>
                     <a:pt x="0" y="0"/>
@@ -2873,15 +2873,15 @@
           </p:nvSpPr>
           <p:spPr>
             <a:xfrm>
-              <a:off x="4274200" y="1896563"/>
-              <a:ext cx="0" cy="3826579"/>
+              <a:off x="4274200" y="2073503"/>
+              <a:ext cx="0" cy="3649639"/>
             </a:xfrm>
             <a:custGeom>
               <a:avLst/>
               <a:pathLst>
-                <a:path w="0" h="3826579">
+                <a:path w="0" h="3649639">
                   <a:moveTo>
-                    <a:pt x="0" y="3826579"/>
+                    <a:pt x="0" y="3649639"/>
                   </a:moveTo>
                   <a:lnTo>
                     <a:pt x="0" y="0"/>
@@ -2916,15 +2916,15 @@
           </p:nvSpPr>
           <p:spPr>
             <a:xfrm>
-              <a:off x="6046857" y="1896563"/>
-              <a:ext cx="0" cy="3826579"/>
+              <a:off x="6046857" y="2073503"/>
+              <a:ext cx="0" cy="3649639"/>
             </a:xfrm>
             <a:custGeom>
               <a:avLst/>
               <a:pathLst>
-                <a:path w="0" h="3826579">
+                <a:path w="0" h="3649639">
                   <a:moveTo>
-                    <a:pt x="0" y="3826579"/>
+                    <a:pt x="0" y="3649639"/>
                   </a:moveTo>
                   <a:lnTo>
                     <a:pt x="0" y="0"/>
@@ -2959,15 +2959,15 @@
           </p:nvSpPr>
           <p:spPr>
             <a:xfrm>
-              <a:off x="7819515" y="1896563"/>
-              <a:ext cx="0" cy="3826579"/>
+              <a:off x="7819515" y="2073503"/>
+              <a:ext cx="0" cy="3649639"/>
             </a:xfrm>
             <a:custGeom>
               <a:avLst/>
               <a:pathLst>
-                <a:path w="0" h="3826579">
+                <a:path w="0" h="3649639">
                   <a:moveTo>
-                    <a:pt x="0" y="3826579"/>
+                    <a:pt x="0" y="3649639"/>
                   </a:moveTo>
                   <a:lnTo>
                     <a:pt x="0" y="0"/>
@@ -3002,579 +3002,579 @@
           </p:nvSpPr>
           <p:spPr>
             <a:xfrm>
-              <a:off x="817517" y="1896563"/>
-              <a:ext cx="7235830" cy="3536130"/>
+              <a:off x="817517" y="2073503"/>
+              <a:ext cx="7235830" cy="3372621"/>
             </a:xfrm>
             <a:custGeom>
               <a:avLst/>
               <a:pathLst>
-                <a:path w="7235830" h="3536130">
+                <a:path w="7235830" h="3372621">
                   <a:moveTo>
                     <a:pt x="750084" y="0"/>
                   </a:moveTo>
                   <a:lnTo>
-                    <a:pt x="818707" y="130921"/>
-                  </a:lnTo>
-                  <a:lnTo>
-                    <a:pt x="892467" y="266236"/>
-                  </a:lnTo>
-                  <a:lnTo>
-                    <a:pt x="966227" y="396351"/>
-                  </a:lnTo>
-                  <a:lnTo>
-                    <a:pt x="1039987" y="521467"/>
-                  </a:lnTo>
-                  <a:lnTo>
-                    <a:pt x="1113747" y="641776"/>
-                  </a:lnTo>
-                  <a:lnTo>
-                    <a:pt x="1187508" y="757462"/>
-                  </a:lnTo>
-                  <a:lnTo>
-                    <a:pt x="1261268" y="868703"/>
-                  </a:lnTo>
-                  <a:lnTo>
-                    <a:pt x="1335028" y="975670"/>
-                  </a:lnTo>
-                  <a:lnTo>
-                    <a:pt x="1408788" y="1078527"/>
-                  </a:lnTo>
-                  <a:lnTo>
-                    <a:pt x="1482548" y="1177432"/>
-                  </a:lnTo>
-                  <a:lnTo>
-                    <a:pt x="1556308" y="1272537"/>
-                  </a:lnTo>
-                  <a:lnTo>
-                    <a:pt x="1630068" y="1363987"/>
-                  </a:lnTo>
-                  <a:lnTo>
-                    <a:pt x="1703828" y="1451924"/>
-                  </a:lnTo>
-                  <a:lnTo>
-                    <a:pt x="1777588" y="1536482"/>
-                  </a:lnTo>
-                  <a:lnTo>
-                    <a:pt x="1851348" y="1617791"/>
-                  </a:lnTo>
-                  <a:lnTo>
-                    <a:pt x="1925108" y="1695976"/>
-                  </a:lnTo>
-                  <a:lnTo>
-                    <a:pt x="1998868" y="1771156"/>
-                  </a:lnTo>
-                  <a:lnTo>
-                    <a:pt x="2072628" y="1843448"/>
-                  </a:lnTo>
-                  <a:lnTo>
-                    <a:pt x="2146388" y="1912963"/>
-                  </a:lnTo>
-                  <a:lnTo>
-                    <a:pt x="2220148" y="1979806"/>
-                  </a:lnTo>
-                  <a:lnTo>
-                    <a:pt x="2293908" y="2044082"/>
-                  </a:lnTo>
-                  <a:lnTo>
-                    <a:pt x="2367668" y="2105887"/>
-                  </a:lnTo>
-                  <a:lnTo>
-                    <a:pt x="2441428" y="2165318"/>
-                  </a:lnTo>
-                  <a:lnTo>
-                    <a:pt x="2515188" y="2222465"/>
-                  </a:lnTo>
-                  <a:lnTo>
-                    <a:pt x="2588948" y="2277417"/>
-                  </a:lnTo>
-                  <a:lnTo>
-                    <a:pt x="2662708" y="2330257"/>
-                  </a:lnTo>
-                  <a:lnTo>
-                    <a:pt x="2736468" y="2381067"/>
-                  </a:lnTo>
-                  <a:lnTo>
-                    <a:pt x="2810228" y="2429924"/>
-                  </a:lnTo>
-                  <a:lnTo>
-                    <a:pt x="2883988" y="2476905"/>
-                  </a:lnTo>
-                  <a:lnTo>
-                    <a:pt x="2957748" y="2522080"/>
-                  </a:lnTo>
-                  <a:lnTo>
-                    <a:pt x="3031508" y="2565519"/>
-                  </a:lnTo>
-                  <a:lnTo>
-                    <a:pt x="3105268" y="2607290"/>
-                  </a:lnTo>
-                  <a:lnTo>
-                    <a:pt x="3179028" y="2647455"/>
-                  </a:lnTo>
-                  <a:lnTo>
-                    <a:pt x="3252788" y="2686077"/>
-                  </a:lnTo>
-                  <a:lnTo>
-                    <a:pt x="3326548" y="2723216"/>
-                  </a:lnTo>
-                  <a:lnTo>
-                    <a:pt x="3400308" y="2758927"/>
-                  </a:lnTo>
-                  <a:lnTo>
-                    <a:pt x="3474068" y="2787035"/>
-                  </a:lnTo>
-                  <a:lnTo>
-                    <a:pt x="3547828" y="2800281"/>
-                  </a:lnTo>
-                  <a:lnTo>
-                    <a:pt x="3621588" y="2813324"/>
-                  </a:lnTo>
-                  <a:lnTo>
-                    <a:pt x="3695348" y="2826167"/>
-                  </a:lnTo>
-                  <a:lnTo>
-                    <a:pt x="3769108" y="2838814"/>
-                  </a:lnTo>
-                  <a:lnTo>
-                    <a:pt x="3842868" y="2851268"/>
-                  </a:lnTo>
-                  <a:lnTo>
-                    <a:pt x="3916628" y="2863531"/>
-                  </a:lnTo>
-                  <a:lnTo>
-                    <a:pt x="3990388" y="2875606"/>
-                  </a:lnTo>
-                  <a:lnTo>
-                    <a:pt x="4064149" y="2887497"/>
-                  </a:lnTo>
-                  <a:lnTo>
-                    <a:pt x="4137909" y="2899205"/>
-                  </a:lnTo>
-                  <a:lnTo>
-                    <a:pt x="4211669" y="2910735"/>
-                  </a:lnTo>
-                  <a:lnTo>
-                    <a:pt x="4285429" y="2922088"/>
-                  </a:lnTo>
-                  <a:lnTo>
-                    <a:pt x="4359189" y="2933267"/>
-                  </a:lnTo>
-                  <a:lnTo>
-                    <a:pt x="4432949" y="2944275"/>
-                  </a:lnTo>
-                  <a:lnTo>
-                    <a:pt x="4506709" y="2955115"/>
-                  </a:lnTo>
-                  <a:lnTo>
-                    <a:pt x="4580469" y="2965788"/>
-                  </a:lnTo>
-                  <a:lnTo>
-                    <a:pt x="4654229" y="2976299"/>
-                  </a:lnTo>
-                  <a:lnTo>
-                    <a:pt x="4727989" y="2986649"/>
-                  </a:lnTo>
-                  <a:lnTo>
-                    <a:pt x="4801749" y="2996840"/>
-                  </a:lnTo>
-                  <a:lnTo>
-                    <a:pt x="4875509" y="3006875"/>
-                  </a:lnTo>
-                  <a:lnTo>
-                    <a:pt x="4949269" y="3016757"/>
-                  </a:lnTo>
-                  <a:lnTo>
-                    <a:pt x="5023029" y="3026488"/>
-                  </a:lnTo>
-                  <a:lnTo>
-                    <a:pt x="5096789" y="3036069"/>
-                  </a:lnTo>
-                  <a:lnTo>
-                    <a:pt x="5170549" y="3045504"/>
-                  </a:lnTo>
-                  <a:lnTo>
-                    <a:pt x="5244309" y="3054795"/>
-                  </a:lnTo>
-                  <a:lnTo>
-                    <a:pt x="5318069" y="3063944"/>
-                  </a:lnTo>
-                  <a:lnTo>
-                    <a:pt x="5391829" y="3072952"/>
-                  </a:lnTo>
-                  <a:lnTo>
-                    <a:pt x="5465589" y="3081823"/>
-                  </a:lnTo>
-                  <a:lnTo>
-                    <a:pt x="5539349" y="3090558"/>
-                  </a:lnTo>
-                  <a:lnTo>
-                    <a:pt x="5613109" y="3099159"/>
-                  </a:lnTo>
-                  <a:lnTo>
-                    <a:pt x="5686869" y="3107628"/>
-                  </a:lnTo>
-                  <a:lnTo>
-                    <a:pt x="5760629" y="3115968"/>
-                  </a:lnTo>
-                  <a:lnTo>
-                    <a:pt x="5834389" y="3124181"/>
-                  </a:lnTo>
-                  <a:lnTo>
-                    <a:pt x="5908149" y="3132268"/>
-                  </a:lnTo>
-                  <a:lnTo>
-                    <a:pt x="5981909" y="3140231"/>
-                  </a:lnTo>
-                  <a:lnTo>
-                    <a:pt x="6055669" y="3148072"/>
-                  </a:lnTo>
-                  <a:lnTo>
-                    <a:pt x="6129429" y="3155793"/>
-                  </a:lnTo>
-                  <a:lnTo>
-                    <a:pt x="6203189" y="3163396"/>
-                  </a:lnTo>
-                  <a:lnTo>
-                    <a:pt x="6276949" y="3170882"/>
-                  </a:lnTo>
-                  <a:lnTo>
-                    <a:pt x="6350709" y="3178255"/>
-                  </a:lnTo>
-                  <a:lnTo>
-                    <a:pt x="6424469" y="3185514"/>
-                  </a:lnTo>
-                  <a:lnTo>
-                    <a:pt x="6498229" y="3192662"/>
-                  </a:lnTo>
-                  <a:lnTo>
-                    <a:pt x="6571989" y="3199701"/>
-                  </a:lnTo>
-                  <a:lnTo>
-                    <a:pt x="6645749" y="3206632"/>
-                  </a:lnTo>
-                  <a:lnTo>
-                    <a:pt x="6719509" y="3213457"/>
-                  </a:lnTo>
-                  <a:lnTo>
-                    <a:pt x="6793269" y="3220178"/>
-                  </a:lnTo>
-                  <a:lnTo>
-                    <a:pt x="6867029" y="3226795"/>
-                  </a:lnTo>
-                  <a:lnTo>
-                    <a:pt x="6940789" y="3233312"/>
-                  </a:lnTo>
-                  <a:lnTo>
-                    <a:pt x="7014550" y="3239729"/>
-                  </a:lnTo>
-                  <a:lnTo>
-                    <a:pt x="7088310" y="3246047"/>
-                  </a:lnTo>
-                  <a:lnTo>
-                    <a:pt x="7162070" y="3252269"/>
-                  </a:lnTo>
-                  <a:lnTo>
-                    <a:pt x="7235830" y="3258396"/>
-                  </a:lnTo>
-                  <a:lnTo>
-                    <a:pt x="7235830" y="3536130"/>
-                  </a:lnTo>
-                  <a:lnTo>
-                    <a:pt x="7162070" y="3531475"/>
-                  </a:lnTo>
-                  <a:lnTo>
-                    <a:pt x="7088310" y="3526633"/>
-                  </a:lnTo>
-                  <a:lnTo>
-                    <a:pt x="7014550" y="3521598"/>
-                  </a:lnTo>
-                  <a:lnTo>
-                    <a:pt x="6940789" y="3516361"/>
-                  </a:lnTo>
-                  <a:lnTo>
-                    <a:pt x="6867029" y="3510916"/>
-                  </a:lnTo>
-                  <a:lnTo>
-                    <a:pt x="6793269" y="3505253"/>
-                  </a:lnTo>
-                  <a:lnTo>
-                    <a:pt x="6719509" y="3499363"/>
-                  </a:lnTo>
-                  <a:lnTo>
-                    <a:pt x="6645749" y="3493238"/>
-                  </a:lnTo>
-                  <a:lnTo>
-                    <a:pt x="6571989" y="3486869"/>
-                  </a:lnTo>
-                  <a:lnTo>
-                    <a:pt x="6498229" y="3480245"/>
-                  </a:lnTo>
-                  <a:lnTo>
-                    <a:pt x="6424469" y="3473356"/>
-                  </a:lnTo>
-                  <a:lnTo>
-                    <a:pt x="6350709" y="3466192"/>
-                  </a:lnTo>
-                  <a:lnTo>
-                    <a:pt x="6276949" y="3458742"/>
-                  </a:lnTo>
-                  <a:lnTo>
-                    <a:pt x="6203189" y="3450994"/>
-                  </a:lnTo>
-                  <a:lnTo>
-                    <a:pt x="6129429" y="3442936"/>
-                  </a:lnTo>
-                  <a:lnTo>
-                    <a:pt x="6055669" y="3434557"/>
-                  </a:lnTo>
-                  <a:lnTo>
-                    <a:pt x="5981909" y="3425843"/>
-                  </a:lnTo>
-                  <a:lnTo>
-                    <a:pt x="5908149" y="3416780"/>
-                  </a:lnTo>
-                  <a:lnTo>
-                    <a:pt x="5834389" y="3407355"/>
-                  </a:lnTo>
-                  <a:lnTo>
-                    <a:pt x="5760629" y="3397554"/>
-                  </a:lnTo>
-                  <a:lnTo>
-                    <a:pt x="5686869" y="3387361"/>
-                  </a:lnTo>
-                  <a:lnTo>
-                    <a:pt x="5613109" y="3376761"/>
-                  </a:lnTo>
-                  <a:lnTo>
-                    <a:pt x="5539349" y="3365737"/>
-                  </a:lnTo>
-                  <a:lnTo>
-                    <a:pt x="5465589" y="3354273"/>
-                  </a:lnTo>
-                  <a:lnTo>
-                    <a:pt x="5391829" y="3342351"/>
-                  </a:lnTo>
-                  <a:lnTo>
-                    <a:pt x="5318069" y="3329952"/>
-                  </a:lnTo>
-                  <a:lnTo>
-                    <a:pt x="5244309" y="3317058"/>
-                  </a:lnTo>
-                  <a:lnTo>
-                    <a:pt x="5170549" y="3303649"/>
-                  </a:lnTo>
-                  <a:lnTo>
-                    <a:pt x="5096789" y="3289703"/>
-                  </a:lnTo>
-                  <a:lnTo>
-                    <a:pt x="5023029" y="3275201"/>
-                  </a:lnTo>
-                  <a:lnTo>
-                    <a:pt x="4949269" y="3260119"/>
-                  </a:lnTo>
-                  <a:lnTo>
-                    <a:pt x="4875509" y="3244435"/>
-                  </a:lnTo>
-                  <a:lnTo>
-                    <a:pt x="4801749" y="3228123"/>
-                  </a:lnTo>
-                  <a:lnTo>
-                    <a:pt x="4727989" y="3211160"/>
-                  </a:lnTo>
-                  <a:lnTo>
-                    <a:pt x="4654229" y="3193519"/>
-                  </a:lnTo>
-                  <a:lnTo>
-                    <a:pt x="4580469" y="3175174"/>
-                  </a:lnTo>
-                  <a:lnTo>
-                    <a:pt x="4506709" y="3156095"/>
-                  </a:lnTo>
-                  <a:lnTo>
-                    <a:pt x="4432949" y="3136254"/>
-                  </a:lnTo>
-                  <a:lnTo>
-                    <a:pt x="4359189" y="3115620"/>
-                  </a:lnTo>
-                  <a:lnTo>
-                    <a:pt x="4285429" y="3094161"/>
-                  </a:lnTo>
-                  <a:lnTo>
-                    <a:pt x="4211669" y="3071845"/>
-                  </a:lnTo>
-                  <a:lnTo>
-                    <a:pt x="4137909" y="3048638"/>
-                  </a:lnTo>
-                  <a:lnTo>
-                    <a:pt x="4064149" y="3024503"/>
-                  </a:lnTo>
-                  <a:lnTo>
-                    <a:pt x="3990388" y="2999403"/>
-                  </a:lnTo>
-                  <a:lnTo>
-                    <a:pt x="3916628" y="2973301"/>
-                  </a:lnTo>
-                  <a:lnTo>
-                    <a:pt x="3842868" y="2946156"/>
-                  </a:lnTo>
-                  <a:lnTo>
-                    <a:pt x="3769108" y="2917926"/>
-                  </a:lnTo>
-                  <a:lnTo>
-                    <a:pt x="3695348" y="2888568"/>
-                  </a:lnTo>
-                  <a:lnTo>
-                    <a:pt x="3621588" y="2858037"/>
-                  </a:lnTo>
-                  <a:lnTo>
-                    <a:pt x="3547828" y="2826286"/>
-                  </a:lnTo>
-                  <a:lnTo>
-                    <a:pt x="3474068" y="2793266"/>
-                  </a:lnTo>
-                  <a:lnTo>
-                    <a:pt x="3400308" y="2773583"/>
-                  </a:lnTo>
-                  <a:lnTo>
-                    <a:pt x="3326548" y="2759922"/>
-                  </a:lnTo>
-                  <a:lnTo>
-                    <a:pt x="3252788" y="2746049"/>
-                  </a:lnTo>
-                  <a:lnTo>
-                    <a:pt x="3179028" y="2731961"/>
-                  </a:lnTo>
-                  <a:lnTo>
-                    <a:pt x="3105268" y="2717653"/>
-                  </a:lnTo>
-                  <a:lnTo>
-                    <a:pt x="3031508" y="2703123"/>
-                  </a:lnTo>
-                  <a:lnTo>
-                    <a:pt x="2957748" y="2688367"/>
-                  </a:lnTo>
-                  <a:lnTo>
-                    <a:pt x="2883988" y="2673382"/>
-                  </a:lnTo>
-                  <a:lnTo>
-                    <a:pt x="2810228" y="2658164"/>
-                  </a:lnTo>
-                  <a:lnTo>
-                    <a:pt x="2736468" y="2642710"/>
-                  </a:lnTo>
-                  <a:lnTo>
-                    <a:pt x="2662708" y="2627016"/>
-                  </a:lnTo>
-                  <a:lnTo>
-                    <a:pt x="2588948" y="2611077"/>
-                  </a:lnTo>
-                  <a:lnTo>
-                    <a:pt x="2515188" y="2594891"/>
-                  </a:lnTo>
-                  <a:lnTo>
-                    <a:pt x="2441428" y="2578453"/>
-                  </a:lnTo>
-                  <a:lnTo>
-                    <a:pt x="2367668" y="2561760"/>
-                  </a:lnTo>
-                  <a:lnTo>
-                    <a:pt x="2293908" y="2544808"/>
-                  </a:lnTo>
-                  <a:lnTo>
-                    <a:pt x="2220148" y="2527592"/>
-                  </a:lnTo>
-                  <a:lnTo>
-                    <a:pt x="2146388" y="2510108"/>
-                  </a:lnTo>
-                  <a:lnTo>
-                    <a:pt x="2072628" y="2492353"/>
-                  </a:lnTo>
-                  <a:lnTo>
-                    <a:pt x="1998868" y="2474322"/>
-                  </a:lnTo>
-                  <a:lnTo>
-                    <a:pt x="1925108" y="2456011"/>
-                  </a:lnTo>
-                  <a:lnTo>
-                    <a:pt x="1851348" y="2437415"/>
-                  </a:lnTo>
-                  <a:lnTo>
-                    <a:pt x="1777588" y="2418530"/>
-                  </a:lnTo>
-                  <a:lnTo>
-                    <a:pt x="1703828" y="2399352"/>
-                  </a:lnTo>
-                  <a:lnTo>
-                    <a:pt x="1630068" y="2379875"/>
-                  </a:lnTo>
-                  <a:lnTo>
-                    <a:pt x="1556308" y="2360096"/>
-                  </a:lnTo>
-                  <a:lnTo>
-                    <a:pt x="1482548" y="2340010"/>
-                  </a:lnTo>
-                  <a:lnTo>
-                    <a:pt x="1408788" y="2319611"/>
-                  </a:lnTo>
-                  <a:lnTo>
-                    <a:pt x="1335028" y="2298896"/>
-                  </a:lnTo>
-                  <a:lnTo>
-                    <a:pt x="1261268" y="2277858"/>
-                  </a:lnTo>
-                  <a:lnTo>
-                    <a:pt x="1187508" y="2256494"/>
-                  </a:lnTo>
-                  <a:lnTo>
-                    <a:pt x="1113747" y="2234797"/>
-                  </a:lnTo>
-                  <a:lnTo>
-                    <a:pt x="1039987" y="2212764"/>
-                  </a:lnTo>
-                  <a:lnTo>
-                    <a:pt x="966227" y="2190388"/>
-                  </a:lnTo>
-                  <a:lnTo>
-                    <a:pt x="892467" y="2167664"/>
-                  </a:lnTo>
-                  <a:lnTo>
-                    <a:pt x="818707" y="2144587"/>
-                  </a:lnTo>
-                  <a:lnTo>
-                    <a:pt x="744947" y="2121152"/>
-                  </a:lnTo>
-                  <a:lnTo>
-                    <a:pt x="671187" y="2097352"/>
-                  </a:lnTo>
-                  <a:lnTo>
-                    <a:pt x="597427" y="2073183"/>
-                  </a:lnTo>
-                  <a:lnTo>
-                    <a:pt x="523667" y="2048638"/>
-                  </a:lnTo>
-                  <a:lnTo>
-                    <a:pt x="449907" y="2023711"/>
-                  </a:lnTo>
-                  <a:lnTo>
-                    <a:pt x="376147" y="1998397"/>
-                  </a:lnTo>
-                  <a:lnTo>
-                    <a:pt x="302387" y="1972690"/>
-                  </a:lnTo>
-                  <a:lnTo>
-                    <a:pt x="228627" y="1946583"/>
-                  </a:lnTo>
-                  <a:lnTo>
-                    <a:pt x="154867" y="1920071"/>
-                  </a:lnTo>
-                  <a:lnTo>
-                    <a:pt x="81107" y="1893146"/>
-                  </a:lnTo>
-                  <a:lnTo>
-                    <a:pt x="7347" y="1865803"/>
-                  </a:lnTo>
-                  <a:lnTo>
-                    <a:pt x="0" y="1863037"/>
+                    <a:pt x="818707" y="124867"/>
+                  </a:lnTo>
+                  <a:lnTo>
+                    <a:pt x="892467" y="253925"/>
+                  </a:lnTo>
+                  <a:lnTo>
+                    <a:pt x="966227" y="378024"/>
+                  </a:lnTo>
+                  <a:lnTo>
+                    <a:pt x="1039987" y="497355"/>
+                  </a:lnTo>
+                  <a:lnTo>
+                    <a:pt x="1113747" y="612100"/>
+                  </a:lnTo>
+                  <a:lnTo>
+                    <a:pt x="1187508" y="722437"/>
+                  </a:lnTo>
+                  <a:lnTo>
+                    <a:pt x="1261268" y="828535"/>
+                  </a:lnTo>
+                  <a:lnTo>
+                    <a:pt x="1335028" y="930555"/>
+                  </a:lnTo>
+                  <a:lnTo>
+                    <a:pt x="1408788" y="1028656"/>
+                  </a:lnTo>
+                  <a:lnTo>
+                    <a:pt x="1482548" y="1122988"/>
+                  </a:lnTo>
+                  <a:lnTo>
+                    <a:pt x="1556308" y="1213695"/>
+                  </a:lnTo>
+                  <a:lnTo>
+                    <a:pt x="1630068" y="1300917"/>
+                  </a:lnTo>
+                  <a:lnTo>
+                    <a:pt x="1703828" y="1384787"/>
+                  </a:lnTo>
+                  <a:lnTo>
+                    <a:pt x="1777588" y="1465435"/>
+                  </a:lnTo>
+                  <a:lnTo>
+                    <a:pt x="1851348" y="1542985"/>
+                  </a:lnTo>
+                  <a:lnTo>
+                    <a:pt x="1925108" y="1617554"/>
+                  </a:lnTo>
+                  <a:lnTo>
+                    <a:pt x="1998868" y="1689259"/>
+                  </a:lnTo>
+                  <a:lnTo>
+                    <a:pt x="2072628" y="1758208"/>
+                  </a:lnTo>
+                  <a:lnTo>
+                    <a:pt x="2146388" y="1824508"/>
+                  </a:lnTo>
+                  <a:lnTo>
+                    <a:pt x="2220148" y="1888261"/>
+                  </a:lnTo>
+                  <a:lnTo>
+                    <a:pt x="2293908" y="1949564"/>
+                  </a:lnTo>
+                  <a:lnTo>
+                    <a:pt x="2367668" y="2008512"/>
+                  </a:lnTo>
+                  <a:lnTo>
+                    <a:pt x="2441428" y="2065194"/>
+                  </a:lnTo>
+                  <a:lnTo>
+                    <a:pt x="2515188" y="2119699"/>
+                  </a:lnTo>
+                  <a:lnTo>
+                    <a:pt x="2588948" y="2172110"/>
+                  </a:lnTo>
+                  <a:lnTo>
+                    <a:pt x="2662708" y="2222507"/>
+                  </a:lnTo>
+                  <a:lnTo>
+                    <a:pt x="2736468" y="2270967"/>
+                  </a:lnTo>
+                  <a:lnTo>
+                    <a:pt x="2810228" y="2317565"/>
+                  </a:lnTo>
+                  <a:lnTo>
+                    <a:pt x="2883988" y="2362373"/>
+                  </a:lnTo>
+                  <a:lnTo>
+                    <a:pt x="2957748" y="2405460"/>
+                  </a:lnTo>
+                  <a:lnTo>
+                    <a:pt x="3031508" y="2446891"/>
+                  </a:lnTo>
+                  <a:lnTo>
+                    <a:pt x="3105268" y="2486730"/>
+                  </a:lnTo>
+                  <a:lnTo>
+                    <a:pt x="3179028" y="2525038"/>
+                  </a:lnTo>
+                  <a:lnTo>
+                    <a:pt x="3252788" y="2561874"/>
+                  </a:lnTo>
+                  <a:lnTo>
+                    <a:pt x="3326548" y="2597295"/>
+                  </a:lnTo>
+                  <a:lnTo>
+                    <a:pt x="3400308" y="2631355"/>
+                  </a:lnTo>
+                  <a:lnTo>
+                    <a:pt x="3474068" y="2658163"/>
+                  </a:lnTo>
+                  <a:lnTo>
+                    <a:pt x="3547828" y="2670797"/>
+                  </a:lnTo>
+                  <a:lnTo>
+                    <a:pt x="3621588" y="2683237"/>
+                  </a:lnTo>
+                  <a:lnTo>
+                    <a:pt x="3695348" y="2695486"/>
+                  </a:lnTo>
+                  <a:lnTo>
+                    <a:pt x="3769108" y="2707549"/>
+                  </a:lnTo>
+                  <a:lnTo>
+                    <a:pt x="3842868" y="2719426"/>
+                  </a:lnTo>
+                  <a:lnTo>
+                    <a:pt x="3916628" y="2731122"/>
+                  </a:lnTo>
+                  <a:lnTo>
+                    <a:pt x="3990388" y="2742639"/>
+                  </a:lnTo>
+                  <a:lnTo>
+                    <a:pt x="4064149" y="2753980"/>
+                  </a:lnTo>
+                  <a:lnTo>
+                    <a:pt x="4137909" y="2765147"/>
+                  </a:lnTo>
+                  <a:lnTo>
+                    <a:pt x="4211669" y="2776143"/>
+                  </a:lnTo>
+                  <a:lnTo>
+                    <a:pt x="4285429" y="2786971"/>
+                  </a:lnTo>
+                  <a:lnTo>
+                    <a:pt x="4359189" y="2797634"/>
+                  </a:lnTo>
+                  <a:lnTo>
+                    <a:pt x="4432949" y="2808133"/>
+                  </a:lnTo>
+                  <a:lnTo>
+                    <a:pt x="4506709" y="2818471"/>
+                  </a:lnTo>
+                  <a:lnTo>
+                    <a:pt x="4580469" y="2828651"/>
+                  </a:lnTo>
+                  <a:lnTo>
+                    <a:pt x="4654229" y="2838676"/>
+                  </a:lnTo>
+                  <a:lnTo>
+                    <a:pt x="4727989" y="2848547"/>
+                  </a:lnTo>
+                  <a:lnTo>
+                    <a:pt x="4801749" y="2858267"/>
+                  </a:lnTo>
+                  <a:lnTo>
+                    <a:pt x="4875509" y="2867838"/>
+                  </a:lnTo>
+                  <a:lnTo>
+                    <a:pt x="4949269" y="2877263"/>
+                  </a:lnTo>
+                  <a:lnTo>
+                    <a:pt x="5023029" y="2886544"/>
+                  </a:lnTo>
+                  <a:lnTo>
+                    <a:pt x="5096789" y="2895683"/>
+                  </a:lnTo>
+                  <a:lnTo>
+                    <a:pt x="5170549" y="2904681"/>
+                  </a:lnTo>
+                  <a:lnTo>
+                    <a:pt x="5244309" y="2913542"/>
+                  </a:lnTo>
+                  <a:lnTo>
+                    <a:pt x="5318069" y="2922268"/>
+                  </a:lnTo>
+                  <a:lnTo>
+                    <a:pt x="5391829" y="2930860"/>
+                  </a:lnTo>
+                  <a:lnTo>
+                    <a:pt x="5465589" y="2939320"/>
+                  </a:lnTo>
+                  <a:lnTo>
+                    <a:pt x="5539349" y="2947651"/>
+                  </a:lnTo>
+                  <a:lnTo>
+                    <a:pt x="5613109" y="2955855"/>
+                  </a:lnTo>
+                  <a:lnTo>
+                    <a:pt x="5686869" y="2963933"/>
+                  </a:lnTo>
+                  <a:lnTo>
+                    <a:pt x="5760629" y="2971887"/>
+                  </a:lnTo>
+                  <a:lnTo>
+                    <a:pt x="5834389" y="2979720"/>
+                  </a:lnTo>
+                  <a:lnTo>
+                    <a:pt x="5908149" y="2987433"/>
+                  </a:lnTo>
+                  <a:lnTo>
+                    <a:pt x="5981909" y="2995027"/>
+                  </a:lnTo>
+                  <a:lnTo>
+                    <a:pt x="6055669" y="3002506"/>
+                  </a:lnTo>
+                  <a:lnTo>
+                    <a:pt x="6129429" y="3009870"/>
+                  </a:lnTo>
+                  <a:lnTo>
+                    <a:pt x="6203189" y="3017122"/>
+                  </a:lnTo>
+                  <a:lnTo>
+                    <a:pt x="6276949" y="3024262"/>
+                  </a:lnTo>
+                  <a:lnTo>
+                    <a:pt x="6350709" y="3031293"/>
+                  </a:lnTo>
+                  <a:lnTo>
+                    <a:pt x="6424469" y="3038217"/>
+                  </a:lnTo>
+                  <a:lnTo>
+                    <a:pt x="6498229" y="3045035"/>
+                  </a:lnTo>
+                  <a:lnTo>
+                    <a:pt x="6571989" y="3051748"/>
+                  </a:lnTo>
+                  <a:lnTo>
+                    <a:pt x="6645749" y="3058358"/>
+                  </a:lnTo>
+                  <a:lnTo>
+                    <a:pt x="6719509" y="3064868"/>
+                  </a:lnTo>
+                  <a:lnTo>
+                    <a:pt x="6793269" y="3071278"/>
+                  </a:lnTo>
+                  <a:lnTo>
+                    <a:pt x="6867029" y="3077589"/>
+                  </a:lnTo>
+                  <a:lnTo>
+                    <a:pt x="6940789" y="3083805"/>
+                  </a:lnTo>
+                  <a:lnTo>
+                    <a:pt x="7014550" y="3089925"/>
+                  </a:lnTo>
+                  <a:lnTo>
+                    <a:pt x="7088310" y="3095951"/>
+                  </a:lnTo>
+                  <a:lnTo>
+                    <a:pt x="7162070" y="3101885"/>
+                  </a:lnTo>
+                  <a:lnTo>
+                    <a:pt x="7235830" y="3107729"/>
+                  </a:lnTo>
+                  <a:lnTo>
+                    <a:pt x="7235830" y="3372621"/>
+                  </a:lnTo>
+                  <a:lnTo>
+                    <a:pt x="7162070" y="3368181"/>
+                  </a:lnTo>
+                  <a:lnTo>
+                    <a:pt x="7088310" y="3363563"/>
+                  </a:lnTo>
+                  <a:lnTo>
+                    <a:pt x="7014550" y="3358760"/>
+                  </a:lnTo>
+                  <a:lnTo>
+                    <a:pt x="6940789" y="3353766"/>
+                  </a:lnTo>
+                  <a:lnTo>
+                    <a:pt x="6867029" y="3348572"/>
+                  </a:lnTo>
+                  <a:lnTo>
+                    <a:pt x="6793269" y="3343171"/>
+                  </a:lnTo>
+                  <a:lnTo>
+                    <a:pt x="6719509" y="3337554"/>
+                  </a:lnTo>
+                  <a:lnTo>
+                    <a:pt x="6645749" y="3331712"/>
+                  </a:lnTo>
+                  <a:lnTo>
+                    <a:pt x="6571989" y="3325637"/>
+                  </a:lnTo>
+                  <a:lnTo>
+                    <a:pt x="6498229" y="3319320"/>
+                  </a:lnTo>
+                  <a:lnTo>
+                    <a:pt x="6424469" y="3312749"/>
+                  </a:lnTo>
+                  <a:lnTo>
+                    <a:pt x="6350709" y="3305917"/>
+                  </a:lnTo>
+                  <a:lnTo>
+                    <a:pt x="6276949" y="3298811"/>
+                  </a:lnTo>
+                  <a:lnTo>
+                    <a:pt x="6203189" y="3291421"/>
+                  </a:lnTo>
+                  <a:lnTo>
+                    <a:pt x="6129429" y="3283736"/>
+                  </a:lnTo>
+                  <a:lnTo>
+                    <a:pt x="6055669" y="3275744"/>
+                  </a:lnTo>
+                  <a:lnTo>
+                    <a:pt x="5981909" y="3267433"/>
+                  </a:lnTo>
+                  <a:lnTo>
+                    <a:pt x="5908149" y="3258789"/>
+                  </a:lnTo>
+                  <a:lnTo>
+                    <a:pt x="5834389" y="3249801"/>
+                  </a:lnTo>
+                  <a:lnTo>
+                    <a:pt x="5760629" y="3240453"/>
+                  </a:lnTo>
+                  <a:lnTo>
+                    <a:pt x="5686869" y="3230731"/>
+                  </a:lnTo>
+                  <a:lnTo>
+                    <a:pt x="5613109" y="3220621"/>
+                  </a:lnTo>
+                  <a:lnTo>
+                    <a:pt x="5539349" y="3210107"/>
+                  </a:lnTo>
+                  <a:lnTo>
+                    <a:pt x="5465589" y="3199173"/>
+                  </a:lnTo>
+                  <a:lnTo>
+                    <a:pt x="5391829" y="3187802"/>
+                  </a:lnTo>
+                  <a:lnTo>
+                    <a:pt x="5318069" y="3175976"/>
+                  </a:lnTo>
+                  <a:lnTo>
+                    <a:pt x="5244309" y="3163678"/>
+                  </a:lnTo>
+                  <a:lnTo>
+                    <a:pt x="5170549" y="3150889"/>
+                  </a:lnTo>
+                  <a:lnTo>
+                    <a:pt x="5096789" y="3137589"/>
+                  </a:lnTo>
+                  <a:lnTo>
+                    <a:pt x="5023029" y="3123757"/>
+                  </a:lnTo>
+                  <a:lnTo>
+                    <a:pt x="4949269" y="3109372"/>
+                  </a:lnTo>
+                  <a:lnTo>
+                    <a:pt x="4875509" y="3094413"/>
+                  </a:lnTo>
+                  <a:lnTo>
+                    <a:pt x="4801749" y="3078856"/>
+                  </a:lnTo>
+                  <a:lnTo>
+                    <a:pt x="4727989" y="3062677"/>
+                  </a:lnTo>
+                  <a:lnTo>
+                    <a:pt x="4654229" y="3045852"/>
+                  </a:lnTo>
+                  <a:lnTo>
+                    <a:pt x="4580469" y="3028355"/>
+                  </a:lnTo>
+                  <a:lnTo>
+                    <a:pt x="4506709" y="3010158"/>
+                  </a:lnTo>
+                  <a:lnTo>
+                    <a:pt x="4432949" y="2991234"/>
+                  </a:lnTo>
+                  <a:lnTo>
+                    <a:pt x="4359189" y="2971555"/>
+                  </a:lnTo>
+                  <a:lnTo>
+                    <a:pt x="4285429" y="2951088"/>
+                  </a:lnTo>
+                  <a:lnTo>
+                    <a:pt x="4211669" y="2929804"/>
+                  </a:lnTo>
+                  <a:lnTo>
+                    <a:pt x="4137909" y="2907670"/>
+                  </a:lnTo>
+                  <a:lnTo>
+                    <a:pt x="4064149" y="2884651"/>
+                  </a:lnTo>
+                  <a:lnTo>
+                    <a:pt x="3990388" y="2860712"/>
+                  </a:lnTo>
+                  <a:lnTo>
+                    <a:pt x="3916628" y="2835817"/>
+                  </a:lnTo>
+                  <a:lnTo>
+                    <a:pt x="3842868" y="2809927"/>
+                  </a:lnTo>
+                  <a:lnTo>
+                    <a:pt x="3769108" y="2783002"/>
+                  </a:lnTo>
+                  <a:lnTo>
+                    <a:pt x="3695348" y="2755002"/>
+                  </a:lnTo>
+                  <a:lnTo>
+                    <a:pt x="3621588" y="2725882"/>
+                  </a:lnTo>
+                  <a:lnTo>
+                    <a:pt x="3547828" y="2695599"/>
+                  </a:lnTo>
+                  <a:lnTo>
+                    <a:pt x="3474068" y="2664106"/>
+                  </a:lnTo>
+                  <a:lnTo>
+                    <a:pt x="3400308" y="2645333"/>
+                  </a:lnTo>
+                  <a:lnTo>
+                    <a:pt x="3326548" y="2632304"/>
+                  </a:lnTo>
+                  <a:lnTo>
+                    <a:pt x="3252788" y="2619073"/>
+                  </a:lnTo>
+                  <a:lnTo>
+                    <a:pt x="3179028" y="2605636"/>
+                  </a:lnTo>
+                  <a:lnTo>
+                    <a:pt x="3105268" y="2591990"/>
+                  </a:lnTo>
+                  <a:lnTo>
+                    <a:pt x="3031508" y="2578132"/>
+                  </a:lnTo>
+                  <a:lnTo>
+                    <a:pt x="2957748" y="2564058"/>
+                  </a:lnTo>
+                  <a:lnTo>
+                    <a:pt x="2883988" y="2549766"/>
+                  </a:lnTo>
+                  <a:lnTo>
+                    <a:pt x="2810228" y="2535252"/>
+                  </a:lnTo>
+                  <a:lnTo>
+                    <a:pt x="2736468" y="2520512"/>
+                  </a:lnTo>
+                  <a:lnTo>
+                    <a:pt x="2662708" y="2505543"/>
+                  </a:lnTo>
+                  <a:lnTo>
+                    <a:pt x="2588948" y="2490342"/>
+                  </a:lnTo>
+                  <a:lnTo>
+                    <a:pt x="2515188" y="2474904"/>
+                  </a:lnTo>
+                  <a:lnTo>
+                    <a:pt x="2441428" y="2459227"/>
+                  </a:lnTo>
+                  <a:lnTo>
+                    <a:pt x="2367668" y="2443305"/>
+                  </a:lnTo>
+                  <a:lnTo>
+                    <a:pt x="2293908" y="2427137"/>
+                  </a:lnTo>
+                  <a:lnTo>
+                    <a:pt x="2220148" y="2410717"/>
+                  </a:lnTo>
+                  <a:lnTo>
+                    <a:pt x="2146388" y="2394042"/>
+                  </a:lnTo>
+                  <a:lnTo>
+                    <a:pt x="2072628" y="2377108"/>
+                  </a:lnTo>
+                  <a:lnTo>
+                    <a:pt x="1998868" y="2359910"/>
+                  </a:lnTo>
+                  <a:lnTo>
+                    <a:pt x="1925108" y="2342446"/>
+                  </a:lnTo>
+                  <a:lnTo>
+                    <a:pt x="1851348" y="2324710"/>
+                  </a:lnTo>
+                  <a:lnTo>
+                    <a:pt x="1777588" y="2306698"/>
+                  </a:lnTo>
+                  <a:lnTo>
+                    <a:pt x="1703828" y="2288406"/>
+                  </a:lnTo>
+                  <a:lnTo>
+                    <a:pt x="1630068" y="2269831"/>
+                  </a:lnTo>
+                  <a:lnTo>
+                    <a:pt x="1556308" y="2250966"/>
+                  </a:lnTo>
+                  <a:lnTo>
+                    <a:pt x="1482548" y="2231809"/>
+                  </a:lnTo>
+                  <a:lnTo>
+                    <a:pt x="1408788" y="2212353"/>
+                  </a:lnTo>
+                  <a:lnTo>
+                    <a:pt x="1335028" y="2192596"/>
+                  </a:lnTo>
+                  <a:lnTo>
+                    <a:pt x="1261268" y="2172531"/>
+                  </a:lnTo>
+                  <a:lnTo>
+                    <a:pt x="1187508" y="2152154"/>
+                  </a:lnTo>
+                  <a:lnTo>
+                    <a:pt x="1113747" y="2131461"/>
+                  </a:lnTo>
+                  <a:lnTo>
+                    <a:pt x="1039987" y="2110446"/>
+                  </a:lnTo>
+                  <a:lnTo>
+                    <a:pt x="966227" y="2089105"/>
+                  </a:lnTo>
+                  <a:lnTo>
+                    <a:pt x="892467" y="2067432"/>
+                  </a:lnTo>
+                  <a:lnTo>
+                    <a:pt x="818707" y="2045422"/>
+                  </a:lnTo>
+                  <a:lnTo>
+                    <a:pt x="744947" y="2023071"/>
+                  </a:lnTo>
+                  <a:lnTo>
+                    <a:pt x="671187" y="2000371"/>
+                  </a:lnTo>
+                  <a:lnTo>
+                    <a:pt x="597427" y="1977319"/>
+                  </a:lnTo>
+                  <a:lnTo>
+                    <a:pt x="523667" y="1953909"/>
+                  </a:lnTo>
+                  <a:lnTo>
+                    <a:pt x="449907" y="1930135"/>
+                  </a:lnTo>
+                  <a:lnTo>
+                    <a:pt x="376147" y="1905992"/>
+                  </a:lnTo>
+                  <a:lnTo>
+                    <a:pt x="302387" y="1881473"/>
+                  </a:lnTo>
+                  <a:lnTo>
+                    <a:pt x="228627" y="1856574"/>
+                  </a:lnTo>
+                  <a:lnTo>
+                    <a:pt x="154867" y="1831287"/>
+                  </a:lnTo>
+                  <a:lnTo>
+                    <a:pt x="81107" y="1805608"/>
+                  </a:lnTo>
+                  <a:lnTo>
+                    <a:pt x="7347" y="1779529"/>
+                  </a:lnTo>
+                  <a:lnTo>
+                    <a:pt x="0" y="1776891"/>
                   </a:lnTo>
                   <a:close/>
                 </a:path>
@@ -3600,279 +3600,279 @@
           </p:nvSpPr>
           <p:spPr>
             <a:xfrm>
-              <a:off x="1567602" y="1896563"/>
-              <a:ext cx="6485745" cy="3258396"/>
+              <a:off x="1567602" y="2073503"/>
+              <a:ext cx="6485745" cy="3107729"/>
             </a:xfrm>
             <a:custGeom>
               <a:avLst/>
               <a:pathLst>
-                <a:path w="6485745" h="3258396">
+                <a:path w="6485745" h="3107729">
                   <a:moveTo>
                     <a:pt x="0" y="0"/>
                   </a:moveTo>
                   <a:lnTo>
-                    <a:pt x="68623" y="130921"/>
-                  </a:lnTo>
-                  <a:lnTo>
-                    <a:pt x="142383" y="266236"/>
-                  </a:lnTo>
-                  <a:lnTo>
-                    <a:pt x="216143" y="396351"/>
-                  </a:lnTo>
-                  <a:lnTo>
-                    <a:pt x="289903" y="521467"/>
-                  </a:lnTo>
-                  <a:lnTo>
-                    <a:pt x="363663" y="641776"/>
-                  </a:lnTo>
-                  <a:lnTo>
-                    <a:pt x="437423" y="757462"/>
-                  </a:lnTo>
-                  <a:lnTo>
-                    <a:pt x="511183" y="868703"/>
-                  </a:lnTo>
-                  <a:lnTo>
-                    <a:pt x="584943" y="975670"/>
-                  </a:lnTo>
-                  <a:lnTo>
-                    <a:pt x="658703" y="1078527"/>
-                  </a:lnTo>
-                  <a:lnTo>
-                    <a:pt x="732463" y="1177432"/>
-                  </a:lnTo>
-                  <a:lnTo>
-                    <a:pt x="806223" y="1272537"/>
-                  </a:lnTo>
-                  <a:lnTo>
-                    <a:pt x="879983" y="1363987"/>
-                  </a:lnTo>
-                  <a:lnTo>
-                    <a:pt x="953743" y="1451924"/>
-                  </a:lnTo>
-                  <a:lnTo>
-                    <a:pt x="1027503" y="1536482"/>
-                  </a:lnTo>
-                  <a:lnTo>
-                    <a:pt x="1101263" y="1617791"/>
-                  </a:lnTo>
-                  <a:lnTo>
-                    <a:pt x="1175023" y="1695976"/>
-                  </a:lnTo>
-                  <a:lnTo>
-                    <a:pt x="1248783" y="1771156"/>
-                  </a:lnTo>
-                  <a:lnTo>
-                    <a:pt x="1322543" y="1843448"/>
-                  </a:lnTo>
-                  <a:lnTo>
-                    <a:pt x="1396303" y="1912963"/>
-                  </a:lnTo>
-                  <a:lnTo>
-                    <a:pt x="1470063" y="1979806"/>
-                  </a:lnTo>
-                  <a:lnTo>
-                    <a:pt x="1543823" y="2044082"/>
-                  </a:lnTo>
-                  <a:lnTo>
-                    <a:pt x="1617583" y="2105887"/>
-                  </a:lnTo>
-                  <a:lnTo>
-                    <a:pt x="1691343" y="2165318"/>
-                  </a:lnTo>
-                  <a:lnTo>
-                    <a:pt x="1765103" y="2222465"/>
-                  </a:lnTo>
-                  <a:lnTo>
-                    <a:pt x="1838863" y="2277417"/>
-                  </a:lnTo>
-                  <a:lnTo>
-                    <a:pt x="1912623" y="2330257"/>
-                  </a:lnTo>
-                  <a:lnTo>
-                    <a:pt x="1986383" y="2381067"/>
-                  </a:lnTo>
-                  <a:lnTo>
-                    <a:pt x="2060143" y="2429924"/>
-                  </a:lnTo>
-                  <a:lnTo>
-                    <a:pt x="2133903" y="2476905"/>
-                  </a:lnTo>
-                  <a:lnTo>
-                    <a:pt x="2207664" y="2522080"/>
-                  </a:lnTo>
-                  <a:lnTo>
-                    <a:pt x="2281424" y="2565519"/>
-                  </a:lnTo>
-                  <a:lnTo>
-                    <a:pt x="2355184" y="2607290"/>
-                  </a:lnTo>
-                  <a:lnTo>
-                    <a:pt x="2428944" y="2647455"/>
-                  </a:lnTo>
-                  <a:lnTo>
-                    <a:pt x="2502704" y="2686077"/>
-                  </a:lnTo>
-                  <a:lnTo>
-                    <a:pt x="2576464" y="2723216"/>
-                  </a:lnTo>
-                  <a:lnTo>
-                    <a:pt x="2650224" y="2758927"/>
-                  </a:lnTo>
-                  <a:lnTo>
-                    <a:pt x="2723984" y="2787035"/>
-                  </a:lnTo>
-                  <a:lnTo>
-                    <a:pt x="2797744" y="2800281"/>
-                  </a:lnTo>
-                  <a:lnTo>
-                    <a:pt x="2871504" y="2813324"/>
-                  </a:lnTo>
-                  <a:lnTo>
-                    <a:pt x="2945264" y="2826167"/>
-                  </a:lnTo>
-                  <a:lnTo>
-                    <a:pt x="3019024" y="2838814"/>
-                  </a:lnTo>
-                  <a:lnTo>
-                    <a:pt x="3092784" y="2851268"/>
-                  </a:lnTo>
-                  <a:lnTo>
-                    <a:pt x="3166544" y="2863531"/>
-                  </a:lnTo>
-                  <a:lnTo>
-                    <a:pt x="3240304" y="2875606"/>
-                  </a:lnTo>
-                  <a:lnTo>
-                    <a:pt x="3314064" y="2887497"/>
-                  </a:lnTo>
-                  <a:lnTo>
-                    <a:pt x="3387824" y="2899205"/>
-                  </a:lnTo>
-                  <a:lnTo>
-                    <a:pt x="3461584" y="2910735"/>
-                  </a:lnTo>
-                  <a:lnTo>
-                    <a:pt x="3535344" y="2922088"/>
-                  </a:lnTo>
-                  <a:lnTo>
-                    <a:pt x="3609104" y="2933267"/>
-                  </a:lnTo>
-                  <a:lnTo>
-                    <a:pt x="3682864" y="2944275"/>
-                  </a:lnTo>
-                  <a:lnTo>
-                    <a:pt x="3756624" y="2955115"/>
-                  </a:lnTo>
-                  <a:lnTo>
-                    <a:pt x="3830384" y="2965788"/>
-                  </a:lnTo>
-                  <a:lnTo>
-                    <a:pt x="3904144" y="2976299"/>
-                  </a:lnTo>
-                  <a:lnTo>
-                    <a:pt x="3977904" y="2986649"/>
-                  </a:lnTo>
-                  <a:lnTo>
-                    <a:pt x="4051664" y="2996840"/>
-                  </a:lnTo>
-                  <a:lnTo>
-                    <a:pt x="4125424" y="3006875"/>
-                  </a:lnTo>
-                  <a:lnTo>
-                    <a:pt x="4199184" y="3016757"/>
-                  </a:lnTo>
-                  <a:lnTo>
-                    <a:pt x="4272944" y="3026488"/>
-                  </a:lnTo>
-                  <a:lnTo>
-                    <a:pt x="4346704" y="3036069"/>
-                  </a:lnTo>
-                  <a:lnTo>
-                    <a:pt x="4420464" y="3045504"/>
-                  </a:lnTo>
-                  <a:lnTo>
-                    <a:pt x="4494224" y="3054795"/>
-                  </a:lnTo>
-                  <a:lnTo>
-                    <a:pt x="4567984" y="3063944"/>
-                  </a:lnTo>
-                  <a:lnTo>
-                    <a:pt x="4641744" y="3072952"/>
-                  </a:lnTo>
-                  <a:lnTo>
-                    <a:pt x="4715504" y="3081823"/>
-                  </a:lnTo>
-                  <a:lnTo>
-                    <a:pt x="4789264" y="3090558"/>
-                  </a:lnTo>
-                  <a:lnTo>
-                    <a:pt x="4863024" y="3099159"/>
-                  </a:lnTo>
-                  <a:lnTo>
-                    <a:pt x="4936784" y="3107628"/>
-                  </a:lnTo>
-                  <a:lnTo>
-                    <a:pt x="5010544" y="3115968"/>
-                  </a:lnTo>
-                  <a:lnTo>
-                    <a:pt x="5084305" y="3124181"/>
-                  </a:lnTo>
-                  <a:lnTo>
-                    <a:pt x="5158065" y="3132268"/>
-                  </a:lnTo>
-                  <a:lnTo>
-                    <a:pt x="5231825" y="3140231"/>
-                  </a:lnTo>
-                  <a:lnTo>
-                    <a:pt x="5305585" y="3148072"/>
-                  </a:lnTo>
-                  <a:lnTo>
-                    <a:pt x="5379345" y="3155793"/>
-                  </a:lnTo>
-                  <a:lnTo>
-                    <a:pt x="5453105" y="3163396"/>
-                  </a:lnTo>
-                  <a:lnTo>
-                    <a:pt x="5526865" y="3170882"/>
-                  </a:lnTo>
-                  <a:lnTo>
-                    <a:pt x="5600625" y="3178255"/>
-                  </a:lnTo>
-                  <a:lnTo>
-                    <a:pt x="5674385" y="3185514"/>
-                  </a:lnTo>
-                  <a:lnTo>
-                    <a:pt x="5748145" y="3192662"/>
-                  </a:lnTo>
-                  <a:lnTo>
-                    <a:pt x="5821905" y="3199701"/>
-                  </a:lnTo>
-                  <a:lnTo>
-                    <a:pt x="5895665" y="3206632"/>
-                  </a:lnTo>
-                  <a:lnTo>
-                    <a:pt x="5969425" y="3213457"/>
-                  </a:lnTo>
-                  <a:lnTo>
-                    <a:pt x="6043185" y="3220178"/>
-                  </a:lnTo>
-                  <a:lnTo>
-                    <a:pt x="6116945" y="3226795"/>
-                  </a:lnTo>
-                  <a:lnTo>
-                    <a:pt x="6190705" y="3233312"/>
-                  </a:lnTo>
-                  <a:lnTo>
-                    <a:pt x="6264465" y="3239729"/>
-                  </a:lnTo>
-                  <a:lnTo>
-                    <a:pt x="6338225" y="3246047"/>
-                  </a:lnTo>
-                  <a:lnTo>
-                    <a:pt x="6411985" y="3252269"/>
-                  </a:lnTo>
-                  <a:lnTo>
-                    <a:pt x="6485745" y="3258396"/>
+                    <a:pt x="68623" y="124867"/>
+                  </a:lnTo>
+                  <a:lnTo>
+                    <a:pt x="142383" y="253925"/>
+                  </a:lnTo>
+                  <a:lnTo>
+                    <a:pt x="216143" y="378024"/>
+                  </a:lnTo>
+                  <a:lnTo>
+                    <a:pt x="289903" y="497355"/>
+                  </a:lnTo>
+                  <a:lnTo>
+                    <a:pt x="363663" y="612100"/>
+                  </a:lnTo>
+                  <a:lnTo>
+                    <a:pt x="437423" y="722437"/>
+                  </a:lnTo>
+                  <a:lnTo>
+                    <a:pt x="511183" y="828535"/>
+                  </a:lnTo>
+                  <a:lnTo>
+                    <a:pt x="584943" y="930555"/>
+                  </a:lnTo>
+                  <a:lnTo>
+                    <a:pt x="658703" y="1028656"/>
+                  </a:lnTo>
+                  <a:lnTo>
+                    <a:pt x="732463" y="1122988"/>
+                  </a:lnTo>
+                  <a:lnTo>
+                    <a:pt x="806223" y="1213695"/>
+                  </a:lnTo>
+                  <a:lnTo>
+                    <a:pt x="879983" y="1300917"/>
+                  </a:lnTo>
+                  <a:lnTo>
+                    <a:pt x="953743" y="1384787"/>
+                  </a:lnTo>
+                  <a:lnTo>
+                    <a:pt x="1027503" y="1465435"/>
+                  </a:lnTo>
+                  <a:lnTo>
+                    <a:pt x="1101263" y="1542985"/>
+                  </a:lnTo>
+                  <a:lnTo>
+                    <a:pt x="1175023" y="1617554"/>
+                  </a:lnTo>
+                  <a:lnTo>
+                    <a:pt x="1248783" y="1689259"/>
+                  </a:lnTo>
+                  <a:lnTo>
+                    <a:pt x="1322543" y="1758208"/>
+                  </a:lnTo>
+                  <a:lnTo>
+                    <a:pt x="1396303" y="1824508"/>
+                  </a:lnTo>
+                  <a:lnTo>
+                    <a:pt x="1470063" y="1888261"/>
+                  </a:lnTo>
+                  <a:lnTo>
+                    <a:pt x="1543823" y="1949564"/>
+                  </a:lnTo>
+                  <a:lnTo>
+                    <a:pt x="1617583" y="2008512"/>
+                  </a:lnTo>
+                  <a:lnTo>
+                    <a:pt x="1691343" y="2065194"/>
+                  </a:lnTo>
+                  <a:lnTo>
+                    <a:pt x="1765103" y="2119699"/>
+                  </a:lnTo>
+                  <a:lnTo>
+                    <a:pt x="1838863" y="2172110"/>
+                  </a:lnTo>
+                  <a:lnTo>
+                    <a:pt x="1912623" y="2222507"/>
+                  </a:lnTo>
+                  <a:lnTo>
+                    <a:pt x="1986383" y="2270967"/>
+                  </a:lnTo>
+                  <a:lnTo>
+                    <a:pt x="2060143" y="2317565"/>
+                  </a:lnTo>
+                  <a:lnTo>
+                    <a:pt x="2133903" y="2362373"/>
+                  </a:lnTo>
+                  <a:lnTo>
+                    <a:pt x="2207664" y="2405460"/>
+                  </a:lnTo>
+                  <a:lnTo>
+                    <a:pt x="2281424" y="2446891"/>
+                  </a:lnTo>
+                  <a:lnTo>
+                    <a:pt x="2355184" y="2486730"/>
+                  </a:lnTo>
+                  <a:lnTo>
+                    <a:pt x="2428944" y="2525038"/>
+                  </a:lnTo>
+                  <a:lnTo>
+                    <a:pt x="2502704" y="2561874"/>
+                  </a:lnTo>
+                  <a:lnTo>
+                    <a:pt x="2576464" y="2597295"/>
+                  </a:lnTo>
+                  <a:lnTo>
+                    <a:pt x="2650224" y="2631355"/>
+                  </a:lnTo>
+                  <a:lnTo>
+                    <a:pt x="2723984" y="2658163"/>
+                  </a:lnTo>
+                  <a:lnTo>
+                    <a:pt x="2797744" y="2670797"/>
+                  </a:lnTo>
+                  <a:lnTo>
+                    <a:pt x="2871504" y="2683237"/>
+                  </a:lnTo>
+                  <a:lnTo>
+                    <a:pt x="2945264" y="2695486"/>
+                  </a:lnTo>
+                  <a:lnTo>
+                    <a:pt x="3019024" y="2707549"/>
+                  </a:lnTo>
+                  <a:lnTo>
+                    <a:pt x="3092784" y="2719426"/>
+                  </a:lnTo>
+                  <a:lnTo>
+                    <a:pt x="3166544" y="2731122"/>
+                  </a:lnTo>
+                  <a:lnTo>
+                    <a:pt x="3240304" y="2742639"/>
+                  </a:lnTo>
+                  <a:lnTo>
+                    <a:pt x="3314064" y="2753980"/>
+                  </a:lnTo>
+                  <a:lnTo>
+                    <a:pt x="3387824" y="2765147"/>
+                  </a:lnTo>
+                  <a:lnTo>
+                    <a:pt x="3461584" y="2776143"/>
+                  </a:lnTo>
+                  <a:lnTo>
+                    <a:pt x="3535344" y="2786971"/>
+                  </a:lnTo>
+                  <a:lnTo>
+                    <a:pt x="3609104" y="2797634"/>
+                  </a:lnTo>
+                  <a:lnTo>
+                    <a:pt x="3682864" y="2808133"/>
+                  </a:lnTo>
+                  <a:lnTo>
+                    <a:pt x="3756624" y="2818471"/>
+                  </a:lnTo>
+                  <a:lnTo>
+                    <a:pt x="3830384" y="2828651"/>
+                  </a:lnTo>
+                  <a:lnTo>
+                    <a:pt x="3904144" y="2838676"/>
+                  </a:lnTo>
+                  <a:lnTo>
+                    <a:pt x="3977904" y="2848547"/>
+                  </a:lnTo>
+                  <a:lnTo>
+                    <a:pt x="4051664" y="2858267"/>
+                  </a:lnTo>
+                  <a:lnTo>
+                    <a:pt x="4125424" y="2867838"/>
+                  </a:lnTo>
+                  <a:lnTo>
+                    <a:pt x="4199184" y="2877263"/>
+                  </a:lnTo>
+                  <a:lnTo>
+                    <a:pt x="4272944" y="2886544"/>
+                  </a:lnTo>
+                  <a:lnTo>
+                    <a:pt x="4346704" y="2895683"/>
+                  </a:lnTo>
+                  <a:lnTo>
+                    <a:pt x="4420464" y="2904681"/>
+                  </a:lnTo>
+                  <a:lnTo>
+                    <a:pt x="4494224" y="2913542"/>
+                  </a:lnTo>
+                  <a:lnTo>
+                    <a:pt x="4567984" y="2922268"/>
+                  </a:lnTo>
+                  <a:lnTo>
+                    <a:pt x="4641744" y="2930860"/>
+                  </a:lnTo>
+                  <a:lnTo>
+                    <a:pt x="4715504" y="2939320"/>
+                  </a:lnTo>
+                  <a:lnTo>
+                    <a:pt x="4789264" y="2947651"/>
+                  </a:lnTo>
+                  <a:lnTo>
+                    <a:pt x="4863024" y="2955855"/>
+                  </a:lnTo>
+                  <a:lnTo>
+                    <a:pt x="4936784" y="2963933"/>
+                  </a:lnTo>
+                  <a:lnTo>
+                    <a:pt x="5010544" y="2971887"/>
+                  </a:lnTo>
+                  <a:lnTo>
+                    <a:pt x="5084305" y="2979720"/>
+                  </a:lnTo>
+                  <a:lnTo>
+                    <a:pt x="5158065" y="2987433"/>
+                  </a:lnTo>
+                  <a:lnTo>
+                    <a:pt x="5231825" y="2995027"/>
+                  </a:lnTo>
+                  <a:lnTo>
+                    <a:pt x="5305585" y="3002506"/>
+                  </a:lnTo>
+                  <a:lnTo>
+                    <a:pt x="5379345" y="3009870"/>
+                  </a:lnTo>
+                  <a:lnTo>
+                    <a:pt x="5453105" y="3017122"/>
+                  </a:lnTo>
+                  <a:lnTo>
+                    <a:pt x="5526865" y="3024262"/>
+                  </a:lnTo>
+                  <a:lnTo>
+                    <a:pt x="5600625" y="3031293"/>
+                  </a:lnTo>
+                  <a:lnTo>
+                    <a:pt x="5674385" y="3038217"/>
+                  </a:lnTo>
+                  <a:lnTo>
+                    <a:pt x="5748145" y="3045035"/>
+                  </a:lnTo>
+                  <a:lnTo>
+                    <a:pt x="5821905" y="3051748"/>
+                  </a:lnTo>
+                  <a:lnTo>
+                    <a:pt x="5895665" y="3058358"/>
+                  </a:lnTo>
+                  <a:lnTo>
+                    <a:pt x="5969425" y="3064868"/>
+                  </a:lnTo>
+                  <a:lnTo>
+                    <a:pt x="6043185" y="3071278"/>
+                  </a:lnTo>
+                  <a:lnTo>
+                    <a:pt x="6116945" y="3077589"/>
+                  </a:lnTo>
+                  <a:lnTo>
+                    <a:pt x="6190705" y="3083805"/>
+                  </a:lnTo>
+                  <a:lnTo>
+                    <a:pt x="6264465" y="3089925"/>
+                  </a:lnTo>
+                  <a:lnTo>
+                    <a:pt x="6338225" y="3095951"/>
+                  </a:lnTo>
+                  <a:lnTo>
+                    <a:pt x="6411985" y="3101885"/>
+                  </a:lnTo>
+                  <a:lnTo>
+                    <a:pt x="6485745" y="3107729"/>
                   </a:lnTo>
                 </a:path>
               </a:pathLst>
@@ -3892,309 +3892,309 @@
           </p:nvSpPr>
           <p:spPr>
             <a:xfrm>
-              <a:off x="817517" y="3759601"/>
-              <a:ext cx="7235830" cy="1673093"/>
+              <a:off x="817517" y="3850394"/>
+              <a:ext cx="7235830" cy="1595729"/>
             </a:xfrm>
             <a:custGeom>
               <a:avLst/>
               <a:pathLst>
-                <a:path w="7235830" h="1673093">
+                <a:path w="7235830" h="1595729">
                   <a:moveTo>
-                    <a:pt x="7235830" y="1673093"/>
+                    <a:pt x="7235830" y="1595729"/>
                   </a:moveTo>
                   <a:lnTo>
-                    <a:pt x="7162070" y="1668437"/>
-                  </a:lnTo>
-                  <a:lnTo>
-                    <a:pt x="7088310" y="1663595"/>
-                  </a:lnTo>
-                  <a:lnTo>
-                    <a:pt x="7014550" y="1658560"/>
-                  </a:lnTo>
-                  <a:lnTo>
-                    <a:pt x="6940789" y="1653324"/>
-                  </a:lnTo>
-                  <a:lnTo>
-                    <a:pt x="6867029" y="1647878"/>
-                  </a:lnTo>
-                  <a:lnTo>
-                    <a:pt x="6793269" y="1642215"/>
-                  </a:lnTo>
-                  <a:lnTo>
-                    <a:pt x="6719509" y="1636326"/>
-                  </a:lnTo>
-                  <a:lnTo>
-                    <a:pt x="6645749" y="1630201"/>
-                  </a:lnTo>
-                  <a:lnTo>
-                    <a:pt x="6571989" y="1623831"/>
-                  </a:lnTo>
-                  <a:lnTo>
-                    <a:pt x="6498229" y="1617207"/>
-                  </a:lnTo>
-                  <a:lnTo>
-                    <a:pt x="6424469" y="1610318"/>
-                  </a:lnTo>
-                  <a:lnTo>
-                    <a:pt x="6350709" y="1603154"/>
-                  </a:lnTo>
-                  <a:lnTo>
-                    <a:pt x="6276949" y="1595704"/>
-                  </a:lnTo>
-                  <a:lnTo>
-                    <a:pt x="6203189" y="1587956"/>
-                  </a:lnTo>
-                  <a:lnTo>
-                    <a:pt x="6129429" y="1579899"/>
-                  </a:lnTo>
-                  <a:lnTo>
-                    <a:pt x="6055669" y="1571519"/>
-                  </a:lnTo>
-                  <a:lnTo>
-                    <a:pt x="5981909" y="1562805"/>
-                  </a:lnTo>
-                  <a:lnTo>
-                    <a:pt x="5908149" y="1553742"/>
-                  </a:lnTo>
-                  <a:lnTo>
-                    <a:pt x="5834389" y="1544318"/>
-                  </a:lnTo>
-                  <a:lnTo>
-                    <a:pt x="5760629" y="1534516"/>
-                  </a:lnTo>
-                  <a:lnTo>
-                    <a:pt x="5686869" y="1524324"/>
-                  </a:lnTo>
-                  <a:lnTo>
-                    <a:pt x="5613109" y="1513723"/>
-                  </a:lnTo>
-                  <a:lnTo>
-                    <a:pt x="5539349" y="1502700"/>
-                  </a:lnTo>
-                  <a:lnTo>
-                    <a:pt x="5465589" y="1491235"/>
-                  </a:lnTo>
-                  <a:lnTo>
-                    <a:pt x="5391829" y="1479313"/>
-                  </a:lnTo>
-                  <a:lnTo>
-                    <a:pt x="5318069" y="1466914"/>
-                  </a:lnTo>
-                  <a:lnTo>
-                    <a:pt x="5244309" y="1454020"/>
-                  </a:lnTo>
-                  <a:lnTo>
-                    <a:pt x="5170549" y="1440611"/>
-                  </a:lnTo>
-                  <a:lnTo>
-                    <a:pt x="5096789" y="1426666"/>
-                  </a:lnTo>
-                  <a:lnTo>
-                    <a:pt x="5023029" y="1412163"/>
-                  </a:lnTo>
-                  <a:lnTo>
-                    <a:pt x="4949269" y="1397081"/>
-                  </a:lnTo>
-                  <a:lnTo>
-                    <a:pt x="4875509" y="1381397"/>
-                  </a:lnTo>
-                  <a:lnTo>
-                    <a:pt x="4801749" y="1365085"/>
-                  </a:lnTo>
-                  <a:lnTo>
-                    <a:pt x="4727989" y="1348122"/>
-                  </a:lnTo>
-                  <a:lnTo>
-                    <a:pt x="4654229" y="1330482"/>
-                  </a:lnTo>
-                  <a:lnTo>
-                    <a:pt x="4580469" y="1312136"/>
-                  </a:lnTo>
-                  <a:lnTo>
-                    <a:pt x="4506709" y="1293057"/>
-                  </a:lnTo>
-                  <a:lnTo>
-                    <a:pt x="4432949" y="1273216"/>
-                  </a:lnTo>
-                  <a:lnTo>
-                    <a:pt x="4359189" y="1252582"/>
-                  </a:lnTo>
-                  <a:lnTo>
-                    <a:pt x="4285429" y="1231123"/>
-                  </a:lnTo>
-                  <a:lnTo>
-                    <a:pt x="4211669" y="1208807"/>
-                  </a:lnTo>
-                  <a:lnTo>
-                    <a:pt x="4137909" y="1185600"/>
-                  </a:lnTo>
-                  <a:lnTo>
-                    <a:pt x="4064149" y="1161465"/>
-                  </a:lnTo>
-                  <a:lnTo>
-                    <a:pt x="3990388" y="1136366"/>
-                  </a:lnTo>
-                  <a:lnTo>
-                    <a:pt x="3916628" y="1110263"/>
-                  </a:lnTo>
-                  <a:lnTo>
-                    <a:pt x="3842868" y="1083118"/>
-                  </a:lnTo>
-                  <a:lnTo>
-                    <a:pt x="3769108" y="1054888"/>
-                  </a:lnTo>
-                  <a:lnTo>
-                    <a:pt x="3695348" y="1025530"/>
-                  </a:lnTo>
-                  <a:lnTo>
-                    <a:pt x="3621588" y="994999"/>
-                  </a:lnTo>
-                  <a:lnTo>
-                    <a:pt x="3547828" y="963248"/>
-                  </a:lnTo>
-                  <a:lnTo>
-                    <a:pt x="3474068" y="930228"/>
-                  </a:lnTo>
-                  <a:lnTo>
-                    <a:pt x="3400308" y="910545"/>
-                  </a:lnTo>
-                  <a:lnTo>
-                    <a:pt x="3326548" y="896884"/>
-                  </a:lnTo>
-                  <a:lnTo>
-                    <a:pt x="3252788" y="883011"/>
-                  </a:lnTo>
-                  <a:lnTo>
-                    <a:pt x="3179028" y="868923"/>
-                  </a:lnTo>
-                  <a:lnTo>
-                    <a:pt x="3105268" y="854615"/>
-                  </a:lnTo>
-                  <a:lnTo>
-                    <a:pt x="3031508" y="840085"/>
-                  </a:lnTo>
-                  <a:lnTo>
-                    <a:pt x="2957748" y="825330"/>
-                  </a:lnTo>
-                  <a:lnTo>
-                    <a:pt x="2883988" y="810345"/>
-                  </a:lnTo>
-                  <a:lnTo>
-                    <a:pt x="2810228" y="795127"/>
-                  </a:lnTo>
-                  <a:lnTo>
-                    <a:pt x="2736468" y="779672"/>
-                  </a:lnTo>
-                  <a:lnTo>
-                    <a:pt x="2662708" y="763978"/>
-                  </a:lnTo>
-                  <a:lnTo>
-                    <a:pt x="2588948" y="748039"/>
-                  </a:lnTo>
-                  <a:lnTo>
-                    <a:pt x="2515188" y="731853"/>
-                  </a:lnTo>
-                  <a:lnTo>
-                    <a:pt x="2441428" y="715416"/>
-                  </a:lnTo>
-                  <a:lnTo>
-                    <a:pt x="2367668" y="698722"/>
-                  </a:lnTo>
-                  <a:lnTo>
-                    <a:pt x="2293908" y="681770"/>
-                  </a:lnTo>
-                  <a:lnTo>
-                    <a:pt x="2220148" y="664554"/>
-                  </a:lnTo>
-                  <a:lnTo>
-                    <a:pt x="2146388" y="647071"/>
-                  </a:lnTo>
-                  <a:lnTo>
-                    <a:pt x="2072628" y="629315"/>
-                  </a:lnTo>
-                  <a:lnTo>
-                    <a:pt x="1998868" y="611284"/>
-                  </a:lnTo>
-                  <a:lnTo>
-                    <a:pt x="1925108" y="592973"/>
-                  </a:lnTo>
-                  <a:lnTo>
-                    <a:pt x="1851348" y="574377"/>
-                  </a:lnTo>
-                  <a:lnTo>
-                    <a:pt x="1777588" y="555492"/>
-                  </a:lnTo>
-                  <a:lnTo>
-                    <a:pt x="1703828" y="536314"/>
-                  </a:lnTo>
-                  <a:lnTo>
-                    <a:pt x="1630068" y="516837"/>
-                  </a:lnTo>
-                  <a:lnTo>
-                    <a:pt x="1556308" y="497058"/>
-                  </a:lnTo>
-                  <a:lnTo>
-                    <a:pt x="1482548" y="476972"/>
-                  </a:lnTo>
-                  <a:lnTo>
-                    <a:pt x="1408788" y="456573"/>
-                  </a:lnTo>
-                  <a:lnTo>
-                    <a:pt x="1335028" y="435858"/>
-                  </a:lnTo>
-                  <a:lnTo>
-                    <a:pt x="1261268" y="414820"/>
-                  </a:lnTo>
-                  <a:lnTo>
-                    <a:pt x="1187508" y="393456"/>
-                  </a:lnTo>
-                  <a:lnTo>
-                    <a:pt x="1113747" y="371760"/>
-                  </a:lnTo>
-                  <a:lnTo>
-                    <a:pt x="1039987" y="349726"/>
-                  </a:lnTo>
-                  <a:lnTo>
-                    <a:pt x="966227" y="327350"/>
-                  </a:lnTo>
-                  <a:lnTo>
-                    <a:pt x="892467" y="304626"/>
-                  </a:lnTo>
-                  <a:lnTo>
-                    <a:pt x="818707" y="281550"/>
-                  </a:lnTo>
-                  <a:lnTo>
-                    <a:pt x="744947" y="258114"/>
-                  </a:lnTo>
-                  <a:lnTo>
-                    <a:pt x="671187" y="234314"/>
-                  </a:lnTo>
-                  <a:lnTo>
-                    <a:pt x="597427" y="210145"/>
-                  </a:lnTo>
-                  <a:lnTo>
-                    <a:pt x="523667" y="185600"/>
-                  </a:lnTo>
-                  <a:lnTo>
-                    <a:pt x="449907" y="160673"/>
-                  </a:lnTo>
-                  <a:lnTo>
-                    <a:pt x="376147" y="135359"/>
-                  </a:lnTo>
-                  <a:lnTo>
-                    <a:pt x="302387" y="109652"/>
-                  </a:lnTo>
-                  <a:lnTo>
-                    <a:pt x="228627" y="83545"/>
-                  </a:lnTo>
-                  <a:lnTo>
-                    <a:pt x="154867" y="57033"/>
-                  </a:lnTo>
-                  <a:lnTo>
-                    <a:pt x="81107" y="30108"/>
-                  </a:lnTo>
-                  <a:lnTo>
-                    <a:pt x="7347" y="2766"/>
+                    <a:pt x="7162070" y="1591289"/>
+                  </a:lnTo>
+                  <a:lnTo>
+                    <a:pt x="7088310" y="1586671"/>
+                  </a:lnTo>
+                  <a:lnTo>
+                    <a:pt x="7014550" y="1581869"/>
+                  </a:lnTo>
+                  <a:lnTo>
+                    <a:pt x="6940789" y="1576875"/>
+                  </a:lnTo>
+                  <a:lnTo>
+                    <a:pt x="6867029" y="1571681"/>
+                  </a:lnTo>
+                  <a:lnTo>
+                    <a:pt x="6793269" y="1566280"/>
+                  </a:lnTo>
+                  <a:lnTo>
+                    <a:pt x="6719509" y="1560662"/>
+                  </a:lnTo>
+                  <a:lnTo>
+                    <a:pt x="6645749" y="1554821"/>
+                  </a:lnTo>
+                  <a:lnTo>
+                    <a:pt x="6571989" y="1548746"/>
+                  </a:lnTo>
+                  <a:lnTo>
+                    <a:pt x="6498229" y="1542428"/>
+                  </a:lnTo>
+                  <a:lnTo>
+                    <a:pt x="6424469" y="1535858"/>
+                  </a:lnTo>
+                  <a:lnTo>
+                    <a:pt x="6350709" y="1529025"/>
+                  </a:lnTo>
+                  <a:lnTo>
+                    <a:pt x="6276949" y="1521919"/>
+                  </a:lnTo>
+                  <a:lnTo>
+                    <a:pt x="6203189" y="1514530"/>
+                  </a:lnTo>
+                  <a:lnTo>
+                    <a:pt x="6129429" y="1506845"/>
+                  </a:lnTo>
+                  <a:lnTo>
+                    <a:pt x="6055669" y="1498853"/>
+                  </a:lnTo>
+                  <a:lnTo>
+                    <a:pt x="5981909" y="1490541"/>
+                  </a:lnTo>
+                  <a:lnTo>
+                    <a:pt x="5908149" y="1481898"/>
+                  </a:lnTo>
+                  <a:lnTo>
+                    <a:pt x="5834389" y="1472909"/>
+                  </a:lnTo>
+                  <a:lnTo>
+                    <a:pt x="5760629" y="1463561"/>
+                  </a:lnTo>
+                  <a:lnTo>
+                    <a:pt x="5686869" y="1453839"/>
+                  </a:lnTo>
+                  <a:lnTo>
+                    <a:pt x="5613109" y="1443729"/>
+                  </a:lnTo>
+                  <a:lnTo>
+                    <a:pt x="5539349" y="1433215"/>
+                  </a:lnTo>
+                  <a:lnTo>
+                    <a:pt x="5465589" y="1422281"/>
+                  </a:lnTo>
+                  <a:lnTo>
+                    <a:pt x="5391829" y="1410910"/>
+                  </a:lnTo>
+                  <a:lnTo>
+                    <a:pt x="5318069" y="1399085"/>
+                  </a:lnTo>
+                  <a:lnTo>
+                    <a:pt x="5244309" y="1386787"/>
+                  </a:lnTo>
+                  <a:lnTo>
+                    <a:pt x="5170549" y="1373997"/>
+                  </a:lnTo>
+                  <a:lnTo>
+                    <a:pt x="5096789" y="1360697"/>
+                  </a:lnTo>
+                  <a:lnTo>
+                    <a:pt x="5023029" y="1346865"/>
+                  </a:lnTo>
+                  <a:lnTo>
+                    <a:pt x="4949269" y="1332481"/>
+                  </a:lnTo>
+                  <a:lnTo>
+                    <a:pt x="4875509" y="1317521"/>
+                  </a:lnTo>
+                  <a:lnTo>
+                    <a:pt x="4801749" y="1301964"/>
+                  </a:lnTo>
+                  <a:lnTo>
+                    <a:pt x="4727989" y="1285786"/>
+                  </a:lnTo>
+                  <a:lnTo>
+                    <a:pt x="4654229" y="1268961"/>
+                  </a:lnTo>
+                  <a:lnTo>
+                    <a:pt x="4580469" y="1251463"/>
+                  </a:lnTo>
+                  <a:lnTo>
+                    <a:pt x="4506709" y="1233267"/>
+                  </a:lnTo>
+                  <a:lnTo>
+                    <a:pt x="4432949" y="1214343"/>
+                  </a:lnTo>
+                  <a:lnTo>
+                    <a:pt x="4359189" y="1194663"/>
+                  </a:lnTo>
+                  <a:lnTo>
+                    <a:pt x="4285429" y="1174197"/>
+                  </a:lnTo>
+                  <a:lnTo>
+                    <a:pt x="4211669" y="1152913"/>
+                  </a:lnTo>
+                  <a:lnTo>
+                    <a:pt x="4137909" y="1130778"/>
+                  </a:lnTo>
+                  <a:lnTo>
+                    <a:pt x="4064149" y="1107759"/>
+                  </a:lnTo>
+                  <a:lnTo>
+                    <a:pt x="3990388" y="1083820"/>
+                  </a:lnTo>
+                  <a:lnTo>
+                    <a:pt x="3916628" y="1058925"/>
+                  </a:lnTo>
+                  <a:lnTo>
+                    <a:pt x="3842868" y="1033035"/>
+                  </a:lnTo>
+                  <a:lnTo>
+                    <a:pt x="3769108" y="1006110"/>
+                  </a:lnTo>
+                  <a:lnTo>
+                    <a:pt x="3695348" y="978110"/>
+                  </a:lnTo>
+                  <a:lnTo>
+                    <a:pt x="3621588" y="948991"/>
+                  </a:lnTo>
+                  <a:lnTo>
+                    <a:pt x="3547828" y="918708"/>
+                  </a:lnTo>
+                  <a:lnTo>
+                    <a:pt x="3474068" y="887215"/>
+                  </a:lnTo>
+                  <a:lnTo>
+                    <a:pt x="3400308" y="868442"/>
+                  </a:lnTo>
+                  <a:lnTo>
+                    <a:pt x="3326548" y="855413"/>
+                  </a:lnTo>
+                  <a:lnTo>
+                    <a:pt x="3252788" y="842181"/>
+                  </a:lnTo>
+                  <a:lnTo>
+                    <a:pt x="3179028" y="828744"/>
+                  </a:lnTo>
+                  <a:lnTo>
+                    <a:pt x="3105268" y="815098"/>
+                  </a:lnTo>
+                  <a:lnTo>
+                    <a:pt x="3031508" y="801240"/>
+                  </a:lnTo>
+                  <a:lnTo>
+                    <a:pt x="2957748" y="787167"/>
+                  </a:lnTo>
+                  <a:lnTo>
+                    <a:pt x="2883988" y="772875"/>
+                  </a:lnTo>
+                  <a:lnTo>
+                    <a:pt x="2810228" y="758360"/>
+                  </a:lnTo>
+                  <a:lnTo>
+                    <a:pt x="2736468" y="743621"/>
+                  </a:lnTo>
+                  <a:lnTo>
+                    <a:pt x="2662708" y="728652"/>
+                  </a:lnTo>
+                  <a:lnTo>
+                    <a:pt x="2588948" y="713450"/>
+                  </a:lnTo>
+                  <a:lnTo>
+                    <a:pt x="2515188" y="698013"/>
+                  </a:lnTo>
+                  <a:lnTo>
+                    <a:pt x="2441428" y="682335"/>
+                  </a:lnTo>
+                  <a:lnTo>
+                    <a:pt x="2367668" y="666414"/>
+                  </a:lnTo>
+                  <a:lnTo>
+                    <a:pt x="2293908" y="650245"/>
+                  </a:lnTo>
+                  <a:lnTo>
+                    <a:pt x="2220148" y="633825"/>
+                  </a:lnTo>
+                  <a:lnTo>
+                    <a:pt x="2146388" y="617150"/>
+                  </a:lnTo>
+                  <a:lnTo>
+                    <a:pt x="2072628" y="600216"/>
+                  </a:lnTo>
+                  <a:lnTo>
+                    <a:pt x="1998868" y="583019"/>
+                  </a:lnTo>
+                  <a:lnTo>
+                    <a:pt x="1925108" y="565554"/>
+                  </a:lnTo>
+                  <a:lnTo>
+                    <a:pt x="1851348" y="547818"/>
+                  </a:lnTo>
+                  <a:lnTo>
+                    <a:pt x="1777588" y="529806"/>
+                  </a:lnTo>
+                  <a:lnTo>
+                    <a:pt x="1703828" y="511515"/>
+                  </a:lnTo>
+                  <a:lnTo>
+                    <a:pt x="1630068" y="492939"/>
+                  </a:lnTo>
+                  <a:lnTo>
+                    <a:pt x="1556308" y="474075"/>
+                  </a:lnTo>
+                  <a:lnTo>
+                    <a:pt x="1482548" y="454917"/>
+                  </a:lnTo>
+                  <a:lnTo>
+                    <a:pt x="1408788" y="435462"/>
+                  </a:lnTo>
+                  <a:lnTo>
+                    <a:pt x="1335028" y="415704"/>
+                  </a:lnTo>
+                  <a:lnTo>
+                    <a:pt x="1261268" y="395639"/>
+                  </a:lnTo>
+                  <a:lnTo>
+                    <a:pt x="1187508" y="375263"/>
+                  </a:lnTo>
+                  <a:lnTo>
+                    <a:pt x="1113747" y="354570"/>
+                  </a:lnTo>
+                  <a:lnTo>
+                    <a:pt x="1039987" y="333555"/>
+                  </a:lnTo>
+                  <a:lnTo>
+                    <a:pt x="966227" y="312214"/>
+                  </a:lnTo>
+                  <a:lnTo>
+                    <a:pt x="892467" y="290541"/>
+                  </a:lnTo>
+                  <a:lnTo>
+                    <a:pt x="818707" y="268531"/>
+                  </a:lnTo>
+                  <a:lnTo>
+                    <a:pt x="744947" y="246179"/>
+                  </a:lnTo>
+                  <a:lnTo>
+                    <a:pt x="671187" y="223480"/>
+                  </a:lnTo>
+                  <a:lnTo>
+                    <a:pt x="597427" y="200428"/>
+                  </a:lnTo>
+                  <a:lnTo>
+                    <a:pt x="523667" y="177018"/>
+                  </a:lnTo>
+                  <a:lnTo>
+                    <a:pt x="449907" y="153244"/>
+                  </a:lnTo>
+                  <a:lnTo>
+                    <a:pt x="376147" y="129100"/>
+                  </a:lnTo>
+                  <a:lnTo>
+                    <a:pt x="302387" y="104582"/>
+                  </a:lnTo>
+                  <a:lnTo>
+                    <a:pt x="228627" y="79682"/>
+                  </a:lnTo>
+                  <a:lnTo>
+                    <a:pt x="154867" y="54396"/>
+                  </a:lnTo>
+                  <a:lnTo>
+                    <a:pt x="81107" y="28716"/>
+                  </a:lnTo>
+                  <a:lnTo>
+                    <a:pt x="7347" y="2638"/>
                   </a:lnTo>
                   <a:lnTo>
                     <a:pt x="0" y="0"/>
@@ -4217,312 +4217,312 @@
           </p:nvSpPr>
           <p:spPr>
             <a:xfrm>
-              <a:off x="817517" y="2428856"/>
-              <a:ext cx="7235830" cy="2906025"/>
+              <a:off x="817517" y="2581183"/>
+              <a:ext cx="7235830" cy="2771652"/>
             </a:xfrm>
             <a:custGeom>
               <a:avLst/>
               <a:pathLst>
-                <a:path w="7235830" h="2906025">
+                <a:path w="7235830" h="2771652">
                   <a:moveTo>
                     <a:pt x="0" y="0"/>
                   </a:moveTo>
                   <a:lnTo>
-                    <a:pt x="7347" y="8579"/>
-                  </a:lnTo>
-                  <a:lnTo>
-                    <a:pt x="81107" y="92383"/>
-                  </a:lnTo>
-                  <a:lnTo>
-                    <a:pt x="154867" y="173930"/>
-                  </a:lnTo>
-                  <a:lnTo>
-                    <a:pt x="228627" y="253281"/>
-                  </a:lnTo>
-                  <a:lnTo>
-                    <a:pt x="302387" y="330494"/>
-                  </a:lnTo>
-                  <a:lnTo>
-                    <a:pt x="376147" y="405629"/>
-                  </a:lnTo>
-                  <a:lnTo>
-                    <a:pt x="449907" y="478740"/>
-                  </a:lnTo>
-                  <a:lnTo>
-                    <a:pt x="523667" y="549882"/>
-                  </a:lnTo>
-                  <a:lnTo>
-                    <a:pt x="597427" y="619108"/>
-                  </a:lnTo>
-                  <a:lnTo>
-                    <a:pt x="671187" y="686469"/>
-                  </a:lnTo>
-                  <a:lnTo>
-                    <a:pt x="744947" y="752017"/>
-                  </a:lnTo>
-                  <a:lnTo>
-                    <a:pt x="818707" y="815799"/>
-                  </a:lnTo>
-                  <a:lnTo>
-                    <a:pt x="892467" y="877864"/>
-                  </a:lnTo>
-                  <a:lnTo>
-                    <a:pt x="966227" y="938257"/>
-                  </a:lnTo>
-                  <a:lnTo>
-                    <a:pt x="1039987" y="997023"/>
-                  </a:lnTo>
-                  <a:lnTo>
-                    <a:pt x="1113747" y="1054207"/>
-                  </a:lnTo>
-                  <a:lnTo>
-                    <a:pt x="1187508" y="1109851"/>
-                  </a:lnTo>
-                  <a:lnTo>
-                    <a:pt x="1261268" y="1163996"/>
-                  </a:lnTo>
-                  <a:lnTo>
-                    <a:pt x="1335028" y="1216683"/>
-                  </a:lnTo>
-                  <a:lnTo>
-                    <a:pt x="1408788" y="1267952"/>
-                  </a:lnTo>
-                  <a:lnTo>
-                    <a:pt x="1482548" y="1317839"/>
-                  </a:lnTo>
-                  <a:lnTo>
-                    <a:pt x="1556308" y="1366383"/>
-                  </a:lnTo>
-                  <a:lnTo>
-                    <a:pt x="1630068" y="1413620"/>
-                  </a:lnTo>
-                  <a:lnTo>
-                    <a:pt x="1703828" y="1459584"/>
-                  </a:lnTo>
-                  <a:lnTo>
-                    <a:pt x="1777588" y="1504311"/>
-                  </a:lnTo>
-                  <a:lnTo>
-                    <a:pt x="1851348" y="1547833"/>
-                  </a:lnTo>
-                  <a:lnTo>
-                    <a:pt x="1925108" y="1590182"/>
-                  </a:lnTo>
-                  <a:lnTo>
-                    <a:pt x="1998868" y="1631392"/>
-                  </a:lnTo>
-                  <a:lnTo>
-                    <a:pt x="2072628" y="1671491"/>
-                  </a:lnTo>
-                  <a:lnTo>
-                    <a:pt x="2146388" y="1710511"/>
-                  </a:lnTo>
-                  <a:lnTo>
-                    <a:pt x="2220148" y="1748480"/>
-                  </a:lnTo>
-                  <a:lnTo>
-                    <a:pt x="2293908" y="1785426"/>
-                  </a:lnTo>
-                  <a:lnTo>
-                    <a:pt x="2367668" y="1821377"/>
-                  </a:lnTo>
-                  <a:lnTo>
-                    <a:pt x="2441428" y="1856360"/>
-                  </a:lnTo>
-                  <a:lnTo>
-                    <a:pt x="2515188" y="1890401"/>
-                  </a:lnTo>
-                  <a:lnTo>
-                    <a:pt x="2588948" y="1923525"/>
-                  </a:lnTo>
-                  <a:lnTo>
-                    <a:pt x="2662708" y="1955757"/>
-                  </a:lnTo>
-                  <a:lnTo>
-                    <a:pt x="2736468" y="1987121"/>
-                  </a:lnTo>
-                  <a:lnTo>
-                    <a:pt x="2810228" y="2017640"/>
-                  </a:lnTo>
-                  <a:lnTo>
-                    <a:pt x="2883988" y="2047338"/>
-                  </a:lnTo>
-                  <a:lnTo>
-                    <a:pt x="2957748" y="2076235"/>
-                  </a:lnTo>
-                  <a:lnTo>
-                    <a:pt x="3031508" y="2104355"/>
-                  </a:lnTo>
-                  <a:lnTo>
-                    <a:pt x="3105268" y="2131717"/>
-                  </a:lnTo>
-                  <a:lnTo>
-                    <a:pt x="3179028" y="2158342"/>
-                  </a:lnTo>
-                  <a:lnTo>
-                    <a:pt x="3252788" y="2184250"/>
-                  </a:lnTo>
-                  <a:lnTo>
-                    <a:pt x="3326548" y="2209460"/>
-                  </a:lnTo>
-                  <a:lnTo>
-                    <a:pt x="3400308" y="2233992"/>
-                  </a:lnTo>
-                  <a:lnTo>
-                    <a:pt x="3474068" y="2257863"/>
-                  </a:lnTo>
-                  <a:lnTo>
-                    <a:pt x="3547828" y="2281090"/>
-                  </a:lnTo>
-                  <a:lnTo>
-                    <a:pt x="3621588" y="2303693"/>
-                  </a:lnTo>
-                  <a:lnTo>
-                    <a:pt x="3695348" y="2325686"/>
-                  </a:lnTo>
-                  <a:lnTo>
-                    <a:pt x="3769108" y="2347088"/>
-                  </a:lnTo>
-                  <a:lnTo>
-                    <a:pt x="3842868" y="2367913"/>
-                  </a:lnTo>
-                  <a:lnTo>
-                    <a:pt x="3916628" y="2388177"/>
-                  </a:lnTo>
-                  <a:lnTo>
-                    <a:pt x="3990388" y="2407895"/>
-                  </a:lnTo>
-                  <a:lnTo>
-                    <a:pt x="4064149" y="2427082"/>
-                  </a:lnTo>
-                  <a:lnTo>
-                    <a:pt x="4137909" y="2445753"/>
-                  </a:lnTo>
-                  <a:lnTo>
-                    <a:pt x="4211669" y="2463921"/>
-                  </a:lnTo>
-                  <a:lnTo>
-                    <a:pt x="4285429" y="2481599"/>
-                  </a:lnTo>
-                  <a:lnTo>
-                    <a:pt x="4359189" y="2498802"/>
-                  </a:lnTo>
-                  <a:lnTo>
-                    <a:pt x="4432949" y="2515541"/>
-                  </a:lnTo>
-                  <a:lnTo>
-                    <a:pt x="4506709" y="2531829"/>
-                  </a:lnTo>
-                  <a:lnTo>
-                    <a:pt x="4580469" y="2547679"/>
-                  </a:lnTo>
-                  <a:lnTo>
-                    <a:pt x="4654229" y="2563101"/>
-                  </a:lnTo>
-                  <a:lnTo>
-                    <a:pt x="4727989" y="2578109"/>
-                  </a:lnTo>
-                  <a:lnTo>
-                    <a:pt x="4801749" y="2592712"/>
-                  </a:lnTo>
-                  <a:lnTo>
-                    <a:pt x="4875509" y="2606922"/>
-                  </a:lnTo>
-                  <a:lnTo>
-                    <a:pt x="4949269" y="2620749"/>
-                  </a:lnTo>
-                  <a:lnTo>
-                    <a:pt x="5023029" y="2634204"/>
-                  </a:lnTo>
-                  <a:lnTo>
-                    <a:pt x="5096789" y="2647297"/>
-                  </a:lnTo>
-                  <a:lnTo>
-                    <a:pt x="5170549" y="2660037"/>
-                  </a:lnTo>
-                  <a:lnTo>
-                    <a:pt x="5244309" y="2672433"/>
-                  </a:lnTo>
-                  <a:lnTo>
-                    <a:pt x="5318069" y="2684496"/>
-                  </a:lnTo>
-                  <a:lnTo>
-                    <a:pt x="5391829" y="2696235"/>
-                  </a:lnTo>
-                  <a:lnTo>
-                    <a:pt x="5465589" y="2707656"/>
-                  </a:lnTo>
-                  <a:lnTo>
-                    <a:pt x="5539349" y="2718771"/>
-                  </a:lnTo>
-                  <a:lnTo>
-                    <a:pt x="5613109" y="2729586"/>
-                  </a:lnTo>
-                  <a:lnTo>
-                    <a:pt x="5686869" y="2740110"/>
-                  </a:lnTo>
-                  <a:lnTo>
-                    <a:pt x="5760629" y="2750350"/>
-                  </a:lnTo>
-                  <a:lnTo>
-                    <a:pt x="5834389" y="2760315"/>
-                  </a:lnTo>
-                  <a:lnTo>
-                    <a:pt x="5908149" y="2770011"/>
-                  </a:lnTo>
-                  <a:lnTo>
-                    <a:pt x="5981909" y="2779446"/>
-                  </a:lnTo>
-                  <a:lnTo>
-                    <a:pt x="6055669" y="2788627"/>
-                  </a:lnTo>
-                  <a:lnTo>
-                    <a:pt x="6129429" y="2797561"/>
-                  </a:lnTo>
-                  <a:lnTo>
-                    <a:pt x="6203189" y="2806254"/>
-                  </a:lnTo>
-                  <a:lnTo>
-                    <a:pt x="6276949" y="2814713"/>
-                  </a:lnTo>
-                  <a:lnTo>
-                    <a:pt x="6350709" y="2822944"/>
-                  </a:lnTo>
-                  <a:lnTo>
-                    <a:pt x="6424469" y="2830953"/>
-                  </a:lnTo>
-                  <a:lnTo>
-                    <a:pt x="6498229" y="2838747"/>
-                  </a:lnTo>
-                  <a:lnTo>
-                    <a:pt x="6571989" y="2846331"/>
-                  </a:lnTo>
-                  <a:lnTo>
-                    <a:pt x="6645749" y="2853711"/>
-                  </a:lnTo>
-                  <a:lnTo>
-                    <a:pt x="6719509" y="2860892"/>
-                  </a:lnTo>
-                  <a:lnTo>
-                    <a:pt x="6793269" y="2867879"/>
-                  </a:lnTo>
-                  <a:lnTo>
-                    <a:pt x="6867029" y="2874679"/>
-                  </a:lnTo>
-                  <a:lnTo>
-                    <a:pt x="6940789" y="2881295"/>
-                  </a:lnTo>
-                  <a:lnTo>
-                    <a:pt x="7014550" y="2887733"/>
-                  </a:lnTo>
-                  <a:lnTo>
-                    <a:pt x="7088310" y="2893998"/>
-                  </a:lnTo>
-                  <a:lnTo>
-                    <a:pt x="7162070" y="2900094"/>
-                  </a:lnTo>
-                  <a:lnTo>
-                    <a:pt x="7235830" y="2906025"/>
+                    <a:pt x="7347" y="8182"/>
+                  </a:lnTo>
+                  <a:lnTo>
+                    <a:pt x="81107" y="88111"/>
+                  </a:lnTo>
+                  <a:lnTo>
+                    <a:pt x="154867" y="165887"/>
+                  </a:lnTo>
+                  <a:lnTo>
+                    <a:pt x="228627" y="241569"/>
+                  </a:lnTo>
+                  <a:lnTo>
+                    <a:pt x="302387" y="315212"/>
+                  </a:lnTo>
+                  <a:lnTo>
+                    <a:pt x="376147" y="386873"/>
+                  </a:lnTo>
+                  <a:lnTo>
+                    <a:pt x="449907" y="456603"/>
+                  </a:lnTo>
+                  <a:lnTo>
+                    <a:pt x="523667" y="524455"/>
+                  </a:lnTo>
+                  <a:lnTo>
+                    <a:pt x="597427" y="590480"/>
+                  </a:lnTo>
+                  <a:lnTo>
+                    <a:pt x="671187" y="654727"/>
+                  </a:lnTo>
+                  <a:lnTo>
+                    <a:pt x="744947" y="717244"/>
+                  </a:lnTo>
+                  <a:lnTo>
+                    <a:pt x="818707" y="778077"/>
+                  </a:lnTo>
+                  <a:lnTo>
+                    <a:pt x="892467" y="837271"/>
+                  </a:lnTo>
+                  <a:lnTo>
+                    <a:pt x="966227" y="894872"/>
+                  </a:lnTo>
+                  <a:lnTo>
+                    <a:pt x="1039987" y="950921"/>
+                  </a:lnTo>
+                  <a:lnTo>
+                    <a:pt x="1113747" y="1005461"/>
+                  </a:lnTo>
+                  <a:lnTo>
+                    <a:pt x="1187508" y="1058532"/>
+                  </a:lnTo>
+                  <a:lnTo>
+                    <a:pt x="1261268" y="1110173"/>
+                  </a:lnTo>
+                  <a:lnTo>
+                    <a:pt x="1335028" y="1160424"/>
+                  </a:lnTo>
+                  <a:lnTo>
+                    <a:pt x="1408788" y="1209322"/>
+                  </a:lnTo>
+                  <a:lnTo>
+                    <a:pt x="1482548" y="1256903"/>
+                  </a:lnTo>
+                  <a:lnTo>
+                    <a:pt x="1556308" y="1303202"/>
+                  </a:lnTo>
+                  <a:lnTo>
+                    <a:pt x="1630068" y="1348254"/>
+                  </a:lnTo>
+                  <a:lnTo>
+                    <a:pt x="1703828" y="1392093"/>
+                  </a:lnTo>
+                  <a:lnTo>
+                    <a:pt x="1777588" y="1434752"/>
+                  </a:lnTo>
+                  <a:lnTo>
+                    <a:pt x="1851348" y="1476261"/>
+                  </a:lnTo>
+                  <a:lnTo>
+                    <a:pt x="1925108" y="1516653"/>
+                  </a:lnTo>
+                  <a:lnTo>
+                    <a:pt x="1998868" y="1555957"/>
+                  </a:lnTo>
+                  <a:lnTo>
+                    <a:pt x="2072628" y="1594202"/>
+                  </a:lnTo>
+                  <a:lnTo>
+                    <a:pt x="2146388" y="1631418"/>
+                  </a:lnTo>
+                  <a:lnTo>
+                    <a:pt x="2220148" y="1667631"/>
+                  </a:lnTo>
+                  <a:lnTo>
+                    <a:pt x="2293908" y="1702868"/>
+                  </a:lnTo>
+                  <a:lnTo>
+                    <a:pt x="2367668" y="1737157"/>
+                  </a:lnTo>
+                  <a:lnTo>
+                    <a:pt x="2441428" y="1770523"/>
+                  </a:lnTo>
+                  <a:lnTo>
+                    <a:pt x="2515188" y="1802990"/>
+                  </a:lnTo>
+                  <a:lnTo>
+                    <a:pt x="2588948" y="1834582"/>
+                  </a:lnTo>
+                  <a:lnTo>
+                    <a:pt x="2662708" y="1865324"/>
+                  </a:lnTo>
+                  <a:lnTo>
+                    <a:pt x="2736468" y="1895237"/>
+                  </a:lnTo>
+                  <a:lnTo>
+                    <a:pt x="2810228" y="1924345"/>
+                  </a:lnTo>
+                  <a:lnTo>
+                    <a:pt x="2883988" y="1952670"/>
+                  </a:lnTo>
+                  <a:lnTo>
+                    <a:pt x="2957748" y="1980231"/>
+                  </a:lnTo>
+                  <a:lnTo>
+                    <a:pt x="3031508" y="2007050"/>
+                  </a:lnTo>
+                  <a:lnTo>
+                    <a:pt x="3105268" y="2033147"/>
+                  </a:lnTo>
+                  <a:lnTo>
+                    <a:pt x="3179028" y="2058541"/>
+                  </a:lnTo>
+                  <a:lnTo>
+                    <a:pt x="3252788" y="2083251"/>
+                  </a:lnTo>
+                  <a:lnTo>
+                    <a:pt x="3326548" y="2107296"/>
+                  </a:lnTo>
+                  <a:lnTo>
+                    <a:pt x="3400308" y="2130693"/>
+                  </a:lnTo>
+                  <a:lnTo>
+                    <a:pt x="3474068" y="2153460"/>
+                  </a:lnTo>
+                  <a:lnTo>
+                    <a:pt x="3547828" y="2175614"/>
+                  </a:lnTo>
+                  <a:lnTo>
+                    <a:pt x="3621588" y="2197171"/>
+                  </a:lnTo>
+                  <a:lnTo>
+                    <a:pt x="3695348" y="2218148"/>
+                  </a:lnTo>
+                  <a:lnTo>
+                    <a:pt x="3769108" y="2238559"/>
+                  </a:lnTo>
+                  <a:lnTo>
+                    <a:pt x="3842868" y="2258421"/>
+                  </a:lnTo>
+                  <a:lnTo>
+                    <a:pt x="3916628" y="2277748"/>
+                  </a:lnTo>
+                  <a:lnTo>
+                    <a:pt x="3990388" y="2296555"/>
+                  </a:lnTo>
+                  <a:lnTo>
+                    <a:pt x="4064149" y="2314855"/>
+                  </a:lnTo>
+                  <a:lnTo>
+                    <a:pt x="4137909" y="2332662"/>
+                  </a:lnTo>
+                  <a:lnTo>
+                    <a:pt x="4211669" y="2349990"/>
+                  </a:lnTo>
+                  <a:lnTo>
+                    <a:pt x="4285429" y="2366851"/>
+                  </a:lnTo>
+                  <a:lnTo>
+                    <a:pt x="4359189" y="2383258"/>
+                  </a:lnTo>
+                  <a:lnTo>
+                    <a:pt x="4432949" y="2399223"/>
+                  </a:lnTo>
+                  <a:lnTo>
+                    <a:pt x="4506709" y="2414758"/>
+                  </a:lnTo>
+                  <a:lnTo>
+                    <a:pt x="4580469" y="2429875"/>
+                  </a:lnTo>
+                  <a:lnTo>
+                    <a:pt x="4654229" y="2444585"/>
+                  </a:lnTo>
+                  <a:lnTo>
+                    <a:pt x="4727989" y="2458898"/>
+                  </a:lnTo>
+                  <a:lnTo>
+                    <a:pt x="4801749" y="2472826"/>
+                  </a:lnTo>
+                  <a:lnTo>
+                    <a:pt x="4875509" y="2486379"/>
+                  </a:lnTo>
+                  <a:lnTo>
+                    <a:pt x="4949269" y="2499567"/>
+                  </a:lnTo>
+                  <a:lnTo>
+                    <a:pt x="5023029" y="2512400"/>
+                  </a:lnTo>
+                  <a:lnTo>
+                    <a:pt x="5096789" y="2524887"/>
+                  </a:lnTo>
+                  <a:lnTo>
+                    <a:pt x="5170549" y="2537038"/>
+                  </a:lnTo>
+                  <a:lnTo>
+                    <a:pt x="5244309" y="2548861"/>
+                  </a:lnTo>
+                  <a:lnTo>
+                    <a:pt x="5318069" y="2560366"/>
+                  </a:lnTo>
+                  <a:lnTo>
+                    <a:pt x="5391829" y="2571562"/>
+                  </a:lnTo>
+                  <a:lnTo>
+                    <a:pt x="5465589" y="2582455"/>
+                  </a:lnTo>
+                  <a:lnTo>
+                    <a:pt x="5539349" y="2593056"/>
+                  </a:lnTo>
+                  <a:lnTo>
+                    <a:pt x="5613109" y="2603371"/>
+                  </a:lnTo>
+                  <a:lnTo>
+                    <a:pt x="5686869" y="2613408"/>
+                  </a:lnTo>
+                  <a:lnTo>
+                    <a:pt x="5760629" y="2623175"/>
+                  </a:lnTo>
+                  <a:lnTo>
+                    <a:pt x="5834389" y="2632679"/>
+                  </a:lnTo>
+                  <a:lnTo>
+                    <a:pt x="5908149" y="2641927"/>
+                  </a:lnTo>
+                  <a:lnTo>
+                    <a:pt x="5981909" y="2650925"/>
+                  </a:lnTo>
+                  <a:lnTo>
+                    <a:pt x="6055669" y="2659682"/>
+                  </a:lnTo>
+                  <a:lnTo>
+                    <a:pt x="6129429" y="2668202"/>
+                  </a:lnTo>
+                  <a:lnTo>
+                    <a:pt x="6203189" y="2676494"/>
+                  </a:lnTo>
+                  <a:lnTo>
+                    <a:pt x="6276949" y="2684561"/>
+                  </a:lnTo>
+                  <a:lnTo>
+                    <a:pt x="6350709" y="2692412"/>
+                  </a:lnTo>
+                  <a:lnTo>
+                    <a:pt x="6424469" y="2700051"/>
+                  </a:lnTo>
+                  <a:lnTo>
+                    <a:pt x="6498229" y="2707485"/>
+                  </a:lnTo>
+                  <a:lnTo>
+                    <a:pt x="6571989" y="2714718"/>
+                  </a:lnTo>
+                  <a:lnTo>
+                    <a:pt x="6645749" y="2721756"/>
+                  </a:lnTo>
+                  <a:lnTo>
+                    <a:pt x="6719509" y="2728605"/>
+                  </a:lnTo>
+                  <a:lnTo>
+                    <a:pt x="6793269" y="2735270"/>
+                  </a:lnTo>
+                  <a:lnTo>
+                    <a:pt x="6867029" y="2741755"/>
+                  </a:lnTo>
+                  <a:lnTo>
+                    <a:pt x="6940789" y="2748065"/>
+                  </a:lnTo>
+                  <a:lnTo>
+                    <a:pt x="7014550" y="2754205"/>
+                  </a:lnTo>
+                  <a:lnTo>
+                    <a:pt x="7088310" y="2760180"/>
+                  </a:lnTo>
+                  <a:lnTo>
+                    <a:pt x="7162070" y="2765994"/>
+                  </a:lnTo>
+                  <a:lnTo>
+                    <a:pt x="7235830" y="2771652"/>
                   </a:lnTo>
                 </a:path>
               </a:pathLst>
@@ -4551,7 +4551,7 @@
           </p:nvSpPr>
           <p:spPr>
             <a:xfrm>
-              <a:off x="817517" y="4679530"/>
+              <a:off x="817517" y="4727786"/>
               <a:ext cx="7799693" cy="0"/>
             </a:xfrm>
             <a:custGeom>
@@ -4594,15 +4594,15 @@
           </p:nvSpPr>
           <p:spPr>
             <a:xfrm>
-              <a:off x="4269157" y="1896563"/>
-              <a:ext cx="0" cy="3826579"/>
+              <a:off x="4269157" y="2073503"/>
+              <a:ext cx="0" cy="3649639"/>
             </a:xfrm>
             <a:custGeom>
               <a:avLst/>
               <a:pathLst>
-                <a:path w="0" h="3826579">
+                <a:path w="0" h="3649639">
                   <a:moveTo>
-                    <a:pt x="0" y="3826579"/>
+                    <a:pt x="0" y="3649639"/>
                   </a:moveTo>
                   <a:lnTo>
                     <a:pt x="0" y="0"/>
@@ -4637,7 +4637,7 @@
           </p:nvSpPr>
           <p:spPr>
             <a:xfrm>
-              <a:off x="692708" y="5509156"/>
+              <a:off x="692708" y="5517199"/>
               <a:ext cx="62179" cy="80101"/>
             </a:xfrm>
             <a:prstGeom prst="rect">
@@ -4683,7 +4683,7 @@
           </p:nvSpPr>
           <p:spPr>
             <a:xfrm>
-              <a:off x="692708" y="4639479"/>
+              <a:off x="692708" y="4687735"/>
               <a:ext cx="62179" cy="80101"/>
             </a:xfrm>
             <a:prstGeom prst="rect">
@@ -4729,7 +4729,7 @@
           </p:nvSpPr>
           <p:spPr>
             <a:xfrm>
-              <a:off x="692708" y="3769802"/>
+              <a:off x="692708" y="3858272"/>
               <a:ext cx="62179" cy="80101"/>
             </a:xfrm>
             <a:prstGeom prst="rect">
@@ -4775,7 +4775,7 @@
           </p:nvSpPr>
           <p:spPr>
             <a:xfrm>
-              <a:off x="692708" y="2900125"/>
+              <a:off x="692708" y="3028808"/>
               <a:ext cx="62179" cy="80101"/>
             </a:xfrm>
             <a:prstGeom prst="rect">
@@ -4821,7 +4821,7 @@
           </p:nvSpPr>
           <p:spPr>
             <a:xfrm>
-              <a:off x="692708" y="2030448"/>
+              <a:off x="692708" y="2199345"/>
               <a:ext cx="62179" cy="80101"/>
             </a:xfrm>
             <a:prstGeom prst="rect">
@@ -5097,7 +5097,7 @@
           </p:nvSpPr>
           <p:spPr>
             <a:xfrm rot="-5400000">
-              <a:off x="68446" y="3759743"/>
+              <a:off x="68446" y="3848213"/>
               <a:ext cx="1016904" cy="100218"/>
             </a:xfrm>
             <a:prstGeom prst="rect">
@@ -5138,6 +5138,52 @@
         <p:sp>
           <p:nvSpPr>
             <p:cNvPr id="38" name="tx38"/>
+            <p:cNvSpPr/>
+            <p:nvPr/>
+          </p:nvSpPr>
+          <p:spPr>
+            <a:xfrm>
+              <a:off x="817517" y="1896563"/>
+              <a:ext cx="5626211" cy="82021"/>
+            </a:xfrm>
+            <a:prstGeom prst="rect">
+              <a:avLst/>
+            </a:prstGeom>
+            <a:noFill/>
+          </p:spPr>
+          <p:txBody>
+            <a:bodyPr lIns="0" rIns="0" tIns="0" bIns="0" anchorCtr="1" anchor="ctr" wrap="none"/>
+            <a:lstStyle/>
+            <a:p>
+              <a:pPr algn="l" marL="0" marR="0" indent="0">
+                <a:lnSpc>
+                  <a:spcPts val="900"/>
+                </a:lnSpc>
+                <a:spcBef>
+                  <a:spcPts val="0"/>
+                </a:spcBef>
+                <a:spcAft>
+                  <a:spcPts val="0"/>
+                </a:spcAft>
+              </a:pPr>
+              <a:r>
+                <a:rPr sz="900">
+                  <a:solidFill>
+                    <a:srgbClr val="404040">
+                      <a:alpha val="100000"/>
+                    </a:srgbClr>
+                  </a:solidFill>
+                  <a:latin typeface="Helvetica"/>
+                  <a:cs typeface="Helvetica"/>
+                </a:rPr>
+                <a:t>subHR per 0.1 ratio decline: 1.39 (1.20-1.60)  |  per IQR decline (Δ = 0.29): 2.61 (1.72-3.97)  |  IQR: [0.85, 1.15]</a:t>
+              </a:r>
+            </a:p>
+          </p:txBody>
+        </p:sp>
+        <p:sp>
+          <p:nvSpPr>
+            <p:cNvPr id="39" name="tx39"/>
             <p:cNvSpPr/>
             <p:nvPr/>
           </p:nvSpPr>

--- a/docs/pptx/whole/jx-linsubhr-ratio-hosp7.pptx
+++ b/docs/pptx/whole/jx-linsubhr-ratio-hosp7.pptx
@@ -5144,7 +5144,7 @@
           <p:spPr>
             <a:xfrm>
               <a:off x="817517" y="1896563"/>
-              <a:ext cx="5626211" cy="82021"/>
+              <a:ext cx="6236116" cy="82021"/>
             </a:xfrm>
             <a:prstGeom prst="rect">
               <a:avLst/>
@@ -5176,7 +5176,7 @@
                   <a:latin typeface="Helvetica"/>
                   <a:cs typeface="Helvetica"/>
                 </a:rPr>
-                <a:t>subHR per 0.1 ratio decline: 1.39 (1.20-1.60)  |  per IQR decline (Δ = 0.29): 2.61 (1.72-3.97)  |  IQR: [0.85, 1.15]</a:t>
+                <a:t>subHR per 0.1 ratio decline: 1.39 (1.20-1.60), p = &lt;0.001  |  per IQR decline (Δ = 0.29): 2.61 (1.72-3.97)  |  IQR: [0.85, 1.15]</a:t>
               </a:r>
             </a:p>
           </p:txBody>

--- a/docs/pptx/whole/jx-linsubhr-ratio-hosp7.pptx
+++ b/docs/pptx/whole/jx-linsubhr-ratio-hosp7.pptx
@@ -2443,7 +2443,7 @@
           </p:nvSpPr>
           <p:spPr>
             <a:xfrm>
-              <a:off x="1615213" y="2073503"/>
+              <a:off x="1365633" y="2073503"/>
               <a:ext cx="0" cy="3649639"/>
             </a:xfrm>
             <a:custGeom>
@@ -2486,7 +2486,7 @@
           </p:nvSpPr>
           <p:spPr>
             <a:xfrm>
-              <a:off x="3387871" y="2073503"/>
+              <a:off x="3517243" y="2073503"/>
               <a:ext cx="0" cy="3649639"/>
             </a:xfrm>
             <a:custGeom>
@@ -2529,7 +2529,7 @@
           </p:nvSpPr>
           <p:spPr>
             <a:xfrm>
-              <a:off x="5160528" y="2073503"/>
+              <a:off x="5668852" y="2073503"/>
               <a:ext cx="0" cy="3649639"/>
             </a:xfrm>
             <a:custGeom>
@@ -2572,7 +2572,7 @@
           </p:nvSpPr>
           <p:spPr>
             <a:xfrm>
-              <a:off x="6933186" y="2073503"/>
+              <a:off x="7820461" y="2073503"/>
               <a:ext cx="0" cy="3649639"/>
             </a:xfrm>
             <a:custGeom>
@@ -2830,7 +2830,7 @@
           </p:nvSpPr>
           <p:spPr>
             <a:xfrm>
-              <a:off x="2501542" y="2073503"/>
+              <a:off x="2441438" y="2073503"/>
               <a:ext cx="0" cy="3649639"/>
             </a:xfrm>
             <a:custGeom>
@@ -2873,7 +2873,7 @@
           </p:nvSpPr>
           <p:spPr>
             <a:xfrm>
-              <a:off x="4274200" y="2073503"/>
+              <a:off x="4593047" y="2073503"/>
               <a:ext cx="0" cy="3649639"/>
             </a:xfrm>
             <a:custGeom>
@@ -2916,7 +2916,7 @@
           </p:nvSpPr>
           <p:spPr>
             <a:xfrm>
-              <a:off x="6046857" y="2073503"/>
+              <a:off x="6744657" y="2073503"/>
               <a:ext cx="0" cy="3649639"/>
             </a:xfrm>
             <a:custGeom>
@@ -2953,628 +2953,585 @@
         </p:sp>
         <p:sp>
           <p:nvSpPr>
-            <p:cNvPr id="20" name="pl20"/>
+            <p:cNvPr id="20" name="pg20"/>
             <p:cNvSpPr/>
             <p:nvPr/>
           </p:nvSpPr>
           <p:spPr>
             <a:xfrm>
-              <a:off x="7819515" y="2073503"/>
-              <a:ext cx="0" cy="3649639"/>
+              <a:off x="1172049" y="2073503"/>
+              <a:ext cx="7090630" cy="3372621"/>
             </a:xfrm>
             <a:custGeom>
               <a:avLst/>
               <a:pathLst>
-                <a:path w="0" h="3649639">
+                <a:path w="7090630" h="3372621">
                   <a:moveTo>
-                    <a:pt x="0" y="3649639"/>
+                    <a:pt x="792835" y="0"/>
                   </a:moveTo>
                   <a:lnTo>
-                    <a:pt x="0" y="0"/>
-                  </a:lnTo>
-                  <a:lnTo>
-                    <a:pt x="0" y="0"/>
-                  </a:lnTo>
-                </a:path>
-              </a:pathLst>
-            </a:custGeom>
-            <a:ln w="13550" cap="flat">
-              <a:solidFill>
-                <a:srgbClr val="EBEBEB">
-                  <a:alpha val="100000"/>
-                </a:srgbClr>
-              </a:solidFill>
-              <a:prstDash val="solid"/>
-              <a:round/>
-            </a:ln>
-          </p:spPr>
-          <p:txBody>
-            <a:bodyPr/>
-            <a:lstStyle/>
-            <a:p/>
-          </p:txBody>
-        </p:sp>
-        <p:sp>
-          <p:nvSpPr>
-            <p:cNvPr id="21" name="pg21"/>
-            <p:cNvSpPr/>
-            <p:nvPr/>
-          </p:nvSpPr>
-          <p:spPr>
-            <a:xfrm>
-              <a:off x="817517" y="2073503"/>
-              <a:ext cx="7235830" cy="3372621"/>
-            </a:xfrm>
-            <a:custGeom>
-              <a:avLst/>
-              <a:pathLst>
-                <a:path w="7235830" h="3372621">
-                  <a:moveTo>
-                    <a:pt x="750084" y="0"/>
-                  </a:moveTo>
-                  <a:lnTo>
-                    <a:pt x="818707" y="124867"/>
-                  </a:lnTo>
-                  <a:lnTo>
-                    <a:pt x="892467" y="253925"/>
-                  </a:lnTo>
-                  <a:lnTo>
-                    <a:pt x="966227" y="378024"/>
-                  </a:lnTo>
-                  <a:lnTo>
-                    <a:pt x="1039987" y="497355"/>
-                  </a:lnTo>
-                  <a:lnTo>
-                    <a:pt x="1113747" y="612100"/>
-                  </a:lnTo>
-                  <a:lnTo>
-                    <a:pt x="1187508" y="722437"/>
-                  </a:lnTo>
-                  <a:lnTo>
-                    <a:pt x="1261268" y="828535"/>
-                  </a:lnTo>
-                  <a:lnTo>
-                    <a:pt x="1335028" y="930555"/>
-                  </a:lnTo>
-                  <a:lnTo>
-                    <a:pt x="1408788" y="1028656"/>
-                  </a:lnTo>
-                  <a:lnTo>
-                    <a:pt x="1482548" y="1122988"/>
-                  </a:lnTo>
-                  <a:lnTo>
-                    <a:pt x="1556308" y="1213695"/>
-                  </a:lnTo>
-                  <a:lnTo>
-                    <a:pt x="1630068" y="1300917"/>
-                  </a:lnTo>
-                  <a:lnTo>
-                    <a:pt x="1703828" y="1384787"/>
-                  </a:lnTo>
-                  <a:lnTo>
-                    <a:pt x="1777588" y="1465435"/>
-                  </a:lnTo>
-                  <a:lnTo>
-                    <a:pt x="1851348" y="1542985"/>
-                  </a:lnTo>
-                  <a:lnTo>
-                    <a:pt x="1925108" y="1617554"/>
-                  </a:lnTo>
-                  <a:lnTo>
-                    <a:pt x="1998868" y="1689259"/>
-                  </a:lnTo>
-                  <a:lnTo>
-                    <a:pt x="2072628" y="1758208"/>
-                  </a:lnTo>
-                  <a:lnTo>
-                    <a:pt x="2146388" y="1824508"/>
-                  </a:lnTo>
-                  <a:lnTo>
-                    <a:pt x="2220148" y="1888261"/>
-                  </a:lnTo>
-                  <a:lnTo>
-                    <a:pt x="2293908" y="1949564"/>
-                  </a:lnTo>
-                  <a:lnTo>
-                    <a:pt x="2367668" y="2008512"/>
-                  </a:lnTo>
-                  <a:lnTo>
-                    <a:pt x="2441428" y="2065194"/>
-                  </a:lnTo>
-                  <a:lnTo>
-                    <a:pt x="2515188" y="2119699"/>
-                  </a:lnTo>
-                  <a:lnTo>
-                    <a:pt x="2588948" y="2172110"/>
-                  </a:lnTo>
-                  <a:lnTo>
-                    <a:pt x="2662708" y="2222507"/>
-                  </a:lnTo>
-                  <a:lnTo>
-                    <a:pt x="2736468" y="2270967"/>
-                  </a:lnTo>
-                  <a:lnTo>
-                    <a:pt x="2810228" y="2317565"/>
-                  </a:lnTo>
-                  <a:lnTo>
-                    <a:pt x="2883988" y="2362373"/>
-                  </a:lnTo>
-                  <a:lnTo>
-                    <a:pt x="2957748" y="2405460"/>
-                  </a:lnTo>
-                  <a:lnTo>
-                    <a:pt x="3031508" y="2446891"/>
-                  </a:lnTo>
-                  <a:lnTo>
-                    <a:pt x="3105268" y="2486730"/>
-                  </a:lnTo>
-                  <a:lnTo>
-                    <a:pt x="3179028" y="2525038"/>
-                  </a:lnTo>
-                  <a:lnTo>
-                    <a:pt x="3252788" y="2561874"/>
-                  </a:lnTo>
-                  <a:lnTo>
-                    <a:pt x="3326548" y="2597295"/>
-                  </a:lnTo>
-                  <a:lnTo>
-                    <a:pt x="3400308" y="2631355"/>
-                  </a:lnTo>
-                  <a:lnTo>
-                    <a:pt x="3474068" y="2658163"/>
-                  </a:lnTo>
-                  <a:lnTo>
-                    <a:pt x="3547828" y="2670797"/>
-                  </a:lnTo>
-                  <a:lnTo>
-                    <a:pt x="3621588" y="2683237"/>
-                  </a:lnTo>
-                  <a:lnTo>
-                    <a:pt x="3695348" y="2695486"/>
-                  </a:lnTo>
-                  <a:lnTo>
-                    <a:pt x="3769108" y="2707549"/>
-                  </a:lnTo>
-                  <a:lnTo>
-                    <a:pt x="3842868" y="2719426"/>
-                  </a:lnTo>
-                  <a:lnTo>
-                    <a:pt x="3916628" y="2731122"/>
-                  </a:lnTo>
-                  <a:lnTo>
-                    <a:pt x="3990388" y="2742639"/>
-                  </a:lnTo>
-                  <a:lnTo>
-                    <a:pt x="4064149" y="2753980"/>
-                  </a:lnTo>
-                  <a:lnTo>
-                    <a:pt x="4137909" y="2765147"/>
-                  </a:lnTo>
-                  <a:lnTo>
-                    <a:pt x="4211669" y="2776143"/>
-                  </a:lnTo>
-                  <a:lnTo>
-                    <a:pt x="4285429" y="2786971"/>
-                  </a:lnTo>
-                  <a:lnTo>
-                    <a:pt x="4359189" y="2797634"/>
-                  </a:lnTo>
-                  <a:lnTo>
-                    <a:pt x="4432949" y="2808133"/>
-                  </a:lnTo>
-                  <a:lnTo>
-                    <a:pt x="4506709" y="2818471"/>
-                  </a:lnTo>
-                  <a:lnTo>
-                    <a:pt x="4580469" y="2828651"/>
-                  </a:lnTo>
-                  <a:lnTo>
-                    <a:pt x="4654229" y="2838676"/>
-                  </a:lnTo>
-                  <a:lnTo>
-                    <a:pt x="4727989" y="2848547"/>
-                  </a:lnTo>
-                  <a:lnTo>
-                    <a:pt x="4801749" y="2858267"/>
-                  </a:lnTo>
-                  <a:lnTo>
-                    <a:pt x="4875509" y="2867838"/>
-                  </a:lnTo>
-                  <a:lnTo>
-                    <a:pt x="4949269" y="2877263"/>
-                  </a:lnTo>
-                  <a:lnTo>
-                    <a:pt x="5023029" y="2886544"/>
-                  </a:lnTo>
-                  <a:lnTo>
-                    <a:pt x="5096789" y="2895683"/>
-                  </a:lnTo>
-                  <a:lnTo>
-                    <a:pt x="5170549" y="2904681"/>
-                  </a:lnTo>
-                  <a:lnTo>
-                    <a:pt x="5244309" y="2913542"/>
-                  </a:lnTo>
-                  <a:lnTo>
-                    <a:pt x="5318069" y="2922268"/>
-                  </a:lnTo>
-                  <a:lnTo>
-                    <a:pt x="5391829" y="2930860"/>
-                  </a:lnTo>
-                  <a:lnTo>
-                    <a:pt x="5465589" y="2939320"/>
-                  </a:lnTo>
-                  <a:lnTo>
-                    <a:pt x="5539349" y="2947651"/>
-                  </a:lnTo>
-                  <a:lnTo>
-                    <a:pt x="5613109" y="2955855"/>
-                  </a:lnTo>
-                  <a:lnTo>
-                    <a:pt x="5686869" y="2963933"/>
-                  </a:lnTo>
-                  <a:lnTo>
-                    <a:pt x="5760629" y="2971887"/>
-                  </a:lnTo>
-                  <a:lnTo>
-                    <a:pt x="5834389" y="2979720"/>
-                  </a:lnTo>
-                  <a:lnTo>
-                    <a:pt x="5908149" y="2987433"/>
-                  </a:lnTo>
-                  <a:lnTo>
-                    <a:pt x="5981909" y="2995027"/>
-                  </a:lnTo>
-                  <a:lnTo>
-                    <a:pt x="6055669" y="3002506"/>
-                  </a:lnTo>
-                  <a:lnTo>
-                    <a:pt x="6129429" y="3009870"/>
-                  </a:lnTo>
-                  <a:lnTo>
-                    <a:pt x="6203189" y="3017122"/>
-                  </a:lnTo>
-                  <a:lnTo>
-                    <a:pt x="6276949" y="3024262"/>
-                  </a:lnTo>
-                  <a:lnTo>
-                    <a:pt x="6350709" y="3031293"/>
-                  </a:lnTo>
-                  <a:lnTo>
-                    <a:pt x="6424469" y="3038217"/>
-                  </a:lnTo>
-                  <a:lnTo>
-                    <a:pt x="6498229" y="3045035"/>
-                  </a:lnTo>
-                  <a:lnTo>
-                    <a:pt x="6571989" y="3051748"/>
-                  </a:lnTo>
-                  <a:lnTo>
-                    <a:pt x="6645749" y="3058358"/>
-                  </a:lnTo>
-                  <a:lnTo>
-                    <a:pt x="6719509" y="3064868"/>
-                  </a:lnTo>
-                  <a:lnTo>
-                    <a:pt x="6793269" y="3071278"/>
-                  </a:lnTo>
-                  <a:lnTo>
-                    <a:pt x="6867029" y="3077589"/>
-                  </a:lnTo>
-                  <a:lnTo>
-                    <a:pt x="6940789" y="3083805"/>
-                  </a:lnTo>
-                  <a:lnTo>
-                    <a:pt x="7014550" y="3089925"/>
-                  </a:lnTo>
-                  <a:lnTo>
-                    <a:pt x="7088310" y="3095951"/>
-                  </a:lnTo>
-                  <a:lnTo>
-                    <a:pt x="7162070" y="3101885"/>
-                  </a:lnTo>
-                  <a:lnTo>
-                    <a:pt x="7235830" y="3107729"/>
-                  </a:lnTo>
-                  <a:lnTo>
-                    <a:pt x="7235830" y="3372621"/>
-                  </a:lnTo>
-                  <a:lnTo>
-                    <a:pt x="7162070" y="3368181"/>
-                  </a:lnTo>
-                  <a:lnTo>
-                    <a:pt x="7088310" y="3363563"/>
-                  </a:lnTo>
-                  <a:lnTo>
-                    <a:pt x="7014550" y="3358760"/>
-                  </a:lnTo>
-                  <a:lnTo>
-                    <a:pt x="6940789" y="3353766"/>
-                  </a:lnTo>
-                  <a:lnTo>
-                    <a:pt x="6867029" y="3348572"/>
-                  </a:lnTo>
-                  <a:lnTo>
-                    <a:pt x="6793269" y="3343171"/>
-                  </a:lnTo>
-                  <a:lnTo>
-                    <a:pt x="6719509" y="3337554"/>
-                  </a:lnTo>
-                  <a:lnTo>
-                    <a:pt x="6645749" y="3331712"/>
-                  </a:lnTo>
-                  <a:lnTo>
-                    <a:pt x="6571989" y="3325637"/>
-                  </a:lnTo>
-                  <a:lnTo>
-                    <a:pt x="6498229" y="3319320"/>
-                  </a:lnTo>
-                  <a:lnTo>
-                    <a:pt x="6424469" y="3312749"/>
-                  </a:lnTo>
-                  <a:lnTo>
-                    <a:pt x="6350709" y="3305917"/>
-                  </a:lnTo>
-                  <a:lnTo>
-                    <a:pt x="6276949" y="3298811"/>
-                  </a:lnTo>
-                  <a:lnTo>
-                    <a:pt x="6203189" y="3291421"/>
-                  </a:lnTo>
-                  <a:lnTo>
-                    <a:pt x="6129429" y="3283736"/>
-                  </a:lnTo>
-                  <a:lnTo>
-                    <a:pt x="6055669" y="3275744"/>
-                  </a:lnTo>
-                  <a:lnTo>
-                    <a:pt x="5981909" y="3267433"/>
-                  </a:lnTo>
-                  <a:lnTo>
-                    <a:pt x="5908149" y="3258789"/>
-                  </a:lnTo>
-                  <a:lnTo>
-                    <a:pt x="5834389" y="3249801"/>
-                  </a:lnTo>
-                  <a:lnTo>
-                    <a:pt x="5760629" y="3240453"/>
-                  </a:lnTo>
-                  <a:lnTo>
-                    <a:pt x="5686869" y="3230731"/>
-                  </a:lnTo>
-                  <a:lnTo>
-                    <a:pt x="5613109" y="3220621"/>
-                  </a:lnTo>
-                  <a:lnTo>
-                    <a:pt x="5539349" y="3210107"/>
-                  </a:lnTo>
-                  <a:lnTo>
-                    <a:pt x="5465589" y="3199173"/>
-                  </a:lnTo>
-                  <a:lnTo>
-                    <a:pt x="5391829" y="3187802"/>
-                  </a:lnTo>
-                  <a:lnTo>
-                    <a:pt x="5318069" y="3175976"/>
-                  </a:lnTo>
-                  <a:lnTo>
-                    <a:pt x="5244309" y="3163678"/>
-                  </a:lnTo>
-                  <a:lnTo>
-                    <a:pt x="5170549" y="3150889"/>
-                  </a:lnTo>
-                  <a:lnTo>
-                    <a:pt x="5096789" y="3137589"/>
-                  </a:lnTo>
-                  <a:lnTo>
-                    <a:pt x="5023029" y="3123757"/>
-                  </a:lnTo>
-                  <a:lnTo>
-                    <a:pt x="4949269" y="3109372"/>
-                  </a:lnTo>
-                  <a:lnTo>
-                    <a:pt x="4875509" y="3094413"/>
-                  </a:lnTo>
-                  <a:lnTo>
-                    <a:pt x="4801749" y="3078856"/>
-                  </a:lnTo>
-                  <a:lnTo>
-                    <a:pt x="4727989" y="3062677"/>
-                  </a:lnTo>
-                  <a:lnTo>
-                    <a:pt x="4654229" y="3045852"/>
-                  </a:lnTo>
-                  <a:lnTo>
-                    <a:pt x="4580469" y="3028355"/>
-                  </a:lnTo>
-                  <a:lnTo>
-                    <a:pt x="4506709" y="3010158"/>
-                  </a:lnTo>
-                  <a:lnTo>
-                    <a:pt x="4432949" y="2991234"/>
-                  </a:lnTo>
-                  <a:lnTo>
-                    <a:pt x="4359189" y="2971555"/>
-                  </a:lnTo>
-                  <a:lnTo>
-                    <a:pt x="4285429" y="2951088"/>
-                  </a:lnTo>
-                  <a:lnTo>
-                    <a:pt x="4211669" y="2929804"/>
-                  </a:lnTo>
-                  <a:lnTo>
-                    <a:pt x="4137909" y="2907670"/>
-                  </a:lnTo>
-                  <a:lnTo>
-                    <a:pt x="4064149" y="2884651"/>
-                  </a:lnTo>
-                  <a:lnTo>
-                    <a:pt x="3990388" y="2860712"/>
-                  </a:lnTo>
-                  <a:lnTo>
-                    <a:pt x="3916628" y="2835817"/>
-                  </a:lnTo>
-                  <a:lnTo>
-                    <a:pt x="3842868" y="2809927"/>
-                  </a:lnTo>
-                  <a:lnTo>
-                    <a:pt x="3769108" y="2783002"/>
-                  </a:lnTo>
-                  <a:lnTo>
-                    <a:pt x="3695348" y="2755002"/>
-                  </a:lnTo>
-                  <a:lnTo>
-                    <a:pt x="3621588" y="2725882"/>
-                  </a:lnTo>
-                  <a:lnTo>
-                    <a:pt x="3547828" y="2695599"/>
-                  </a:lnTo>
-                  <a:lnTo>
-                    <a:pt x="3474068" y="2664106"/>
-                  </a:lnTo>
-                  <a:lnTo>
-                    <a:pt x="3400308" y="2645333"/>
-                  </a:lnTo>
-                  <a:lnTo>
-                    <a:pt x="3326548" y="2632304"/>
-                  </a:lnTo>
-                  <a:lnTo>
-                    <a:pt x="3252788" y="2619073"/>
-                  </a:lnTo>
-                  <a:lnTo>
-                    <a:pt x="3179028" y="2605636"/>
-                  </a:lnTo>
-                  <a:lnTo>
-                    <a:pt x="3105268" y="2591990"/>
-                  </a:lnTo>
-                  <a:lnTo>
-                    <a:pt x="3031508" y="2578132"/>
-                  </a:lnTo>
-                  <a:lnTo>
-                    <a:pt x="2957748" y="2564058"/>
-                  </a:lnTo>
-                  <a:lnTo>
-                    <a:pt x="2883988" y="2549766"/>
-                  </a:lnTo>
-                  <a:lnTo>
-                    <a:pt x="2810228" y="2535252"/>
-                  </a:lnTo>
-                  <a:lnTo>
-                    <a:pt x="2736468" y="2520512"/>
-                  </a:lnTo>
-                  <a:lnTo>
-                    <a:pt x="2662708" y="2505543"/>
-                  </a:lnTo>
-                  <a:lnTo>
-                    <a:pt x="2588948" y="2490342"/>
-                  </a:lnTo>
-                  <a:lnTo>
-                    <a:pt x="2515188" y="2474904"/>
-                  </a:lnTo>
-                  <a:lnTo>
-                    <a:pt x="2441428" y="2459227"/>
-                  </a:lnTo>
-                  <a:lnTo>
-                    <a:pt x="2367668" y="2443305"/>
-                  </a:lnTo>
-                  <a:lnTo>
-                    <a:pt x="2293908" y="2427137"/>
-                  </a:lnTo>
-                  <a:lnTo>
-                    <a:pt x="2220148" y="2410717"/>
-                  </a:lnTo>
-                  <a:lnTo>
-                    <a:pt x="2146388" y="2394042"/>
-                  </a:lnTo>
-                  <a:lnTo>
-                    <a:pt x="2072628" y="2377108"/>
-                  </a:lnTo>
-                  <a:lnTo>
-                    <a:pt x="1998868" y="2359910"/>
-                  </a:lnTo>
-                  <a:lnTo>
-                    <a:pt x="1925108" y="2342446"/>
-                  </a:lnTo>
-                  <a:lnTo>
-                    <a:pt x="1851348" y="2324710"/>
-                  </a:lnTo>
-                  <a:lnTo>
-                    <a:pt x="1777588" y="2306698"/>
-                  </a:lnTo>
-                  <a:lnTo>
-                    <a:pt x="1703828" y="2288406"/>
-                  </a:lnTo>
-                  <a:lnTo>
-                    <a:pt x="1630068" y="2269831"/>
-                  </a:lnTo>
-                  <a:lnTo>
-                    <a:pt x="1556308" y="2250966"/>
-                  </a:lnTo>
-                  <a:lnTo>
-                    <a:pt x="1482548" y="2231809"/>
-                  </a:lnTo>
-                  <a:lnTo>
-                    <a:pt x="1408788" y="2212353"/>
-                  </a:lnTo>
-                  <a:lnTo>
-                    <a:pt x="1335028" y="2192596"/>
-                  </a:lnTo>
-                  <a:lnTo>
-                    <a:pt x="1261268" y="2172531"/>
-                  </a:lnTo>
-                  <a:lnTo>
-                    <a:pt x="1187508" y="2152154"/>
-                  </a:lnTo>
-                  <a:lnTo>
-                    <a:pt x="1113747" y="2131461"/>
-                  </a:lnTo>
-                  <a:lnTo>
-                    <a:pt x="1039987" y="2110446"/>
-                  </a:lnTo>
-                  <a:lnTo>
-                    <a:pt x="966227" y="2089105"/>
-                  </a:lnTo>
-                  <a:lnTo>
-                    <a:pt x="892467" y="2067432"/>
-                  </a:lnTo>
-                  <a:lnTo>
-                    <a:pt x="818707" y="2045422"/>
-                  </a:lnTo>
-                  <a:lnTo>
-                    <a:pt x="744947" y="2023071"/>
-                  </a:lnTo>
-                  <a:lnTo>
-                    <a:pt x="671187" y="2000371"/>
-                  </a:lnTo>
-                  <a:lnTo>
-                    <a:pt x="597427" y="1977319"/>
-                  </a:lnTo>
-                  <a:lnTo>
-                    <a:pt x="523667" y="1953909"/>
-                  </a:lnTo>
-                  <a:lnTo>
-                    <a:pt x="449907" y="1930135"/>
-                  </a:lnTo>
-                  <a:lnTo>
-                    <a:pt x="376147" y="1905992"/>
-                  </a:lnTo>
-                  <a:lnTo>
-                    <a:pt x="302387" y="1881473"/>
-                  </a:lnTo>
-                  <a:lnTo>
-                    <a:pt x="228627" y="1856574"/>
-                  </a:lnTo>
-                  <a:lnTo>
-                    <a:pt x="154867" y="1831287"/>
-                  </a:lnTo>
-                  <a:lnTo>
-                    <a:pt x="81107" y="1805608"/>
-                  </a:lnTo>
-                  <a:lnTo>
-                    <a:pt x="7347" y="1779529"/>
-                  </a:lnTo>
-                  <a:lnTo>
-                    <a:pt x="0" y="1776891"/>
+                    <a:pt x="859470" y="124867"/>
+                  </a:lnTo>
+                  <a:lnTo>
+                    <a:pt x="931092" y="253925"/>
+                  </a:lnTo>
+                  <a:lnTo>
+                    <a:pt x="1002715" y="378024"/>
+                  </a:lnTo>
+                  <a:lnTo>
+                    <a:pt x="1074337" y="497355"/>
+                  </a:lnTo>
+                  <a:lnTo>
+                    <a:pt x="1145960" y="612100"/>
+                  </a:lnTo>
+                  <a:lnTo>
+                    <a:pt x="1217582" y="722437"/>
+                  </a:lnTo>
+                  <a:lnTo>
+                    <a:pt x="1289205" y="828535"/>
+                  </a:lnTo>
+                  <a:lnTo>
+                    <a:pt x="1360827" y="930555"/>
+                  </a:lnTo>
+                  <a:lnTo>
+                    <a:pt x="1432450" y="1028656"/>
+                  </a:lnTo>
+                  <a:lnTo>
+                    <a:pt x="1504073" y="1122988"/>
+                  </a:lnTo>
+                  <a:lnTo>
+                    <a:pt x="1575695" y="1213695"/>
+                  </a:lnTo>
+                  <a:lnTo>
+                    <a:pt x="1647318" y="1300917"/>
+                  </a:lnTo>
+                  <a:lnTo>
+                    <a:pt x="1718940" y="1384787"/>
+                  </a:lnTo>
+                  <a:lnTo>
+                    <a:pt x="1790563" y="1465435"/>
+                  </a:lnTo>
+                  <a:lnTo>
+                    <a:pt x="1862185" y="1542985"/>
+                  </a:lnTo>
+                  <a:lnTo>
+                    <a:pt x="1933808" y="1617554"/>
+                  </a:lnTo>
+                  <a:lnTo>
+                    <a:pt x="2005430" y="1689259"/>
+                  </a:lnTo>
+                  <a:lnTo>
+                    <a:pt x="2077053" y="1758208"/>
+                  </a:lnTo>
+                  <a:lnTo>
+                    <a:pt x="2148675" y="1824508"/>
+                  </a:lnTo>
+                  <a:lnTo>
+                    <a:pt x="2220298" y="1888261"/>
+                  </a:lnTo>
+                  <a:lnTo>
+                    <a:pt x="2291920" y="1949564"/>
+                  </a:lnTo>
+                  <a:lnTo>
+                    <a:pt x="2363543" y="2008512"/>
+                  </a:lnTo>
+                  <a:lnTo>
+                    <a:pt x="2435165" y="2065194"/>
+                  </a:lnTo>
+                  <a:lnTo>
+                    <a:pt x="2506788" y="2119699"/>
+                  </a:lnTo>
+                  <a:lnTo>
+                    <a:pt x="2578410" y="2172110"/>
+                  </a:lnTo>
+                  <a:lnTo>
+                    <a:pt x="2650033" y="2222507"/>
+                  </a:lnTo>
+                  <a:lnTo>
+                    <a:pt x="2721655" y="2270967"/>
+                  </a:lnTo>
+                  <a:lnTo>
+                    <a:pt x="2793278" y="2317565"/>
+                  </a:lnTo>
+                  <a:lnTo>
+                    <a:pt x="2864901" y="2362373"/>
+                  </a:lnTo>
+                  <a:lnTo>
+                    <a:pt x="2936523" y="2405460"/>
+                  </a:lnTo>
+                  <a:lnTo>
+                    <a:pt x="3008146" y="2446891"/>
+                  </a:lnTo>
+                  <a:lnTo>
+                    <a:pt x="3079768" y="2486730"/>
+                  </a:lnTo>
+                  <a:lnTo>
+                    <a:pt x="3151391" y="2525038"/>
+                  </a:lnTo>
+                  <a:lnTo>
+                    <a:pt x="3223013" y="2561874"/>
+                  </a:lnTo>
+                  <a:lnTo>
+                    <a:pt x="3294636" y="2597295"/>
+                  </a:lnTo>
+                  <a:lnTo>
+                    <a:pt x="3366258" y="2631355"/>
+                  </a:lnTo>
+                  <a:lnTo>
+                    <a:pt x="3437881" y="2658163"/>
+                  </a:lnTo>
+                  <a:lnTo>
+                    <a:pt x="3509503" y="2670797"/>
+                  </a:lnTo>
+                  <a:lnTo>
+                    <a:pt x="3581126" y="2683237"/>
+                  </a:lnTo>
+                  <a:lnTo>
+                    <a:pt x="3652748" y="2695486"/>
+                  </a:lnTo>
+                  <a:lnTo>
+                    <a:pt x="3724371" y="2707549"/>
+                  </a:lnTo>
+                  <a:lnTo>
+                    <a:pt x="3795993" y="2719426"/>
+                  </a:lnTo>
+                  <a:lnTo>
+                    <a:pt x="3867616" y="2731122"/>
+                  </a:lnTo>
+                  <a:lnTo>
+                    <a:pt x="3939238" y="2742639"/>
+                  </a:lnTo>
+                  <a:lnTo>
+                    <a:pt x="4010861" y="2753980"/>
+                  </a:lnTo>
+                  <a:lnTo>
+                    <a:pt x="4082483" y="2765147"/>
+                  </a:lnTo>
+                  <a:lnTo>
+                    <a:pt x="4154106" y="2776143"/>
+                  </a:lnTo>
+                  <a:lnTo>
+                    <a:pt x="4225729" y="2786971"/>
+                  </a:lnTo>
+                  <a:lnTo>
+                    <a:pt x="4297351" y="2797634"/>
+                  </a:lnTo>
+                  <a:lnTo>
+                    <a:pt x="4368974" y="2808133"/>
+                  </a:lnTo>
+                  <a:lnTo>
+                    <a:pt x="4440596" y="2818471"/>
+                  </a:lnTo>
+                  <a:lnTo>
+                    <a:pt x="4512219" y="2828651"/>
+                  </a:lnTo>
+                  <a:lnTo>
+                    <a:pt x="4583841" y="2838676"/>
+                  </a:lnTo>
+                  <a:lnTo>
+                    <a:pt x="4655464" y="2848547"/>
+                  </a:lnTo>
+                  <a:lnTo>
+                    <a:pt x="4727086" y="2858267"/>
+                  </a:lnTo>
+                  <a:lnTo>
+                    <a:pt x="4798709" y="2867838"/>
+                  </a:lnTo>
+                  <a:lnTo>
+                    <a:pt x="4870331" y="2877263"/>
+                  </a:lnTo>
+                  <a:lnTo>
+                    <a:pt x="4941954" y="2886544"/>
+                  </a:lnTo>
+                  <a:lnTo>
+                    <a:pt x="5013576" y="2895683"/>
+                  </a:lnTo>
+                  <a:lnTo>
+                    <a:pt x="5085199" y="2904681"/>
+                  </a:lnTo>
+                  <a:lnTo>
+                    <a:pt x="5156821" y="2913542"/>
+                  </a:lnTo>
+                  <a:lnTo>
+                    <a:pt x="5228444" y="2922268"/>
+                  </a:lnTo>
+                  <a:lnTo>
+                    <a:pt x="5300066" y="2930860"/>
+                  </a:lnTo>
+                  <a:lnTo>
+                    <a:pt x="5371689" y="2939320"/>
+                  </a:lnTo>
+                  <a:lnTo>
+                    <a:pt x="5443311" y="2947651"/>
+                  </a:lnTo>
+                  <a:lnTo>
+                    <a:pt x="5514934" y="2955855"/>
+                  </a:lnTo>
+                  <a:lnTo>
+                    <a:pt x="5586557" y="2963933"/>
+                  </a:lnTo>
+                  <a:lnTo>
+                    <a:pt x="5658179" y="2971887"/>
+                  </a:lnTo>
+                  <a:lnTo>
+                    <a:pt x="5729802" y="2979720"/>
+                  </a:lnTo>
+                  <a:lnTo>
+                    <a:pt x="5801424" y="2987433"/>
+                  </a:lnTo>
+                  <a:lnTo>
+                    <a:pt x="5873047" y="2995027"/>
+                  </a:lnTo>
+                  <a:lnTo>
+                    <a:pt x="5944669" y="3002506"/>
+                  </a:lnTo>
+                  <a:lnTo>
+                    <a:pt x="6016292" y="3009870"/>
+                  </a:lnTo>
+                  <a:lnTo>
+                    <a:pt x="6087914" y="3017122"/>
+                  </a:lnTo>
+                  <a:lnTo>
+                    <a:pt x="6159537" y="3024262"/>
+                  </a:lnTo>
+                  <a:lnTo>
+                    <a:pt x="6231159" y="3031293"/>
+                  </a:lnTo>
+                  <a:lnTo>
+                    <a:pt x="6302782" y="3038217"/>
+                  </a:lnTo>
+                  <a:lnTo>
+                    <a:pt x="6374404" y="3045035"/>
+                  </a:lnTo>
+                  <a:lnTo>
+                    <a:pt x="6446027" y="3051748"/>
+                  </a:lnTo>
+                  <a:lnTo>
+                    <a:pt x="6517649" y="3058358"/>
+                  </a:lnTo>
+                  <a:lnTo>
+                    <a:pt x="6589272" y="3064868"/>
+                  </a:lnTo>
+                  <a:lnTo>
+                    <a:pt x="6660894" y="3071278"/>
+                  </a:lnTo>
+                  <a:lnTo>
+                    <a:pt x="6732517" y="3077589"/>
+                  </a:lnTo>
+                  <a:lnTo>
+                    <a:pt x="6804139" y="3083805"/>
+                  </a:lnTo>
+                  <a:lnTo>
+                    <a:pt x="6875762" y="3089925"/>
+                  </a:lnTo>
+                  <a:lnTo>
+                    <a:pt x="6947385" y="3095951"/>
+                  </a:lnTo>
+                  <a:lnTo>
+                    <a:pt x="7019007" y="3101885"/>
+                  </a:lnTo>
+                  <a:lnTo>
+                    <a:pt x="7090630" y="3107729"/>
+                  </a:lnTo>
+                  <a:lnTo>
+                    <a:pt x="7090630" y="3372621"/>
+                  </a:lnTo>
+                  <a:lnTo>
+                    <a:pt x="7019007" y="3368181"/>
+                  </a:lnTo>
+                  <a:lnTo>
+                    <a:pt x="6947385" y="3363563"/>
+                  </a:lnTo>
+                  <a:lnTo>
+                    <a:pt x="6875762" y="3358760"/>
+                  </a:lnTo>
+                  <a:lnTo>
+                    <a:pt x="6804139" y="3353766"/>
+                  </a:lnTo>
+                  <a:lnTo>
+                    <a:pt x="6732517" y="3348572"/>
+                  </a:lnTo>
+                  <a:lnTo>
+                    <a:pt x="6660894" y="3343171"/>
+                  </a:lnTo>
+                  <a:lnTo>
+                    <a:pt x="6589272" y="3337554"/>
+                  </a:lnTo>
+                  <a:lnTo>
+                    <a:pt x="6517649" y="3331712"/>
+                  </a:lnTo>
+                  <a:lnTo>
+                    <a:pt x="6446027" y="3325637"/>
+                  </a:lnTo>
+                  <a:lnTo>
+                    <a:pt x="6374404" y="3319320"/>
+                  </a:lnTo>
+                  <a:lnTo>
+                    <a:pt x="6302782" y="3312749"/>
+                  </a:lnTo>
+                  <a:lnTo>
+                    <a:pt x="6231159" y="3305917"/>
+                  </a:lnTo>
+                  <a:lnTo>
+                    <a:pt x="6159537" y="3298811"/>
+                  </a:lnTo>
+                  <a:lnTo>
+                    <a:pt x="6087914" y="3291421"/>
+                  </a:lnTo>
+                  <a:lnTo>
+                    <a:pt x="6016292" y="3283736"/>
+                  </a:lnTo>
+                  <a:lnTo>
+                    <a:pt x="5944669" y="3275744"/>
+                  </a:lnTo>
+                  <a:lnTo>
+                    <a:pt x="5873047" y="3267433"/>
+                  </a:lnTo>
+                  <a:lnTo>
+                    <a:pt x="5801424" y="3258789"/>
+                  </a:lnTo>
+                  <a:lnTo>
+                    <a:pt x="5729802" y="3249801"/>
+                  </a:lnTo>
+                  <a:lnTo>
+                    <a:pt x="5658179" y="3240453"/>
+                  </a:lnTo>
+                  <a:lnTo>
+                    <a:pt x="5586557" y="3230731"/>
+                  </a:lnTo>
+                  <a:lnTo>
+                    <a:pt x="5514934" y="3220621"/>
+                  </a:lnTo>
+                  <a:lnTo>
+                    <a:pt x="5443311" y="3210107"/>
+                  </a:lnTo>
+                  <a:lnTo>
+                    <a:pt x="5371689" y="3199173"/>
+                  </a:lnTo>
+                  <a:lnTo>
+                    <a:pt x="5300066" y="3187802"/>
+                  </a:lnTo>
+                  <a:lnTo>
+                    <a:pt x="5228444" y="3175976"/>
+                  </a:lnTo>
+                  <a:lnTo>
+                    <a:pt x="5156821" y="3163678"/>
+                  </a:lnTo>
+                  <a:lnTo>
+                    <a:pt x="5085199" y="3150889"/>
+                  </a:lnTo>
+                  <a:lnTo>
+                    <a:pt x="5013576" y="3137589"/>
+                  </a:lnTo>
+                  <a:lnTo>
+                    <a:pt x="4941954" y="3123757"/>
+                  </a:lnTo>
+                  <a:lnTo>
+                    <a:pt x="4870331" y="3109372"/>
+                  </a:lnTo>
+                  <a:lnTo>
+                    <a:pt x="4798709" y="3094413"/>
+                  </a:lnTo>
+                  <a:lnTo>
+                    <a:pt x="4727086" y="3078856"/>
+                  </a:lnTo>
+                  <a:lnTo>
+                    <a:pt x="4655464" y="3062677"/>
+                  </a:lnTo>
+                  <a:lnTo>
+                    <a:pt x="4583841" y="3045852"/>
+                  </a:lnTo>
+                  <a:lnTo>
+                    <a:pt x="4512219" y="3028355"/>
+                  </a:lnTo>
+                  <a:lnTo>
+                    <a:pt x="4440596" y="3010158"/>
+                  </a:lnTo>
+                  <a:lnTo>
+                    <a:pt x="4368974" y="2991234"/>
+                  </a:lnTo>
+                  <a:lnTo>
+                    <a:pt x="4297351" y="2971555"/>
+                  </a:lnTo>
+                  <a:lnTo>
+                    <a:pt x="4225729" y="2951088"/>
+                  </a:lnTo>
+                  <a:lnTo>
+                    <a:pt x="4154106" y="2929804"/>
+                  </a:lnTo>
+                  <a:lnTo>
+                    <a:pt x="4082483" y="2907670"/>
+                  </a:lnTo>
+                  <a:lnTo>
+                    <a:pt x="4010861" y="2884651"/>
+                  </a:lnTo>
+                  <a:lnTo>
+                    <a:pt x="3939238" y="2860712"/>
+                  </a:lnTo>
+                  <a:lnTo>
+                    <a:pt x="3867616" y="2835817"/>
+                  </a:lnTo>
+                  <a:lnTo>
+                    <a:pt x="3795993" y="2809927"/>
+                  </a:lnTo>
+                  <a:lnTo>
+                    <a:pt x="3724371" y="2783002"/>
+                  </a:lnTo>
+                  <a:lnTo>
+                    <a:pt x="3652748" y="2755002"/>
+                  </a:lnTo>
+                  <a:lnTo>
+                    <a:pt x="3581126" y="2725882"/>
+                  </a:lnTo>
+                  <a:lnTo>
+                    <a:pt x="3509503" y="2695599"/>
+                  </a:lnTo>
+                  <a:lnTo>
+                    <a:pt x="3437881" y="2664106"/>
+                  </a:lnTo>
+                  <a:lnTo>
+                    <a:pt x="3366258" y="2645333"/>
+                  </a:lnTo>
+                  <a:lnTo>
+                    <a:pt x="3294636" y="2632304"/>
+                  </a:lnTo>
+                  <a:lnTo>
+                    <a:pt x="3223013" y="2619073"/>
+                  </a:lnTo>
+                  <a:lnTo>
+                    <a:pt x="3151391" y="2605636"/>
+                  </a:lnTo>
+                  <a:lnTo>
+                    <a:pt x="3079768" y="2591990"/>
+                  </a:lnTo>
+                  <a:lnTo>
+                    <a:pt x="3008146" y="2578132"/>
+                  </a:lnTo>
+                  <a:lnTo>
+                    <a:pt x="2936523" y="2564058"/>
+                  </a:lnTo>
+                  <a:lnTo>
+                    <a:pt x="2864901" y="2549766"/>
+                  </a:lnTo>
+                  <a:lnTo>
+                    <a:pt x="2793278" y="2535252"/>
+                  </a:lnTo>
+                  <a:lnTo>
+                    <a:pt x="2721655" y="2520512"/>
+                  </a:lnTo>
+                  <a:lnTo>
+                    <a:pt x="2650033" y="2505543"/>
+                  </a:lnTo>
+                  <a:lnTo>
+                    <a:pt x="2578410" y="2490342"/>
+                  </a:lnTo>
+                  <a:lnTo>
+                    <a:pt x="2506788" y="2474904"/>
+                  </a:lnTo>
+                  <a:lnTo>
+                    <a:pt x="2435165" y="2459227"/>
+                  </a:lnTo>
+                  <a:lnTo>
+                    <a:pt x="2363543" y="2443305"/>
+                  </a:lnTo>
+                  <a:lnTo>
+                    <a:pt x="2291920" y="2427137"/>
+                  </a:lnTo>
+                  <a:lnTo>
+                    <a:pt x="2220298" y="2410717"/>
+                  </a:lnTo>
+                  <a:lnTo>
+                    <a:pt x="2148675" y="2394042"/>
+                  </a:lnTo>
+                  <a:lnTo>
+                    <a:pt x="2077053" y="2377108"/>
+                  </a:lnTo>
+                  <a:lnTo>
+                    <a:pt x="2005430" y="2359910"/>
+                  </a:lnTo>
+                  <a:lnTo>
+                    <a:pt x="1933808" y="2342446"/>
+                  </a:lnTo>
+                  <a:lnTo>
+                    <a:pt x="1862185" y="2324710"/>
+                  </a:lnTo>
+                  <a:lnTo>
+                    <a:pt x="1790563" y="2306698"/>
+                  </a:lnTo>
+                  <a:lnTo>
+                    <a:pt x="1718940" y="2288406"/>
+                  </a:lnTo>
+                  <a:lnTo>
+                    <a:pt x="1647318" y="2269831"/>
+                  </a:lnTo>
+                  <a:lnTo>
+                    <a:pt x="1575695" y="2250966"/>
+                  </a:lnTo>
+                  <a:lnTo>
+                    <a:pt x="1504073" y="2231809"/>
+                  </a:lnTo>
+                  <a:lnTo>
+                    <a:pt x="1432450" y="2212353"/>
+                  </a:lnTo>
+                  <a:lnTo>
+                    <a:pt x="1360827" y="2192596"/>
+                  </a:lnTo>
+                  <a:lnTo>
+                    <a:pt x="1289205" y="2172531"/>
+                  </a:lnTo>
+                  <a:lnTo>
+                    <a:pt x="1217582" y="2152154"/>
+                  </a:lnTo>
+                  <a:lnTo>
+                    <a:pt x="1145960" y="2131461"/>
+                  </a:lnTo>
+                  <a:lnTo>
+                    <a:pt x="1074337" y="2110446"/>
+                  </a:lnTo>
+                  <a:lnTo>
+                    <a:pt x="1002715" y="2089105"/>
+                  </a:lnTo>
+                  <a:lnTo>
+                    <a:pt x="931092" y="2067432"/>
+                  </a:lnTo>
+                  <a:lnTo>
+                    <a:pt x="859470" y="2045422"/>
+                  </a:lnTo>
+                  <a:lnTo>
+                    <a:pt x="787847" y="2023071"/>
+                  </a:lnTo>
+                  <a:lnTo>
+                    <a:pt x="716225" y="2000371"/>
+                  </a:lnTo>
+                  <a:lnTo>
+                    <a:pt x="644602" y="1977319"/>
+                  </a:lnTo>
+                  <a:lnTo>
+                    <a:pt x="572980" y="1953909"/>
+                  </a:lnTo>
+                  <a:lnTo>
+                    <a:pt x="501357" y="1930135"/>
+                  </a:lnTo>
+                  <a:lnTo>
+                    <a:pt x="429735" y="1905992"/>
+                  </a:lnTo>
+                  <a:lnTo>
+                    <a:pt x="358112" y="1881473"/>
+                  </a:lnTo>
+                  <a:lnTo>
+                    <a:pt x="286490" y="1856574"/>
+                  </a:lnTo>
+                  <a:lnTo>
+                    <a:pt x="214867" y="1831287"/>
+                  </a:lnTo>
+                  <a:lnTo>
+                    <a:pt x="143245" y="1805608"/>
+                  </a:lnTo>
+                  <a:lnTo>
+                    <a:pt x="71622" y="1779529"/>
+                  </a:lnTo>
+                  <a:lnTo>
+                    <a:pt x="0" y="1753045"/>
                   </a:lnTo>
                   <a:close/>
                 </a:path>
@@ -3594,285 +3551,610 @@
         </p:sp>
         <p:sp>
           <p:nvSpPr>
+            <p:cNvPr id="21" name="pl21"/>
+            <p:cNvSpPr/>
+            <p:nvPr/>
+          </p:nvSpPr>
+          <p:spPr>
+            <a:xfrm>
+              <a:off x="1964885" y="2073503"/>
+              <a:ext cx="6297794" cy="3107729"/>
+            </a:xfrm>
+            <a:custGeom>
+              <a:avLst/>
+              <a:pathLst>
+                <a:path w="6297794" h="3107729">
+                  <a:moveTo>
+                    <a:pt x="0" y="0"/>
+                  </a:moveTo>
+                  <a:lnTo>
+                    <a:pt x="66634" y="124867"/>
+                  </a:lnTo>
+                  <a:lnTo>
+                    <a:pt x="138257" y="253925"/>
+                  </a:lnTo>
+                  <a:lnTo>
+                    <a:pt x="209879" y="378024"/>
+                  </a:lnTo>
+                  <a:lnTo>
+                    <a:pt x="281502" y="497355"/>
+                  </a:lnTo>
+                  <a:lnTo>
+                    <a:pt x="353124" y="612100"/>
+                  </a:lnTo>
+                  <a:lnTo>
+                    <a:pt x="424747" y="722437"/>
+                  </a:lnTo>
+                  <a:lnTo>
+                    <a:pt x="496369" y="828535"/>
+                  </a:lnTo>
+                  <a:lnTo>
+                    <a:pt x="567992" y="930555"/>
+                  </a:lnTo>
+                  <a:lnTo>
+                    <a:pt x="639614" y="1028656"/>
+                  </a:lnTo>
+                  <a:lnTo>
+                    <a:pt x="711237" y="1122988"/>
+                  </a:lnTo>
+                  <a:lnTo>
+                    <a:pt x="782859" y="1213695"/>
+                  </a:lnTo>
+                  <a:lnTo>
+                    <a:pt x="854482" y="1300917"/>
+                  </a:lnTo>
+                  <a:lnTo>
+                    <a:pt x="926104" y="1384787"/>
+                  </a:lnTo>
+                  <a:lnTo>
+                    <a:pt x="997727" y="1465435"/>
+                  </a:lnTo>
+                  <a:lnTo>
+                    <a:pt x="1069350" y="1542985"/>
+                  </a:lnTo>
+                  <a:lnTo>
+                    <a:pt x="1140972" y="1617554"/>
+                  </a:lnTo>
+                  <a:lnTo>
+                    <a:pt x="1212595" y="1689259"/>
+                  </a:lnTo>
+                  <a:lnTo>
+                    <a:pt x="1284217" y="1758208"/>
+                  </a:lnTo>
+                  <a:lnTo>
+                    <a:pt x="1355840" y="1824508"/>
+                  </a:lnTo>
+                  <a:lnTo>
+                    <a:pt x="1427462" y="1888261"/>
+                  </a:lnTo>
+                  <a:lnTo>
+                    <a:pt x="1499085" y="1949564"/>
+                  </a:lnTo>
+                  <a:lnTo>
+                    <a:pt x="1570707" y="2008512"/>
+                  </a:lnTo>
+                  <a:lnTo>
+                    <a:pt x="1642330" y="2065194"/>
+                  </a:lnTo>
+                  <a:lnTo>
+                    <a:pt x="1713952" y="2119699"/>
+                  </a:lnTo>
+                  <a:lnTo>
+                    <a:pt x="1785575" y="2172110"/>
+                  </a:lnTo>
+                  <a:lnTo>
+                    <a:pt x="1857197" y="2222507"/>
+                  </a:lnTo>
+                  <a:lnTo>
+                    <a:pt x="1928820" y="2270967"/>
+                  </a:lnTo>
+                  <a:lnTo>
+                    <a:pt x="2000442" y="2317565"/>
+                  </a:lnTo>
+                  <a:lnTo>
+                    <a:pt x="2072065" y="2362373"/>
+                  </a:lnTo>
+                  <a:lnTo>
+                    <a:pt x="2143687" y="2405460"/>
+                  </a:lnTo>
+                  <a:lnTo>
+                    <a:pt x="2215310" y="2446891"/>
+                  </a:lnTo>
+                  <a:lnTo>
+                    <a:pt x="2286932" y="2486730"/>
+                  </a:lnTo>
+                  <a:lnTo>
+                    <a:pt x="2358555" y="2525038"/>
+                  </a:lnTo>
+                  <a:lnTo>
+                    <a:pt x="2430178" y="2561874"/>
+                  </a:lnTo>
+                  <a:lnTo>
+                    <a:pt x="2501800" y="2597295"/>
+                  </a:lnTo>
+                  <a:lnTo>
+                    <a:pt x="2573423" y="2631355"/>
+                  </a:lnTo>
+                  <a:lnTo>
+                    <a:pt x="2645045" y="2658163"/>
+                  </a:lnTo>
+                  <a:lnTo>
+                    <a:pt x="2716668" y="2670797"/>
+                  </a:lnTo>
+                  <a:lnTo>
+                    <a:pt x="2788290" y="2683237"/>
+                  </a:lnTo>
+                  <a:lnTo>
+                    <a:pt x="2859913" y="2695486"/>
+                  </a:lnTo>
+                  <a:lnTo>
+                    <a:pt x="2931535" y="2707549"/>
+                  </a:lnTo>
+                  <a:lnTo>
+                    <a:pt x="3003158" y="2719426"/>
+                  </a:lnTo>
+                  <a:lnTo>
+                    <a:pt x="3074780" y="2731122"/>
+                  </a:lnTo>
+                  <a:lnTo>
+                    <a:pt x="3146403" y="2742639"/>
+                  </a:lnTo>
+                  <a:lnTo>
+                    <a:pt x="3218025" y="2753980"/>
+                  </a:lnTo>
+                  <a:lnTo>
+                    <a:pt x="3289648" y="2765147"/>
+                  </a:lnTo>
+                  <a:lnTo>
+                    <a:pt x="3361270" y="2776143"/>
+                  </a:lnTo>
+                  <a:lnTo>
+                    <a:pt x="3432893" y="2786971"/>
+                  </a:lnTo>
+                  <a:lnTo>
+                    <a:pt x="3504515" y="2797634"/>
+                  </a:lnTo>
+                  <a:lnTo>
+                    <a:pt x="3576138" y="2808133"/>
+                  </a:lnTo>
+                  <a:lnTo>
+                    <a:pt x="3647760" y="2818471"/>
+                  </a:lnTo>
+                  <a:lnTo>
+                    <a:pt x="3719383" y="2828651"/>
+                  </a:lnTo>
+                  <a:lnTo>
+                    <a:pt x="3791006" y="2838676"/>
+                  </a:lnTo>
+                  <a:lnTo>
+                    <a:pt x="3862628" y="2848547"/>
+                  </a:lnTo>
+                  <a:lnTo>
+                    <a:pt x="3934251" y="2858267"/>
+                  </a:lnTo>
+                  <a:lnTo>
+                    <a:pt x="4005873" y="2867838"/>
+                  </a:lnTo>
+                  <a:lnTo>
+                    <a:pt x="4077496" y="2877263"/>
+                  </a:lnTo>
+                  <a:lnTo>
+                    <a:pt x="4149118" y="2886544"/>
+                  </a:lnTo>
+                  <a:lnTo>
+                    <a:pt x="4220741" y="2895683"/>
+                  </a:lnTo>
+                  <a:lnTo>
+                    <a:pt x="4292363" y="2904681"/>
+                  </a:lnTo>
+                  <a:lnTo>
+                    <a:pt x="4363986" y="2913542"/>
+                  </a:lnTo>
+                  <a:lnTo>
+                    <a:pt x="4435608" y="2922268"/>
+                  </a:lnTo>
+                  <a:lnTo>
+                    <a:pt x="4507231" y="2930860"/>
+                  </a:lnTo>
+                  <a:lnTo>
+                    <a:pt x="4578853" y="2939320"/>
+                  </a:lnTo>
+                  <a:lnTo>
+                    <a:pt x="4650476" y="2947651"/>
+                  </a:lnTo>
+                  <a:lnTo>
+                    <a:pt x="4722098" y="2955855"/>
+                  </a:lnTo>
+                  <a:lnTo>
+                    <a:pt x="4793721" y="2963933"/>
+                  </a:lnTo>
+                  <a:lnTo>
+                    <a:pt x="4865343" y="2971887"/>
+                  </a:lnTo>
+                  <a:lnTo>
+                    <a:pt x="4936966" y="2979720"/>
+                  </a:lnTo>
+                  <a:lnTo>
+                    <a:pt x="5008588" y="2987433"/>
+                  </a:lnTo>
+                  <a:lnTo>
+                    <a:pt x="5080211" y="2995027"/>
+                  </a:lnTo>
+                  <a:lnTo>
+                    <a:pt x="5151834" y="3002506"/>
+                  </a:lnTo>
+                  <a:lnTo>
+                    <a:pt x="5223456" y="3009870"/>
+                  </a:lnTo>
+                  <a:lnTo>
+                    <a:pt x="5295079" y="3017122"/>
+                  </a:lnTo>
+                  <a:lnTo>
+                    <a:pt x="5366701" y="3024262"/>
+                  </a:lnTo>
+                  <a:lnTo>
+                    <a:pt x="5438324" y="3031293"/>
+                  </a:lnTo>
+                  <a:lnTo>
+                    <a:pt x="5509946" y="3038217"/>
+                  </a:lnTo>
+                  <a:lnTo>
+                    <a:pt x="5581569" y="3045035"/>
+                  </a:lnTo>
+                  <a:lnTo>
+                    <a:pt x="5653191" y="3051748"/>
+                  </a:lnTo>
+                  <a:lnTo>
+                    <a:pt x="5724814" y="3058358"/>
+                  </a:lnTo>
+                  <a:lnTo>
+                    <a:pt x="5796436" y="3064868"/>
+                  </a:lnTo>
+                  <a:lnTo>
+                    <a:pt x="5868059" y="3071278"/>
+                  </a:lnTo>
+                  <a:lnTo>
+                    <a:pt x="5939681" y="3077589"/>
+                  </a:lnTo>
+                  <a:lnTo>
+                    <a:pt x="6011304" y="3083805"/>
+                  </a:lnTo>
+                  <a:lnTo>
+                    <a:pt x="6082926" y="3089925"/>
+                  </a:lnTo>
+                  <a:lnTo>
+                    <a:pt x="6154549" y="3095951"/>
+                  </a:lnTo>
+                  <a:lnTo>
+                    <a:pt x="6226171" y="3101885"/>
+                  </a:lnTo>
+                  <a:lnTo>
+                    <a:pt x="6297794" y="3107729"/>
+                  </a:lnTo>
+                </a:path>
+              </a:pathLst>
+            </a:custGeom>
+          </p:spPr>
+          <p:txBody>
+            <a:bodyPr/>
+            <a:lstStyle/>
+            <a:p/>
+          </p:txBody>
+        </p:sp>
+        <p:sp>
+          <p:nvSpPr>
             <p:cNvPr id="22" name="pl22"/>
             <p:cNvSpPr/>
             <p:nvPr/>
           </p:nvSpPr>
           <p:spPr>
             <a:xfrm>
-              <a:off x="1567602" y="2073503"/>
-              <a:ext cx="6485745" cy="3107729"/>
+              <a:off x="1172049" y="3826548"/>
+              <a:ext cx="7090630" cy="1619575"/>
             </a:xfrm>
             <a:custGeom>
               <a:avLst/>
               <a:pathLst>
-                <a:path w="6485745" h="3107729">
+                <a:path w="7090630" h="1619575">
                   <a:moveTo>
+                    <a:pt x="7090630" y="1619575"/>
+                  </a:moveTo>
+                  <a:lnTo>
+                    <a:pt x="7019007" y="1615135"/>
+                  </a:lnTo>
+                  <a:lnTo>
+                    <a:pt x="6947385" y="1610517"/>
+                  </a:lnTo>
+                  <a:lnTo>
+                    <a:pt x="6875762" y="1605714"/>
+                  </a:lnTo>
+                  <a:lnTo>
+                    <a:pt x="6804139" y="1600720"/>
+                  </a:lnTo>
+                  <a:lnTo>
+                    <a:pt x="6732517" y="1595526"/>
+                  </a:lnTo>
+                  <a:lnTo>
+                    <a:pt x="6660894" y="1590125"/>
+                  </a:lnTo>
+                  <a:lnTo>
+                    <a:pt x="6589272" y="1584508"/>
+                  </a:lnTo>
+                  <a:lnTo>
+                    <a:pt x="6517649" y="1578666"/>
+                  </a:lnTo>
+                  <a:lnTo>
+                    <a:pt x="6446027" y="1572591"/>
+                  </a:lnTo>
+                  <a:lnTo>
+                    <a:pt x="6374404" y="1566274"/>
+                  </a:lnTo>
+                  <a:lnTo>
+                    <a:pt x="6302782" y="1559704"/>
+                  </a:lnTo>
+                  <a:lnTo>
+                    <a:pt x="6231159" y="1552871"/>
+                  </a:lnTo>
+                  <a:lnTo>
+                    <a:pt x="6159537" y="1545765"/>
+                  </a:lnTo>
+                  <a:lnTo>
+                    <a:pt x="6087914" y="1538375"/>
+                  </a:lnTo>
+                  <a:lnTo>
+                    <a:pt x="6016292" y="1530690"/>
+                  </a:lnTo>
+                  <a:lnTo>
+                    <a:pt x="5944669" y="1522698"/>
+                  </a:lnTo>
+                  <a:lnTo>
+                    <a:pt x="5873047" y="1514387"/>
+                  </a:lnTo>
+                  <a:lnTo>
+                    <a:pt x="5801424" y="1505743"/>
+                  </a:lnTo>
+                  <a:lnTo>
+                    <a:pt x="5729802" y="1496755"/>
+                  </a:lnTo>
+                  <a:lnTo>
+                    <a:pt x="5658179" y="1487407"/>
+                  </a:lnTo>
+                  <a:lnTo>
+                    <a:pt x="5586557" y="1477685"/>
+                  </a:lnTo>
+                  <a:lnTo>
+                    <a:pt x="5514934" y="1467575"/>
+                  </a:lnTo>
+                  <a:lnTo>
+                    <a:pt x="5443311" y="1457061"/>
+                  </a:lnTo>
+                  <a:lnTo>
+                    <a:pt x="5371689" y="1446127"/>
+                  </a:lnTo>
+                  <a:lnTo>
+                    <a:pt x="5300066" y="1434756"/>
+                  </a:lnTo>
+                  <a:lnTo>
+                    <a:pt x="5228444" y="1422930"/>
+                  </a:lnTo>
+                  <a:lnTo>
+                    <a:pt x="5156821" y="1410632"/>
+                  </a:lnTo>
+                  <a:lnTo>
+                    <a:pt x="5085199" y="1397843"/>
+                  </a:lnTo>
+                  <a:lnTo>
+                    <a:pt x="5013576" y="1384543"/>
+                  </a:lnTo>
+                  <a:lnTo>
+                    <a:pt x="4941954" y="1370711"/>
+                  </a:lnTo>
+                  <a:lnTo>
+                    <a:pt x="4870331" y="1356326"/>
+                  </a:lnTo>
+                  <a:lnTo>
+                    <a:pt x="4798709" y="1341367"/>
+                  </a:lnTo>
+                  <a:lnTo>
+                    <a:pt x="4727086" y="1325810"/>
+                  </a:lnTo>
+                  <a:lnTo>
+                    <a:pt x="4655464" y="1309631"/>
+                  </a:lnTo>
+                  <a:lnTo>
+                    <a:pt x="4583841" y="1292806"/>
+                  </a:lnTo>
+                  <a:lnTo>
+                    <a:pt x="4512219" y="1275309"/>
+                  </a:lnTo>
+                  <a:lnTo>
+                    <a:pt x="4440596" y="1257112"/>
+                  </a:lnTo>
+                  <a:lnTo>
+                    <a:pt x="4368974" y="1238188"/>
+                  </a:lnTo>
+                  <a:lnTo>
+                    <a:pt x="4297351" y="1218509"/>
+                  </a:lnTo>
+                  <a:lnTo>
+                    <a:pt x="4225729" y="1198042"/>
+                  </a:lnTo>
+                  <a:lnTo>
+                    <a:pt x="4154106" y="1176758"/>
+                  </a:lnTo>
+                  <a:lnTo>
+                    <a:pt x="4082483" y="1154624"/>
+                  </a:lnTo>
+                  <a:lnTo>
+                    <a:pt x="4010861" y="1131605"/>
+                  </a:lnTo>
+                  <a:lnTo>
+                    <a:pt x="3939238" y="1107666"/>
+                  </a:lnTo>
+                  <a:lnTo>
+                    <a:pt x="3867616" y="1082771"/>
+                  </a:lnTo>
+                  <a:lnTo>
+                    <a:pt x="3795993" y="1056881"/>
+                  </a:lnTo>
+                  <a:lnTo>
+                    <a:pt x="3724371" y="1029956"/>
+                  </a:lnTo>
+                  <a:lnTo>
+                    <a:pt x="3652748" y="1001956"/>
+                  </a:lnTo>
+                  <a:lnTo>
+                    <a:pt x="3581126" y="972836"/>
+                  </a:lnTo>
+                  <a:lnTo>
+                    <a:pt x="3509503" y="942553"/>
+                  </a:lnTo>
+                  <a:lnTo>
+                    <a:pt x="3437881" y="911061"/>
+                  </a:lnTo>
+                  <a:lnTo>
+                    <a:pt x="3366258" y="892288"/>
+                  </a:lnTo>
+                  <a:lnTo>
+                    <a:pt x="3294636" y="879258"/>
+                  </a:lnTo>
+                  <a:lnTo>
+                    <a:pt x="3223013" y="866027"/>
+                  </a:lnTo>
+                  <a:lnTo>
+                    <a:pt x="3151391" y="852590"/>
+                  </a:lnTo>
+                  <a:lnTo>
+                    <a:pt x="3079768" y="838944"/>
+                  </a:lnTo>
+                  <a:lnTo>
+                    <a:pt x="3008146" y="825086"/>
+                  </a:lnTo>
+                  <a:lnTo>
+                    <a:pt x="2936523" y="811012"/>
+                  </a:lnTo>
+                  <a:lnTo>
+                    <a:pt x="2864901" y="796720"/>
+                  </a:lnTo>
+                  <a:lnTo>
+                    <a:pt x="2793278" y="782206"/>
+                  </a:lnTo>
+                  <a:lnTo>
+                    <a:pt x="2721655" y="767466"/>
+                  </a:lnTo>
+                  <a:lnTo>
+                    <a:pt x="2650033" y="752497"/>
+                  </a:lnTo>
+                  <a:lnTo>
+                    <a:pt x="2578410" y="737296"/>
+                  </a:lnTo>
+                  <a:lnTo>
+                    <a:pt x="2506788" y="721858"/>
+                  </a:lnTo>
+                  <a:lnTo>
+                    <a:pt x="2435165" y="706181"/>
+                  </a:lnTo>
+                  <a:lnTo>
+                    <a:pt x="2363543" y="690259"/>
+                  </a:lnTo>
+                  <a:lnTo>
+                    <a:pt x="2291920" y="674091"/>
+                  </a:lnTo>
+                  <a:lnTo>
+                    <a:pt x="2220298" y="657671"/>
+                  </a:lnTo>
+                  <a:lnTo>
+                    <a:pt x="2148675" y="640996"/>
+                  </a:lnTo>
+                  <a:lnTo>
+                    <a:pt x="2077053" y="624062"/>
+                  </a:lnTo>
+                  <a:lnTo>
+                    <a:pt x="2005430" y="606864"/>
+                  </a:lnTo>
+                  <a:lnTo>
+                    <a:pt x="1933808" y="589400"/>
+                  </a:lnTo>
+                  <a:lnTo>
+                    <a:pt x="1862185" y="571664"/>
+                  </a:lnTo>
+                  <a:lnTo>
+                    <a:pt x="1790563" y="553652"/>
+                  </a:lnTo>
+                  <a:lnTo>
+                    <a:pt x="1718940" y="535360"/>
+                  </a:lnTo>
+                  <a:lnTo>
+                    <a:pt x="1647318" y="516785"/>
+                  </a:lnTo>
+                  <a:lnTo>
+                    <a:pt x="1575695" y="497920"/>
+                  </a:lnTo>
+                  <a:lnTo>
+                    <a:pt x="1504073" y="478763"/>
+                  </a:lnTo>
+                  <a:lnTo>
+                    <a:pt x="1432450" y="459307"/>
+                  </a:lnTo>
+                  <a:lnTo>
+                    <a:pt x="1360827" y="439550"/>
+                  </a:lnTo>
+                  <a:lnTo>
+                    <a:pt x="1289205" y="419485"/>
+                  </a:lnTo>
+                  <a:lnTo>
+                    <a:pt x="1217582" y="399108"/>
+                  </a:lnTo>
+                  <a:lnTo>
+                    <a:pt x="1145960" y="378415"/>
+                  </a:lnTo>
+                  <a:lnTo>
+                    <a:pt x="1074337" y="357400"/>
+                  </a:lnTo>
+                  <a:lnTo>
+                    <a:pt x="1002715" y="336059"/>
+                  </a:lnTo>
+                  <a:lnTo>
+                    <a:pt x="931092" y="314386"/>
+                  </a:lnTo>
+                  <a:lnTo>
+                    <a:pt x="859470" y="292376"/>
+                  </a:lnTo>
+                  <a:lnTo>
+                    <a:pt x="787847" y="270025"/>
+                  </a:lnTo>
+                  <a:lnTo>
+                    <a:pt x="716225" y="247325"/>
+                  </a:lnTo>
+                  <a:lnTo>
+                    <a:pt x="644602" y="224274"/>
+                  </a:lnTo>
+                  <a:lnTo>
+                    <a:pt x="572980" y="200863"/>
+                  </a:lnTo>
+                  <a:lnTo>
+                    <a:pt x="501357" y="177089"/>
+                  </a:lnTo>
+                  <a:lnTo>
+                    <a:pt x="429735" y="152946"/>
+                  </a:lnTo>
+                  <a:lnTo>
+                    <a:pt x="358112" y="128428"/>
+                  </a:lnTo>
+                  <a:lnTo>
+                    <a:pt x="286490" y="103528"/>
+                  </a:lnTo>
+                  <a:lnTo>
+                    <a:pt x="214867" y="78241"/>
+                  </a:lnTo>
+                  <a:lnTo>
+                    <a:pt x="143245" y="52562"/>
+                  </a:lnTo>
+                  <a:lnTo>
+                    <a:pt x="71622" y="26483"/>
+                  </a:lnTo>
+                  <a:lnTo>
                     <a:pt x="0" y="0"/>
-                  </a:moveTo>
-                  <a:lnTo>
-                    <a:pt x="68623" y="124867"/>
-                  </a:lnTo>
-                  <a:lnTo>
-                    <a:pt x="142383" y="253925"/>
-                  </a:lnTo>
-                  <a:lnTo>
-                    <a:pt x="216143" y="378024"/>
-                  </a:lnTo>
-                  <a:lnTo>
-                    <a:pt x="289903" y="497355"/>
-                  </a:lnTo>
-                  <a:lnTo>
-                    <a:pt x="363663" y="612100"/>
-                  </a:lnTo>
-                  <a:lnTo>
-                    <a:pt x="437423" y="722437"/>
-                  </a:lnTo>
-                  <a:lnTo>
-                    <a:pt x="511183" y="828535"/>
-                  </a:lnTo>
-                  <a:lnTo>
-                    <a:pt x="584943" y="930555"/>
-                  </a:lnTo>
-                  <a:lnTo>
-                    <a:pt x="658703" y="1028656"/>
-                  </a:lnTo>
-                  <a:lnTo>
-                    <a:pt x="732463" y="1122988"/>
-                  </a:lnTo>
-                  <a:lnTo>
-                    <a:pt x="806223" y="1213695"/>
-                  </a:lnTo>
-                  <a:lnTo>
-                    <a:pt x="879983" y="1300917"/>
-                  </a:lnTo>
-                  <a:lnTo>
-                    <a:pt x="953743" y="1384787"/>
-                  </a:lnTo>
-                  <a:lnTo>
-                    <a:pt x="1027503" y="1465435"/>
-                  </a:lnTo>
-                  <a:lnTo>
-                    <a:pt x="1101263" y="1542985"/>
-                  </a:lnTo>
-                  <a:lnTo>
-                    <a:pt x="1175023" y="1617554"/>
-                  </a:lnTo>
-                  <a:lnTo>
-                    <a:pt x="1248783" y="1689259"/>
-                  </a:lnTo>
-                  <a:lnTo>
-                    <a:pt x="1322543" y="1758208"/>
-                  </a:lnTo>
-                  <a:lnTo>
-                    <a:pt x="1396303" y="1824508"/>
-                  </a:lnTo>
-                  <a:lnTo>
-                    <a:pt x="1470063" y="1888261"/>
-                  </a:lnTo>
-                  <a:lnTo>
-                    <a:pt x="1543823" y="1949564"/>
-                  </a:lnTo>
-                  <a:lnTo>
-                    <a:pt x="1617583" y="2008512"/>
-                  </a:lnTo>
-                  <a:lnTo>
-                    <a:pt x="1691343" y="2065194"/>
-                  </a:lnTo>
-                  <a:lnTo>
-                    <a:pt x="1765103" y="2119699"/>
-                  </a:lnTo>
-                  <a:lnTo>
-                    <a:pt x="1838863" y="2172110"/>
-                  </a:lnTo>
-                  <a:lnTo>
-                    <a:pt x="1912623" y="2222507"/>
-                  </a:lnTo>
-                  <a:lnTo>
-                    <a:pt x="1986383" y="2270967"/>
-                  </a:lnTo>
-                  <a:lnTo>
-                    <a:pt x="2060143" y="2317565"/>
-                  </a:lnTo>
-                  <a:lnTo>
-                    <a:pt x="2133903" y="2362373"/>
-                  </a:lnTo>
-                  <a:lnTo>
-                    <a:pt x="2207664" y="2405460"/>
-                  </a:lnTo>
-                  <a:lnTo>
-                    <a:pt x="2281424" y="2446891"/>
-                  </a:lnTo>
-                  <a:lnTo>
-                    <a:pt x="2355184" y="2486730"/>
-                  </a:lnTo>
-                  <a:lnTo>
-                    <a:pt x="2428944" y="2525038"/>
-                  </a:lnTo>
-                  <a:lnTo>
-                    <a:pt x="2502704" y="2561874"/>
-                  </a:lnTo>
-                  <a:lnTo>
-                    <a:pt x="2576464" y="2597295"/>
-                  </a:lnTo>
-                  <a:lnTo>
-                    <a:pt x="2650224" y="2631355"/>
-                  </a:lnTo>
-                  <a:lnTo>
-                    <a:pt x="2723984" y="2658163"/>
-                  </a:lnTo>
-                  <a:lnTo>
-                    <a:pt x="2797744" y="2670797"/>
-                  </a:lnTo>
-                  <a:lnTo>
-                    <a:pt x="2871504" y="2683237"/>
-                  </a:lnTo>
-                  <a:lnTo>
-                    <a:pt x="2945264" y="2695486"/>
-                  </a:lnTo>
-                  <a:lnTo>
-                    <a:pt x="3019024" y="2707549"/>
-                  </a:lnTo>
-                  <a:lnTo>
-                    <a:pt x="3092784" y="2719426"/>
-                  </a:lnTo>
-                  <a:lnTo>
-                    <a:pt x="3166544" y="2731122"/>
-                  </a:lnTo>
-                  <a:lnTo>
-                    <a:pt x="3240304" y="2742639"/>
-                  </a:lnTo>
-                  <a:lnTo>
-                    <a:pt x="3314064" y="2753980"/>
-                  </a:lnTo>
-                  <a:lnTo>
-                    <a:pt x="3387824" y="2765147"/>
-                  </a:lnTo>
-                  <a:lnTo>
-                    <a:pt x="3461584" y="2776143"/>
-                  </a:lnTo>
-                  <a:lnTo>
-                    <a:pt x="3535344" y="2786971"/>
-                  </a:lnTo>
-                  <a:lnTo>
-                    <a:pt x="3609104" y="2797634"/>
-                  </a:lnTo>
-                  <a:lnTo>
-                    <a:pt x="3682864" y="2808133"/>
-                  </a:lnTo>
-                  <a:lnTo>
-                    <a:pt x="3756624" y="2818471"/>
-                  </a:lnTo>
-                  <a:lnTo>
-                    <a:pt x="3830384" y="2828651"/>
-                  </a:lnTo>
-                  <a:lnTo>
-                    <a:pt x="3904144" y="2838676"/>
-                  </a:lnTo>
-                  <a:lnTo>
-                    <a:pt x="3977904" y="2848547"/>
-                  </a:lnTo>
-                  <a:lnTo>
-                    <a:pt x="4051664" y="2858267"/>
-                  </a:lnTo>
-                  <a:lnTo>
-                    <a:pt x="4125424" y="2867838"/>
-                  </a:lnTo>
-                  <a:lnTo>
-                    <a:pt x="4199184" y="2877263"/>
-                  </a:lnTo>
-                  <a:lnTo>
-                    <a:pt x="4272944" y="2886544"/>
-                  </a:lnTo>
-                  <a:lnTo>
-                    <a:pt x="4346704" y="2895683"/>
-                  </a:lnTo>
-                  <a:lnTo>
-                    <a:pt x="4420464" y="2904681"/>
-                  </a:lnTo>
-                  <a:lnTo>
-                    <a:pt x="4494224" y="2913542"/>
-                  </a:lnTo>
-                  <a:lnTo>
-                    <a:pt x="4567984" y="2922268"/>
-                  </a:lnTo>
-                  <a:lnTo>
-                    <a:pt x="4641744" y="2930860"/>
-                  </a:lnTo>
-                  <a:lnTo>
-                    <a:pt x="4715504" y="2939320"/>
-                  </a:lnTo>
-                  <a:lnTo>
-                    <a:pt x="4789264" y="2947651"/>
-                  </a:lnTo>
-                  <a:lnTo>
-                    <a:pt x="4863024" y="2955855"/>
-                  </a:lnTo>
-                  <a:lnTo>
-                    <a:pt x="4936784" y="2963933"/>
-                  </a:lnTo>
-                  <a:lnTo>
-                    <a:pt x="5010544" y="2971887"/>
-                  </a:lnTo>
-                  <a:lnTo>
-                    <a:pt x="5084305" y="2979720"/>
-                  </a:lnTo>
-                  <a:lnTo>
-                    <a:pt x="5158065" y="2987433"/>
-                  </a:lnTo>
-                  <a:lnTo>
-                    <a:pt x="5231825" y="2995027"/>
-                  </a:lnTo>
-                  <a:lnTo>
-                    <a:pt x="5305585" y="3002506"/>
-                  </a:lnTo>
-                  <a:lnTo>
-                    <a:pt x="5379345" y="3009870"/>
-                  </a:lnTo>
-                  <a:lnTo>
-                    <a:pt x="5453105" y="3017122"/>
-                  </a:lnTo>
-                  <a:lnTo>
-                    <a:pt x="5526865" y="3024262"/>
-                  </a:lnTo>
-                  <a:lnTo>
-                    <a:pt x="5600625" y="3031293"/>
-                  </a:lnTo>
-                  <a:lnTo>
-                    <a:pt x="5674385" y="3038217"/>
-                  </a:lnTo>
-                  <a:lnTo>
-                    <a:pt x="5748145" y="3045035"/>
-                  </a:lnTo>
-                  <a:lnTo>
-                    <a:pt x="5821905" y="3051748"/>
-                  </a:lnTo>
-                  <a:lnTo>
-                    <a:pt x="5895665" y="3058358"/>
-                  </a:lnTo>
-                  <a:lnTo>
-                    <a:pt x="5969425" y="3064868"/>
-                  </a:lnTo>
-                  <a:lnTo>
-                    <a:pt x="6043185" y="3071278"/>
-                  </a:lnTo>
-                  <a:lnTo>
-                    <a:pt x="6116945" y="3077589"/>
-                  </a:lnTo>
-                  <a:lnTo>
-                    <a:pt x="6190705" y="3083805"/>
-                  </a:lnTo>
-                  <a:lnTo>
-                    <a:pt x="6264465" y="3089925"/>
-                  </a:lnTo>
-                  <a:lnTo>
-                    <a:pt x="6338225" y="3095951"/>
-                  </a:lnTo>
-                  <a:lnTo>
-                    <a:pt x="6411985" y="3101885"/>
-                  </a:lnTo>
-                  <a:lnTo>
-                    <a:pt x="6485745" y="3107729"/>
                   </a:lnTo>
                 </a:path>
               </a:pathLst>
@@ -3892,637 +4174,312 @@
           </p:nvSpPr>
           <p:spPr>
             <a:xfrm>
-              <a:off x="817517" y="3850394"/>
-              <a:ext cx="7235830" cy="1595729"/>
+              <a:off x="1172049" y="2507224"/>
+              <a:ext cx="7090630" cy="2845610"/>
             </a:xfrm>
             <a:custGeom>
               <a:avLst/>
               <a:pathLst>
-                <a:path w="7235830" h="1595729">
-                  <a:moveTo>
-                    <a:pt x="7235830" y="1595729"/>
-                  </a:moveTo>
-                  <a:lnTo>
-                    <a:pt x="7162070" y="1591289"/>
-                  </a:lnTo>
-                  <a:lnTo>
-                    <a:pt x="7088310" y="1586671"/>
-                  </a:lnTo>
-                  <a:lnTo>
-                    <a:pt x="7014550" y="1581869"/>
-                  </a:lnTo>
-                  <a:lnTo>
-                    <a:pt x="6940789" y="1576875"/>
-                  </a:lnTo>
-                  <a:lnTo>
-                    <a:pt x="6867029" y="1571681"/>
-                  </a:lnTo>
-                  <a:lnTo>
-                    <a:pt x="6793269" y="1566280"/>
-                  </a:lnTo>
-                  <a:lnTo>
-                    <a:pt x="6719509" y="1560662"/>
-                  </a:lnTo>
-                  <a:lnTo>
-                    <a:pt x="6645749" y="1554821"/>
-                  </a:lnTo>
-                  <a:lnTo>
-                    <a:pt x="6571989" y="1548746"/>
-                  </a:lnTo>
-                  <a:lnTo>
-                    <a:pt x="6498229" y="1542428"/>
-                  </a:lnTo>
-                  <a:lnTo>
-                    <a:pt x="6424469" y="1535858"/>
-                  </a:lnTo>
-                  <a:lnTo>
-                    <a:pt x="6350709" y="1529025"/>
-                  </a:lnTo>
-                  <a:lnTo>
-                    <a:pt x="6276949" y="1521919"/>
-                  </a:lnTo>
-                  <a:lnTo>
-                    <a:pt x="6203189" y="1514530"/>
-                  </a:lnTo>
-                  <a:lnTo>
-                    <a:pt x="6129429" y="1506845"/>
-                  </a:lnTo>
-                  <a:lnTo>
-                    <a:pt x="6055669" y="1498853"/>
-                  </a:lnTo>
-                  <a:lnTo>
-                    <a:pt x="5981909" y="1490541"/>
-                  </a:lnTo>
-                  <a:lnTo>
-                    <a:pt x="5908149" y="1481898"/>
-                  </a:lnTo>
-                  <a:lnTo>
-                    <a:pt x="5834389" y="1472909"/>
-                  </a:lnTo>
-                  <a:lnTo>
-                    <a:pt x="5760629" y="1463561"/>
-                  </a:lnTo>
-                  <a:lnTo>
-                    <a:pt x="5686869" y="1453839"/>
-                  </a:lnTo>
-                  <a:lnTo>
-                    <a:pt x="5613109" y="1443729"/>
-                  </a:lnTo>
-                  <a:lnTo>
-                    <a:pt x="5539349" y="1433215"/>
-                  </a:lnTo>
-                  <a:lnTo>
-                    <a:pt x="5465589" y="1422281"/>
-                  </a:lnTo>
-                  <a:lnTo>
-                    <a:pt x="5391829" y="1410910"/>
-                  </a:lnTo>
-                  <a:lnTo>
-                    <a:pt x="5318069" y="1399085"/>
-                  </a:lnTo>
-                  <a:lnTo>
-                    <a:pt x="5244309" y="1386787"/>
-                  </a:lnTo>
-                  <a:lnTo>
-                    <a:pt x="5170549" y="1373997"/>
-                  </a:lnTo>
-                  <a:lnTo>
-                    <a:pt x="5096789" y="1360697"/>
-                  </a:lnTo>
-                  <a:lnTo>
-                    <a:pt x="5023029" y="1346865"/>
-                  </a:lnTo>
-                  <a:lnTo>
-                    <a:pt x="4949269" y="1332481"/>
-                  </a:lnTo>
-                  <a:lnTo>
-                    <a:pt x="4875509" y="1317521"/>
-                  </a:lnTo>
-                  <a:lnTo>
-                    <a:pt x="4801749" y="1301964"/>
-                  </a:lnTo>
-                  <a:lnTo>
-                    <a:pt x="4727989" y="1285786"/>
-                  </a:lnTo>
-                  <a:lnTo>
-                    <a:pt x="4654229" y="1268961"/>
-                  </a:lnTo>
-                  <a:lnTo>
-                    <a:pt x="4580469" y="1251463"/>
-                  </a:lnTo>
-                  <a:lnTo>
-                    <a:pt x="4506709" y="1233267"/>
-                  </a:lnTo>
-                  <a:lnTo>
-                    <a:pt x="4432949" y="1214343"/>
-                  </a:lnTo>
-                  <a:lnTo>
-                    <a:pt x="4359189" y="1194663"/>
-                  </a:lnTo>
-                  <a:lnTo>
-                    <a:pt x="4285429" y="1174197"/>
-                  </a:lnTo>
-                  <a:lnTo>
-                    <a:pt x="4211669" y="1152913"/>
-                  </a:lnTo>
-                  <a:lnTo>
-                    <a:pt x="4137909" y="1130778"/>
-                  </a:lnTo>
-                  <a:lnTo>
-                    <a:pt x="4064149" y="1107759"/>
-                  </a:lnTo>
-                  <a:lnTo>
-                    <a:pt x="3990388" y="1083820"/>
-                  </a:lnTo>
-                  <a:lnTo>
-                    <a:pt x="3916628" y="1058925"/>
-                  </a:lnTo>
-                  <a:lnTo>
-                    <a:pt x="3842868" y="1033035"/>
-                  </a:lnTo>
-                  <a:lnTo>
-                    <a:pt x="3769108" y="1006110"/>
-                  </a:lnTo>
-                  <a:lnTo>
-                    <a:pt x="3695348" y="978110"/>
-                  </a:lnTo>
-                  <a:lnTo>
-                    <a:pt x="3621588" y="948991"/>
-                  </a:lnTo>
-                  <a:lnTo>
-                    <a:pt x="3547828" y="918708"/>
-                  </a:lnTo>
-                  <a:lnTo>
-                    <a:pt x="3474068" y="887215"/>
-                  </a:lnTo>
-                  <a:lnTo>
-                    <a:pt x="3400308" y="868442"/>
-                  </a:lnTo>
-                  <a:lnTo>
-                    <a:pt x="3326548" y="855413"/>
-                  </a:lnTo>
-                  <a:lnTo>
-                    <a:pt x="3252788" y="842181"/>
-                  </a:lnTo>
-                  <a:lnTo>
-                    <a:pt x="3179028" y="828744"/>
-                  </a:lnTo>
-                  <a:lnTo>
-                    <a:pt x="3105268" y="815098"/>
-                  </a:lnTo>
-                  <a:lnTo>
-                    <a:pt x="3031508" y="801240"/>
-                  </a:lnTo>
-                  <a:lnTo>
-                    <a:pt x="2957748" y="787167"/>
-                  </a:lnTo>
-                  <a:lnTo>
-                    <a:pt x="2883988" y="772875"/>
-                  </a:lnTo>
-                  <a:lnTo>
-                    <a:pt x="2810228" y="758360"/>
-                  </a:lnTo>
-                  <a:lnTo>
-                    <a:pt x="2736468" y="743621"/>
-                  </a:lnTo>
-                  <a:lnTo>
-                    <a:pt x="2662708" y="728652"/>
-                  </a:lnTo>
-                  <a:lnTo>
-                    <a:pt x="2588948" y="713450"/>
-                  </a:lnTo>
-                  <a:lnTo>
-                    <a:pt x="2515188" y="698013"/>
-                  </a:lnTo>
-                  <a:lnTo>
-                    <a:pt x="2441428" y="682335"/>
-                  </a:lnTo>
-                  <a:lnTo>
-                    <a:pt x="2367668" y="666414"/>
-                  </a:lnTo>
-                  <a:lnTo>
-                    <a:pt x="2293908" y="650245"/>
-                  </a:lnTo>
-                  <a:lnTo>
-                    <a:pt x="2220148" y="633825"/>
-                  </a:lnTo>
-                  <a:lnTo>
-                    <a:pt x="2146388" y="617150"/>
-                  </a:lnTo>
-                  <a:lnTo>
-                    <a:pt x="2072628" y="600216"/>
-                  </a:lnTo>
-                  <a:lnTo>
-                    <a:pt x="1998868" y="583019"/>
-                  </a:lnTo>
-                  <a:lnTo>
-                    <a:pt x="1925108" y="565554"/>
-                  </a:lnTo>
-                  <a:lnTo>
-                    <a:pt x="1851348" y="547818"/>
-                  </a:lnTo>
-                  <a:lnTo>
-                    <a:pt x="1777588" y="529806"/>
-                  </a:lnTo>
-                  <a:lnTo>
-                    <a:pt x="1703828" y="511515"/>
-                  </a:lnTo>
-                  <a:lnTo>
-                    <a:pt x="1630068" y="492939"/>
-                  </a:lnTo>
-                  <a:lnTo>
-                    <a:pt x="1556308" y="474075"/>
-                  </a:lnTo>
-                  <a:lnTo>
-                    <a:pt x="1482548" y="454917"/>
-                  </a:lnTo>
-                  <a:lnTo>
-                    <a:pt x="1408788" y="435462"/>
-                  </a:lnTo>
-                  <a:lnTo>
-                    <a:pt x="1335028" y="415704"/>
-                  </a:lnTo>
-                  <a:lnTo>
-                    <a:pt x="1261268" y="395639"/>
-                  </a:lnTo>
-                  <a:lnTo>
-                    <a:pt x="1187508" y="375263"/>
-                  </a:lnTo>
-                  <a:lnTo>
-                    <a:pt x="1113747" y="354570"/>
-                  </a:lnTo>
-                  <a:lnTo>
-                    <a:pt x="1039987" y="333555"/>
-                  </a:lnTo>
-                  <a:lnTo>
-                    <a:pt x="966227" y="312214"/>
-                  </a:lnTo>
-                  <a:lnTo>
-                    <a:pt x="892467" y="290541"/>
-                  </a:lnTo>
-                  <a:lnTo>
-                    <a:pt x="818707" y="268531"/>
-                  </a:lnTo>
-                  <a:lnTo>
-                    <a:pt x="744947" y="246179"/>
-                  </a:lnTo>
-                  <a:lnTo>
-                    <a:pt x="671187" y="223480"/>
-                  </a:lnTo>
-                  <a:lnTo>
-                    <a:pt x="597427" y="200428"/>
-                  </a:lnTo>
-                  <a:lnTo>
-                    <a:pt x="523667" y="177018"/>
-                  </a:lnTo>
-                  <a:lnTo>
-                    <a:pt x="449907" y="153244"/>
-                  </a:lnTo>
-                  <a:lnTo>
-                    <a:pt x="376147" y="129100"/>
-                  </a:lnTo>
-                  <a:lnTo>
-                    <a:pt x="302387" y="104582"/>
-                  </a:lnTo>
-                  <a:lnTo>
-                    <a:pt x="228627" y="79682"/>
-                  </a:lnTo>
-                  <a:lnTo>
-                    <a:pt x="154867" y="54396"/>
-                  </a:lnTo>
-                  <a:lnTo>
-                    <a:pt x="81107" y="28716"/>
-                  </a:lnTo>
-                  <a:lnTo>
-                    <a:pt x="7347" y="2638"/>
-                  </a:lnTo>
-                  <a:lnTo>
-                    <a:pt x="0" y="0"/>
-                  </a:lnTo>
-                </a:path>
-              </a:pathLst>
-            </a:custGeom>
-          </p:spPr>
-          <p:txBody>
-            <a:bodyPr/>
-            <a:lstStyle/>
-            <a:p/>
-          </p:txBody>
-        </p:sp>
-        <p:sp>
-          <p:nvSpPr>
-            <p:cNvPr id="24" name="pl24"/>
-            <p:cNvSpPr/>
-            <p:nvPr/>
-          </p:nvSpPr>
-          <p:spPr>
-            <a:xfrm>
-              <a:off x="817517" y="2581183"/>
-              <a:ext cx="7235830" cy="2771652"/>
-            </a:xfrm>
-            <a:custGeom>
-              <a:avLst/>
-              <a:pathLst>
-                <a:path w="7235830" h="2771652">
+                <a:path w="7090630" h="2845610">
                   <a:moveTo>
                     <a:pt x="0" y="0"/>
                   </a:moveTo>
                   <a:lnTo>
-                    <a:pt x="7347" y="8182"/>
-                  </a:lnTo>
-                  <a:lnTo>
-                    <a:pt x="81107" y="88111"/>
-                  </a:lnTo>
-                  <a:lnTo>
-                    <a:pt x="154867" y="165887"/>
-                  </a:lnTo>
-                  <a:lnTo>
-                    <a:pt x="228627" y="241569"/>
-                  </a:lnTo>
-                  <a:lnTo>
-                    <a:pt x="302387" y="315212"/>
-                  </a:lnTo>
-                  <a:lnTo>
-                    <a:pt x="376147" y="386873"/>
-                  </a:lnTo>
-                  <a:lnTo>
-                    <a:pt x="449907" y="456603"/>
-                  </a:lnTo>
-                  <a:lnTo>
-                    <a:pt x="523667" y="524455"/>
-                  </a:lnTo>
-                  <a:lnTo>
-                    <a:pt x="597427" y="590480"/>
-                  </a:lnTo>
-                  <a:lnTo>
-                    <a:pt x="671187" y="654727"/>
-                  </a:lnTo>
-                  <a:lnTo>
-                    <a:pt x="744947" y="717244"/>
-                  </a:lnTo>
-                  <a:lnTo>
-                    <a:pt x="818707" y="778077"/>
-                  </a:lnTo>
-                  <a:lnTo>
-                    <a:pt x="892467" y="837271"/>
-                  </a:lnTo>
-                  <a:lnTo>
-                    <a:pt x="966227" y="894872"/>
-                  </a:lnTo>
-                  <a:lnTo>
-                    <a:pt x="1039987" y="950921"/>
-                  </a:lnTo>
-                  <a:lnTo>
-                    <a:pt x="1113747" y="1005461"/>
-                  </a:lnTo>
-                  <a:lnTo>
-                    <a:pt x="1187508" y="1058532"/>
-                  </a:lnTo>
-                  <a:lnTo>
-                    <a:pt x="1261268" y="1110173"/>
-                  </a:lnTo>
-                  <a:lnTo>
-                    <a:pt x="1335028" y="1160424"/>
-                  </a:lnTo>
-                  <a:lnTo>
-                    <a:pt x="1408788" y="1209322"/>
-                  </a:lnTo>
-                  <a:lnTo>
-                    <a:pt x="1482548" y="1256903"/>
-                  </a:lnTo>
-                  <a:lnTo>
-                    <a:pt x="1556308" y="1303202"/>
-                  </a:lnTo>
-                  <a:lnTo>
-                    <a:pt x="1630068" y="1348254"/>
-                  </a:lnTo>
-                  <a:lnTo>
-                    <a:pt x="1703828" y="1392093"/>
-                  </a:lnTo>
-                  <a:lnTo>
-                    <a:pt x="1777588" y="1434752"/>
-                  </a:lnTo>
-                  <a:lnTo>
-                    <a:pt x="1851348" y="1476261"/>
-                  </a:lnTo>
-                  <a:lnTo>
-                    <a:pt x="1925108" y="1516653"/>
-                  </a:lnTo>
-                  <a:lnTo>
-                    <a:pt x="1998868" y="1555957"/>
-                  </a:lnTo>
-                  <a:lnTo>
-                    <a:pt x="2072628" y="1594202"/>
-                  </a:lnTo>
-                  <a:lnTo>
-                    <a:pt x="2146388" y="1631418"/>
-                  </a:lnTo>
-                  <a:lnTo>
-                    <a:pt x="2220148" y="1667631"/>
-                  </a:lnTo>
-                  <a:lnTo>
-                    <a:pt x="2293908" y="1702868"/>
-                  </a:lnTo>
-                  <a:lnTo>
-                    <a:pt x="2367668" y="1737157"/>
-                  </a:lnTo>
-                  <a:lnTo>
-                    <a:pt x="2441428" y="1770523"/>
-                  </a:lnTo>
-                  <a:lnTo>
-                    <a:pt x="2515188" y="1802990"/>
-                  </a:lnTo>
-                  <a:lnTo>
-                    <a:pt x="2588948" y="1834582"/>
-                  </a:lnTo>
-                  <a:lnTo>
-                    <a:pt x="2662708" y="1865324"/>
-                  </a:lnTo>
-                  <a:lnTo>
-                    <a:pt x="2736468" y="1895237"/>
-                  </a:lnTo>
-                  <a:lnTo>
-                    <a:pt x="2810228" y="1924345"/>
-                  </a:lnTo>
-                  <a:lnTo>
-                    <a:pt x="2883988" y="1952670"/>
-                  </a:lnTo>
-                  <a:lnTo>
-                    <a:pt x="2957748" y="1980231"/>
-                  </a:lnTo>
-                  <a:lnTo>
-                    <a:pt x="3031508" y="2007050"/>
-                  </a:lnTo>
-                  <a:lnTo>
-                    <a:pt x="3105268" y="2033147"/>
-                  </a:lnTo>
-                  <a:lnTo>
-                    <a:pt x="3179028" y="2058541"/>
-                  </a:lnTo>
-                  <a:lnTo>
-                    <a:pt x="3252788" y="2083251"/>
-                  </a:lnTo>
-                  <a:lnTo>
-                    <a:pt x="3326548" y="2107296"/>
-                  </a:lnTo>
-                  <a:lnTo>
-                    <a:pt x="3400308" y="2130693"/>
-                  </a:lnTo>
-                  <a:lnTo>
-                    <a:pt x="3474068" y="2153460"/>
-                  </a:lnTo>
-                  <a:lnTo>
-                    <a:pt x="3547828" y="2175614"/>
-                  </a:lnTo>
-                  <a:lnTo>
-                    <a:pt x="3621588" y="2197171"/>
-                  </a:lnTo>
-                  <a:lnTo>
-                    <a:pt x="3695348" y="2218148"/>
-                  </a:lnTo>
-                  <a:lnTo>
-                    <a:pt x="3769108" y="2238559"/>
-                  </a:lnTo>
-                  <a:lnTo>
-                    <a:pt x="3842868" y="2258421"/>
-                  </a:lnTo>
-                  <a:lnTo>
-                    <a:pt x="3916628" y="2277748"/>
-                  </a:lnTo>
-                  <a:lnTo>
-                    <a:pt x="3990388" y="2296555"/>
-                  </a:lnTo>
-                  <a:lnTo>
-                    <a:pt x="4064149" y="2314855"/>
-                  </a:lnTo>
-                  <a:lnTo>
-                    <a:pt x="4137909" y="2332662"/>
-                  </a:lnTo>
-                  <a:lnTo>
-                    <a:pt x="4211669" y="2349990"/>
-                  </a:lnTo>
-                  <a:lnTo>
-                    <a:pt x="4285429" y="2366851"/>
-                  </a:lnTo>
-                  <a:lnTo>
-                    <a:pt x="4359189" y="2383258"/>
-                  </a:lnTo>
-                  <a:lnTo>
-                    <a:pt x="4432949" y="2399223"/>
-                  </a:lnTo>
-                  <a:lnTo>
-                    <a:pt x="4506709" y="2414758"/>
-                  </a:lnTo>
-                  <a:lnTo>
-                    <a:pt x="4580469" y="2429875"/>
-                  </a:lnTo>
-                  <a:lnTo>
-                    <a:pt x="4654229" y="2444585"/>
-                  </a:lnTo>
-                  <a:lnTo>
-                    <a:pt x="4727989" y="2458898"/>
-                  </a:lnTo>
-                  <a:lnTo>
-                    <a:pt x="4801749" y="2472826"/>
-                  </a:lnTo>
-                  <a:lnTo>
-                    <a:pt x="4875509" y="2486379"/>
-                  </a:lnTo>
-                  <a:lnTo>
-                    <a:pt x="4949269" y="2499567"/>
-                  </a:lnTo>
-                  <a:lnTo>
-                    <a:pt x="5023029" y="2512400"/>
-                  </a:lnTo>
-                  <a:lnTo>
-                    <a:pt x="5096789" y="2524887"/>
-                  </a:lnTo>
-                  <a:lnTo>
-                    <a:pt x="5170549" y="2537038"/>
-                  </a:lnTo>
-                  <a:lnTo>
-                    <a:pt x="5244309" y="2548861"/>
-                  </a:lnTo>
-                  <a:lnTo>
-                    <a:pt x="5318069" y="2560366"/>
-                  </a:lnTo>
-                  <a:lnTo>
-                    <a:pt x="5391829" y="2571562"/>
-                  </a:lnTo>
-                  <a:lnTo>
-                    <a:pt x="5465589" y="2582455"/>
-                  </a:lnTo>
-                  <a:lnTo>
-                    <a:pt x="5539349" y="2593056"/>
-                  </a:lnTo>
-                  <a:lnTo>
-                    <a:pt x="5613109" y="2603371"/>
-                  </a:lnTo>
-                  <a:lnTo>
-                    <a:pt x="5686869" y="2613408"/>
-                  </a:lnTo>
-                  <a:lnTo>
-                    <a:pt x="5760629" y="2623175"/>
-                  </a:lnTo>
-                  <a:lnTo>
-                    <a:pt x="5834389" y="2632679"/>
-                  </a:lnTo>
-                  <a:lnTo>
-                    <a:pt x="5908149" y="2641927"/>
-                  </a:lnTo>
-                  <a:lnTo>
-                    <a:pt x="5981909" y="2650925"/>
-                  </a:lnTo>
-                  <a:lnTo>
-                    <a:pt x="6055669" y="2659682"/>
-                  </a:lnTo>
-                  <a:lnTo>
-                    <a:pt x="6129429" y="2668202"/>
-                  </a:lnTo>
-                  <a:lnTo>
-                    <a:pt x="6203189" y="2676494"/>
-                  </a:lnTo>
-                  <a:lnTo>
-                    <a:pt x="6276949" y="2684561"/>
-                  </a:lnTo>
-                  <a:lnTo>
-                    <a:pt x="6350709" y="2692412"/>
-                  </a:lnTo>
-                  <a:lnTo>
-                    <a:pt x="6424469" y="2700051"/>
-                  </a:lnTo>
-                  <a:lnTo>
-                    <a:pt x="6498229" y="2707485"/>
-                  </a:lnTo>
-                  <a:lnTo>
-                    <a:pt x="6571989" y="2714718"/>
-                  </a:lnTo>
-                  <a:lnTo>
-                    <a:pt x="6645749" y="2721756"/>
-                  </a:lnTo>
-                  <a:lnTo>
-                    <a:pt x="6719509" y="2728605"/>
-                  </a:lnTo>
-                  <a:lnTo>
-                    <a:pt x="6793269" y="2735270"/>
-                  </a:lnTo>
-                  <a:lnTo>
-                    <a:pt x="6867029" y="2741755"/>
-                  </a:lnTo>
-                  <a:lnTo>
-                    <a:pt x="6940789" y="2748065"/>
-                  </a:lnTo>
-                  <a:lnTo>
-                    <a:pt x="7014550" y="2754205"/>
-                  </a:lnTo>
-                  <a:lnTo>
-                    <a:pt x="7088310" y="2760180"/>
-                  </a:lnTo>
-                  <a:lnTo>
-                    <a:pt x="7162070" y="2765994"/>
-                  </a:lnTo>
-                  <a:lnTo>
-                    <a:pt x="7235830" y="2771652"/>
+                    <a:pt x="71622" y="82141"/>
+                  </a:lnTo>
+                  <a:lnTo>
+                    <a:pt x="143245" y="162070"/>
+                  </a:lnTo>
+                  <a:lnTo>
+                    <a:pt x="214867" y="239846"/>
+                  </a:lnTo>
+                  <a:lnTo>
+                    <a:pt x="286490" y="315528"/>
+                  </a:lnTo>
+                  <a:lnTo>
+                    <a:pt x="358112" y="389171"/>
+                  </a:lnTo>
+                  <a:lnTo>
+                    <a:pt x="429735" y="460831"/>
+                  </a:lnTo>
+                  <a:lnTo>
+                    <a:pt x="501357" y="530562"/>
+                  </a:lnTo>
+                  <a:lnTo>
+                    <a:pt x="572980" y="598414"/>
+                  </a:lnTo>
+                  <a:lnTo>
+                    <a:pt x="644602" y="664439"/>
+                  </a:lnTo>
+                  <a:lnTo>
+                    <a:pt x="716225" y="728686"/>
+                  </a:lnTo>
+                  <a:lnTo>
+                    <a:pt x="787847" y="791202"/>
+                  </a:lnTo>
+                  <a:lnTo>
+                    <a:pt x="859470" y="852035"/>
+                  </a:lnTo>
+                  <a:lnTo>
+                    <a:pt x="931092" y="911230"/>
+                  </a:lnTo>
+                  <a:lnTo>
+                    <a:pt x="1002715" y="968831"/>
+                  </a:lnTo>
+                  <a:lnTo>
+                    <a:pt x="1074337" y="1024880"/>
+                  </a:lnTo>
+                  <a:lnTo>
+                    <a:pt x="1145960" y="1079420"/>
+                  </a:lnTo>
+                  <a:lnTo>
+                    <a:pt x="1217582" y="1132490"/>
+                  </a:lnTo>
+                  <a:lnTo>
+                    <a:pt x="1289205" y="1184132"/>
+                  </a:lnTo>
+                  <a:lnTo>
+                    <a:pt x="1360827" y="1234383"/>
+                  </a:lnTo>
+                  <a:lnTo>
+                    <a:pt x="1432450" y="1283281"/>
+                  </a:lnTo>
+                  <a:lnTo>
+                    <a:pt x="1504073" y="1330861"/>
+                  </a:lnTo>
+                  <a:lnTo>
+                    <a:pt x="1575695" y="1377160"/>
+                  </a:lnTo>
+                  <a:lnTo>
+                    <a:pt x="1647318" y="1422213"/>
+                  </a:lnTo>
+                  <a:lnTo>
+                    <a:pt x="1718940" y="1466052"/>
+                  </a:lnTo>
+                  <a:lnTo>
+                    <a:pt x="1790563" y="1508710"/>
+                  </a:lnTo>
+                  <a:lnTo>
+                    <a:pt x="1862185" y="1550220"/>
+                  </a:lnTo>
+                  <a:lnTo>
+                    <a:pt x="1933808" y="1590612"/>
+                  </a:lnTo>
+                  <a:lnTo>
+                    <a:pt x="2005430" y="1629915"/>
+                  </a:lnTo>
+                  <a:lnTo>
+                    <a:pt x="2077053" y="1668161"/>
+                  </a:lnTo>
+                  <a:lnTo>
+                    <a:pt x="2148675" y="1705376"/>
+                  </a:lnTo>
+                  <a:lnTo>
+                    <a:pt x="2220298" y="1741589"/>
+                  </a:lnTo>
+                  <a:lnTo>
+                    <a:pt x="2291920" y="1776827"/>
+                  </a:lnTo>
+                  <a:lnTo>
+                    <a:pt x="2363543" y="1811116"/>
+                  </a:lnTo>
+                  <a:lnTo>
+                    <a:pt x="2435165" y="1844481"/>
+                  </a:lnTo>
+                  <a:lnTo>
+                    <a:pt x="2506788" y="1876948"/>
+                  </a:lnTo>
+                  <a:lnTo>
+                    <a:pt x="2578410" y="1908541"/>
+                  </a:lnTo>
+                  <a:lnTo>
+                    <a:pt x="2650033" y="1939282"/>
+                  </a:lnTo>
+                  <a:lnTo>
+                    <a:pt x="2721655" y="1969196"/>
+                  </a:lnTo>
+                  <a:lnTo>
+                    <a:pt x="2793278" y="1998304"/>
+                  </a:lnTo>
+                  <a:lnTo>
+                    <a:pt x="2864901" y="2026628"/>
+                  </a:lnTo>
+                  <a:lnTo>
+                    <a:pt x="2936523" y="2054190"/>
+                  </a:lnTo>
+                  <a:lnTo>
+                    <a:pt x="3008146" y="2081009"/>
+                  </a:lnTo>
+                  <a:lnTo>
+                    <a:pt x="3079768" y="2107106"/>
+                  </a:lnTo>
+                  <a:lnTo>
+                    <a:pt x="3151391" y="2132500"/>
+                  </a:lnTo>
+                  <a:lnTo>
+                    <a:pt x="3223013" y="2157210"/>
+                  </a:lnTo>
+                  <a:lnTo>
+                    <a:pt x="3294636" y="2181254"/>
+                  </a:lnTo>
+                  <a:lnTo>
+                    <a:pt x="3366258" y="2204651"/>
+                  </a:lnTo>
+                  <a:lnTo>
+                    <a:pt x="3437881" y="2227418"/>
+                  </a:lnTo>
+                  <a:lnTo>
+                    <a:pt x="3509503" y="2249572"/>
+                  </a:lnTo>
+                  <a:lnTo>
+                    <a:pt x="3581126" y="2271129"/>
+                  </a:lnTo>
+                  <a:lnTo>
+                    <a:pt x="3652748" y="2292106"/>
+                  </a:lnTo>
+                  <a:lnTo>
+                    <a:pt x="3724371" y="2312518"/>
+                  </a:lnTo>
+                  <a:lnTo>
+                    <a:pt x="3795993" y="2332380"/>
+                  </a:lnTo>
+                  <a:lnTo>
+                    <a:pt x="3867616" y="2351707"/>
+                  </a:lnTo>
+                  <a:lnTo>
+                    <a:pt x="3939238" y="2370514"/>
+                  </a:lnTo>
+                  <a:lnTo>
+                    <a:pt x="4010861" y="2388814"/>
+                  </a:lnTo>
+                  <a:lnTo>
+                    <a:pt x="4082483" y="2406621"/>
+                  </a:lnTo>
+                  <a:lnTo>
+                    <a:pt x="4154106" y="2423949"/>
+                  </a:lnTo>
+                  <a:lnTo>
+                    <a:pt x="4225729" y="2440810"/>
+                  </a:lnTo>
+                  <a:lnTo>
+                    <a:pt x="4297351" y="2457217"/>
+                  </a:lnTo>
+                  <a:lnTo>
+                    <a:pt x="4368974" y="2473182"/>
+                  </a:lnTo>
+                  <a:lnTo>
+                    <a:pt x="4440596" y="2488717"/>
+                  </a:lnTo>
+                  <a:lnTo>
+                    <a:pt x="4512219" y="2503833"/>
+                  </a:lnTo>
+                  <a:lnTo>
+                    <a:pt x="4583841" y="2518543"/>
+                  </a:lnTo>
+                  <a:lnTo>
+                    <a:pt x="4655464" y="2532857"/>
+                  </a:lnTo>
+                  <a:lnTo>
+                    <a:pt x="4727086" y="2546785"/>
+                  </a:lnTo>
+                  <a:lnTo>
+                    <a:pt x="4798709" y="2560337"/>
+                  </a:lnTo>
+                  <a:lnTo>
+                    <a:pt x="4870331" y="2573525"/>
+                  </a:lnTo>
+                  <a:lnTo>
+                    <a:pt x="4941954" y="2586358"/>
+                  </a:lnTo>
+                  <a:lnTo>
+                    <a:pt x="5013576" y="2598845"/>
+                  </a:lnTo>
+                  <a:lnTo>
+                    <a:pt x="5085199" y="2610996"/>
+                  </a:lnTo>
+                  <a:lnTo>
+                    <a:pt x="5156821" y="2622820"/>
+                  </a:lnTo>
+                  <a:lnTo>
+                    <a:pt x="5228444" y="2634325"/>
+                  </a:lnTo>
+                  <a:lnTo>
+                    <a:pt x="5300066" y="2645520"/>
+                  </a:lnTo>
+                  <a:lnTo>
+                    <a:pt x="5371689" y="2656414"/>
+                  </a:lnTo>
+                  <a:lnTo>
+                    <a:pt x="5443311" y="2667014"/>
+                  </a:lnTo>
+                  <a:lnTo>
+                    <a:pt x="5514934" y="2677329"/>
+                  </a:lnTo>
+                  <a:lnTo>
+                    <a:pt x="5586557" y="2687367"/>
+                  </a:lnTo>
+                  <a:lnTo>
+                    <a:pt x="5658179" y="2697133"/>
+                  </a:lnTo>
+                  <a:lnTo>
+                    <a:pt x="5729802" y="2706637"/>
+                  </a:lnTo>
+                  <a:lnTo>
+                    <a:pt x="5801424" y="2715885"/>
+                  </a:lnTo>
+                  <a:lnTo>
+                    <a:pt x="5873047" y="2724884"/>
+                  </a:lnTo>
+                  <a:lnTo>
+                    <a:pt x="5944669" y="2733640"/>
+                  </a:lnTo>
+                  <a:lnTo>
+                    <a:pt x="6016292" y="2742161"/>
+                  </a:lnTo>
+                  <a:lnTo>
+                    <a:pt x="6087914" y="2750452"/>
+                  </a:lnTo>
+                  <a:lnTo>
+                    <a:pt x="6159537" y="2758520"/>
+                  </a:lnTo>
+                  <a:lnTo>
+                    <a:pt x="6231159" y="2766371"/>
+                  </a:lnTo>
+                  <a:lnTo>
+                    <a:pt x="6302782" y="2774010"/>
+                  </a:lnTo>
+                  <a:lnTo>
+                    <a:pt x="6374404" y="2781443"/>
+                  </a:lnTo>
+                  <a:lnTo>
+                    <a:pt x="6446027" y="2788676"/>
+                  </a:lnTo>
+                  <a:lnTo>
+                    <a:pt x="6517649" y="2795715"/>
+                  </a:lnTo>
+                  <a:lnTo>
+                    <a:pt x="6589272" y="2802564"/>
+                  </a:lnTo>
+                  <a:lnTo>
+                    <a:pt x="6660894" y="2809228"/>
+                  </a:lnTo>
+                  <a:lnTo>
+                    <a:pt x="6732517" y="2815713"/>
+                  </a:lnTo>
+                  <a:lnTo>
+                    <a:pt x="6804139" y="2822023"/>
+                  </a:lnTo>
+                  <a:lnTo>
+                    <a:pt x="6875762" y="2828164"/>
+                  </a:lnTo>
+                  <a:lnTo>
+                    <a:pt x="6947385" y="2834139"/>
+                  </a:lnTo>
+                  <a:lnTo>
+                    <a:pt x="7019007" y="2839953"/>
+                  </a:lnTo>
+                  <a:lnTo>
+                    <a:pt x="7090630" y="2845610"/>
                   </a:lnTo>
                 </a:path>
               </a:pathLst>
@@ -4545,7 +4502,7 @@
         </p:sp>
         <p:sp>
           <p:nvSpPr>
-            <p:cNvPr id="25" name="pl25"/>
+            <p:cNvPr id="24" name="pl24"/>
             <p:cNvSpPr/>
             <p:nvPr/>
           </p:nvSpPr>
@@ -4588,13 +4545,13 @@
         </p:sp>
         <p:sp>
           <p:nvSpPr>
-            <p:cNvPr id="26" name="pl26"/>
+            <p:cNvPr id="25" name="pl25"/>
             <p:cNvSpPr/>
             <p:nvPr/>
           </p:nvSpPr>
           <p:spPr>
             <a:xfrm>
-              <a:off x="4269157" y="2073503"/>
+              <a:off x="4588151" y="2073503"/>
               <a:ext cx="0" cy="3649639"/>
             </a:xfrm>
             <a:custGeom>
@@ -4631,7 +4588,7 @@
         </p:sp>
         <p:sp>
           <p:nvSpPr>
-            <p:cNvPr id="27" name="tx27"/>
+            <p:cNvPr id="26" name="tx26"/>
             <p:cNvSpPr/>
             <p:nvPr/>
           </p:nvSpPr>
@@ -4677,7 +4634,7 @@
         </p:sp>
         <p:sp>
           <p:nvSpPr>
-            <p:cNvPr id="28" name="tx28"/>
+            <p:cNvPr id="27" name="tx27"/>
             <p:cNvSpPr/>
             <p:nvPr/>
           </p:nvSpPr>
@@ -4723,7 +4680,7 @@
         </p:sp>
         <p:sp>
           <p:nvSpPr>
-            <p:cNvPr id="29" name="tx29"/>
+            <p:cNvPr id="28" name="tx28"/>
             <p:cNvSpPr/>
             <p:nvPr/>
           </p:nvSpPr>
@@ -4769,7 +4726,7 @@
         </p:sp>
         <p:sp>
           <p:nvSpPr>
-            <p:cNvPr id="30" name="tx30"/>
+            <p:cNvPr id="29" name="tx29"/>
             <p:cNvSpPr/>
             <p:nvPr/>
           </p:nvSpPr>
@@ -4815,7 +4772,7 @@
         </p:sp>
         <p:sp>
           <p:nvSpPr>
-            <p:cNvPr id="31" name="tx31"/>
+            <p:cNvPr id="30" name="tx30"/>
             <p:cNvSpPr/>
             <p:nvPr/>
           </p:nvSpPr>
@@ -4861,14 +4818,14 @@
         </p:sp>
         <p:sp>
           <p:nvSpPr>
-            <p:cNvPr id="32" name="tx32"/>
+            <p:cNvPr id="31" name="tx31"/>
             <p:cNvSpPr/>
             <p:nvPr/>
           </p:nvSpPr>
           <p:spPr>
             <a:xfrm>
-              <a:off x="2423864" y="5785772"/>
-              <a:ext cx="155356" cy="80101"/>
+              <a:off x="2360651" y="5785772"/>
+              <a:ext cx="161574" cy="80101"/>
             </a:xfrm>
             <a:prstGeom prst="rect">
               <a:avLst/>
@@ -4900,21 +4857,21 @@
                   <a:latin typeface="Helvetica"/>
                   <a:cs typeface="Helvetica"/>
                 </a:rPr>
-                <a:t>0.8</a:t>
+                <a:t>-25</a:t>
               </a:r>
             </a:p>
           </p:txBody>
         </p:sp>
         <p:sp>
           <p:nvSpPr>
-            <p:cNvPr id="33" name="tx33"/>
+            <p:cNvPr id="32" name="tx32"/>
             <p:cNvSpPr/>
             <p:nvPr/>
           </p:nvSpPr>
           <p:spPr>
             <a:xfrm>
-              <a:off x="4196521" y="5785772"/>
-              <a:ext cx="155356" cy="80101"/>
+              <a:off x="4561958" y="5785772"/>
+              <a:ext cx="62179" cy="80101"/>
             </a:xfrm>
             <a:prstGeom prst="rect">
               <a:avLst/>
@@ -4946,21 +4903,21 @@
                   <a:latin typeface="Helvetica"/>
                   <a:cs typeface="Helvetica"/>
                 </a:rPr>
-                <a:t>1.0</a:t>
+                <a:t>0</a:t>
               </a:r>
             </a:p>
           </p:txBody>
         </p:sp>
         <p:sp>
           <p:nvSpPr>
-            <p:cNvPr id="34" name="tx34"/>
+            <p:cNvPr id="33" name="tx33"/>
             <p:cNvSpPr/>
             <p:nvPr/>
           </p:nvSpPr>
           <p:spPr>
             <a:xfrm>
-              <a:off x="5969179" y="5785772"/>
-              <a:ext cx="155356" cy="80101"/>
+              <a:off x="6682478" y="5785772"/>
+              <a:ext cx="124358" cy="80101"/>
             </a:xfrm>
             <a:prstGeom prst="rect">
               <a:avLst/>
@@ -4992,67 +4949,21 @@
                   <a:latin typeface="Helvetica"/>
                   <a:cs typeface="Helvetica"/>
                 </a:rPr>
-                <a:t>1.2</a:t>
+                <a:t>25</a:t>
               </a:r>
             </a:p>
           </p:txBody>
         </p:sp>
         <p:sp>
           <p:nvSpPr>
-            <p:cNvPr id="35" name="tx35"/>
+            <p:cNvPr id="34" name="tx34"/>
             <p:cNvSpPr/>
             <p:nvPr/>
           </p:nvSpPr>
           <p:spPr>
             <a:xfrm>
-              <a:off x="7741836" y="5785772"/>
-              <a:ext cx="155356" cy="80101"/>
-            </a:xfrm>
-            <a:prstGeom prst="rect">
-              <a:avLst/>
-            </a:prstGeom>
-            <a:noFill/>
-          </p:spPr>
-          <p:txBody>
-            <a:bodyPr lIns="0" rIns="0" tIns="0" bIns="0" anchorCtr="1" anchor="ctr" wrap="none"/>
-            <a:lstStyle/>
-            <a:p>
-              <a:pPr algn="l" marL="0" marR="0" indent="0">
-                <a:lnSpc>
-                  <a:spcPts val="880"/>
-                </a:lnSpc>
-                <a:spcBef>
-                  <a:spcPts val="0"/>
-                </a:spcBef>
-                <a:spcAft>
-                  <a:spcPts val="0"/>
-                </a:spcAft>
-              </a:pPr>
-              <a:r>
-                <a:rPr sz="880">
-                  <a:solidFill>
-                    <a:srgbClr val="4D4D4D">
-                      <a:alpha val="100000"/>
-                    </a:srgbClr>
-                  </a:solidFill>
-                  <a:latin typeface="Helvetica"/>
-                  <a:cs typeface="Helvetica"/>
-                </a:rPr>
-                <a:t>1.4</a:t>
-              </a:r>
-            </a:p>
-          </p:txBody>
-        </p:sp>
-        <p:sp>
-          <p:nvSpPr>
-            <p:cNvPr id="36" name="tx36"/>
-            <p:cNvSpPr/>
-            <p:nvPr/>
-          </p:nvSpPr>
-          <p:spPr>
-            <a:xfrm>
-              <a:off x="3879271" y="5925448"/>
-              <a:ext cx="1676186" cy="100218"/>
+              <a:off x="2928340" y="5925448"/>
+              <a:ext cx="3578047" cy="100218"/>
             </a:xfrm>
             <a:prstGeom prst="rect">
               <a:avLst/>
@@ -5084,14 +4995,14 @@
                   <a:latin typeface="Helvetica"/>
                   <a:cs typeface="Helvetica"/>
                 </a:rPr>
-                <a:t>CKD-EPI Cr-Cys / CG ratio</a:t>
+                <a:t>eGFR difference (%): 100 × (CKD-EPI Cr-Cys − CG) / CG</a:t>
               </a:r>
             </a:p>
           </p:txBody>
         </p:sp>
         <p:sp>
           <p:nvSpPr>
-            <p:cNvPr id="37" name="tx37"/>
+            <p:cNvPr id="35" name="tx35"/>
             <p:cNvSpPr/>
             <p:nvPr/>
           </p:nvSpPr>
@@ -5137,14 +5048,14 @@
         </p:sp>
         <p:sp>
           <p:nvSpPr>
-            <p:cNvPr id="38" name="tx38"/>
+            <p:cNvPr id="36" name="tx36"/>
             <p:cNvSpPr/>
             <p:nvPr/>
           </p:nvSpPr>
           <p:spPr>
             <a:xfrm>
               <a:off x="817517" y="1896563"/>
-              <a:ext cx="6236116" cy="82021"/>
+              <a:ext cx="6388364" cy="82021"/>
             </a:xfrm>
             <a:prstGeom prst="rect">
               <a:avLst/>
@@ -5176,14 +5087,14 @@
                   <a:latin typeface="Helvetica"/>
                   <a:cs typeface="Helvetica"/>
                 </a:rPr>
-                <a:t>subHR per 0.1 ratio decline: 1.39 (1.20-1.60), p = &lt;0.001  |  per IQR decline (Δ = 0.29): 2.61 (1.72-3.97)  |  IQR: [0.85, 1.15]</a:t>
+                <a:t>subHR per 10 % decline: 1.39 (1.20-1.60), p = &lt;0.001  |  per IQR decline (Δ = 29.3 %): 2.61 (1.72-3.97)  |  IQR: [-14.6, 14.7] %</a:t>
               </a:r>
             </a:p>
           </p:txBody>
         </p:sp>
         <p:sp>
           <p:nvSpPr>
-            <p:cNvPr id="39" name="tx39"/>
+            <p:cNvPr id="37" name="tx37"/>
             <p:cNvSpPr/>
             <p:nvPr/>
           </p:nvSpPr>

--- a/docs/pptx/whole/jx-linsubhr-ratio-hosp7.pptx
+++ b/docs/pptx/whole/jx-linsubhr-ratio-hosp7.pptx
@@ -2265,34 +2265,26 @@
         </p:sp>
         <p:sp>
           <p:nvSpPr>
-            <p:cNvPr id="4" name="pl4"/>
+            <p:cNvPr id="4" name="rc4"/>
             <p:cNvSpPr/>
             <p:nvPr/>
           </p:nvSpPr>
           <p:spPr>
             <a:xfrm>
-              <a:off x="817517" y="5142518"/>
-              <a:ext cx="7799693" cy="0"/>
+              <a:off x="457200" y="1600200"/>
+              <a:ext cx="8229600" cy="4525962"/>
             </a:xfrm>
-            <a:custGeom>
+            <a:prstGeom prst="rect">
               <a:avLst/>
-              <a:pathLst>
-                <a:path w="7799693" h="0">
-                  <a:moveTo>
-                    <a:pt x="0" y="0"/>
-                  </a:moveTo>
-                  <a:lnTo>
-                    <a:pt x="7799693" y="0"/>
-                  </a:lnTo>
-                  <a:lnTo>
-                    <a:pt x="7799693" y="0"/>
-                  </a:lnTo>
-                </a:path>
-              </a:pathLst>
-            </a:custGeom>
-            <a:ln w="6775" cap="flat">
+            </a:prstGeom>
+            <a:solidFill>
+              <a:srgbClr val="FFFFFF">
+                <a:alpha val="100000"/>
+              </a:srgbClr>
+            </a:solidFill>
+            <a:ln w="13550" cap="rnd">
               <a:solidFill>
-                <a:srgbClr val="EBEBEB">
+                <a:srgbClr val="FFFFFF">
                   <a:alpha val="100000"/>
                 </a:srgbClr>
               </a:solidFill>
@@ -2314,21 +2306,21 @@
           </p:nvSpPr>
           <p:spPr>
             <a:xfrm>
-              <a:off x="817517" y="4313054"/>
-              <a:ext cx="7799693" cy="0"/>
+              <a:off x="887106" y="3250627"/>
+              <a:ext cx="7660515" cy="0"/>
             </a:xfrm>
             <a:custGeom>
               <a:avLst/>
               <a:pathLst>
-                <a:path w="7799693" h="0">
+                <a:path w="7660515" h="0">
                   <a:moveTo>
                     <a:pt x="0" y="0"/>
                   </a:moveTo>
                   <a:lnTo>
-                    <a:pt x="7799693" y="0"/>
-                  </a:lnTo>
-                  <a:lnTo>
-                    <a:pt x="7799693" y="0"/>
+                    <a:pt x="7660515" y="0"/>
+                  </a:lnTo>
+                  <a:lnTo>
+                    <a:pt x="7660515" y="0"/>
                   </a:lnTo>
                 </a:path>
               </a:pathLst>
@@ -2357,21 +2349,21 @@
           </p:nvSpPr>
           <p:spPr>
             <a:xfrm>
-              <a:off x="817517" y="3483591"/>
-              <a:ext cx="7799693" cy="0"/>
+              <a:off x="887106" y="2951293"/>
+              <a:ext cx="7660515" cy="0"/>
             </a:xfrm>
             <a:custGeom>
               <a:avLst/>
               <a:pathLst>
-                <a:path w="7799693" h="0">
+                <a:path w="7660515" h="0">
                   <a:moveTo>
                     <a:pt x="0" y="0"/>
                   </a:moveTo>
                   <a:lnTo>
-                    <a:pt x="7799693" y="0"/>
-                  </a:lnTo>
-                  <a:lnTo>
-                    <a:pt x="7799693" y="0"/>
+                    <a:pt x="7660515" y="0"/>
+                  </a:lnTo>
+                  <a:lnTo>
+                    <a:pt x="7660515" y="0"/>
                   </a:lnTo>
                 </a:path>
               </a:pathLst>
@@ -2400,21 +2392,21 @@
           </p:nvSpPr>
           <p:spPr>
             <a:xfrm>
-              <a:off x="817517" y="2654127"/>
-              <a:ext cx="7799693" cy="0"/>
+              <a:off x="887106" y="2651959"/>
+              <a:ext cx="7660515" cy="0"/>
             </a:xfrm>
             <a:custGeom>
               <a:avLst/>
               <a:pathLst>
-                <a:path w="7799693" h="0">
+                <a:path w="7660515" h="0">
                   <a:moveTo>
                     <a:pt x="0" y="0"/>
                   </a:moveTo>
                   <a:lnTo>
-                    <a:pt x="7799693" y="0"/>
-                  </a:lnTo>
-                  <a:lnTo>
-                    <a:pt x="7799693" y="0"/>
+                    <a:pt x="7660515" y="0"/>
+                  </a:lnTo>
+                  <a:lnTo>
+                    <a:pt x="7660515" y="0"/>
                   </a:lnTo>
                 </a:path>
               </a:pathLst>
@@ -2443,21 +2435,21 @@
           </p:nvSpPr>
           <p:spPr>
             <a:xfrm>
-              <a:off x="1365633" y="2073503"/>
-              <a:ext cx="0" cy="3649639"/>
+              <a:off x="887106" y="2352625"/>
+              <a:ext cx="7660515" cy="0"/>
             </a:xfrm>
             <a:custGeom>
               <a:avLst/>
               <a:pathLst>
-                <a:path w="0" h="3649639">
+                <a:path w="7660515" h="0">
                   <a:moveTo>
-                    <a:pt x="0" y="3649639"/>
+                    <a:pt x="0" y="0"/>
                   </a:moveTo>
                   <a:lnTo>
-                    <a:pt x="0" y="0"/>
-                  </a:lnTo>
-                  <a:lnTo>
-                    <a:pt x="0" y="0"/>
+                    <a:pt x="7660515" y="0"/>
+                  </a:lnTo>
+                  <a:lnTo>
+                    <a:pt x="7660515" y="0"/>
                   </a:lnTo>
                 </a:path>
               </a:pathLst>
@@ -2486,15 +2478,15 @@
           </p:nvSpPr>
           <p:spPr>
             <a:xfrm>
-              <a:off x="3517243" y="2073503"/>
-              <a:ext cx="0" cy="3649639"/>
+              <a:off x="1425442" y="2143092"/>
+              <a:ext cx="0" cy="1317069"/>
             </a:xfrm>
             <a:custGeom>
               <a:avLst/>
               <a:pathLst>
-                <a:path w="0" h="3649639">
+                <a:path w="0" h="1317069">
                   <a:moveTo>
-                    <a:pt x="0" y="3649639"/>
+                    <a:pt x="0" y="1317069"/>
                   </a:moveTo>
                   <a:lnTo>
                     <a:pt x="0" y="0"/>
@@ -2529,15 +2521,15 @@
           </p:nvSpPr>
           <p:spPr>
             <a:xfrm>
-              <a:off x="5668852" y="2073503"/>
-              <a:ext cx="0" cy="3649639"/>
+              <a:off x="3538658" y="2143092"/>
+              <a:ext cx="0" cy="1317069"/>
             </a:xfrm>
             <a:custGeom>
               <a:avLst/>
               <a:pathLst>
-                <a:path w="0" h="3649639">
+                <a:path w="0" h="1317069">
                   <a:moveTo>
-                    <a:pt x="0" y="3649639"/>
+                    <a:pt x="0" y="1317069"/>
                   </a:moveTo>
                   <a:lnTo>
                     <a:pt x="0" y="0"/>
@@ -2572,15 +2564,15 @@
           </p:nvSpPr>
           <p:spPr>
             <a:xfrm>
-              <a:off x="7820461" y="2073503"/>
-              <a:ext cx="0" cy="3649639"/>
+              <a:off x="5651874" y="2143092"/>
+              <a:ext cx="0" cy="1317069"/>
             </a:xfrm>
             <a:custGeom>
               <a:avLst/>
               <a:pathLst>
-                <a:path w="0" h="3649639">
+                <a:path w="0" h="1317069">
                   <a:moveTo>
-                    <a:pt x="0" y="3649639"/>
+                    <a:pt x="0" y="1317069"/>
                   </a:moveTo>
                   <a:lnTo>
                     <a:pt x="0" y="0"/>
@@ -2615,26 +2607,26 @@
           </p:nvSpPr>
           <p:spPr>
             <a:xfrm>
-              <a:off x="817517" y="5557249"/>
-              <a:ext cx="7799693" cy="0"/>
+              <a:off x="7765090" y="2143092"/>
+              <a:ext cx="0" cy="1317069"/>
             </a:xfrm>
             <a:custGeom>
               <a:avLst/>
               <a:pathLst>
-                <a:path w="7799693" h="0">
+                <a:path w="0" h="1317069">
                   <a:moveTo>
+                    <a:pt x="0" y="1317069"/>
+                  </a:moveTo>
+                  <a:lnTo>
                     <a:pt x="0" y="0"/>
-                  </a:moveTo>
-                  <a:lnTo>
-                    <a:pt x="7799693" y="0"/>
-                  </a:lnTo>
-                  <a:lnTo>
-                    <a:pt x="7799693" y="0"/>
+                  </a:lnTo>
+                  <a:lnTo>
+                    <a:pt x="0" y="0"/>
                   </a:lnTo>
                 </a:path>
               </a:pathLst>
             </a:custGeom>
-            <a:ln w="13550" cap="flat">
+            <a:ln w="6775" cap="flat">
               <a:solidFill>
                 <a:srgbClr val="EBEBEB">
                   <a:alpha val="100000"/>
@@ -2658,21 +2650,21 @@
           </p:nvSpPr>
           <p:spPr>
             <a:xfrm>
-              <a:off x="817517" y="4727786"/>
-              <a:ext cx="7799693" cy="0"/>
+              <a:off x="887106" y="3400294"/>
+              <a:ext cx="7660515" cy="0"/>
             </a:xfrm>
             <a:custGeom>
               <a:avLst/>
               <a:pathLst>
-                <a:path w="7799693" h="0">
+                <a:path w="7660515" h="0">
                   <a:moveTo>
                     <a:pt x="0" y="0"/>
                   </a:moveTo>
                   <a:lnTo>
-                    <a:pt x="7799693" y="0"/>
-                  </a:lnTo>
-                  <a:lnTo>
-                    <a:pt x="7799693" y="0"/>
+                    <a:pt x="7660515" y="0"/>
+                  </a:lnTo>
+                  <a:lnTo>
+                    <a:pt x="7660515" y="0"/>
                   </a:lnTo>
                 </a:path>
               </a:pathLst>
@@ -2701,21 +2693,21 @@
           </p:nvSpPr>
           <p:spPr>
             <a:xfrm>
-              <a:off x="817517" y="3898322"/>
-              <a:ext cx="7799693" cy="0"/>
+              <a:off x="887106" y="3100960"/>
+              <a:ext cx="7660515" cy="0"/>
             </a:xfrm>
             <a:custGeom>
               <a:avLst/>
               <a:pathLst>
-                <a:path w="7799693" h="0">
+                <a:path w="7660515" h="0">
                   <a:moveTo>
                     <a:pt x="0" y="0"/>
                   </a:moveTo>
                   <a:lnTo>
-                    <a:pt x="7799693" y="0"/>
-                  </a:lnTo>
-                  <a:lnTo>
-                    <a:pt x="7799693" y="0"/>
+                    <a:pt x="7660515" y="0"/>
+                  </a:lnTo>
+                  <a:lnTo>
+                    <a:pt x="7660515" y="0"/>
                   </a:lnTo>
                 </a:path>
               </a:pathLst>
@@ -2744,21 +2736,21 @@
           </p:nvSpPr>
           <p:spPr>
             <a:xfrm>
-              <a:off x="817517" y="3068859"/>
-              <a:ext cx="7799693" cy="0"/>
+              <a:off x="887106" y="2801626"/>
+              <a:ext cx="7660515" cy="0"/>
             </a:xfrm>
             <a:custGeom>
               <a:avLst/>
               <a:pathLst>
-                <a:path w="7799693" h="0">
+                <a:path w="7660515" h="0">
                   <a:moveTo>
                     <a:pt x="0" y="0"/>
                   </a:moveTo>
                   <a:lnTo>
-                    <a:pt x="7799693" y="0"/>
-                  </a:lnTo>
-                  <a:lnTo>
-                    <a:pt x="7799693" y="0"/>
+                    <a:pt x="7660515" y="0"/>
+                  </a:lnTo>
+                  <a:lnTo>
+                    <a:pt x="7660515" y="0"/>
                   </a:lnTo>
                 </a:path>
               </a:pathLst>
@@ -2787,21 +2779,21 @@
           </p:nvSpPr>
           <p:spPr>
             <a:xfrm>
-              <a:off x="817517" y="2239395"/>
-              <a:ext cx="7799693" cy="0"/>
+              <a:off x="887106" y="2502292"/>
+              <a:ext cx="7660515" cy="0"/>
             </a:xfrm>
             <a:custGeom>
               <a:avLst/>
               <a:pathLst>
-                <a:path w="7799693" h="0">
+                <a:path w="7660515" h="0">
                   <a:moveTo>
                     <a:pt x="0" y="0"/>
                   </a:moveTo>
                   <a:lnTo>
-                    <a:pt x="7799693" y="0"/>
-                  </a:lnTo>
-                  <a:lnTo>
-                    <a:pt x="7799693" y="0"/>
+                    <a:pt x="7660515" y="0"/>
+                  </a:lnTo>
+                  <a:lnTo>
+                    <a:pt x="7660515" y="0"/>
                   </a:lnTo>
                 </a:path>
               </a:pathLst>
@@ -2830,21 +2822,21 @@
           </p:nvSpPr>
           <p:spPr>
             <a:xfrm>
-              <a:off x="2441438" y="2073503"/>
-              <a:ext cx="0" cy="3649639"/>
+              <a:off x="887106" y="2202958"/>
+              <a:ext cx="7660515" cy="0"/>
             </a:xfrm>
             <a:custGeom>
               <a:avLst/>
               <a:pathLst>
-                <a:path w="0" h="3649639">
+                <a:path w="7660515" h="0">
                   <a:moveTo>
-                    <a:pt x="0" y="3649639"/>
+                    <a:pt x="0" y="0"/>
                   </a:moveTo>
                   <a:lnTo>
-                    <a:pt x="0" y="0"/>
-                  </a:lnTo>
-                  <a:lnTo>
-                    <a:pt x="0" y="0"/>
+                    <a:pt x="7660515" y="0"/>
+                  </a:lnTo>
+                  <a:lnTo>
+                    <a:pt x="7660515" y="0"/>
                   </a:lnTo>
                 </a:path>
               </a:pathLst>
@@ -2873,15 +2865,15 @@
           </p:nvSpPr>
           <p:spPr>
             <a:xfrm>
-              <a:off x="4593047" y="2073503"/>
-              <a:ext cx="0" cy="3649639"/>
+              <a:off x="2482050" y="2143092"/>
+              <a:ext cx="0" cy="1317069"/>
             </a:xfrm>
             <a:custGeom>
               <a:avLst/>
               <a:pathLst>
-                <a:path w="0" h="3649639">
+                <a:path w="0" h="1317069">
                   <a:moveTo>
-                    <a:pt x="0" y="3649639"/>
+                    <a:pt x="0" y="1317069"/>
                   </a:moveTo>
                   <a:lnTo>
                     <a:pt x="0" y="0"/>
@@ -2916,15 +2908,15 @@
           </p:nvSpPr>
           <p:spPr>
             <a:xfrm>
-              <a:off x="6744657" y="2073503"/>
-              <a:ext cx="0" cy="3649639"/>
+              <a:off x="4595266" y="2143092"/>
+              <a:ext cx="0" cy="1317069"/>
             </a:xfrm>
             <a:custGeom>
               <a:avLst/>
               <a:pathLst>
-                <a:path w="0" h="3649639">
+                <a:path w="0" h="1317069">
                   <a:moveTo>
-                    <a:pt x="0" y="3649639"/>
+                    <a:pt x="0" y="1317069"/>
                   </a:moveTo>
                   <a:lnTo>
                     <a:pt x="0" y="0"/>
@@ -2953,585 +2945,628 @@
         </p:sp>
         <p:sp>
           <p:nvSpPr>
-            <p:cNvPr id="20" name="pg20"/>
+            <p:cNvPr id="20" name="pl20"/>
             <p:cNvSpPr/>
             <p:nvPr/>
           </p:nvSpPr>
           <p:spPr>
             <a:xfrm>
-              <a:off x="1172049" y="2073503"/>
-              <a:ext cx="7090630" cy="3372621"/>
+              <a:off x="6708482" y="2143092"/>
+              <a:ext cx="0" cy="1317069"/>
             </a:xfrm>
             <a:custGeom>
               <a:avLst/>
               <a:pathLst>
-                <a:path w="7090630" h="3372621">
+                <a:path w="0" h="1317069">
                   <a:moveTo>
-                    <a:pt x="792835" y="0"/>
+                    <a:pt x="0" y="1317069"/>
                   </a:moveTo>
                   <a:lnTo>
-                    <a:pt x="859470" y="124867"/>
-                  </a:lnTo>
-                  <a:lnTo>
-                    <a:pt x="931092" y="253925"/>
-                  </a:lnTo>
-                  <a:lnTo>
-                    <a:pt x="1002715" y="378024"/>
-                  </a:lnTo>
-                  <a:lnTo>
-                    <a:pt x="1074337" y="497355"/>
-                  </a:lnTo>
-                  <a:lnTo>
-                    <a:pt x="1145960" y="612100"/>
-                  </a:lnTo>
-                  <a:lnTo>
-                    <a:pt x="1217582" y="722437"/>
-                  </a:lnTo>
-                  <a:lnTo>
-                    <a:pt x="1289205" y="828535"/>
-                  </a:lnTo>
-                  <a:lnTo>
-                    <a:pt x="1360827" y="930555"/>
-                  </a:lnTo>
-                  <a:lnTo>
-                    <a:pt x="1432450" y="1028656"/>
-                  </a:lnTo>
-                  <a:lnTo>
-                    <a:pt x="1504073" y="1122988"/>
-                  </a:lnTo>
-                  <a:lnTo>
-                    <a:pt x="1575695" y="1213695"/>
-                  </a:lnTo>
-                  <a:lnTo>
-                    <a:pt x="1647318" y="1300917"/>
-                  </a:lnTo>
-                  <a:lnTo>
-                    <a:pt x="1718940" y="1384787"/>
-                  </a:lnTo>
-                  <a:lnTo>
-                    <a:pt x="1790563" y="1465435"/>
-                  </a:lnTo>
-                  <a:lnTo>
-                    <a:pt x="1862185" y="1542985"/>
-                  </a:lnTo>
-                  <a:lnTo>
-                    <a:pt x="1933808" y="1617554"/>
-                  </a:lnTo>
-                  <a:lnTo>
-                    <a:pt x="2005430" y="1689259"/>
-                  </a:lnTo>
-                  <a:lnTo>
-                    <a:pt x="2077053" y="1758208"/>
-                  </a:lnTo>
-                  <a:lnTo>
-                    <a:pt x="2148675" y="1824508"/>
-                  </a:lnTo>
-                  <a:lnTo>
-                    <a:pt x="2220298" y="1888261"/>
-                  </a:lnTo>
-                  <a:lnTo>
-                    <a:pt x="2291920" y="1949564"/>
-                  </a:lnTo>
-                  <a:lnTo>
-                    <a:pt x="2363543" y="2008512"/>
-                  </a:lnTo>
-                  <a:lnTo>
-                    <a:pt x="2435165" y="2065194"/>
-                  </a:lnTo>
-                  <a:lnTo>
-                    <a:pt x="2506788" y="2119699"/>
-                  </a:lnTo>
-                  <a:lnTo>
-                    <a:pt x="2578410" y="2172110"/>
-                  </a:lnTo>
-                  <a:lnTo>
-                    <a:pt x="2650033" y="2222507"/>
-                  </a:lnTo>
-                  <a:lnTo>
-                    <a:pt x="2721655" y="2270967"/>
-                  </a:lnTo>
-                  <a:lnTo>
-                    <a:pt x="2793278" y="2317565"/>
-                  </a:lnTo>
-                  <a:lnTo>
-                    <a:pt x="2864901" y="2362373"/>
-                  </a:lnTo>
-                  <a:lnTo>
-                    <a:pt x="2936523" y="2405460"/>
-                  </a:lnTo>
-                  <a:lnTo>
-                    <a:pt x="3008146" y="2446891"/>
-                  </a:lnTo>
-                  <a:lnTo>
-                    <a:pt x="3079768" y="2486730"/>
-                  </a:lnTo>
-                  <a:lnTo>
-                    <a:pt x="3151391" y="2525038"/>
-                  </a:lnTo>
-                  <a:lnTo>
-                    <a:pt x="3223013" y="2561874"/>
-                  </a:lnTo>
-                  <a:lnTo>
-                    <a:pt x="3294636" y="2597295"/>
-                  </a:lnTo>
-                  <a:lnTo>
-                    <a:pt x="3366258" y="2631355"/>
-                  </a:lnTo>
-                  <a:lnTo>
-                    <a:pt x="3437881" y="2658163"/>
-                  </a:lnTo>
-                  <a:lnTo>
-                    <a:pt x="3509503" y="2670797"/>
-                  </a:lnTo>
-                  <a:lnTo>
-                    <a:pt x="3581126" y="2683237"/>
-                  </a:lnTo>
-                  <a:lnTo>
-                    <a:pt x="3652748" y="2695486"/>
-                  </a:lnTo>
-                  <a:lnTo>
-                    <a:pt x="3724371" y="2707549"/>
-                  </a:lnTo>
-                  <a:lnTo>
-                    <a:pt x="3795993" y="2719426"/>
-                  </a:lnTo>
-                  <a:lnTo>
-                    <a:pt x="3867616" y="2731122"/>
-                  </a:lnTo>
-                  <a:lnTo>
-                    <a:pt x="3939238" y="2742639"/>
-                  </a:lnTo>
-                  <a:lnTo>
-                    <a:pt x="4010861" y="2753980"/>
-                  </a:lnTo>
-                  <a:lnTo>
-                    <a:pt x="4082483" y="2765147"/>
-                  </a:lnTo>
-                  <a:lnTo>
-                    <a:pt x="4154106" y="2776143"/>
-                  </a:lnTo>
-                  <a:lnTo>
-                    <a:pt x="4225729" y="2786971"/>
-                  </a:lnTo>
-                  <a:lnTo>
-                    <a:pt x="4297351" y="2797634"/>
-                  </a:lnTo>
-                  <a:lnTo>
-                    <a:pt x="4368974" y="2808133"/>
-                  </a:lnTo>
-                  <a:lnTo>
-                    <a:pt x="4440596" y="2818471"/>
-                  </a:lnTo>
-                  <a:lnTo>
-                    <a:pt x="4512219" y="2828651"/>
-                  </a:lnTo>
-                  <a:lnTo>
-                    <a:pt x="4583841" y="2838676"/>
-                  </a:lnTo>
-                  <a:lnTo>
-                    <a:pt x="4655464" y="2848547"/>
-                  </a:lnTo>
-                  <a:lnTo>
-                    <a:pt x="4727086" y="2858267"/>
-                  </a:lnTo>
-                  <a:lnTo>
-                    <a:pt x="4798709" y="2867838"/>
-                  </a:lnTo>
-                  <a:lnTo>
-                    <a:pt x="4870331" y="2877263"/>
-                  </a:lnTo>
-                  <a:lnTo>
-                    <a:pt x="4941954" y="2886544"/>
-                  </a:lnTo>
-                  <a:lnTo>
-                    <a:pt x="5013576" y="2895683"/>
-                  </a:lnTo>
-                  <a:lnTo>
-                    <a:pt x="5085199" y="2904681"/>
-                  </a:lnTo>
-                  <a:lnTo>
-                    <a:pt x="5156821" y="2913542"/>
-                  </a:lnTo>
-                  <a:lnTo>
-                    <a:pt x="5228444" y="2922268"/>
-                  </a:lnTo>
-                  <a:lnTo>
-                    <a:pt x="5300066" y="2930860"/>
-                  </a:lnTo>
-                  <a:lnTo>
-                    <a:pt x="5371689" y="2939320"/>
-                  </a:lnTo>
-                  <a:lnTo>
-                    <a:pt x="5443311" y="2947651"/>
-                  </a:lnTo>
-                  <a:lnTo>
-                    <a:pt x="5514934" y="2955855"/>
-                  </a:lnTo>
-                  <a:lnTo>
-                    <a:pt x="5586557" y="2963933"/>
-                  </a:lnTo>
-                  <a:lnTo>
-                    <a:pt x="5658179" y="2971887"/>
-                  </a:lnTo>
-                  <a:lnTo>
-                    <a:pt x="5729802" y="2979720"/>
-                  </a:lnTo>
-                  <a:lnTo>
-                    <a:pt x="5801424" y="2987433"/>
-                  </a:lnTo>
-                  <a:lnTo>
-                    <a:pt x="5873047" y="2995027"/>
-                  </a:lnTo>
-                  <a:lnTo>
-                    <a:pt x="5944669" y="3002506"/>
-                  </a:lnTo>
-                  <a:lnTo>
-                    <a:pt x="6016292" y="3009870"/>
-                  </a:lnTo>
-                  <a:lnTo>
-                    <a:pt x="6087914" y="3017122"/>
-                  </a:lnTo>
-                  <a:lnTo>
-                    <a:pt x="6159537" y="3024262"/>
-                  </a:lnTo>
-                  <a:lnTo>
-                    <a:pt x="6231159" y="3031293"/>
-                  </a:lnTo>
-                  <a:lnTo>
-                    <a:pt x="6302782" y="3038217"/>
-                  </a:lnTo>
-                  <a:lnTo>
-                    <a:pt x="6374404" y="3045035"/>
-                  </a:lnTo>
-                  <a:lnTo>
-                    <a:pt x="6446027" y="3051748"/>
-                  </a:lnTo>
-                  <a:lnTo>
-                    <a:pt x="6517649" y="3058358"/>
-                  </a:lnTo>
-                  <a:lnTo>
-                    <a:pt x="6589272" y="3064868"/>
-                  </a:lnTo>
-                  <a:lnTo>
-                    <a:pt x="6660894" y="3071278"/>
-                  </a:lnTo>
-                  <a:lnTo>
-                    <a:pt x="6732517" y="3077589"/>
-                  </a:lnTo>
-                  <a:lnTo>
-                    <a:pt x="6804139" y="3083805"/>
-                  </a:lnTo>
-                  <a:lnTo>
-                    <a:pt x="6875762" y="3089925"/>
-                  </a:lnTo>
-                  <a:lnTo>
-                    <a:pt x="6947385" y="3095951"/>
-                  </a:lnTo>
-                  <a:lnTo>
-                    <a:pt x="7019007" y="3101885"/>
-                  </a:lnTo>
-                  <a:lnTo>
-                    <a:pt x="7090630" y="3107729"/>
-                  </a:lnTo>
-                  <a:lnTo>
-                    <a:pt x="7090630" y="3372621"/>
-                  </a:lnTo>
-                  <a:lnTo>
-                    <a:pt x="7019007" y="3368181"/>
-                  </a:lnTo>
-                  <a:lnTo>
-                    <a:pt x="6947385" y="3363563"/>
-                  </a:lnTo>
-                  <a:lnTo>
-                    <a:pt x="6875762" y="3358760"/>
-                  </a:lnTo>
-                  <a:lnTo>
-                    <a:pt x="6804139" y="3353766"/>
-                  </a:lnTo>
-                  <a:lnTo>
-                    <a:pt x="6732517" y="3348572"/>
-                  </a:lnTo>
-                  <a:lnTo>
-                    <a:pt x="6660894" y="3343171"/>
-                  </a:lnTo>
-                  <a:lnTo>
-                    <a:pt x="6589272" y="3337554"/>
-                  </a:lnTo>
-                  <a:lnTo>
-                    <a:pt x="6517649" y="3331712"/>
-                  </a:lnTo>
-                  <a:lnTo>
-                    <a:pt x="6446027" y="3325637"/>
-                  </a:lnTo>
-                  <a:lnTo>
-                    <a:pt x="6374404" y="3319320"/>
-                  </a:lnTo>
-                  <a:lnTo>
-                    <a:pt x="6302782" y="3312749"/>
-                  </a:lnTo>
-                  <a:lnTo>
-                    <a:pt x="6231159" y="3305917"/>
-                  </a:lnTo>
-                  <a:lnTo>
-                    <a:pt x="6159537" y="3298811"/>
-                  </a:lnTo>
-                  <a:lnTo>
-                    <a:pt x="6087914" y="3291421"/>
-                  </a:lnTo>
-                  <a:lnTo>
-                    <a:pt x="6016292" y="3283736"/>
-                  </a:lnTo>
-                  <a:lnTo>
-                    <a:pt x="5944669" y="3275744"/>
-                  </a:lnTo>
-                  <a:lnTo>
-                    <a:pt x="5873047" y="3267433"/>
-                  </a:lnTo>
-                  <a:lnTo>
-                    <a:pt x="5801424" y="3258789"/>
-                  </a:lnTo>
-                  <a:lnTo>
-                    <a:pt x="5729802" y="3249801"/>
-                  </a:lnTo>
-                  <a:lnTo>
-                    <a:pt x="5658179" y="3240453"/>
-                  </a:lnTo>
-                  <a:lnTo>
-                    <a:pt x="5586557" y="3230731"/>
-                  </a:lnTo>
-                  <a:lnTo>
-                    <a:pt x="5514934" y="3220621"/>
-                  </a:lnTo>
-                  <a:lnTo>
-                    <a:pt x="5443311" y="3210107"/>
-                  </a:lnTo>
-                  <a:lnTo>
-                    <a:pt x="5371689" y="3199173"/>
-                  </a:lnTo>
-                  <a:lnTo>
-                    <a:pt x="5300066" y="3187802"/>
-                  </a:lnTo>
-                  <a:lnTo>
-                    <a:pt x="5228444" y="3175976"/>
-                  </a:lnTo>
-                  <a:lnTo>
-                    <a:pt x="5156821" y="3163678"/>
-                  </a:lnTo>
-                  <a:lnTo>
-                    <a:pt x="5085199" y="3150889"/>
-                  </a:lnTo>
-                  <a:lnTo>
-                    <a:pt x="5013576" y="3137589"/>
-                  </a:lnTo>
-                  <a:lnTo>
-                    <a:pt x="4941954" y="3123757"/>
-                  </a:lnTo>
-                  <a:lnTo>
-                    <a:pt x="4870331" y="3109372"/>
-                  </a:lnTo>
-                  <a:lnTo>
-                    <a:pt x="4798709" y="3094413"/>
-                  </a:lnTo>
-                  <a:lnTo>
-                    <a:pt x="4727086" y="3078856"/>
-                  </a:lnTo>
-                  <a:lnTo>
-                    <a:pt x="4655464" y="3062677"/>
-                  </a:lnTo>
-                  <a:lnTo>
-                    <a:pt x="4583841" y="3045852"/>
-                  </a:lnTo>
-                  <a:lnTo>
-                    <a:pt x="4512219" y="3028355"/>
-                  </a:lnTo>
-                  <a:lnTo>
-                    <a:pt x="4440596" y="3010158"/>
-                  </a:lnTo>
-                  <a:lnTo>
-                    <a:pt x="4368974" y="2991234"/>
-                  </a:lnTo>
-                  <a:lnTo>
-                    <a:pt x="4297351" y="2971555"/>
-                  </a:lnTo>
-                  <a:lnTo>
-                    <a:pt x="4225729" y="2951088"/>
-                  </a:lnTo>
-                  <a:lnTo>
-                    <a:pt x="4154106" y="2929804"/>
-                  </a:lnTo>
-                  <a:lnTo>
-                    <a:pt x="4082483" y="2907670"/>
-                  </a:lnTo>
-                  <a:lnTo>
-                    <a:pt x="4010861" y="2884651"/>
-                  </a:lnTo>
-                  <a:lnTo>
-                    <a:pt x="3939238" y="2860712"/>
-                  </a:lnTo>
-                  <a:lnTo>
-                    <a:pt x="3867616" y="2835817"/>
-                  </a:lnTo>
-                  <a:lnTo>
-                    <a:pt x="3795993" y="2809927"/>
-                  </a:lnTo>
-                  <a:lnTo>
-                    <a:pt x="3724371" y="2783002"/>
-                  </a:lnTo>
-                  <a:lnTo>
-                    <a:pt x="3652748" y="2755002"/>
-                  </a:lnTo>
-                  <a:lnTo>
-                    <a:pt x="3581126" y="2725882"/>
-                  </a:lnTo>
-                  <a:lnTo>
-                    <a:pt x="3509503" y="2695599"/>
-                  </a:lnTo>
-                  <a:lnTo>
-                    <a:pt x="3437881" y="2664106"/>
-                  </a:lnTo>
-                  <a:lnTo>
-                    <a:pt x="3366258" y="2645333"/>
-                  </a:lnTo>
-                  <a:lnTo>
-                    <a:pt x="3294636" y="2632304"/>
-                  </a:lnTo>
-                  <a:lnTo>
-                    <a:pt x="3223013" y="2619073"/>
-                  </a:lnTo>
-                  <a:lnTo>
-                    <a:pt x="3151391" y="2605636"/>
-                  </a:lnTo>
-                  <a:lnTo>
-                    <a:pt x="3079768" y="2591990"/>
-                  </a:lnTo>
-                  <a:lnTo>
-                    <a:pt x="3008146" y="2578132"/>
-                  </a:lnTo>
-                  <a:lnTo>
-                    <a:pt x="2936523" y="2564058"/>
-                  </a:lnTo>
-                  <a:lnTo>
-                    <a:pt x="2864901" y="2549766"/>
-                  </a:lnTo>
-                  <a:lnTo>
-                    <a:pt x="2793278" y="2535252"/>
-                  </a:lnTo>
-                  <a:lnTo>
-                    <a:pt x="2721655" y="2520512"/>
-                  </a:lnTo>
-                  <a:lnTo>
-                    <a:pt x="2650033" y="2505543"/>
-                  </a:lnTo>
-                  <a:lnTo>
-                    <a:pt x="2578410" y="2490342"/>
-                  </a:lnTo>
-                  <a:lnTo>
-                    <a:pt x="2506788" y="2474904"/>
-                  </a:lnTo>
-                  <a:lnTo>
-                    <a:pt x="2435165" y="2459227"/>
-                  </a:lnTo>
-                  <a:lnTo>
-                    <a:pt x="2363543" y="2443305"/>
-                  </a:lnTo>
-                  <a:lnTo>
-                    <a:pt x="2291920" y="2427137"/>
-                  </a:lnTo>
-                  <a:lnTo>
-                    <a:pt x="2220298" y="2410717"/>
-                  </a:lnTo>
-                  <a:lnTo>
-                    <a:pt x="2148675" y="2394042"/>
-                  </a:lnTo>
-                  <a:lnTo>
-                    <a:pt x="2077053" y="2377108"/>
-                  </a:lnTo>
-                  <a:lnTo>
-                    <a:pt x="2005430" y="2359910"/>
-                  </a:lnTo>
-                  <a:lnTo>
-                    <a:pt x="1933808" y="2342446"/>
-                  </a:lnTo>
-                  <a:lnTo>
-                    <a:pt x="1862185" y="2324710"/>
-                  </a:lnTo>
-                  <a:lnTo>
-                    <a:pt x="1790563" y="2306698"/>
-                  </a:lnTo>
-                  <a:lnTo>
-                    <a:pt x="1718940" y="2288406"/>
-                  </a:lnTo>
-                  <a:lnTo>
-                    <a:pt x="1647318" y="2269831"/>
-                  </a:lnTo>
-                  <a:lnTo>
-                    <a:pt x="1575695" y="2250966"/>
-                  </a:lnTo>
-                  <a:lnTo>
-                    <a:pt x="1504073" y="2231809"/>
-                  </a:lnTo>
-                  <a:lnTo>
-                    <a:pt x="1432450" y="2212353"/>
-                  </a:lnTo>
-                  <a:lnTo>
-                    <a:pt x="1360827" y="2192596"/>
-                  </a:lnTo>
-                  <a:lnTo>
-                    <a:pt x="1289205" y="2172531"/>
-                  </a:lnTo>
-                  <a:lnTo>
-                    <a:pt x="1217582" y="2152154"/>
-                  </a:lnTo>
-                  <a:lnTo>
-                    <a:pt x="1145960" y="2131461"/>
-                  </a:lnTo>
-                  <a:lnTo>
-                    <a:pt x="1074337" y="2110446"/>
-                  </a:lnTo>
-                  <a:lnTo>
-                    <a:pt x="1002715" y="2089105"/>
-                  </a:lnTo>
-                  <a:lnTo>
-                    <a:pt x="931092" y="2067432"/>
-                  </a:lnTo>
-                  <a:lnTo>
-                    <a:pt x="859470" y="2045422"/>
-                  </a:lnTo>
-                  <a:lnTo>
-                    <a:pt x="787847" y="2023071"/>
-                  </a:lnTo>
-                  <a:lnTo>
-                    <a:pt x="716225" y="2000371"/>
-                  </a:lnTo>
-                  <a:lnTo>
-                    <a:pt x="644602" y="1977319"/>
-                  </a:lnTo>
-                  <a:lnTo>
-                    <a:pt x="572980" y="1953909"/>
-                  </a:lnTo>
-                  <a:lnTo>
-                    <a:pt x="501357" y="1930135"/>
-                  </a:lnTo>
-                  <a:lnTo>
-                    <a:pt x="429735" y="1905992"/>
-                  </a:lnTo>
-                  <a:lnTo>
-                    <a:pt x="358112" y="1881473"/>
-                  </a:lnTo>
-                  <a:lnTo>
-                    <a:pt x="286490" y="1856574"/>
-                  </a:lnTo>
-                  <a:lnTo>
-                    <a:pt x="214867" y="1831287"/>
-                  </a:lnTo>
-                  <a:lnTo>
-                    <a:pt x="143245" y="1805608"/>
-                  </a:lnTo>
-                  <a:lnTo>
-                    <a:pt x="71622" y="1779529"/>
-                  </a:lnTo>
-                  <a:lnTo>
-                    <a:pt x="0" y="1753045"/>
+                    <a:pt x="0" y="0"/>
+                  </a:lnTo>
+                  <a:lnTo>
+                    <a:pt x="0" y="0"/>
+                  </a:lnTo>
+                </a:path>
+              </a:pathLst>
+            </a:custGeom>
+            <a:ln w="13550" cap="flat">
+              <a:solidFill>
+                <a:srgbClr val="EBEBEB">
+                  <a:alpha val="100000"/>
+                </a:srgbClr>
+              </a:solidFill>
+              <a:prstDash val="solid"/>
+              <a:round/>
+            </a:ln>
+          </p:spPr>
+          <p:txBody>
+            <a:bodyPr/>
+            <a:lstStyle/>
+            <a:p/>
+          </p:txBody>
+        </p:sp>
+        <p:sp>
+          <p:nvSpPr>
+            <p:cNvPr id="21" name="pg21"/>
+            <p:cNvSpPr/>
+            <p:nvPr/>
+          </p:nvSpPr>
+          <p:spPr>
+            <a:xfrm>
+              <a:off x="1235312" y="2143092"/>
+              <a:ext cx="6964104" cy="1217099"/>
+            </a:xfrm>
+            <a:custGeom>
+              <a:avLst/>
+              <a:pathLst>
+                <a:path w="6964104" h="1217099">
+                  <a:moveTo>
+                    <a:pt x="778688" y="0"/>
+                  </a:moveTo>
+                  <a:lnTo>
+                    <a:pt x="844133" y="45061"/>
+                  </a:lnTo>
+                  <a:lnTo>
+                    <a:pt x="914478" y="91635"/>
+                  </a:lnTo>
+                  <a:lnTo>
+                    <a:pt x="984822" y="136420"/>
+                  </a:lnTo>
+                  <a:lnTo>
+                    <a:pt x="1055167" y="179483"/>
+                  </a:lnTo>
+                  <a:lnTo>
+                    <a:pt x="1125511" y="220892"/>
+                  </a:lnTo>
+                  <a:lnTo>
+                    <a:pt x="1195856" y="260710"/>
+                  </a:lnTo>
+                  <a:lnTo>
+                    <a:pt x="1266200" y="298998"/>
+                  </a:lnTo>
+                  <a:lnTo>
+                    <a:pt x="1336545" y="335815"/>
+                  </a:lnTo>
+                  <a:lnTo>
+                    <a:pt x="1406889" y="371218"/>
+                  </a:lnTo>
+                  <a:lnTo>
+                    <a:pt x="1477234" y="405260"/>
+                  </a:lnTo>
+                  <a:lnTo>
+                    <a:pt x="1547578" y="437994"/>
+                  </a:lnTo>
+                  <a:lnTo>
+                    <a:pt x="1617923" y="469470"/>
+                  </a:lnTo>
+                  <a:lnTo>
+                    <a:pt x="1688267" y="499737"/>
+                  </a:lnTo>
+                  <a:lnTo>
+                    <a:pt x="1758612" y="528841"/>
+                  </a:lnTo>
+                  <a:lnTo>
+                    <a:pt x="1828956" y="556827"/>
+                  </a:lnTo>
+                  <a:lnTo>
+                    <a:pt x="1899301" y="583737"/>
+                  </a:lnTo>
+                  <a:lnTo>
+                    <a:pt x="1969645" y="609613"/>
+                  </a:lnTo>
+                  <a:lnTo>
+                    <a:pt x="2039990" y="634496"/>
+                  </a:lnTo>
+                  <a:lnTo>
+                    <a:pt x="2110334" y="658422"/>
+                  </a:lnTo>
+                  <a:lnTo>
+                    <a:pt x="2180679" y="681429"/>
+                  </a:lnTo>
+                  <a:lnTo>
+                    <a:pt x="2251023" y="703551"/>
+                  </a:lnTo>
+                  <a:lnTo>
+                    <a:pt x="2321368" y="724824"/>
+                  </a:lnTo>
+                  <a:lnTo>
+                    <a:pt x="2391712" y="745280"/>
+                  </a:lnTo>
+                  <a:lnTo>
+                    <a:pt x="2462057" y="764949"/>
+                  </a:lnTo>
+                  <a:lnTo>
+                    <a:pt x="2532401" y="783863"/>
+                  </a:lnTo>
+                  <a:lnTo>
+                    <a:pt x="2602746" y="802050"/>
+                  </a:lnTo>
+                  <a:lnTo>
+                    <a:pt x="2673090" y="819538"/>
+                  </a:lnTo>
+                  <a:lnTo>
+                    <a:pt x="2743435" y="836355"/>
+                  </a:lnTo>
+                  <a:lnTo>
+                    <a:pt x="2813779" y="852525"/>
+                  </a:lnTo>
+                  <a:lnTo>
+                    <a:pt x="2884124" y="868074"/>
+                  </a:lnTo>
+                  <a:lnTo>
+                    <a:pt x="2954468" y="883025"/>
+                  </a:lnTo>
+                  <a:lnTo>
+                    <a:pt x="3024813" y="897402"/>
+                  </a:lnTo>
+                  <a:lnTo>
+                    <a:pt x="3095157" y="911226"/>
+                  </a:lnTo>
+                  <a:lnTo>
+                    <a:pt x="3165502" y="924520"/>
+                  </a:lnTo>
+                  <a:lnTo>
+                    <a:pt x="3235846" y="937302"/>
+                  </a:lnTo>
+                  <a:lnTo>
+                    <a:pt x="3306191" y="949594"/>
+                  </a:lnTo>
+                  <a:lnTo>
+                    <a:pt x="3376535" y="959268"/>
+                  </a:lnTo>
+                  <a:lnTo>
+                    <a:pt x="3446880" y="963827"/>
+                  </a:lnTo>
+                  <a:lnTo>
+                    <a:pt x="3517224" y="968317"/>
+                  </a:lnTo>
+                  <a:lnTo>
+                    <a:pt x="3587569" y="972737"/>
+                  </a:lnTo>
+                  <a:lnTo>
+                    <a:pt x="3657913" y="977090"/>
+                  </a:lnTo>
+                  <a:lnTo>
+                    <a:pt x="3728257" y="981377"/>
+                  </a:lnTo>
+                  <a:lnTo>
+                    <a:pt x="3798602" y="985597"/>
+                  </a:lnTo>
+                  <a:lnTo>
+                    <a:pt x="3868946" y="989754"/>
+                  </a:lnTo>
+                  <a:lnTo>
+                    <a:pt x="3939291" y="993846"/>
+                  </a:lnTo>
+                  <a:lnTo>
+                    <a:pt x="4009635" y="997876"/>
+                  </a:lnTo>
+                  <a:lnTo>
+                    <a:pt x="4079980" y="1001844"/>
+                  </a:lnTo>
+                  <a:lnTo>
+                    <a:pt x="4150324" y="1005752"/>
+                  </a:lnTo>
+                  <a:lnTo>
+                    <a:pt x="4220669" y="1009600"/>
+                  </a:lnTo>
+                  <a:lnTo>
+                    <a:pt x="4291013" y="1013389"/>
+                  </a:lnTo>
+                  <a:lnTo>
+                    <a:pt x="4361358" y="1017120"/>
+                  </a:lnTo>
+                  <a:lnTo>
+                    <a:pt x="4431702" y="1020793"/>
+                  </a:lnTo>
+                  <a:lnTo>
+                    <a:pt x="4502047" y="1024411"/>
+                  </a:lnTo>
+                  <a:lnTo>
+                    <a:pt x="4572391" y="1027973"/>
+                  </a:lnTo>
+                  <a:lnTo>
+                    <a:pt x="4642736" y="1031481"/>
+                  </a:lnTo>
+                  <a:lnTo>
+                    <a:pt x="4713080" y="1034935"/>
+                  </a:lnTo>
+                  <a:lnTo>
+                    <a:pt x="4783425" y="1038336"/>
+                  </a:lnTo>
+                  <a:lnTo>
+                    <a:pt x="4853769" y="1041685"/>
+                  </a:lnTo>
+                  <a:lnTo>
+                    <a:pt x="4924114" y="1044983"/>
+                  </a:lnTo>
+                  <a:lnTo>
+                    <a:pt x="4994458" y="1048231"/>
+                  </a:lnTo>
+                  <a:lnTo>
+                    <a:pt x="5064803" y="1051429"/>
+                  </a:lnTo>
+                  <a:lnTo>
+                    <a:pt x="5135147" y="1054577"/>
+                  </a:lnTo>
+                  <a:lnTo>
+                    <a:pt x="5205492" y="1057678"/>
+                  </a:lnTo>
+                  <a:lnTo>
+                    <a:pt x="5275836" y="1060731"/>
+                  </a:lnTo>
+                  <a:lnTo>
+                    <a:pt x="5346181" y="1063738"/>
+                  </a:lnTo>
+                  <a:lnTo>
+                    <a:pt x="5416525" y="1066698"/>
+                  </a:lnTo>
+                  <a:lnTo>
+                    <a:pt x="5486870" y="1069613"/>
+                  </a:lnTo>
+                  <a:lnTo>
+                    <a:pt x="5557214" y="1072484"/>
+                  </a:lnTo>
+                  <a:lnTo>
+                    <a:pt x="5627559" y="1075310"/>
+                  </a:lnTo>
+                  <a:lnTo>
+                    <a:pt x="5697903" y="1078094"/>
+                  </a:lnTo>
+                  <a:lnTo>
+                    <a:pt x="5768248" y="1080835"/>
+                  </a:lnTo>
+                  <a:lnTo>
+                    <a:pt x="5838592" y="1083533"/>
+                  </a:lnTo>
+                  <a:lnTo>
+                    <a:pt x="5908937" y="1086191"/>
+                  </a:lnTo>
+                  <a:lnTo>
+                    <a:pt x="5979281" y="1088808"/>
+                  </a:lnTo>
+                  <a:lnTo>
+                    <a:pt x="6049626" y="1091385"/>
+                  </a:lnTo>
+                  <a:lnTo>
+                    <a:pt x="6119970" y="1093922"/>
+                  </a:lnTo>
+                  <a:lnTo>
+                    <a:pt x="6190315" y="1096421"/>
+                  </a:lnTo>
+                  <a:lnTo>
+                    <a:pt x="6260659" y="1098881"/>
+                  </a:lnTo>
+                  <a:lnTo>
+                    <a:pt x="6331004" y="1101304"/>
+                  </a:lnTo>
+                  <a:lnTo>
+                    <a:pt x="6401348" y="1103689"/>
+                  </a:lnTo>
+                  <a:lnTo>
+                    <a:pt x="6471693" y="1106038"/>
+                  </a:lnTo>
+                  <a:lnTo>
+                    <a:pt x="6542037" y="1108352"/>
+                  </a:lnTo>
+                  <a:lnTo>
+                    <a:pt x="6612382" y="1110629"/>
+                  </a:lnTo>
+                  <a:lnTo>
+                    <a:pt x="6682726" y="1112872"/>
+                  </a:lnTo>
+                  <a:lnTo>
+                    <a:pt x="6753071" y="1115081"/>
+                  </a:lnTo>
+                  <a:lnTo>
+                    <a:pt x="6823415" y="1117256"/>
+                  </a:lnTo>
+                  <a:lnTo>
+                    <a:pt x="6893760" y="1119397"/>
+                  </a:lnTo>
+                  <a:lnTo>
+                    <a:pt x="6964104" y="1121506"/>
+                  </a:lnTo>
+                  <a:lnTo>
+                    <a:pt x="6964104" y="1217099"/>
+                  </a:lnTo>
+                  <a:lnTo>
+                    <a:pt x="6893760" y="1215497"/>
+                  </a:lnTo>
+                  <a:lnTo>
+                    <a:pt x="6823415" y="1213830"/>
+                  </a:lnTo>
+                  <a:lnTo>
+                    <a:pt x="6753071" y="1212097"/>
+                  </a:lnTo>
+                  <a:lnTo>
+                    <a:pt x="6682726" y="1210295"/>
+                  </a:lnTo>
+                  <a:lnTo>
+                    <a:pt x="6612382" y="1208421"/>
+                  </a:lnTo>
+                  <a:lnTo>
+                    <a:pt x="6542037" y="1206471"/>
+                  </a:lnTo>
+                  <a:lnTo>
+                    <a:pt x="6471693" y="1204444"/>
+                  </a:lnTo>
+                  <a:lnTo>
+                    <a:pt x="6401348" y="1202336"/>
+                  </a:lnTo>
+                  <a:lnTo>
+                    <a:pt x="6331004" y="1200144"/>
+                  </a:lnTo>
+                  <a:lnTo>
+                    <a:pt x="6260659" y="1197864"/>
+                  </a:lnTo>
+                  <a:lnTo>
+                    <a:pt x="6190315" y="1195493"/>
+                  </a:lnTo>
+                  <a:lnTo>
+                    <a:pt x="6119970" y="1193027"/>
+                  </a:lnTo>
+                  <a:lnTo>
+                    <a:pt x="6049626" y="1190463"/>
+                  </a:lnTo>
+                  <a:lnTo>
+                    <a:pt x="5979281" y="1187796"/>
+                  </a:lnTo>
+                  <a:lnTo>
+                    <a:pt x="5908937" y="1185023"/>
+                  </a:lnTo>
+                  <a:lnTo>
+                    <a:pt x="5838592" y="1182139"/>
+                  </a:lnTo>
+                  <a:lnTo>
+                    <a:pt x="5768248" y="1179139"/>
+                  </a:lnTo>
+                  <a:lnTo>
+                    <a:pt x="5697903" y="1176020"/>
+                  </a:lnTo>
+                  <a:lnTo>
+                    <a:pt x="5627559" y="1172776"/>
+                  </a:lnTo>
+                  <a:lnTo>
+                    <a:pt x="5557214" y="1169403"/>
+                  </a:lnTo>
+                  <a:lnTo>
+                    <a:pt x="5486870" y="1165894"/>
+                  </a:lnTo>
+                  <a:lnTo>
+                    <a:pt x="5416525" y="1162246"/>
+                  </a:lnTo>
+                  <a:lnTo>
+                    <a:pt x="5346181" y="1158452"/>
+                  </a:lnTo>
+                  <a:lnTo>
+                    <a:pt x="5275836" y="1154506"/>
+                  </a:lnTo>
+                  <a:lnTo>
+                    <a:pt x="5205492" y="1150402"/>
+                  </a:lnTo>
+                  <a:lnTo>
+                    <a:pt x="5135147" y="1146135"/>
+                  </a:lnTo>
+                  <a:lnTo>
+                    <a:pt x="5064803" y="1141697"/>
+                  </a:lnTo>
+                  <a:lnTo>
+                    <a:pt x="4994458" y="1137081"/>
+                  </a:lnTo>
+                  <a:lnTo>
+                    <a:pt x="4924114" y="1132282"/>
+                  </a:lnTo>
+                  <a:lnTo>
+                    <a:pt x="4853769" y="1127290"/>
+                  </a:lnTo>
+                  <a:lnTo>
+                    <a:pt x="4783425" y="1122099"/>
+                  </a:lnTo>
+                  <a:lnTo>
+                    <a:pt x="4713080" y="1116701"/>
+                  </a:lnTo>
+                  <a:lnTo>
+                    <a:pt x="4642736" y="1111086"/>
+                  </a:lnTo>
+                  <a:lnTo>
+                    <a:pt x="4572391" y="1105248"/>
+                  </a:lnTo>
+                  <a:lnTo>
+                    <a:pt x="4502047" y="1099176"/>
+                  </a:lnTo>
+                  <a:lnTo>
+                    <a:pt x="4431702" y="1092862"/>
+                  </a:lnTo>
+                  <a:lnTo>
+                    <a:pt x="4361358" y="1086295"/>
+                  </a:lnTo>
+                  <a:lnTo>
+                    <a:pt x="4291013" y="1079466"/>
+                  </a:lnTo>
+                  <a:lnTo>
+                    <a:pt x="4220669" y="1072364"/>
+                  </a:lnTo>
+                  <a:lnTo>
+                    <a:pt x="4150324" y="1064978"/>
+                  </a:lnTo>
+                  <a:lnTo>
+                    <a:pt x="4079980" y="1057297"/>
+                  </a:lnTo>
+                  <a:lnTo>
+                    <a:pt x="4009635" y="1049309"/>
+                  </a:lnTo>
+                  <a:lnTo>
+                    <a:pt x="3939291" y="1041002"/>
+                  </a:lnTo>
+                  <a:lnTo>
+                    <a:pt x="3868946" y="1032363"/>
+                  </a:lnTo>
+                  <a:lnTo>
+                    <a:pt x="3798602" y="1023379"/>
+                  </a:lnTo>
+                  <a:lnTo>
+                    <a:pt x="3728257" y="1014036"/>
+                  </a:lnTo>
+                  <a:lnTo>
+                    <a:pt x="3657913" y="1004320"/>
+                  </a:lnTo>
+                  <a:lnTo>
+                    <a:pt x="3587569" y="994215"/>
+                  </a:lnTo>
+                  <a:lnTo>
+                    <a:pt x="3517224" y="983706"/>
+                  </a:lnTo>
+                  <a:lnTo>
+                    <a:pt x="3446880" y="972778"/>
+                  </a:lnTo>
+                  <a:lnTo>
+                    <a:pt x="3376535" y="961413"/>
+                  </a:lnTo>
+                  <a:lnTo>
+                    <a:pt x="3306191" y="954638"/>
+                  </a:lnTo>
+                  <a:lnTo>
+                    <a:pt x="3235846" y="949936"/>
+                  </a:lnTo>
+                  <a:lnTo>
+                    <a:pt x="3165502" y="945161"/>
+                  </a:lnTo>
+                  <a:lnTo>
+                    <a:pt x="3095157" y="940312"/>
+                  </a:lnTo>
+                  <a:lnTo>
+                    <a:pt x="3024813" y="935388"/>
+                  </a:lnTo>
+                  <a:lnTo>
+                    <a:pt x="2954468" y="930387"/>
+                  </a:lnTo>
+                  <a:lnTo>
+                    <a:pt x="2884124" y="925308"/>
+                  </a:lnTo>
+                  <a:lnTo>
+                    <a:pt x="2813779" y="920150"/>
+                  </a:lnTo>
+                  <a:lnTo>
+                    <a:pt x="2743435" y="914912"/>
+                  </a:lnTo>
+                  <a:lnTo>
+                    <a:pt x="2673090" y="909593"/>
+                  </a:lnTo>
+                  <a:lnTo>
+                    <a:pt x="2602746" y="904191"/>
+                  </a:lnTo>
+                  <a:lnTo>
+                    <a:pt x="2532401" y="898705"/>
+                  </a:lnTo>
+                  <a:lnTo>
+                    <a:pt x="2462057" y="893134"/>
+                  </a:lnTo>
+                  <a:lnTo>
+                    <a:pt x="2391712" y="887477"/>
+                  </a:lnTo>
+                  <a:lnTo>
+                    <a:pt x="2321368" y="881731"/>
+                  </a:lnTo>
+                  <a:lnTo>
+                    <a:pt x="2251023" y="875896"/>
+                  </a:lnTo>
+                  <a:lnTo>
+                    <a:pt x="2180679" y="869971"/>
+                  </a:lnTo>
+                  <a:lnTo>
+                    <a:pt x="2110334" y="863953"/>
+                  </a:lnTo>
+                  <a:lnTo>
+                    <a:pt x="2039990" y="857842"/>
+                  </a:lnTo>
+                  <a:lnTo>
+                    <a:pt x="1969645" y="851636"/>
+                  </a:lnTo>
+                  <a:lnTo>
+                    <a:pt x="1899301" y="845333"/>
+                  </a:lnTo>
+                  <a:lnTo>
+                    <a:pt x="1828956" y="838933"/>
+                  </a:lnTo>
+                  <a:lnTo>
+                    <a:pt x="1758612" y="832433"/>
+                  </a:lnTo>
+                  <a:lnTo>
+                    <a:pt x="1688267" y="825832"/>
+                  </a:lnTo>
+                  <a:lnTo>
+                    <a:pt x="1617923" y="819128"/>
+                  </a:lnTo>
+                  <a:lnTo>
+                    <a:pt x="1547578" y="812320"/>
+                  </a:lnTo>
+                  <a:lnTo>
+                    <a:pt x="1477234" y="805407"/>
+                  </a:lnTo>
+                  <a:lnTo>
+                    <a:pt x="1406889" y="798386"/>
+                  </a:lnTo>
+                  <a:lnTo>
+                    <a:pt x="1336545" y="791256"/>
+                  </a:lnTo>
+                  <a:lnTo>
+                    <a:pt x="1266200" y="784015"/>
+                  </a:lnTo>
+                  <a:lnTo>
+                    <a:pt x="1195856" y="776662"/>
+                  </a:lnTo>
+                  <a:lnTo>
+                    <a:pt x="1125511" y="769194"/>
+                  </a:lnTo>
+                  <a:lnTo>
+                    <a:pt x="1055167" y="761610"/>
+                  </a:lnTo>
+                  <a:lnTo>
+                    <a:pt x="984822" y="753909"/>
+                  </a:lnTo>
+                  <a:lnTo>
+                    <a:pt x="914478" y="746087"/>
+                  </a:lnTo>
+                  <a:lnTo>
+                    <a:pt x="844133" y="738144"/>
+                  </a:lnTo>
+                  <a:lnTo>
+                    <a:pt x="773789" y="730078"/>
+                  </a:lnTo>
+                  <a:lnTo>
+                    <a:pt x="703444" y="721887"/>
+                  </a:lnTo>
+                  <a:lnTo>
+                    <a:pt x="633100" y="713568"/>
+                  </a:lnTo>
+                  <a:lnTo>
+                    <a:pt x="562755" y="705120"/>
+                  </a:lnTo>
+                  <a:lnTo>
+                    <a:pt x="492411" y="696540"/>
+                  </a:lnTo>
+                  <a:lnTo>
+                    <a:pt x="422066" y="687827"/>
+                  </a:lnTo>
+                  <a:lnTo>
+                    <a:pt x="351722" y="678979"/>
+                  </a:lnTo>
+                  <a:lnTo>
+                    <a:pt x="281377" y="669994"/>
+                  </a:lnTo>
+                  <a:lnTo>
+                    <a:pt x="211033" y="660868"/>
+                  </a:lnTo>
+                  <a:lnTo>
+                    <a:pt x="140688" y="651601"/>
+                  </a:lnTo>
+                  <a:lnTo>
+                    <a:pt x="70344" y="642190"/>
+                  </a:lnTo>
+                  <a:lnTo>
+                    <a:pt x="0" y="632633"/>
                   </a:lnTo>
                   <a:close/>
                 </a:path>
@@ -3551,610 +3586,285 @@
         </p:sp>
         <p:sp>
           <p:nvSpPr>
-            <p:cNvPr id="21" name="pl21"/>
-            <p:cNvSpPr/>
-            <p:nvPr/>
-          </p:nvSpPr>
-          <p:spPr>
-            <a:xfrm>
-              <a:off x="1964885" y="2073503"/>
-              <a:ext cx="6297794" cy="3107729"/>
-            </a:xfrm>
-            <a:custGeom>
-              <a:avLst/>
-              <a:pathLst>
-                <a:path w="6297794" h="3107729">
-                  <a:moveTo>
-                    <a:pt x="0" y="0"/>
-                  </a:moveTo>
-                  <a:lnTo>
-                    <a:pt x="66634" y="124867"/>
-                  </a:lnTo>
-                  <a:lnTo>
-                    <a:pt x="138257" y="253925"/>
-                  </a:lnTo>
-                  <a:lnTo>
-                    <a:pt x="209879" y="378024"/>
-                  </a:lnTo>
-                  <a:lnTo>
-                    <a:pt x="281502" y="497355"/>
-                  </a:lnTo>
-                  <a:lnTo>
-                    <a:pt x="353124" y="612100"/>
-                  </a:lnTo>
-                  <a:lnTo>
-                    <a:pt x="424747" y="722437"/>
-                  </a:lnTo>
-                  <a:lnTo>
-                    <a:pt x="496369" y="828535"/>
-                  </a:lnTo>
-                  <a:lnTo>
-                    <a:pt x="567992" y="930555"/>
-                  </a:lnTo>
-                  <a:lnTo>
-                    <a:pt x="639614" y="1028656"/>
-                  </a:lnTo>
-                  <a:lnTo>
-                    <a:pt x="711237" y="1122988"/>
-                  </a:lnTo>
-                  <a:lnTo>
-                    <a:pt x="782859" y="1213695"/>
-                  </a:lnTo>
-                  <a:lnTo>
-                    <a:pt x="854482" y="1300917"/>
-                  </a:lnTo>
-                  <a:lnTo>
-                    <a:pt x="926104" y="1384787"/>
-                  </a:lnTo>
-                  <a:lnTo>
-                    <a:pt x="997727" y="1465435"/>
-                  </a:lnTo>
-                  <a:lnTo>
-                    <a:pt x="1069350" y="1542985"/>
-                  </a:lnTo>
-                  <a:lnTo>
-                    <a:pt x="1140972" y="1617554"/>
-                  </a:lnTo>
-                  <a:lnTo>
-                    <a:pt x="1212595" y="1689259"/>
-                  </a:lnTo>
-                  <a:lnTo>
-                    <a:pt x="1284217" y="1758208"/>
-                  </a:lnTo>
-                  <a:lnTo>
-                    <a:pt x="1355840" y="1824508"/>
-                  </a:lnTo>
-                  <a:lnTo>
-                    <a:pt x="1427462" y="1888261"/>
-                  </a:lnTo>
-                  <a:lnTo>
-                    <a:pt x="1499085" y="1949564"/>
-                  </a:lnTo>
-                  <a:lnTo>
-                    <a:pt x="1570707" y="2008512"/>
-                  </a:lnTo>
-                  <a:lnTo>
-                    <a:pt x="1642330" y="2065194"/>
-                  </a:lnTo>
-                  <a:lnTo>
-                    <a:pt x="1713952" y="2119699"/>
-                  </a:lnTo>
-                  <a:lnTo>
-                    <a:pt x="1785575" y="2172110"/>
-                  </a:lnTo>
-                  <a:lnTo>
-                    <a:pt x="1857197" y="2222507"/>
-                  </a:lnTo>
-                  <a:lnTo>
-                    <a:pt x="1928820" y="2270967"/>
-                  </a:lnTo>
-                  <a:lnTo>
-                    <a:pt x="2000442" y="2317565"/>
-                  </a:lnTo>
-                  <a:lnTo>
-                    <a:pt x="2072065" y="2362373"/>
-                  </a:lnTo>
-                  <a:lnTo>
-                    <a:pt x="2143687" y="2405460"/>
-                  </a:lnTo>
-                  <a:lnTo>
-                    <a:pt x="2215310" y="2446891"/>
-                  </a:lnTo>
-                  <a:lnTo>
-                    <a:pt x="2286932" y="2486730"/>
-                  </a:lnTo>
-                  <a:lnTo>
-                    <a:pt x="2358555" y="2525038"/>
-                  </a:lnTo>
-                  <a:lnTo>
-                    <a:pt x="2430178" y="2561874"/>
-                  </a:lnTo>
-                  <a:lnTo>
-                    <a:pt x="2501800" y="2597295"/>
-                  </a:lnTo>
-                  <a:lnTo>
-                    <a:pt x="2573423" y="2631355"/>
-                  </a:lnTo>
-                  <a:lnTo>
-                    <a:pt x="2645045" y="2658163"/>
-                  </a:lnTo>
-                  <a:lnTo>
-                    <a:pt x="2716668" y="2670797"/>
-                  </a:lnTo>
-                  <a:lnTo>
-                    <a:pt x="2788290" y="2683237"/>
-                  </a:lnTo>
-                  <a:lnTo>
-                    <a:pt x="2859913" y="2695486"/>
-                  </a:lnTo>
-                  <a:lnTo>
-                    <a:pt x="2931535" y="2707549"/>
-                  </a:lnTo>
-                  <a:lnTo>
-                    <a:pt x="3003158" y="2719426"/>
-                  </a:lnTo>
-                  <a:lnTo>
-                    <a:pt x="3074780" y="2731122"/>
-                  </a:lnTo>
-                  <a:lnTo>
-                    <a:pt x="3146403" y="2742639"/>
-                  </a:lnTo>
-                  <a:lnTo>
-                    <a:pt x="3218025" y="2753980"/>
-                  </a:lnTo>
-                  <a:lnTo>
-                    <a:pt x="3289648" y="2765147"/>
-                  </a:lnTo>
-                  <a:lnTo>
-                    <a:pt x="3361270" y="2776143"/>
-                  </a:lnTo>
-                  <a:lnTo>
-                    <a:pt x="3432893" y="2786971"/>
-                  </a:lnTo>
-                  <a:lnTo>
-                    <a:pt x="3504515" y="2797634"/>
-                  </a:lnTo>
-                  <a:lnTo>
-                    <a:pt x="3576138" y="2808133"/>
-                  </a:lnTo>
-                  <a:lnTo>
-                    <a:pt x="3647760" y="2818471"/>
-                  </a:lnTo>
-                  <a:lnTo>
-                    <a:pt x="3719383" y="2828651"/>
-                  </a:lnTo>
-                  <a:lnTo>
-                    <a:pt x="3791006" y="2838676"/>
-                  </a:lnTo>
-                  <a:lnTo>
-                    <a:pt x="3862628" y="2848547"/>
-                  </a:lnTo>
-                  <a:lnTo>
-                    <a:pt x="3934251" y="2858267"/>
-                  </a:lnTo>
-                  <a:lnTo>
-                    <a:pt x="4005873" y="2867838"/>
-                  </a:lnTo>
-                  <a:lnTo>
-                    <a:pt x="4077496" y="2877263"/>
-                  </a:lnTo>
-                  <a:lnTo>
-                    <a:pt x="4149118" y="2886544"/>
-                  </a:lnTo>
-                  <a:lnTo>
-                    <a:pt x="4220741" y="2895683"/>
-                  </a:lnTo>
-                  <a:lnTo>
-                    <a:pt x="4292363" y="2904681"/>
-                  </a:lnTo>
-                  <a:lnTo>
-                    <a:pt x="4363986" y="2913542"/>
-                  </a:lnTo>
-                  <a:lnTo>
-                    <a:pt x="4435608" y="2922268"/>
-                  </a:lnTo>
-                  <a:lnTo>
-                    <a:pt x="4507231" y="2930860"/>
-                  </a:lnTo>
-                  <a:lnTo>
-                    <a:pt x="4578853" y="2939320"/>
-                  </a:lnTo>
-                  <a:lnTo>
-                    <a:pt x="4650476" y="2947651"/>
-                  </a:lnTo>
-                  <a:lnTo>
-                    <a:pt x="4722098" y="2955855"/>
-                  </a:lnTo>
-                  <a:lnTo>
-                    <a:pt x="4793721" y="2963933"/>
-                  </a:lnTo>
-                  <a:lnTo>
-                    <a:pt x="4865343" y="2971887"/>
-                  </a:lnTo>
-                  <a:lnTo>
-                    <a:pt x="4936966" y="2979720"/>
-                  </a:lnTo>
-                  <a:lnTo>
-                    <a:pt x="5008588" y="2987433"/>
-                  </a:lnTo>
-                  <a:lnTo>
-                    <a:pt x="5080211" y="2995027"/>
-                  </a:lnTo>
-                  <a:lnTo>
-                    <a:pt x="5151834" y="3002506"/>
-                  </a:lnTo>
-                  <a:lnTo>
-                    <a:pt x="5223456" y="3009870"/>
-                  </a:lnTo>
-                  <a:lnTo>
-                    <a:pt x="5295079" y="3017122"/>
-                  </a:lnTo>
-                  <a:lnTo>
-                    <a:pt x="5366701" y="3024262"/>
-                  </a:lnTo>
-                  <a:lnTo>
-                    <a:pt x="5438324" y="3031293"/>
-                  </a:lnTo>
-                  <a:lnTo>
-                    <a:pt x="5509946" y="3038217"/>
-                  </a:lnTo>
-                  <a:lnTo>
-                    <a:pt x="5581569" y="3045035"/>
-                  </a:lnTo>
-                  <a:lnTo>
-                    <a:pt x="5653191" y="3051748"/>
-                  </a:lnTo>
-                  <a:lnTo>
-                    <a:pt x="5724814" y="3058358"/>
-                  </a:lnTo>
-                  <a:lnTo>
-                    <a:pt x="5796436" y="3064868"/>
-                  </a:lnTo>
-                  <a:lnTo>
-                    <a:pt x="5868059" y="3071278"/>
-                  </a:lnTo>
-                  <a:lnTo>
-                    <a:pt x="5939681" y="3077589"/>
-                  </a:lnTo>
-                  <a:lnTo>
-                    <a:pt x="6011304" y="3083805"/>
-                  </a:lnTo>
-                  <a:lnTo>
-                    <a:pt x="6082926" y="3089925"/>
-                  </a:lnTo>
-                  <a:lnTo>
-                    <a:pt x="6154549" y="3095951"/>
-                  </a:lnTo>
-                  <a:lnTo>
-                    <a:pt x="6226171" y="3101885"/>
-                  </a:lnTo>
-                  <a:lnTo>
-                    <a:pt x="6297794" y="3107729"/>
-                  </a:lnTo>
-                </a:path>
-              </a:pathLst>
-            </a:custGeom>
-          </p:spPr>
-          <p:txBody>
-            <a:bodyPr/>
-            <a:lstStyle/>
-            <a:p/>
-          </p:txBody>
-        </p:sp>
-        <p:sp>
-          <p:nvSpPr>
             <p:cNvPr id="22" name="pl22"/>
             <p:cNvSpPr/>
             <p:nvPr/>
           </p:nvSpPr>
           <p:spPr>
             <a:xfrm>
-              <a:off x="1172049" y="3826548"/>
-              <a:ext cx="7090630" cy="1619575"/>
+              <a:off x="2014000" y="2143092"/>
+              <a:ext cx="6185416" cy="1121506"/>
             </a:xfrm>
             <a:custGeom>
               <a:avLst/>
               <a:pathLst>
-                <a:path w="7090630" h="1619575">
+                <a:path w="6185416" h="1121506">
                   <a:moveTo>
-                    <a:pt x="7090630" y="1619575"/>
+                    <a:pt x="0" y="0"/>
                   </a:moveTo>
                   <a:lnTo>
-                    <a:pt x="7019007" y="1615135"/>
-                  </a:lnTo>
-                  <a:lnTo>
-                    <a:pt x="6947385" y="1610517"/>
-                  </a:lnTo>
-                  <a:lnTo>
-                    <a:pt x="6875762" y="1605714"/>
-                  </a:lnTo>
-                  <a:lnTo>
-                    <a:pt x="6804139" y="1600720"/>
-                  </a:lnTo>
-                  <a:lnTo>
-                    <a:pt x="6732517" y="1595526"/>
-                  </a:lnTo>
-                  <a:lnTo>
-                    <a:pt x="6660894" y="1590125"/>
-                  </a:lnTo>
-                  <a:lnTo>
-                    <a:pt x="6589272" y="1584508"/>
-                  </a:lnTo>
-                  <a:lnTo>
-                    <a:pt x="6517649" y="1578666"/>
-                  </a:lnTo>
-                  <a:lnTo>
-                    <a:pt x="6446027" y="1572591"/>
-                  </a:lnTo>
-                  <a:lnTo>
-                    <a:pt x="6374404" y="1566274"/>
-                  </a:lnTo>
-                  <a:lnTo>
-                    <a:pt x="6302782" y="1559704"/>
-                  </a:lnTo>
-                  <a:lnTo>
-                    <a:pt x="6231159" y="1552871"/>
-                  </a:lnTo>
-                  <a:lnTo>
-                    <a:pt x="6159537" y="1545765"/>
-                  </a:lnTo>
-                  <a:lnTo>
-                    <a:pt x="6087914" y="1538375"/>
-                  </a:lnTo>
-                  <a:lnTo>
-                    <a:pt x="6016292" y="1530690"/>
-                  </a:lnTo>
-                  <a:lnTo>
-                    <a:pt x="5944669" y="1522698"/>
-                  </a:lnTo>
-                  <a:lnTo>
-                    <a:pt x="5873047" y="1514387"/>
-                  </a:lnTo>
-                  <a:lnTo>
-                    <a:pt x="5801424" y="1505743"/>
-                  </a:lnTo>
-                  <a:lnTo>
-                    <a:pt x="5729802" y="1496755"/>
-                  </a:lnTo>
-                  <a:lnTo>
-                    <a:pt x="5658179" y="1487407"/>
-                  </a:lnTo>
-                  <a:lnTo>
-                    <a:pt x="5586557" y="1477685"/>
-                  </a:lnTo>
-                  <a:lnTo>
-                    <a:pt x="5514934" y="1467575"/>
-                  </a:lnTo>
-                  <a:lnTo>
-                    <a:pt x="5443311" y="1457061"/>
-                  </a:lnTo>
-                  <a:lnTo>
-                    <a:pt x="5371689" y="1446127"/>
-                  </a:lnTo>
-                  <a:lnTo>
-                    <a:pt x="5300066" y="1434756"/>
-                  </a:lnTo>
-                  <a:lnTo>
-                    <a:pt x="5228444" y="1422930"/>
-                  </a:lnTo>
-                  <a:lnTo>
-                    <a:pt x="5156821" y="1410632"/>
-                  </a:lnTo>
-                  <a:lnTo>
-                    <a:pt x="5085199" y="1397843"/>
-                  </a:lnTo>
-                  <a:lnTo>
-                    <a:pt x="5013576" y="1384543"/>
-                  </a:lnTo>
-                  <a:lnTo>
-                    <a:pt x="4941954" y="1370711"/>
-                  </a:lnTo>
-                  <a:lnTo>
-                    <a:pt x="4870331" y="1356326"/>
-                  </a:lnTo>
-                  <a:lnTo>
-                    <a:pt x="4798709" y="1341367"/>
-                  </a:lnTo>
-                  <a:lnTo>
-                    <a:pt x="4727086" y="1325810"/>
-                  </a:lnTo>
-                  <a:lnTo>
-                    <a:pt x="4655464" y="1309631"/>
-                  </a:lnTo>
-                  <a:lnTo>
-                    <a:pt x="4583841" y="1292806"/>
-                  </a:lnTo>
-                  <a:lnTo>
-                    <a:pt x="4512219" y="1275309"/>
-                  </a:lnTo>
-                  <a:lnTo>
-                    <a:pt x="4440596" y="1257112"/>
-                  </a:lnTo>
-                  <a:lnTo>
-                    <a:pt x="4368974" y="1238188"/>
-                  </a:lnTo>
-                  <a:lnTo>
-                    <a:pt x="4297351" y="1218509"/>
-                  </a:lnTo>
-                  <a:lnTo>
-                    <a:pt x="4225729" y="1198042"/>
-                  </a:lnTo>
-                  <a:lnTo>
-                    <a:pt x="4154106" y="1176758"/>
-                  </a:lnTo>
-                  <a:lnTo>
-                    <a:pt x="4082483" y="1154624"/>
-                  </a:lnTo>
-                  <a:lnTo>
-                    <a:pt x="4010861" y="1131605"/>
-                  </a:lnTo>
-                  <a:lnTo>
-                    <a:pt x="3939238" y="1107666"/>
-                  </a:lnTo>
-                  <a:lnTo>
-                    <a:pt x="3867616" y="1082771"/>
-                  </a:lnTo>
-                  <a:lnTo>
-                    <a:pt x="3795993" y="1056881"/>
-                  </a:lnTo>
-                  <a:lnTo>
-                    <a:pt x="3724371" y="1029956"/>
-                  </a:lnTo>
-                  <a:lnTo>
-                    <a:pt x="3652748" y="1001956"/>
-                  </a:lnTo>
-                  <a:lnTo>
-                    <a:pt x="3581126" y="972836"/>
-                  </a:lnTo>
-                  <a:lnTo>
-                    <a:pt x="3509503" y="942553"/>
-                  </a:lnTo>
-                  <a:lnTo>
-                    <a:pt x="3437881" y="911061"/>
-                  </a:lnTo>
-                  <a:lnTo>
-                    <a:pt x="3366258" y="892288"/>
-                  </a:lnTo>
-                  <a:lnTo>
-                    <a:pt x="3294636" y="879258"/>
-                  </a:lnTo>
-                  <a:lnTo>
-                    <a:pt x="3223013" y="866027"/>
-                  </a:lnTo>
-                  <a:lnTo>
-                    <a:pt x="3151391" y="852590"/>
-                  </a:lnTo>
-                  <a:lnTo>
-                    <a:pt x="3079768" y="838944"/>
-                  </a:lnTo>
-                  <a:lnTo>
-                    <a:pt x="3008146" y="825086"/>
-                  </a:lnTo>
-                  <a:lnTo>
-                    <a:pt x="2936523" y="811012"/>
-                  </a:lnTo>
-                  <a:lnTo>
-                    <a:pt x="2864901" y="796720"/>
-                  </a:lnTo>
-                  <a:lnTo>
-                    <a:pt x="2793278" y="782206"/>
-                  </a:lnTo>
-                  <a:lnTo>
-                    <a:pt x="2721655" y="767466"/>
-                  </a:lnTo>
-                  <a:lnTo>
-                    <a:pt x="2650033" y="752497"/>
-                  </a:lnTo>
-                  <a:lnTo>
-                    <a:pt x="2578410" y="737296"/>
-                  </a:lnTo>
-                  <a:lnTo>
-                    <a:pt x="2506788" y="721858"/>
-                  </a:lnTo>
-                  <a:lnTo>
-                    <a:pt x="2435165" y="706181"/>
-                  </a:lnTo>
-                  <a:lnTo>
-                    <a:pt x="2363543" y="690259"/>
-                  </a:lnTo>
-                  <a:lnTo>
-                    <a:pt x="2291920" y="674091"/>
-                  </a:lnTo>
-                  <a:lnTo>
-                    <a:pt x="2220298" y="657671"/>
-                  </a:lnTo>
-                  <a:lnTo>
-                    <a:pt x="2148675" y="640996"/>
-                  </a:lnTo>
-                  <a:lnTo>
-                    <a:pt x="2077053" y="624062"/>
-                  </a:lnTo>
-                  <a:lnTo>
-                    <a:pt x="2005430" y="606864"/>
-                  </a:lnTo>
-                  <a:lnTo>
-                    <a:pt x="1933808" y="589400"/>
-                  </a:lnTo>
-                  <a:lnTo>
-                    <a:pt x="1862185" y="571664"/>
-                  </a:lnTo>
-                  <a:lnTo>
-                    <a:pt x="1790563" y="553652"/>
-                  </a:lnTo>
-                  <a:lnTo>
-                    <a:pt x="1718940" y="535360"/>
-                  </a:lnTo>
-                  <a:lnTo>
-                    <a:pt x="1647318" y="516785"/>
-                  </a:lnTo>
-                  <a:lnTo>
-                    <a:pt x="1575695" y="497920"/>
-                  </a:lnTo>
-                  <a:lnTo>
-                    <a:pt x="1504073" y="478763"/>
-                  </a:lnTo>
-                  <a:lnTo>
-                    <a:pt x="1432450" y="459307"/>
-                  </a:lnTo>
-                  <a:lnTo>
-                    <a:pt x="1360827" y="439550"/>
-                  </a:lnTo>
-                  <a:lnTo>
-                    <a:pt x="1289205" y="419485"/>
-                  </a:lnTo>
-                  <a:lnTo>
-                    <a:pt x="1217582" y="399108"/>
-                  </a:lnTo>
-                  <a:lnTo>
-                    <a:pt x="1145960" y="378415"/>
-                  </a:lnTo>
-                  <a:lnTo>
-                    <a:pt x="1074337" y="357400"/>
-                  </a:lnTo>
-                  <a:lnTo>
-                    <a:pt x="1002715" y="336059"/>
-                  </a:lnTo>
-                  <a:lnTo>
-                    <a:pt x="931092" y="314386"/>
-                  </a:lnTo>
-                  <a:lnTo>
-                    <a:pt x="859470" y="292376"/>
-                  </a:lnTo>
-                  <a:lnTo>
-                    <a:pt x="787847" y="270025"/>
-                  </a:lnTo>
-                  <a:lnTo>
-                    <a:pt x="716225" y="247325"/>
-                  </a:lnTo>
-                  <a:lnTo>
-                    <a:pt x="644602" y="224274"/>
-                  </a:lnTo>
-                  <a:lnTo>
-                    <a:pt x="572980" y="200863"/>
-                  </a:lnTo>
-                  <a:lnTo>
-                    <a:pt x="501357" y="177089"/>
-                  </a:lnTo>
-                  <a:lnTo>
-                    <a:pt x="429735" y="152946"/>
-                  </a:lnTo>
-                  <a:lnTo>
-                    <a:pt x="358112" y="128428"/>
-                  </a:lnTo>
-                  <a:lnTo>
-                    <a:pt x="286490" y="103528"/>
-                  </a:lnTo>
-                  <a:lnTo>
-                    <a:pt x="214867" y="78241"/>
-                  </a:lnTo>
-                  <a:lnTo>
-                    <a:pt x="143245" y="52562"/>
-                  </a:lnTo>
-                  <a:lnTo>
-                    <a:pt x="71622" y="26483"/>
-                  </a:lnTo>
-                  <a:lnTo>
-                    <a:pt x="0" y="0"/>
+                    <a:pt x="65445" y="45061"/>
+                  </a:lnTo>
+                  <a:lnTo>
+                    <a:pt x="135790" y="91635"/>
+                  </a:lnTo>
+                  <a:lnTo>
+                    <a:pt x="206134" y="136420"/>
+                  </a:lnTo>
+                  <a:lnTo>
+                    <a:pt x="276479" y="179483"/>
+                  </a:lnTo>
+                  <a:lnTo>
+                    <a:pt x="346823" y="220892"/>
+                  </a:lnTo>
+                  <a:lnTo>
+                    <a:pt x="417168" y="260710"/>
+                  </a:lnTo>
+                  <a:lnTo>
+                    <a:pt x="487512" y="298998"/>
+                  </a:lnTo>
+                  <a:lnTo>
+                    <a:pt x="557857" y="335815"/>
+                  </a:lnTo>
+                  <a:lnTo>
+                    <a:pt x="628201" y="371218"/>
+                  </a:lnTo>
+                  <a:lnTo>
+                    <a:pt x="698546" y="405260"/>
+                  </a:lnTo>
+                  <a:lnTo>
+                    <a:pt x="768890" y="437994"/>
+                  </a:lnTo>
+                  <a:lnTo>
+                    <a:pt x="839235" y="469470"/>
+                  </a:lnTo>
+                  <a:lnTo>
+                    <a:pt x="909579" y="499737"/>
+                  </a:lnTo>
+                  <a:lnTo>
+                    <a:pt x="979923" y="528841"/>
+                  </a:lnTo>
+                  <a:lnTo>
+                    <a:pt x="1050268" y="556827"/>
+                  </a:lnTo>
+                  <a:lnTo>
+                    <a:pt x="1120612" y="583737"/>
+                  </a:lnTo>
+                  <a:lnTo>
+                    <a:pt x="1190957" y="609613"/>
+                  </a:lnTo>
+                  <a:lnTo>
+                    <a:pt x="1261301" y="634496"/>
+                  </a:lnTo>
+                  <a:lnTo>
+                    <a:pt x="1331646" y="658422"/>
+                  </a:lnTo>
+                  <a:lnTo>
+                    <a:pt x="1401990" y="681429"/>
+                  </a:lnTo>
+                  <a:lnTo>
+                    <a:pt x="1472335" y="703551"/>
+                  </a:lnTo>
+                  <a:lnTo>
+                    <a:pt x="1542679" y="724824"/>
+                  </a:lnTo>
+                  <a:lnTo>
+                    <a:pt x="1613024" y="745280"/>
+                  </a:lnTo>
+                  <a:lnTo>
+                    <a:pt x="1683368" y="764949"/>
+                  </a:lnTo>
+                  <a:lnTo>
+                    <a:pt x="1753713" y="783863"/>
+                  </a:lnTo>
+                  <a:lnTo>
+                    <a:pt x="1824057" y="802050"/>
+                  </a:lnTo>
+                  <a:lnTo>
+                    <a:pt x="1894402" y="819538"/>
+                  </a:lnTo>
+                  <a:lnTo>
+                    <a:pt x="1964746" y="836355"/>
+                  </a:lnTo>
+                  <a:lnTo>
+                    <a:pt x="2035091" y="852525"/>
+                  </a:lnTo>
+                  <a:lnTo>
+                    <a:pt x="2105435" y="868074"/>
+                  </a:lnTo>
+                  <a:lnTo>
+                    <a:pt x="2175780" y="883025"/>
+                  </a:lnTo>
+                  <a:lnTo>
+                    <a:pt x="2246124" y="897402"/>
+                  </a:lnTo>
+                  <a:lnTo>
+                    <a:pt x="2316469" y="911226"/>
+                  </a:lnTo>
+                  <a:lnTo>
+                    <a:pt x="2386813" y="924520"/>
+                  </a:lnTo>
+                  <a:lnTo>
+                    <a:pt x="2457158" y="937302"/>
+                  </a:lnTo>
+                  <a:lnTo>
+                    <a:pt x="2527502" y="949594"/>
+                  </a:lnTo>
+                  <a:lnTo>
+                    <a:pt x="2597847" y="959268"/>
+                  </a:lnTo>
+                  <a:lnTo>
+                    <a:pt x="2668191" y="963827"/>
+                  </a:lnTo>
+                  <a:lnTo>
+                    <a:pt x="2738536" y="968317"/>
+                  </a:lnTo>
+                  <a:lnTo>
+                    <a:pt x="2808880" y="972737"/>
+                  </a:lnTo>
+                  <a:lnTo>
+                    <a:pt x="2879225" y="977090"/>
+                  </a:lnTo>
+                  <a:lnTo>
+                    <a:pt x="2949569" y="981377"/>
+                  </a:lnTo>
+                  <a:lnTo>
+                    <a:pt x="3019914" y="985597"/>
+                  </a:lnTo>
+                  <a:lnTo>
+                    <a:pt x="3090258" y="989754"/>
+                  </a:lnTo>
+                  <a:lnTo>
+                    <a:pt x="3160603" y="993846"/>
+                  </a:lnTo>
+                  <a:lnTo>
+                    <a:pt x="3230947" y="997876"/>
+                  </a:lnTo>
+                  <a:lnTo>
+                    <a:pt x="3301292" y="1001844"/>
+                  </a:lnTo>
+                  <a:lnTo>
+                    <a:pt x="3371636" y="1005752"/>
+                  </a:lnTo>
+                  <a:lnTo>
+                    <a:pt x="3441981" y="1009600"/>
+                  </a:lnTo>
+                  <a:lnTo>
+                    <a:pt x="3512325" y="1013389"/>
+                  </a:lnTo>
+                  <a:lnTo>
+                    <a:pt x="3582670" y="1017120"/>
+                  </a:lnTo>
+                  <a:lnTo>
+                    <a:pt x="3653014" y="1020793"/>
+                  </a:lnTo>
+                  <a:lnTo>
+                    <a:pt x="3723359" y="1024411"/>
+                  </a:lnTo>
+                  <a:lnTo>
+                    <a:pt x="3793703" y="1027973"/>
+                  </a:lnTo>
+                  <a:lnTo>
+                    <a:pt x="3864048" y="1031481"/>
+                  </a:lnTo>
+                  <a:lnTo>
+                    <a:pt x="3934392" y="1034935"/>
+                  </a:lnTo>
+                  <a:lnTo>
+                    <a:pt x="4004737" y="1038336"/>
+                  </a:lnTo>
+                  <a:lnTo>
+                    <a:pt x="4075081" y="1041685"/>
+                  </a:lnTo>
+                  <a:lnTo>
+                    <a:pt x="4145426" y="1044983"/>
+                  </a:lnTo>
+                  <a:lnTo>
+                    <a:pt x="4215770" y="1048231"/>
+                  </a:lnTo>
+                  <a:lnTo>
+                    <a:pt x="4286115" y="1051429"/>
+                  </a:lnTo>
+                  <a:lnTo>
+                    <a:pt x="4356459" y="1054577"/>
+                  </a:lnTo>
+                  <a:lnTo>
+                    <a:pt x="4426804" y="1057678"/>
+                  </a:lnTo>
+                  <a:lnTo>
+                    <a:pt x="4497148" y="1060731"/>
+                  </a:lnTo>
+                  <a:lnTo>
+                    <a:pt x="4567493" y="1063738"/>
+                  </a:lnTo>
+                  <a:lnTo>
+                    <a:pt x="4637837" y="1066698"/>
+                  </a:lnTo>
+                  <a:lnTo>
+                    <a:pt x="4708181" y="1069613"/>
+                  </a:lnTo>
+                  <a:lnTo>
+                    <a:pt x="4778526" y="1072484"/>
+                  </a:lnTo>
+                  <a:lnTo>
+                    <a:pt x="4848870" y="1075310"/>
+                  </a:lnTo>
+                  <a:lnTo>
+                    <a:pt x="4919215" y="1078094"/>
+                  </a:lnTo>
+                  <a:lnTo>
+                    <a:pt x="4989559" y="1080835"/>
+                  </a:lnTo>
+                  <a:lnTo>
+                    <a:pt x="5059904" y="1083533"/>
+                  </a:lnTo>
+                  <a:lnTo>
+                    <a:pt x="5130248" y="1086191"/>
+                  </a:lnTo>
+                  <a:lnTo>
+                    <a:pt x="5200593" y="1088808"/>
+                  </a:lnTo>
+                  <a:lnTo>
+                    <a:pt x="5270937" y="1091385"/>
+                  </a:lnTo>
+                  <a:lnTo>
+                    <a:pt x="5341282" y="1093922"/>
+                  </a:lnTo>
+                  <a:lnTo>
+                    <a:pt x="5411626" y="1096421"/>
+                  </a:lnTo>
+                  <a:lnTo>
+                    <a:pt x="5481971" y="1098881"/>
+                  </a:lnTo>
+                  <a:lnTo>
+                    <a:pt x="5552315" y="1101304"/>
+                  </a:lnTo>
+                  <a:lnTo>
+                    <a:pt x="5622660" y="1103689"/>
+                  </a:lnTo>
+                  <a:lnTo>
+                    <a:pt x="5693004" y="1106038"/>
+                  </a:lnTo>
+                  <a:lnTo>
+                    <a:pt x="5763349" y="1108352"/>
+                  </a:lnTo>
+                  <a:lnTo>
+                    <a:pt x="5833693" y="1110629"/>
+                  </a:lnTo>
+                  <a:lnTo>
+                    <a:pt x="5904038" y="1112872"/>
+                  </a:lnTo>
+                  <a:lnTo>
+                    <a:pt x="5974382" y="1115081"/>
+                  </a:lnTo>
+                  <a:lnTo>
+                    <a:pt x="6044727" y="1117256"/>
+                  </a:lnTo>
+                  <a:lnTo>
+                    <a:pt x="6115071" y="1119397"/>
+                  </a:lnTo>
+                  <a:lnTo>
+                    <a:pt x="6185416" y="1121506"/>
                   </a:lnTo>
                 </a:path>
               </a:pathLst>
@@ -4174,312 +3884,637 @@
           </p:nvSpPr>
           <p:spPr>
             <a:xfrm>
-              <a:off x="1172049" y="2507224"/>
-              <a:ext cx="7090630" cy="2845610"/>
+              <a:off x="1235312" y="2775725"/>
+              <a:ext cx="6964104" cy="584466"/>
             </a:xfrm>
             <a:custGeom>
               <a:avLst/>
               <a:pathLst>
-                <a:path w="7090630" h="2845610">
+                <a:path w="6964104" h="584466">
+                  <a:moveTo>
+                    <a:pt x="6964104" y="584466"/>
+                  </a:moveTo>
+                  <a:lnTo>
+                    <a:pt x="6893760" y="582864"/>
+                  </a:lnTo>
+                  <a:lnTo>
+                    <a:pt x="6823415" y="581197"/>
+                  </a:lnTo>
+                  <a:lnTo>
+                    <a:pt x="6753071" y="579464"/>
+                  </a:lnTo>
+                  <a:lnTo>
+                    <a:pt x="6682726" y="577662"/>
+                  </a:lnTo>
+                  <a:lnTo>
+                    <a:pt x="6612382" y="575788"/>
+                  </a:lnTo>
+                  <a:lnTo>
+                    <a:pt x="6542037" y="573838"/>
+                  </a:lnTo>
+                  <a:lnTo>
+                    <a:pt x="6471693" y="571811"/>
+                  </a:lnTo>
+                  <a:lnTo>
+                    <a:pt x="6401348" y="569703"/>
+                  </a:lnTo>
+                  <a:lnTo>
+                    <a:pt x="6331004" y="567511"/>
+                  </a:lnTo>
+                  <a:lnTo>
+                    <a:pt x="6260659" y="565231"/>
+                  </a:lnTo>
+                  <a:lnTo>
+                    <a:pt x="6190315" y="562860"/>
+                  </a:lnTo>
+                  <a:lnTo>
+                    <a:pt x="6119970" y="560394"/>
+                  </a:lnTo>
+                  <a:lnTo>
+                    <a:pt x="6049626" y="557830"/>
+                  </a:lnTo>
+                  <a:lnTo>
+                    <a:pt x="5979281" y="555163"/>
+                  </a:lnTo>
+                  <a:lnTo>
+                    <a:pt x="5908937" y="552390"/>
+                  </a:lnTo>
+                  <a:lnTo>
+                    <a:pt x="5838592" y="549506"/>
+                  </a:lnTo>
+                  <a:lnTo>
+                    <a:pt x="5768248" y="546506"/>
+                  </a:lnTo>
+                  <a:lnTo>
+                    <a:pt x="5697903" y="543387"/>
+                  </a:lnTo>
+                  <a:lnTo>
+                    <a:pt x="5627559" y="540143"/>
+                  </a:lnTo>
+                  <a:lnTo>
+                    <a:pt x="5557214" y="536770"/>
+                  </a:lnTo>
+                  <a:lnTo>
+                    <a:pt x="5486870" y="533261"/>
+                  </a:lnTo>
+                  <a:lnTo>
+                    <a:pt x="5416525" y="529613"/>
+                  </a:lnTo>
+                  <a:lnTo>
+                    <a:pt x="5346181" y="525819"/>
+                  </a:lnTo>
+                  <a:lnTo>
+                    <a:pt x="5275836" y="521873"/>
+                  </a:lnTo>
+                  <a:lnTo>
+                    <a:pt x="5205492" y="517769"/>
+                  </a:lnTo>
+                  <a:lnTo>
+                    <a:pt x="5135147" y="513502"/>
+                  </a:lnTo>
+                  <a:lnTo>
+                    <a:pt x="5064803" y="509064"/>
+                  </a:lnTo>
+                  <a:lnTo>
+                    <a:pt x="4994458" y="504448"/>
+                  </a:lnTo>
+                  <a:lnTo>
+                    <a:pt x="4924114" y="499649"/>
+                  </a:lnTo>
+                  <a:lnTo>
+                    <a:pt x="4853769" y="494657"/>
+                  </a:lnTo>
+                  <a:lnTo>
+                    <a:pt x="4783425" y="489466"/>
+                  </a:lnTo>
+                  <a:lnTo>
+                    <a:pt x="4713080" y="484068"/>
+                  </a:lnTo>
+                  <a:lnTo>
+                    <a:pt x="4642736" y="478453"/>
+                  </a:lnTo>
+                  <a:lnTo>
+                    <a:pt x="4572391" y="472615"/>
+                  </a:lnTo>
+                  <a:lnTo>
+                    <a:pt x="4502047" y="466543"/>
+                  </a:lnTo>
+                  <a:lnTo>
+                    <a:pt x="4431702" y="460229"/>
+                  </a:lnTo>
+                  <a:lnTo>
+                    <a:pt x="4361358" y="453662"/>
+                  </a:lnTo>
+                  <a:lnTo>
+                    <a:pt x="4291013" y="446833"/>
+                  </a:lnTo>
+                  <a:lnTo>
+                    <a:pt x="4220669" y="439731"/>
+                  </a:lnTo>
+                  <a:lnTo>
+                    <a:pt x="4150324" y="432345"/>
+                  </a:lnTo>
+                  <a:lnTo>
+                    <a:pt x="4079980" y="424664"/>
+                  </a:lnTo>
+                  <a:lnTo>
+                    <a:pt x="4009635" y="416676"/>
+                  </a:lnTo>
+                  <a:lnTo>
+                    <a:pt x="3939291" y="408369"/>
+                  </a:lnTo>
+                  <a:lnTo>
+                    <a:pt x="3868946" y="399730"/>
+                  </a:lnTo>
+                  <a:lnTo>
+                    <a:pt x="3798602" y="390746"/>
+                  </a:lnTo>
+                  <a:lnTo>
+                    <a:pt x="3728257" y="381403"/>
+                  </a:lnTo>
+                  <a:lnTo>
+                    <a:pt x="3657913" y="371687"/>
+                  </a:lnTo>
+                  <a:lnTo>
+                    <a:pt x="3587569" y="361582"/>
+                  </a:lnTo>
+                  <a:lnTo>
+                    <a:pt x="3517224" y="351073"/>
+                  </a:lnTo>
+                  <a:lnTo>
+                    <a:pt x="3446880" y="340145"/>
+                  </a:lnTo>
+                  <a:lnTo>
+                    <a:pt x="3376535" y="328780"/>
+                  </a:lnTo>
+                  <a:lnTo>
+                    <a:pt x="3306191" y="322005"/>
+                  </a:lnTo>
+                  <a:lnTo>
+                    <a:pt x="3235846" y="317303"/>
+                  </a:lnTo>
+                  <a:lnTo>
+                    <a:pt x="3165502" y="312528"/>
+                  </a:lnTo>
+                  <a:lnTo>
+                    <a:pt x="3095157" y="307679"/>
+                  </a:lnTo>
+                  <a:lnTo>
+                    <a:pt x="3024813" y="302755"/>
+                  </a:lnTo>
+                  <a:lnTo>
+                    <a:pt x="2954468" y="297754"/>
+                  </a:lnTo>
+                  <a:lnTo>
+                    <a:pt x="2884124" y="292675"/>
+                  </a:lnTo>
+                  <a:lnTo>
+                    <a:pt x="2813779" y="287517"/>
+                  </a:lnTo>
+                  <a:lnTo>
+                    <a:pt x="2743435" y="282279"/>
+                  </a:lnTo>
+                  <a:lnTo>
+                    <a:pt x="2673090" y="276960"/>
+                  </a:lnTo>
+                  <a:lnTo>
+                    <a:pt x="2602746" y="271558"/>
+                  </a:lnTo>
+                  <a:lnTo>
+                    <a:pt x="2532401" y="266072"/>
+                  </a:lnTo>
+                  <a:lnTo>
+                    <a:pt x="2462057" y="260501"/>
+                  </a:lnTo>
+                  <a:lnTo>
+                    <a:pt x="2391712" y="254844"/>
+                  </a:lnTo>
+                  <a:lnTo>
+                    <a:pt x="2321368" y="249098"/>
+                  </a:lnTo>
+                  <a:lnTo>
+                    <a:pt x="2251023" y="243263"/>
+                  </a:lnTo>
+                  <a:lnTo>
+                    <a:pt x="2180679" y="237338"/>
+                  </a:lnTo>
+                  <a:lnTo>
+                    <a:pt x="2110334" y="231320"/>
+                  </a:lnTo>
+                  <a:lnTo>
+                    <a:pt x="2039990" y="225209"/>
+                  </a:lnTo>
+                  <a:lnTo>
+                    <a:pt x="1969645" y="219003"/>
+                  </a:lnTo>
+                  <a:lnTo>
+                    <a:pt x="1899301" y="212700"/>
+                  </a:lnTo>
+                  <a:lnTo>
+                    <a:pt x="1828956" y="206300"/>
+                  </a:lnTo>
+                  <a:lnTo>
+                    <a:pt x="1758612" y="199800"/>
+                  </a:lnTo>
+                  <a:lnTo>
+                    <a:pt x="1688267" y="193199"/>
+                  </a:lnTo>
+                  <a:lnTo>
+                    <a:pt x="1617923" y="186495"/>
+                  </a:lnTo>
+                  <a:lnTo>
+                    <a:pt x="1547578" y="179687"/>
+                  </a:lnTo>
+                  <a:lnTo>
+                    <a:pt x="1477234" y="172774"/>
+                  </a:lnTo>
+                  <a:lnTo>
+                    <a:pt x="1406889" y="165753"/>
+                  </a:lnTo>
+                  <a:lnTo>
+                    <a:pt x="1336545" y="158623"/>
+                  </a:lnTo>
+                  <a:lnTo>
+                    <a:pt x="1266200" y="151382"/>
+                  </a:lnTo>
+                  <a:lnTo>
+                    <a:pt x="1195856" y="144029"/>
+                  </a:lnTo>
+                  <a:lnTo>
+                    <a:pt x="1125511" y="136561"/>
+                  </a:lnTo>
+                  <a:lnTo>
+                    <a:pt x="1055167" y="128977"/>
+                  </a:lnTo>
+                  <a:lnTo>
+                    <a:pt x="984822" y="121276"/>
+                  </a:lnTo>
+                  <a:lnTo>
+                    <a:pt x="914478" y="113454"/>
+                  </a:lnTo>
+                  <a:lnTo>
+                    <a:pt x="844133" y="105511"/>
+                  </a:lnTo>
+                  <a:lnTo>
+                    <a:pt x="773789" y="97445"/>
+                  </a:lnTo>
+                  <a:lnTo>
+                    <a:pt x="703444" y="89254"/>
+                  </a:lnTo>
+                  <a:lnTo>
+                    <a:pt x="633100" y="80935"/>
+                  </a:lnTo>
+                  <a:lnTo>
+                    <a:pt x="562755" y="72487"/>
+                  </a:lnTo>
+                  <a:lnTo>
+                    <a:pt x="492411" y="63907"/>
+                  </a:lnTo>
+                  <a:lnTo>
+                    <a:pt x="422066" y="55194"/>
+                  </a:lnTo>
+                  <a:lnTo>
+                    <a:pt x="351722" y="46346"/>
+                  </a:lnTo>
+                  <a:lnTo>
+                    <a:pt x="281377" y="37360"/>
+                  </a:lnTo>
+                  <a:lnTo>
+                    <a:pt x="211033" y="28235"/>
+                  </a:lnTo>
+                  <a:lnTo>
+                    <a:pt x="140688" y="18968"/>
+                  </a:lnTo>
+                  <a:lnTo>
+                    <a:pt x="70344" y="9557"/>
+                  </a:lnTo>
+                  <a:lnTo>
+                    <a:pt x="0" y="0"/>
+                  </a:lnTo>
+                </a:path>
+              </a:pathLst>
+            </a:custGeom>
+          </p:spPr>
+          <p:txBody>
+            <a:bodyPr/>
+            <a:lstStyle/>
+            <a:p/>
+          </p:txBody>
+        </p:sp>
+        <p:sp>
+          <p:nvSpPr>
+            <p:cNvPr id="24" name="pl24"/>
+            <p:cNvSpPr/>
+            <p:nvPr/>
+          </p:nvSpPr>
+          <p:spPr>
+            <a:xfrm>
+              <a:off x="1235312" y="2299612"/>
+              <a:ext cx="6964104" cy="1026914"/>
+            </a:xfrm>
+            <a:custGeom>
+              <a:avLst/>
+              <a:pathLst>
+                <a:path w="6964104" h="1026914">
                   <a:moveTo>
                     <a:pt x="0" y="0"/>
                   </a:moveTo>
                   <a:lnTo>
-                    <a:pt x="71622" y="82141"/>
-                  </a:lnTo>
-                  <a:lnTo>
-                    <a:pt x="143245" y="162070"/>
-                  </a:lnTo>
-                  <a:lnTo>
-                    <a:pt x="214867" y="239846"/>
-                  </a:lnTo>
-                  <a:lnTo>
-                    <a:pt x="286490" y="315528"/>
-                  </a:lnTo>
-                  <a:lnTo>
-                    <a:pt x="358112" y="389171"/>
-                  </a:lnTo>
-                  <a:lnTo>
-                    <a:pt x="429735" y="460831"/>
-                  </a:lnTo>
-                  <a:lnTo>
-                    <a:pt x="501357" y="530562"/>
-                  </a:lnTo>
-                  <a:lnTo>
-                    <a:pt x="572980" y="598414"/>
-                  </a:lnTo>
-                  <a:lnTo>
-                    <a:pt x="644602" y="664439"/>
-                  </a:lnTo>
-                  <a:lnTo>
-                    <a:pt x="716225" y="728686"/>
-                  </a:lnTo>
-                  <a:lnTo>
-                    <a:pt x="787847" y="791202"/>
-                  </a:lnTo>
-                  <a:lnTo>
-                    <a:pt x="859470" y="852035"/>
-                  </a:lnTo>
-                  <a:lnTo>
-                    <a:pt x="931092" y="911230"/>
-                  </a:lnTo>
-                  <a:lnTo>
-                    <a:pt x="1002715" y="968831"/>
-                  </a:lnTo>
-                  <a:lnTo>
-                    <a:pt x="1074337" y="1024880"/>
-                  </a:lnTo>
-                  <a:lnTo>
-                    <a:pt x="1145960" y="1079420"/>
-                  </a:lnTo>
-                  <a:lnTo>
-                    <a:pt x="1217582" y="1132490"/>
-                  </a:lnTo>
-                  <a:lnTo>
-                    <a:pt x="1289205" y="1184132"/>
-                  </a:lnTo>
-                  <a:lnTo>
-                    <a:pt x="1360827" y="1234383"/>
-                  </a:lnTo>
-                  <a:lnTo>
-                    <a:pt x="1432450" y="1283281"/>
-                  </a:lnTo>
-                  <a:lnTo>
-                    <a:pt x="1504073" y="1330861"/>
-                  </a:lnTo>
-                  <a:lnTo>
-                    <a:pt x="1575695" y="1377160"/>
-                  </a:lnTo>
-                  <a:lnTo>
-                    <a:pt x="1647318" y="1422213"/>
-                  </a:lnTo>
-                  <a:lnTo>
-                    <a:pt x="1718940" y="1466052"/>
-                  </a:lnTo>
-                  <a:lnTo>
-                    <a:pt x="1790563" y="1508710"/>
-                  </a:lnTo>
-                  <a:lnTo>
-                    <a:pt x="1862185" y="1550220"/>
-                  </a:lnTo>
-                  <a:lnTo>
-                    <a:pt x="1933808" y="1590612"/>
-                  </a:lnTo>
-                  <a:lnTo>
-                    <a:pt x="2005430" y="1629915"/>
-                  </a:lnTo>
-                  <a:lnTo>
-                    <a:pt x="2077053" y="1668161"/>
-                  </a:lnTo>
-                  <a:lnTo>
-                    <a:pt x="2148675" y="1705376"/>
-                  </a:lnTo>
-                  <a:lnTo>
-                    <a:pt x="2220298" y="1741589"/>
-                  </a:lnTo>
-                  <a:lnTo>
-                    <a:pt x="2291920" y="1776827"/>
-                  </a:lnTo>
-                  <a:lnTo>
-                    <a:pt x="2363543" y="1811116"/>
-                  </a:lnTo>
-                  <a:lnTo>
-                    <a:pt x="2435165" y="1844481"/>
-                  </a:lnTo>
-                  <a:lnTo>
-                    <a:pt x="2506788" y="1876948"/>
-                  </a:lnTo>
-                  <a:lnTo>
-                    <a:pt x="2578410" y="1908541"/>
-                  </a:lnTo>
-                  <a:lnTo>
-                    <a:pt x="2650033" y="1939282"/>
-                  </a:lnTo>
-                  <a:lnTo>
-                    <a:pt x="2721655" y="1969196"/>
-                  </a:lnTo>
-                  <a:lnTo>
-                    <a:pt x="2793278" y="1998304"/>
-                  </a:lnTo>
-                  <a:lnTo>
-                    <a:pt x="2864901" y="2026628"/>
-                  </a:lnTo>
-                  <a:lnTo>
-                    <a:pt x="2936523" y="2054190"/>
-                  </a:lnTo>
-                  <a:lnTo>
-                    <a:pt x="3008146" y="2081009"/>
-                  </a:lnTo>
-                  <a:lnTo>
-                    <a:pt x="3079768" y="2107106"/>
-                  </a:lnTo>
-                  <a:lnTo>
-                    <a:pt x="3151391" y="2132500"/>
-                  </a:lnTo>
-                  <a:lnTo>
-                    <a:pt x="3223013" y="2157210"/>
-                  </a:lnTo>
-                  <a:lnTo>
-                    <a:pt x="3294636" y="2181254"/>
-                  </a:lnTo>
-                  <a:lnTo>
-                    <a:pt x="3366258" y="2204651"/>
-                  </a:lnTo>
-                  <a:lnTo>
-                    <a:pt x="3437881" y="2227418"/>
-                  </a:lnTo>
-                  <a:lnTo>
-                    <a:pt x="3509503" y="2249572"/>
-                  </a:lnTo>
-                  <a:lnTo>
-                    <a:pt x="3581126" y="2271129"/>
-                  </a:lnTo>
-                  <a:lnTo>
-                    <a:pt x="3652748" y="2292106"/>
-                  </a:lnTo>
-                  <a:lnTo>
-                    <a:pt x="3724371" y="2312518"/>
-                  </a:lnTo>
-                  <a:lnTo>
-                    <a:pt x="3795993" y="2332380"/>
-                  </a:lnTo>
-                  <a:lnTo>
-                    <a:pt x="3867616" y="2351707"/>
-                  </a:lnTo>
-                  <a:lnTo>
-                    <a:pt x="3939238" y="2370514"/>
-                  </a:lnTo>
-                  <a:lnTo>
-                    <a:pt x="4010861" y="2388814"/>
-                  </a:lnTo>
-                  <a:lnTo>
-                    <a:pt x="4082483" y="2406621"/>
-                  </a:lnTo>
-                  <a:lnTo>
-                    <a:pt x="4154106" y="2423949"/>
-                  </a:lnTo>
-                  <a:lnTo>
-                    <a:pt x="4225729" y="2440810"/>
-                  </a:lnTo>
-                  <a:lnTo>
-                    <a:pt x="4297351" y="2457217"/>
-                  </a:lnTo>
-                  <a:lnTo>
-                    <a:pt x="4368974" y="2473182"/>
-                  </a:lnTo>
-                  <a:lnTo>
-                    <a:pt x="4440596" y="2488717"/>
-                  </a:lnTo>
-                  <a:lnTo>
-                    <a:pt x="4512219" y="2503833"/>
-                  </a:lnTo>
-                  <a:lnTo>
-                    <a:pt x="4583841" y="2518543"/>
-                  </a:lnTo>
-                  <a:lnTo>
-                    <a:pt x="4655464" y="2532857"/>
-                  </a:lnTo>
-                  <a:lnTo>
-                    <a:pt x="4727086" y="2546785"/>
-                  </a:lnTo>
-                  <a:lnTo>
-                    <a:pt x="4798709" y="2560337"/>
-                  </a:lnTo>
-                  <a:lnTo>
-                    <a:pt x="4870331" y="2573525"/>
-                  </a:lnTo>
-                  <a:lnTo>
-                    <a:pt x="4941954" y="2586358"/>
-                  </a:lnTo>
-                  <a:lnTo>
-                    <a:pt x="5013576" y="2598845"/>
-                  </a:lnTo>
-                  <a:lnTo>
-                    <a:pt x="5085199" y="2610996"/>
-                  </a:lnTo>
-                  <a:lnTo>
-                    <a:pt x="5156821" y="2622820"/>
-                  </a:lnTo>
-                  <a:lnTo>
-                    <a:pt x="5228444" y="2634325"/>
-                  </a:lnTo>
-                  <a:lnTo>
-                    <a:pt x="5300066" y="2645520"/>
-                  </a:lnTo>
-                  <a:lnTo>
-                    <a:pt x="5371689" y="2656414"/>
-                  </a:lnTo>
-                  <a:lnTo>
-                    <a:pt x="5443311" y="2667014"/>
-                  </a:lnTo>
-                  <a:lnTo>
-                    <a:pt x="5514934" y="2677329"/>
-                  </a:lnTo>
-                  <a:lnTo>
-                    <a:pt x="5586557" y="2687367"/>
-                  </a:lnTo>
-                  <a:lnTo>
-                    <a:pt x="5658179" y="2697133"/>
-                  </a:lnTo>
-                  <a:lnTo>
-                    <a:pt x="5729802" y="2706637"/>
-                  </a:lnTo>
-                  <a:lnTo>
-                    <a:pt x="5801424" y="2715885"/>
-                  </a:lnTo>
-                  <a:lnTo>
-                    <a:pt x="5873047" y="2724884"/>
-                  </a:lnTo>
-                  <a:lnTo>
-                    <a:pt x="5944669" y="2733640"/>
-                  </a:lnTo>
-                  <a:lnTo>
-                    <a:pt x="6016292" y="2742161"/>
-                  </a:lnTo>
-                  <a:lnTo>
-                    <a:pt x="6087914" y="2750452"/>
-                  </a:lnTo>
-                  <a:lnTo>
-                    <a:pt x="6159537" y="2758520"/>
-                  </a:lnTo>
-                  <a:lnTo>
-                    <a:pt x="6231159" y="2766371"/>
-                  </a:lnTo>
-                  <a:lnTo>
-                    <a:pt x="6302782" y="2774010"/>
-                  </a:lnTo>
-                  <a:lnTo>
-                    <a:pt x="6374404" y="2781443"/>
-                  </a:lnTo>
-                  <a:lnTo>
-                    <a:pt x="6446027" y="2788676"/>
-                  </a:lnTo>
-                  <a:lnTo>
-                    <a:pt x="6517649" y="2795715"/>
-                  </a:lnTo>
-                  <a:lnTo>
-                    <a:pt x="6589272" y="2802564"/>
-                  </a:lnTo>
-                  <a:lnTo>
-                    <a:pt x="6660894" y="2809228"/>
-                  </a:lnTo>
-                  <a:lnTo>
-                    <a:pt x="6732517" y="2815713"/>
-                  </a:lnTo>
-                  <a:lnTo>
-                    <a:pt x="6804139" y="2822023"/>
-                  </a:lnTo>
-                  <a:lnTo>
-                    <a:pt x="6875762" y="2828164"/>
-                  </a:lnTo>
-                  <a:lnTo>
-                    <a:pt x="6947385" y="2834139"/>
-                  </a:lnTo>
-                  <a:lnTo>
-                    <a:pt x="7019007" y="2839953"/>
-                  </a:lnTo>
-                  <a:lnTo>
-                    <a:pt x="7090630" y="2845610"/>
+                    <a:pt x="70344" y="29642"/>
+                  </a:lnTo>
+                  <a:lnTo>
+                    <a:pt x="140688" y="58487"/>
+                  </a:lnTo>
+                  <a:lnTo>
+                    <a:pt x="211033" y="86554"/>
+                  </a:lnTo>
+                  <a:lnTo>
+                    <a:pt x="281377" y="113866"/>
+                  </a:lnTo>
+                  <a:lnTo>
+                    <a:pt x="351722" y="140442"/>
+                  </a:lnTo>
+                  <a:lnTo>
+                    <a:pt x="422066" y="166303"/>
+                  </a:lnTo>
+                  <a:lnTo>
+                    <a:pt x="492411" y="191467"/>
+                  </a:lnTo>
+                  <a:lnTo>
+                    <a:pt x="562755" y="215953"/>
+                  </a:lnTo>
+                  <a:lnTo>
+                    <a:pt x="633100" y="239780"/>
+                  </a:lnTo>
+                  <a:lnTo>
+                    <a:pt x="703444" y="262965"/>
+                  </a:lnTo>
+                  <a:lnTo>
+                    <a:pt x="773789" y="285526"/>
+                  </a:lnTo>
+                  <a:lnTo>
+                    <a:pt x="844133" y="307479"/>
+                  </a:lnTo>
+                  <a:lnTo>
+                    <a:pt x="914478" y="328841"/>
+                  </a:lnTo>
+                  <a:lnTo>
+                    <a:pt x="984822" y="349628"/>
+                  </a:lnTo>
+                  <a:lnTo>
+                    <a:pt x="1055167" y="369855"/>
+                  </a:lnTo>
+                  <a:lnTo>
+                    <a:pt x="1125511" y="389537"/>
+                  </a:lnTo>
+                  <a:lnTo>
+                    <a:pt x="1195856" y="408689"/>
+                  </a:lnTo>
+                  <a:lnTo>
+                    <a:pt x="1266200" y="427325"/>
+                  </a:lnTo>
+                  <a:lnTo>
+                    <a:pt x="1336545" y="445459"/>
+                  </a:lnTo>
+                  <a:lnTo>
+                    <a:pt x="1406889" y="463105"/>
+                  </a:lnTo>
+                  <a:lnTo>
+                    <a:pt x="1477234" y="480276"/>
+                  </a:lnTo>
+                  <a:lnTo>
+                    <a:pt x="1547578" y="496984"/>
+                  </a:lnTo>
+                  <a:lnTo>
+                    <a:pt x="1617923" y="513243"/>
+                  </a:lnTo>
+                  <a:lnTo>
+                    <a:pt x="1688267" y="529063"/>
+                  </a:lnTo>
+                  <a:lnTo>
+                    <a:pt x="1758612" y="544458"/>
+                  </a:lnTo>
+                  <a:lnTo>
+                    <a:pt x="1828956" y="559438"/>
+                  </a:lnTo>
+                  <a:lnTo>
+                    <a:pt x="1899301" y="574014"/>
+                  </a:lnTo>
+                  <a:lnTo>
+                    <a:pt x="1969645" y="588198"/>
+                  </a:lnTo>
+                  <a:lnTo>
+                    <a:pt x="2039990" y="602000"/>
+                  </a:lnTo>
+                  <a:lnTo>
+                    <a:pt x="2110334" y="615430"/>
+                  </a:lnTo>
+                  <a:lnTo>
+                    <a:pt x="2180679" y="628498"/>
+                  </a:lnTo>
+                  <a:lnTo>
+                    <a:pt x="2251023" y="641215"/>
+                  </a:lnTo>
+                  <a:lnTo>
+                    <a:pt x="2321368" y="653589"/>
+                  </a:lnTo>
+                  <a:lnTo>
+                    <a:pt x="2391712" y="665630"/>
+                  </a:lnTo>
+                  <a:lnTo>
+                    <a:pt x="2462057" y="677346"/>
+                  </a:lnTo>
+                  <a:lnTo>
+                    <a:pt x="2532401" y="688747"/>
+                  </a:lnTo>
+                  <a:lnTo>
+                    <a:pt x="2602746" y="699841"/>
+                  </a:lnTo>
+                  <a:lnTo>
+                    <a:pt x="2673090" y="710636"/>
+                  </a:lnTo>
+                  <a:lnTo>
+                    <a:pt x="2743435" y="721141"/>
+                  </a:lnTo>
+                  <a:lnTo>
+                    <a:pt x="2813779" y="731362"/>
+                  </a:lnTo>
+                  <a:lnTo>
+                    <a:pt x="2884124" y="741308"/>
+                  </a:lnTo>
+                  <a:lnTo>
+                    <a:pt x="2954468" y="750987"/>
+                  </a:lnTo>
+                  <a:lnTo>
+                    <a:pt x="3024813" y="760405"/>
+                  </a:lnTo>
+                  <a:lnTo>
+                    <a:pt x="3095157" y="769569"/>
+                  </a:lnTo>
+                  <a:lnTo>
+                    <a:pt x="3165502" y="778486"/>
+                  </a:lnTo>
+                  <a:lnTo>
+                    <a:pt x="3235846" y="787163"/>
+                  </a:lnTo>
+                  <a:lnTo>
+                    <a:pt x="3306191" y="795607"/>
+                  </a:lnTo>
+                  <a:lnTo>
+                    <a:pt x="3376535" y="803823"/>
+                  </a:lnTo>
+                  <a:lnTo>
+                    <a:pt x="3446880" y="811817"/>
+                  </a:lnTo>
+                  <a:lnTo>
+                    <a:pt x="3517224" y="819597"/>
+                  </a:lnTo>
+                  <a:lnTo>
+                    <a:pt x="3587569" y="827167"/>
+                  </a:lnTo>
+                  <a:lnTo>
+                    <a:pt x="3657913" y="834533"/>
+                  </a:lnTo>
+                  <a:lnTo>
+                    <a:pt x="3728257" y="841701"/>
+                  </a:lnTo>
+                  <a:lnTo>
+                    <a:pt x="3798602" y="848675"/>
+                  </a:lnTo>
+                  <a:lnTo>
+                    <a:pt x="3868946" y="855462"/>
+                  </a:lnTo>
+                  <a:lnTo>
+                    <a:pt x="3939291" y="862066"/>
+                  </a:lnTo>
+                  <a:lnTo>
+                    <a:pt x="4009635" y="868493"/>
+                  </a:lnTo>
+                  <a:lnTo>
+                    <a:pt x="4079980" y="874746"/>
+                  </a:lnTo>
+                  <a:lnTo>
+                    <a:pt x="4150324" y="880830"/>
+                  </a:lnTo>
+                  <a:lnTo>
+                    <a:pt x="4220669" y="886751"/>
+                  </a:lnTo>
+                  <a:lnTo>
+                    <a:pt x="4291013" y="892513"/>
+                  </a:lnTo>
+                  <a:lnTo>
+                    <a:pt x="4361358" y="898119"/>
+                  </a:lnTo>
+                  <a:lnTo>
+                    <a:pt x="4431702" y="903574"/>
+                  </a:lnTo>
+                  <a:lnTo>
+                    <a:pt x="4502047" y="908883"/>
+                  </a:lnTo>
+                  <a:lnTo>
+                    <a:pt x="4572391" y="914048"/>
+                  </a:lnTo>
+                  <a:lnTo>
+                    <a:pt x="4642736" y="919074"/>
+                  </a:lnTo>
+                  <a:lnTo>
+                    <a:pt x="4713080" y="923965"/>
+                  </a:lnTo>
+                  <a:lnTo>
+                    <a:pt x="4783425" y="928724"/>
+                  </a:lnTo>
+                  <a:lnTo>
+                    <a:pt x="4853769" y="933355"/>
+                  </a:lnTo>
+                  <a:lnTo>
+                    <a:pt x="4924114" y="937862"/>
+                  </a:lnTo>
+                  <a:lnTo>
+                    <a:pt x="4994458" y="942247"/>
+                  </a:lnTo>
+                  <a:lnTo>
+                    <a:pt x="5064803" y="946514"/>
+                  </a:lnTo>
+                  <a:lnTo>
+                    <a:pt x="5135147" y="950666"/>
+                  </a:lnTo>
+                  <a:lnTo>
+                    <a:pt x="5205492" y="954706"/>
+                  </a:lnTo>
+                  <a:lnTo>
+                    <a:pt x="5275836" y="958637"/>
+                  </a:lnTo>
+                  <a:lnTo>
+                    <a:pt x="5346181" y="962462"/>
+                  </a:lnTo>
+                  <a:lnTo>
+                    <a:pt x="5416525" y="966185"/>
+                  </a:lnTo>
+                  <a:lnTo>
+                    <a:pt x="5486870" y="969807"/>
+                  </a:lnTo>
+                  <a:lnTo>
+                    <a:pt x="5557214" y="973332"/>
+                  </a:lnTo>
+                  <a:lnTo>
+                    <a:pt x="5627559" y="976761"/>
+                  </a:lnTo>
+                  <a:lnTo>
+                    <a:pt x="5697903" y="980099"/>
+                  </a:lnTo>
+                  <a:lnTo>
+                    <a:pt x="5768248" y="983346"/>
+                  </a:lnTo>
+                  <a:lnTo>
+                    <a:pt x="5838592" y="986506"/>
+                  </a:lnTo>
+                  <a:lnTo>
+                    <a:pt x="5908937" y="989581"/>
+                  </a:lnTo>
+                  <a:lnTo>
+                    <a:pt x="5979281" y="992573"/>
+                  </a:lnTo>
+                  <a:lnTo>
+                    <a:pt x="6049626" y="995485"/>
+                  </a:lnTo>
+                  <a:lnTo>
+                    <a:pt x="6119970" y="998318"/>
+                  </a:lnTo>
+                  <a:lnTo>
+                    <a:pt x="6190315" y="1001075"/>
+                  </a:lnTo>
+                  <a:lnTo>
+                    <a:pt x="6260659" y="1003757"/>
+                  </a:lnTo>
+                  <a:lnTo>
+                    <a:pt x="6331004" y="1006367"/>
+                  </a:lnTo>
+                  <a:lnTo>
+                    <a:pt x="6401348" y="1008907"/>
+                  </a:lnTo>
+                  <a:lnTo>
+                    <a:pt x="6471693" y="1011379"/>
+                  </a:lnTo>
+                  <a:lnTo>
+                    <a:pt x="6542037" y="1013784"/>
+                  </a:lnTo>
+                  <a:lnTo>
+                    <a:pt x="6612382" y="1016124"/>
+                  </a:lnTo>
+                  <a:lnTo>
+                    <a:pt x="6682726" y="1018402"/>
+                  </a:lnTo>
+                  <a:lnTo>
+                    <a:pt x="6753071" y="1020617"/>
+                  </a:lnTo>
+                  <a:lnTo>
+                    <a:pt x="6823415" y="1022774"/>
+                  </a:lnTo>
+                  <a:lnTo>
+                    <a:pt x="6893760" y="1024872"/>
+                  </a:lnTo>
+                  <a:lnTo>
+                    <a:pt x="6964104" y="1026914"/>
                   </a:lnTo>
                 </a:path>
               </a:pathLst>
@@ -4502,27 +4537,27 @@
         </p:sp>
         <p:sp>
           <p:nvSpPr>
-            <p:cNvPr id="24" name="pl24"/>
+            <p:cNvPr id="25" name="pl25"/>
             <p:cNvSpPr/>
             <p:nvPr/>
           </p:nvSpPr>
           <p:spPr>
             <a:xfrm>
-              <a:off x="817517" y="4727786"/>
-              <a:ext cx="7799693" cy="0"/>
+              <a:off x="887106" y="3100960"/>
+              <a:ext cx="7660515" cy="0"/>
             </a:xfrm>
             <a:custGeom>
               <a:avLst/>
               <a:pathLst>
-                <a:path w="7799693" h="0">
+                <a:path w="7660515" h="0">
                   <a:moveTo>
                     <a:pt x="0" y="0"/>
                   </a:moveTo>
                   <a:lnTo>
-                    <a:pt x="7799693" y="0"/>
-                  </a:lnTo>
-                  <a:lnTo>
-                    <a:pt x="7799693" y="0"/>
+                    <a:pt x="7660515" y="0"/>
+                  </a:lnTo>
+                  <a:lnTo>
+                    <a:pt x="7660515" y="0"/>
                   </a:lnTo>
                 </a:path>
               </a:pathLst>
@@ -4545,21 +4580,21 @@
         </p:sp>
         <p:sp>
           <p:nvSpPr>
-            <p:cNvPr id="25" name="pl25"/>
+            <p:cNvPr id="26" name="pl26"/>
             <p:cNvSpPr/>
             <p:nvPr/>
           </p:nvSpPr>
           <p:spPr>
             <a:xfrm>
-              <a:off x="4588151" y="2073503"/>
-              <a:ext cx="0" cy="3649639"/>
+              <a:off x="4590457" y="2143092"/>
+              <a:ext cx="0" cy="1317069"/>
             </a:xfrm>
             <a:custGeom>
               <a:avLst/>
               <a:pathLst>
-                <a:path w="0" h="3649639">
+                <a:path w="0" h="1317069">
                   <a:moveTo>
-                    <a:pt x="0" y="3649639"/>
+                    <a:pt x="0" y="1317069"/>
                   </a:moveTo>
                   <a:lnTo>
                     <a:pt x="0" y="0"/>
@@ -4588,13 +4623,13 @@
         </p:sp>
         <p:sp>
           <p:nvSpPr>
-            <p:cNvPr id="26" name="tx26"/>
+            <p:cNvPr id="27" name="tx27"/>
             <p:cNvSpPr/>
             <p:nvPr/>
           </p:nvSpPr>
           <p:spPr>
             <a:xfrm>
-              <a:off x="692708" y="5517199"/>
+              <a:off x="762297" y="3360243"/>
               <a:ext cx="62179" cy="80101"/>
             </a:xfrm>
             <a:prstGeom prst="rect">
@@ -4634,13 +4669,13 @@
         </p:sp>
         <p:sp>
           <p:nvSpPr>
-            <p:cNvPr id="27" name="tx27"/>
+            <p:cNvPr id="28" name="tx28"/>
             <p:cNvSpPr/>
             <p:nvPr/>
           </p:nvSpPr>
           <p:spPr>
             <a:xfrm>
-              <a:off x="692708" y="4687735"/>
+              <a:off x="762297" y="3060909"/>
               <a:ext cx="62179" cy="80101"/>
             </a:xfrm>
             <a:prstGeom prst="rect">
@@ -4680,13 +4715,13 @@
         </p:sp>
         <p:sp>
           <p:nvSpPr>
-            <p:cNvPr id="28" name="tx28"/>
+            <p:cNvPr id="29" name="tx29"/>
             <p:cNvSpPr/>
             <p:nvPr/>
           </p:nvSpPr>
           <p:spPr>
             <a:xfrm>
-              <a:off x="692708" y="3858272"/>
+              <a:off x="762297" y="2761575"/>
               <a:ext cx="62179" cy="80101"/>
             </a:xfrm>
             <a:prstGeom prst="rect">
@@ -4726,13 +4761,13 @@
         </p:sp>
         <p:sp>
           <p:nvSpPr>
-            <p:cNvPr id="29" name="tx29"/>
+            <p:cNvPr id="30" name="tx30"/>
             <p:cNvSpPr/>
             <p:nvPr/>
           </p:nvSpPr>
           <p:spPr>
             <a:xfrm>
-              <a:off x="692708" y="3028808"/>
+              <a:off x="762297" y="2462242"/>
               <a:ext cx="62179" cy="80101"/>
             </a:xfrm>
             <a:prstGeom prst="rect">
@@ -4772,13 +4807,13 @@
         </p:sp>
         <p:sp>
           <p:nvSpPr>
-            <p:cNvPr id="30" name="tx30"/>
+            <p:cNvPr id="31" name="tx31"/>
             <p:cNvSpPr/>
             <p:nvPr/>
           </p:nvSpPr>
           <p:spPr>
             <a:xfrm>
-              <a:off x="692708" y="2199345"/>
+              <a:off x="762297" y="2162908"/>
               <a:ext cx="62179" cy="80101"/>
             </a:xfrm>
             <a:prstGeom prst="rect">
@@ -4818,13 +4853,13 @@
         </p:sp>
         <p:sp>
           <p:nvSpPr>
-            <p:cNvPr id="31" name="tx31"/>
+            <p:cNvPr id="32" name="tx32"/>
             <p:cNvSpPr/>
             <p:nvPr/>
           </p:nvSpPr>
           <p:spPr>
             <a:xfrm>
-              <a:off x="2360651" y="5785772"/>
+              <a:off x="2401262" y="3522791"/>
               <a:ext cx="161574" cy="80101"/>
             </a:xfrm>
             <a:prstGeom prst="rect">
@@ -4864,13 +4899,13 @@
         </p:sp>
         <p:sp>
           <p:nvSpPr>
-            <p:cNvPr id="32" name="tx32"/>
+            <p:cNvPr id="33" name="tx33"/>
             <p:cNvSpPr/>
             <p:nvPr/>
           </p:nvSpPr>
           <p:spPr>
             <a:xfrm>
-              <a:off x="4561958" y="5785772"/>
+              <a:off x="4564176" y="3522791"/>
               <a:ext cx="62179" cy="80101"/>
             </a:xfrm>
             <a:prstGeom prst="rect">
@@ -4910,13 +4945,13 @@
         </p:sp>
         <p:sp>
           <p:nvSpPr>
-            <p:cNvPr id="33" name="tx33"/>
+            <p:cNvPr id="34" name="tx34"/>
             <p:cNvSpPr/>
             <p:nvPr/>
           </p:nvSpPr>
           <p:spPr>
             <a:xfrm>
-              <a:off x="6682478" y="5785772"/>
+              <a:off x="6646302" y="3522791"/>
               <a:ext cx="124358" cy="80101"/>
             </a:xfrm>
             <a:prstGeom prst="rect">
@@ -4956,13 +4991,13 @@
         </p:sp>
         <p:sp>
           <p:nvSpPr>
-            <p:cNvPr id="34" name="tx34"/>
+            <p:cNvPr id="35" name="tx35"/>
             <p:cNvSpPr/>
             <p:nvPr/>
           </p:nvSpPr>
           <p:spPr>
             <a:xfrm>
-              <a:off x="2928340" y="5925448"/>
+              <a:off x="2928340" y="3662467"/>
               <a:ext cx="3578047" cy="100218"/>
             </a:xfrm>
             <a:prstGeom prst="rect">
@@ -5002,13 +5037,13 @@
         </p:sp>
         <p:sp>
           <p:nvSpPr>
-            <p:cNvPr id="35" name="tx35"/>
+            <p:cNvPr id="36" name="tx36"/>
             <p:cNvSpPr/>
             <p:nvPr/>
           </p:nvSpPr>
           <p:spPr>
             <a:xfrm rot="-5400000">
-              <a:off x="68446" y="3848213"/>
+              <a:off x="138035" y="2751517"/>
               <a:ext cx="1016904" cy="100218"/>
             </a:xfrm>
             <a:prstGeom prst="rect">
@@ -5048,13 +5083,13 @@
         </p:sp>
         <p:sp>
           <p:nvSpPr>
-            <p:cNvPr id="36" name="tx36"/>
+            <p:cNvPr id="37" name="tx37"/>
             <p:cNvSpPr/>
             <p:nvPr/>
           </p:nvSpPr>
           <p:spPr>
             <a:xfrm>
-              <a:off x="817517" y="1896563"/>
+              <a:off x="887106" y="1966152"/>
               <a:ext cx="6388364" cy="82021"/>
             </a:xfrm>
             <a:prstGeom prst="rect">
@@ -5094,13 +5129,3637 @@
         </p:sp>
         <p:sp>
           <p:nvSpPr>
-            <p:cNvPr id="37" name="tx37"/>
+            <p:cNvPr id="38" name="tx38"/>
             <p:cNvSpPr/>
             <p:nvPr/>
           </p:nvSpPr>
           <p:spPr>
             <a:xfrm>
-              <a:off x="817517" y="1669789"/>
+              <a:off x="887106" y="1739378"/>
+              <a:ext cx="1182684" cy="120152"/>
+            </a:xfrm>
+            <a:prstGeom prst="rect">
+              <a:avLst/>
+            </a:prstGeom>
+            <a:noFill/>
+          </p:spPr>
+          <p:txBody>
+            <a:bodyPr lIns="0" rIns="0" tIns="0" bIns="0" anchorCtr="1" anchor="ctr" wrap="none"/>
+            <a:lstStyle/>
+            <a:p>
+              <a:pPr algn="l" marL="0" marR="0" indent="0">
+                <a:lnSpc>
+                  <a:spcPts val="1320"/>
+                </a:lnSpc>
+                <a:spcBef>
+                  <a:spcPts val="0"/>
+                </a:spcBef>
+                <a:spcAft>
+                  <a:spcPts val="0"/>
+                </a:spcAft>
+              </a:pPr>
+              <a:r>
+                <a:rPr sz="1320">
+                  <a:solidFill>
+                    <a:srgbClr val="000000">
+                      <a:alpha val="100000"/>
+                    </a:srgbClr>
+                  </a:solidFill>
+                  <a:latin typeface="Helvetica"/>
+                  <a:cs typeface="Helvetica"/>
+                </a:rPr>
+                <a:t>Infection/Sepsis</a:t>
+              </a:r>
+            </a:p>
+          </p:txBody>
+        </p:sp>
+        <p:sp>
+          <p:nvSpPr>
+            <p:cNvPr id="39" name="pl39"/>
+            <p:cNvSpPr/>
+            <p:nvPr/>
+          </p:nvSpPr>
+          <p:spPr>
+            <a:xfrm>
+              <a:off x="887106" y="5444019"/>
+              <a:ext cx="7660515" cy="0"/>
+            </a:xfrm>
+            <a:custGeom>
+              <a:avLst/>
+              <a:pathLst>
+                <a:path w="7660515" h="0">
+                  <a:moveTo>
+                    <a:pt x="0" y="0"/>
+                  </a:moveTo>
+                  <a:lnTo>
+                    <a:pt x="7660515" y="0"/>
+                  </a:lnTo>
+                  <a:lnTo>
+                    <a:pt x="7660515" y="0"/>
+                  </a:lnTo>
+                </a:path>
+              </a:pathLst>
+            </a:custGeom>
+            <a:ln w="6775" cap="flat">
+              <a:solidFill>
+                <a:srgbClr val="EBEBEB">
+                  <a:alpha val="100000"/>
+                </a:srgbClr>
+              </a:solidFill>
+              <a:prstDash val="solid"/>
+              <a:round/>
+            </a:ln>
+          </p:spPr>
+          <p:txBody>
+            <a:bodyPr/>
+            <a:lstStyle/>
+            <a:p/>
+          </p:txBody>
+        </p:sp>
+        <p:sp>
+          <p:nvSpPr>
+            <p:cNvPr id="40" name="pl40"/>
+            <p:cNvSpPr/>
+            <p:nvPr/>
+          </p:nvSpPr>
+          <p:spPr>
+            <a:xfrm>
+              <a:off x="887106" y="5144686"/>
+              <a:ext cx="7660515" cy="0"/>
+            </a:xfrm>
+            <a:custGeom>
+              <a:avLst/>
+              <a:pathLst>
+                <a:path w="7660515" h="0">
+                  <a:moveTo>
+                    <a:pt x="0" y="0"/>
+                  </a:moveTo>
+                  <a:lnTo>
+                    <a:pt x="7660515" y="0"/>
+                  </a:lnTo>
+                  <a:lnTo>
+                    <a:pt x="7660515" y="0"/>
+                  </a:lnTo>
+                </a:path>
+              </a:pathLst>
+            </a:custGeom>
+            <a:ln w="6775" cap="flat">
+              <a:solidFill>
+                <a:srgbClr val="EBEBEB">
+                  <a:alpha val="100000"/>
+                </a:srgbClr>
+              </a:solidFill>
+              <a:prstDash val="solid"/>
+              <a:round/>
+            </a:ln>
+          </p:spPr>
+          <p:txBody>
+            <a:bodyPr/>
+            <a:lstStyle/>
+            <a:p/>
+          </p:txBody>
+        </p:sp>
+        <p:sp>
+          <p:nvSpPr>
+            <p:cNvPr id="41" name="pl41"/>
+            <p:cNvSpPr/>
+            <p:nvPr/>
+          </p:nvSpPr>
+          <p:spPr>
+            <a:xfrm>
+              <a:off x="887106" y="4845352"/>
+              <a:ext cx="7660515" cy="0"/>
+            </a:xfrm>
+            <a:custGeom>
+              <a:avLst/>
+              <a:pathLst>
+                <a:path w="7660515" h="0">
+                  <a:moveTo>
+                    <a:pt x="0" y="0"/>
+                  </a:moveTo>
+                  <a:lnTo>
+                    <a:pt x="7660515" y="0"/>
+                  </a:lnTo>
+                  <a:lnTo>
+                    <a:pt x="7660515" y="0"/>
+                  </a:lnTo>
+                </a:path>
+              </a:pathLst>
+            </a:custGeom>
+            <a:ln w="6775" cap="flat">
+              <a:solidFill>
+                <a:srgbClr val="EBEBEB">
+                  <a:alpha val="100000"/>
+                </a:srgbClr>
+              </a:solidFill>
+              <a:prstDash val="solid"/>
+              <a:round/>
+            </a:ln>
+          </p:spPr>
+          <p:txBody>
+            <a:bodyPr/>
+            <a:lstStyle/>
+            <a:p/>
+          </p:txBody>
+        </p:sp>
+        <p:sp>
+          <p:nvSpPr>
+            <p:cNvPr id="42" name="pl42"/>
+            <p:cNvSpPr/>
+            <p:nvPr/>
+          </p:nvSpPr>
+          <p:spPr>
+            <a:xfrm>
+              <a:off x="887106" y="4546018"/>
+              <a:ext cx="7660515" cy="0"/>
+            </a:xfrm>
+            <a:custGeom>
+              <a:avLst/>
+              <a:pathLst>
+                <a:path w="7660515" h="0">
+                  <a:moveTo>
+                    <a:pt x="0" y="0"/>
+                  </a:moveTo>
+                  <a:lnTo>
+                    <a:pt x="7660515" y="0"/>
+                  </a:lnTo>
+                  <a:lnTo>
+                    <a:pt x="7660515" y="0"/>
+                  </a:lnTo>
+                </a:path>
+              </a:pathLst>
+            </a:custGeom>
+            <a:ln w="6775" cap="flat">
+              <a:solidFill>
+                <a:srgbClr val="EBEBEB">
+                  <a:alpha val="100000"/>
+                </a:srgbClr>
+              </a:solidFill>
+              <a:prstDash val="solid"/>
+              <a:round/>
+            </a:ln>
+          </p:spPr>
+          <p:txBody>
+            <a:bodyPr/>
+            <a:lstStyle/>
+            <a:p/>
+          </p:txBody>
+        </p:sp>
+        <p:sp>
+          <p:nvSpPr>
+            <p:cNvPr id="43" name="pl43"/>
+            <p:cNvSpPr/>
+            <p:nvPr/>
+          </p:nvSpPr>
+          <p:spPr>
+            <a:xfrm>
+              <a:off x="1636763" y="4336484"/>
+              <a:ext cx="0" cy="1317069"/>
+            </a:xfrm>
+            <a:custGeom>
+              <a:avLst/>
+              <a:pathLst>
+                <a:path w="0" h="1317069">
+                  <a:moveTo>
+                    <a:pt x="0" y="1317069"/>
+                  </a:moveTo>
+                  <a:lnTo>
+                    <a:pt x="0" y="0"/>
+                  </a:lnTo>
+                  <a:lnTo>
+                    <a:pt x="0" y="0"/>
+                  </a:lnTo>
+                </a:path>
+              </a:pathLst>
+            </a:custGeom>
+            <a:ln w="6775" cap="flat">
+              <a:solidFill>
+                <a:srgbClr val="EBEBEB">
+                  <a:alpha val="100000"/>
+                </a:srgbClr>
+              </a:solidFill>
+              <a:prstDash val="solid"/>
+              <a:round/>
+            </a:ln>
+          </p:spPr>
+          <p:txBody>
+            <a:bodyPr/>
+            <a:lstStyle/>
+            <a:p/>
+          </p:txBody>
+        </p:sp>
+        <p:sp>
+          <p:nvSpPr>
+            <p:cNvPr id="44" name="pl44"/>
+            <p:cNvSpPr/>
+            <p:nvPr/>
+          </p:nvSpPr>
+          <p:spPr>
+            <a:xfrm>
+              <a:off x="2482050" y="4336484"/>
+              <a:ext cx="0" cy="1317069"/>
+            </a:xfrm>
+            <a:custGeom>
+              <a:avLst/>
+              <a:pathLst>
+                <a:path w="0" h="1317069">
+                  <a:moveTo>
+                    <a:pt x="0" y="1317069"/>
+                  </a:moveTo>
+                  <a:lnTo>
+                    <a:pt x="0" y="0"/>
+                  </a:lnTo>
+                  <a:lnTo>
+                    <a:pt x="0" y="0"/>
+                  </a:lnTo>
+                </a:path>
+              </a:pathLst>
+            </a:custGeom>
+            <a:ln w="6775" cap="flat">
+              <a:solidFill>
+                <a:srgbClr val="EBEBEB">
+                  <a:alpha val="100000"/>
+                </a:srgbClr>
+              </a:solidFill>
+              <a:prstDash val="solid"/>
+              <a:round/>
+            </a:ln>
+          </p:spPr>
+          <p:txBody>
+            <a:bodyPr/>
+            <a:lstStyle/>
+            <a:p/>
+          </p:txBody>
+        </p:sp>
+        <p:sp>
+          <p:nvSpPr>
+            <p:cNvPr id="45" name="pl45"/>
+            <p:cNvSpPr/>
+            <p:nvPr/>
+          </p:nvSpPr>
+          <p:spPr>
+            <a:xfrm>
+              <a:off x="3327336" y="4336484"/>
+              <a:ext cx="0" cy="1317069"/>
+            </a:xfrm>
+            <a:custGeom>
+              <a:avLst/>
+              <a:pathLst>
+                <a:path w="0" h="1317069">
+                  <a:moveTo>
+                    <a:pt x="0" y="1317069"/>
+                  </a:moveTo>
+                  <a:lnTo>
+                    <a:pt x="0" y="0"/>
+                  </a:lnTo>
+                  <a:lnTo>
+                    <a:pt x="0" y="0"/>
+                  </a:lnTo>
+                </a:path>
+              </a:pathLst>
+            </a:custGeom>
+            <a:ln w="6775" cap="flat">
+              <a:solidFill>
+                <a:srgbClr val="EBEBEB">
+                  <a:alpha val="100000"/>
+                </a:srgbClr>
+              </a:solidFill>
+              <a:prstDash val="solid"/>
+              <a:round/>
+            </a:ln>
+          </p:spPr>
+          <p:txBody>
+            <a:bodyPr/>
+            <a:lstStyle/>
+            <a:p/>
+          </p:txBody>
+        </p:sp>
+        <p:sp>
+          <p:nvSpPr>
+            <p:cNvPr id="46" name="pl46"/>
+            <p:cNvSpPr/>
+            <p:nvPr/>
+          </p:nvSpPr>
+          <p:spPr>
+            <a:xfrm>
+              <a:off x="4172622" y="4336484"/>
+              <a:ext cx="0" cy="1317069"/>
+            </a:xfrm>
+            <a:custGeom>
+              <a:avLst/>
+              <a:pathLst>
+                <a:path w="0" h="1317069">
+                  <a:moveTo>
+                    <a:pt x="0" y="1317069"/>
+                  </a:moveTo>
+                  <a:lnTo>
+                    <a:pt x="0" y="0"/>
+                  </a:lnTo>
+                  <a:lnTo>
+                    <a:pt x="0" y="0"/>
+                  </a:lnTo>
+                </a:path>
+              </a:pathLst>
+            </a:custGeom>
+            <a:ln w="6775" cap="flat">
+              <a:solidFill>
+                <a:srgbClr val="EBEBEB">
+                  <a:alpha val="100000"/>
+                </a:srgbClr>
+              </a:solidFill>
+              <a:prstDash val="solid"/>
+              <a:round/>
+            </a:ln>
+          </p:spPr>
+          <p:txBody>
+            <a:bodyPr/>
+            <a:lstStyle/>
+            <a:p/>
+          </p:txBody>
+        </p:sp>
+        <p:sp>
+          <p:nvSpPr>
+            <p:cNvPr id="47" name="pl47"/>
+            <p:cNvSpPr/>
+            <p:nvPr/>
+          </p:nvSpPr>
+          <p:spPr>
+            <a:xfrm>
+              <a:off x="5017909" y="4336484"/>
+              <a:ext cx="0" cy="1317069"/>
+            </a:xfrm>
+            <a:custGeom>
+              <a:avLst/>
+              <a:pathLst>
+                <a:path w="0" h="1317069">
+                  <a:moveTo>
+                    <a:pt x="0" y="1317069"/>
+                  </a:moveTo>
+                  <a:lnTo>
+                    <a:pt x="0" y="0"/>
+                  </a:lnTo>
+                  <a:lnTo>
+                    <a:pt x="0" y="0"/>
+                  </a:lnTo>
+                </a:path>
+              </a:pathLst>
+            </a:custGeom>
+            <a:ln w="6775" cap="flat">
+              <a:solidFill>
+                <a:srgbClr val="EBEBEB">
+                  <a:alpha val="100000"/>
+                </a:srgbClr>
+              </a:solidFill>
+              <a:prstDash val="solid"/>
+              <a:round/>
+            </a:ln>
+          </p:spPr>
+          <p:txBody>
+            <a:bodyPr/>
+            <a:lstStyle/>
+            <a:p/>
+          </p:txBody>
+        </p:sp>
+        <p:sp>
+          <p:nvSpPr>
+            <p:cNvPr id="48" name="pl48"/>
+            <p:cNvSpPr/>
+            <p:nvPr/>
+          </p:nvSpPr>
+          <p:spPr>
+            <a:xfrm>
+              <a:off x="5863195" y="4336484"/>
+              <a:ext cx="0" cy="1317069"/>
+            </a:xfrm>
+            <a:custGeom>
+              <a:avLst/>
+              <a:pathLst>
+                <a:path w="0" h="1317069">
+                  <a:moveTo>
+                    <a:pt x="0" y="1317069"/>
+                  </a:moveTo>
+                  <a:lnTo>
+                    <a:pt x="0" y="0"/>
+                  </a:lnTo>
+                  <a:lnTo>
+                    <a:pt x="0" y="0"/>
+                  </a:lnTo>
+                </a:path>
+              </a:pathLst>
+            </a:custGeom>
+            <a:ln w="6775" cap="flat">
+              <a:solidFill>
+                <a:srgbClr val="EBEBEB">
+                  <a:alpha val="100000"/>
+                </a:srgbClr>
+              </a:solidFill>
+              <a:prstDash val="solid"/>
+              <a:round/>
+            </a:ln>
+          </p:spPr>
+          <p:txBody>
+            <a:bodyPr/>
+            <a:lstStyle/>
+            <a:p/>
+          </p:txBody>
+        </p:sp>
+        <p:sp>
+          <p:nvSpPr>
+            <p:cNvPr id="49" name="pl49"/>
+            <p:cNvSpPr/>
+            <p:nvPr/>
+          </p:nvSpPr>
+          <p:spPr>
+            <a:xfrm>
+              <a:off x="6708482" y="4336484"/>
+              <a:ext cx="0" cy="1317069"/>
+            </a:xfrm>
+            <a:custGeom>
+              <a:avLst/>
+              <a:pathLst>
+                <a:path w="0" h="1317069">
+                  <a:moveTo>
+                    <a:pt x="0" y="1317069"/>
+                  </a:moveTo>
+                  <a:lnTo>
+                    <a:pt x="0" y="0"/>
+                  </a:lnTo>
+                  <a:lnTo>
+                    <a:pt x="0" y="0"/>
+                  </a:lnTo>
+                </a:path>
+              </a:pathLst>
+            </a:custGeom>
+            <a:ln w="6775" cap="flat">
+              <a:solidFill>
+                <a:srgbClr val="EBEBEB">
+                  <a:alpha val="100000"/>
+                </a:srgbClr>
+              </a:solidFill>
+              <a:prstDash val="solid"/>
+              <a:round/>
+            </a:ln>
+          </p:spPr>
+          <p:txBody>
+            <a:bodyPr/>
+            <a:lstStyle/>
+            <a:p/>
+          </p:txBody>
+        </p:sp>
+        <p:sp>
+          <p:nvSpPr>
+            <p:cNvPr id="50" name="pl50"/>
+            <p:cNvSpPr/>
+            <p:nvPr/>
+          </p:nvSpPr>
+          <p:spPr>
+            <a:xfrm>
+              <a:off x="7553768" y="4336484"/>
+              <a:ext cx="0" cy="1317069"/>
+            </a:xfrm>
+            <a:custGeom>
+              <a:avLst/>
+              <a:pathLst>
+                <a:path w="0" h="1317069">
+                  <a:moveTo>
+                    <a:pt x="0" y="1317069"/>
+                  </a:moveTo>
+                  <a:lnTo>
+                    <a:pt x="0" y="0"/>
+                  </a:lnTo>
+                  <a:lnTo>
+                    <a:pt x="0" y="0"/>
+                  </a:lnTo>
+                </a:path>
+              </a:pathLst>
+            </a:custGeom>
+            <a:ln w="6775" cap="flat">
+              <a:solidFill>
+                <a:srgbClr val="EBEBEB">
+                  <a:alpha val="100000"/>
+                </a:srgbClr>
+              </a:solidFill>
+              <a:prstDash val="solid"/>
+              <a:round/>
+            </a:ln>
+          </p:spPr>
+          <p:txBody>
+            <a:bodyPr/>
+            <a:lstStyle/>
+            <a:p/>
+          </p:txBody>
+        </p:sp>
+        <p:sp>
+          <p:nvSpPr>
+            <p:cNvPr id="51" name="pl51"/>
+            <p:cNvSpPr/>
+            <p:nvPr/>
+          </p:nvSpPr>
+          <p:spPr>
+            <a:xfrm>
+              <a:off x="8399054" y="4336484"/>
+              <a:ext cx="0" cy="1317069"/>
+            </a:xfrm>
+            <a:custGeom>
+              <a:avLst/>
+              <a:pathLst>
+                <a:path w="0" h="1317069">
+                  <a:moveTo>
+                    <a:pt x="0" y="1317069"/>
+                  </a:moveTo>
+                  <a:lnTo>
+                    <a:pt x="0" y="0"/>
+                  </a:lnTo>
+                  <a:lnTo>
+                    <a:pt x="0" y="0"/>
+                  </a:lnTo>
+                </a:path>
+              </a:pathLst>
+            </a:custGeom>
+            <a:ln w="6775" cap="flat">
+              <a:solidFill>
+                <a:srgbClr val="EBEBEB">
+                  <a:alpha val="100000"/>
+                </a:srgbClr>
+              </a:solidFill>
+              <a:prstDash val="solid"/>
+              <a:round/>
+            </a:ln>
+          </p:spPr>
+          <p:txBody>
+            <a:bodyPr/>
+            <a:lstStyle/>
+            <a:p/>
+          </p:txBody>
+        </p:sp>
+        <p:sp>
+          <p:nvSpPr>
+            <p:cNvPr id="52" name="pl52"/>
+            <p:cNvSpPr/>
+            <p:nvPr/>
+          </p:nvSpPr>
+          <p:spPr>
+            <a:xfrm>
+              <a:off x="887106" y="5593686"/>
+              <a:ext cx="7660515" cy="0"/>
+            </a:xfrm>
+            <a:custGeom>
+              <a:avLst/>
+              <a:pathLst>
+                <a:path w="7660515" h="0">
+                  <a:moveTo>
+                    <a:pt x="0" y="0"/>
+                  </a:moveTo>
+                  <a:lnTo>
+                    <a:pt x="7660515" y="0"/>
+                  </a:lnTo>
+                  <a:lnTo>
+                    <a:pt x="7660515" y="0"/>
+                  </a:lnTo>
+                </a:path>
+              </a:pathLst>
+            </a:custGeom>
+            <a:ln w="13550" cap="flat">
+              <a:solidFill>
+                <a:srgbClr val="EBEBEB">
+                  <a:alpha val="100000"/>
+                </a:srgbClr>
+              </a:solidFill>
+              <a:prstDash val="solid"/>
+              <a:round/>
+            </a:ln>
+          </p:spPr>
+          <p:txBody>
+            <a:bodyPr/>
+            <a:lstStyle/>
+            <a:p/>
+          </p:txBody>
+        </p:sp>
+        <p:sp>
+          <p:nvSpPr>
+            <p:cNvPr id="53" name="pl53"/>
+            <p:cNvSpPr/>
+            <p:nvPr/>
+          </p:nvSpPr>
+          <p:spPr>
+            <a:xfrm>
+              <a:off x="887106" y="5294352"/>
+              <a:ext cx="7660515" cy="0"/>
+            </a:xfrm>
+            <a:custGeom>
+              <a:avLst/>
+              <a:pathLst>
+                <a:path w="7660515" h="0">
+                  <a:moveTo>
+                    <a:pt x="0" y="0"/>
+                  </a:moveTo>
+                  <a:lnTo>
+                    <a:pt x="7660515" y="0"/>
+                  </a:lnTo>
+                  <a:lnTo>
+                    <a:pt x="7660515" y="0"/>
+                  </a:lnTo>
+                </a:path>
+              </a:pathLst>
+            </a:custGeom>
+            <a:ln w="13550" cap="flat">
+              <a:solidFill>
+                <a:srgbClr val="EBEBEB">
+                  <a:alpha val="100000"/>
+                </a:srgbClr>
+              </a:solidFill>
+              <a:prstDash val="solid"/>
+              <a:round/>
+            </a:ln>
+          </p:spPr>
+          <p:txBody>
+            <a:bodyPr/>
+            <a:lstStyle/>
+            <a:p/>
+          </p:txBody>
+        </p:sp>
+        <p:sp>
+          <p:nvSpPr>
+            <p:cNvPr id="54" name="pl54"/>
+            <p:cNvSpPr/>
+            <p:nvPr/>
+          </p:nvSpPr>
+          <p:spPr>
+            <a:xfrm>
+              <a:off x="887106" y="4995019"/>
+              <a:ext cx="7660515" cy="0"/>
+            </a:xfrm>
+            <a:custGeom>
+              <a:avLst/>
+              <a:pathLst>
+                <a:path w="7660515" h="0">
+                  <a:moveTo>
+                    <a:pt x="0" y="0"/>
+                  </a:moveTo>
+                  <a:lnTo>
+                    <a:pt x="7660515" y="0"/>
+                  </a:lnTo>
+                  <a:lnTo>
+                    <a:pt x="7660515" y="0"/>
+                  </a:lnTo>
+                </a:path>
+              </a:pathLst>
+            </a:custGeom>
+            <a:ln w="13550" cap="flat">
+              <a:solidFill>
+                <a:srgbClr val="EBEBEB">
+                  <a:alpha val="100000"/>
+                </a:srgbClr>
+              </a:solidFill>
+              <a:prstDash val="solid"/>
+              <a:round/>
+            </a:ln>
+          </p:spPr>
+          <p:txBody>
+            <a:bodyPr/>
+            <a:lstStyle/>
+            <a:p/>
+          </p:txBody>
+        </p:sp>
+        <p:sp>
+          <p:nvSpPr>
+            <p:cNvPr id="55" name="pl55"/>
+            <p:cNvSpPr/>
+            <p:nvPr/>
+          </p:nvSpPr>
+          <p:spPr>
+            <a:xfrm>
+              <a:off x="887106" y="4695685"/>
+              <a:ext cx="7660515" cy="0"/>
+            </a:xfrm>
+            <a:custGeom>
+              <a:avLst/>
+              <a:pathLst>
+                <a:path w="7660515" h="0">
+                  <a:moveTo>
+                    <a:pt x="0" y="0"/>
+                  </a:moveTo>
+                  <a:lnTo>
+                    <a:pt x="7660515" y="0"/>
+                  </a:lnTo>
+                  <a:lnTo>
+                    <a:pt x="7660515" y="0"/>
+                  </a:lnTo>
+                </a:path>
+              </a:pathLst>
+            </a:custGeom>
+            <a:ln w="13550" cap="flat">
+              <a:solidFill>
+                <a:srgbClr val="EBEBEB">
+                  <a:alpha val="100000"/>
+                </a:srgbClr>
+              </a:solidFill>
+              <a:prstDash val="solid"/>
+              <a:round/>
+            </a:ln>
+          </p:spPr>
+          <p:txBody>
+            <a:bodyPr/>
+            <a:lstStyle/>
+            <a:p/>
+          </p:txBody>
+        </p:sp>
+        <p:sp>
+          <p:nvSpPr>
+            <p:cNvPr id="56" name="pl56"/>
+            <p:cNvSpPr/>
+            <p:nvPr/>
+          </p:nvSpPr>
+          <p:spPr>
+            <a:xfrm>
+              <a:off x="887106" y="4396351"/>
+              <a:ext cx="7660515" cy="0"/>
+            </a:xfrm>
+            <a:custGeom>
+              <a:avLst/>
+              <a:pathLst>
+                <a:path w="7660515" h="0">
+                  <a:moveTo>
+                    <a:pt x="0" y="0"/>
+                  </a:moveTo>
+                  <a:lnTo>
+                    <a:pt x="7660515" y="0"/>
+                  </a:lnTo>
+                  <a:lnTo>
+                    <a:pt x="7660515" y="0"/>
+                  </a:lnTo>
+                </a:path>
+              </a:pathLst>
+            </a:custGeom>
+            <a:ln w="13550" cap="flat">
+              <a:solidFill>
+                <a:srgbClr val="EBEBEB">
+                  <a:alpha val="100000"/>
+                </a:srgbClr>
+              </a:solidFill>
+              <a:prstDash val="solid"/>
+              <a:round/>
+            </a:ln>
+          </p:spPr>
+          <p:txBody>
+            <a:bodyPr/>
+            <a:lstStyle/>
+            <a:p/>
+          </p:txBody>
+        </p:sp>
+        <p:sp>
+          <p:nvSpPr>
+            <p:cNvPr id="57" name="pl57"/>
+            <p:cNvSpPr/>
+            <p:nvPr/>
+          </p:nvSpPr>
+          <p:spPr>
+            <a:xfrm>
+              <a:off x="1214120" y="4336484"/>
+              <a:ext cx="0" cy="1317069"/>
+            </a:xfrm>
+            <a:custGeom>
+              <a:avLst/>
+              <a:pathLst>
+                <a:path w="0" h="1317069">
+                  <a:moveTo>
+                    <a:pt x="0" y="1317069"/>
+                  </a:moveTo>
+                  <a:lnTo>
+                    <a:pt x="0" y="0"/>
+                  </a:lnTo>
+                  <a:lnTo>
+                    <a:pt x="0" y="0"/>
+                  </a:lnTo>
+                </a:path>
+              </a:pathLst>
+            </a:custGeom>
+            <a:ln w="13550" cap="flat">
+              <a:solidFill>
+                <a:srgbClr val="EBEBEB">
+                  <a:alpha val="100000"/>
+                </a:srgbClr>
+              </a:solidFill>
+              <a:prstDash val="solid"/>
+              <a:round/>
+            </a:ln>
+          </p:spPr>
+          <p:txBody>
+            <a:bodyPr/>
+            <a:lstStyle/>
+            <a:p/>
+          </p:txBody>
+        </p:sp>
+        <p:sp>
+          <p:nvSpPr>
+            <p:cNvPr id="58" name="pl58"/>
+            <p:cNvSpPr/>
+            <p:nvPr/>
+          </p:nvSpPr>
+          <p:spPr>
+            <a:xfrm>
+              <a:off x="2059406" y="4336484"/>
+              <a:ext cx="0" cy="1317069"/>
+            </a:xfrm>
+            <a:custGeom>
+              <a:avLst/>
+              <a:pathLst>
+                <a:path w="0" h="1317069">
+                  <a:moveTo>
+                    <a:pt x="0" y="1317069"/>
+                  </a:moveTo>
+                  <a:lnTo>
+                    <a:pt x="0" y="0"/>
+                  </a:lnTo>
+                  <a:lnTo>
+                    <a:pt x="0" y="0"/>
+                  </a:lnTo>
+                </a:path>
+              </a:pathLst>
+            </a:custGeom>
+            <a:ln w="13550" cap="flat">
+              <a:solidFill>
+                <a:srgbClr val="EBEBEB">
+                  <a:alpha val="100000"/>
+                </a:srgbClr>
+              </a:solidFill>
+              <a:prstDash val="solid"/>
+              <a:round/>
+            </a:ln>
+          </p:spPr>
+          <p:txBody>
+            <a:bodyPr/>
+            <a:lstStyle/>
+            <a:p/>
+          </p:txBody>
+        </p:sp>
+        <p:sp>
+          <p:nvSpPr>
+            <p:cNvPr id="59" name="pl59"/>
+            <p:cNvSpPr/>
+            <p:nvPr/>
+          </p:nvSpPr>
+          <p:spPr>
+            <a:xfrm>
+              <a:off x="2904693" y="4336484"/>
+              <a:ext cx="0" cy="1317069"/>
+            </a:xfrm>
+            <a:custGeom>
+              <a:avLst/>
+              <a:pathLst>
+                <a:path w="0" h="1317069">
+                  <a:moveTo>
+                    <a:pt x="0" y="1317069"/>
+                  </a:moveTo>
+                  <a:lnTo>
+                    <a:pt x="0" y="0"/>
+                  </a:lnTo>
+                  <a:lnTo>
+                    <a:pt x="0" y="0"/>
+                  </a:lnTo>
+                </a:path>
+              </a:pathLst>
+            </a:custGeom>
+            <a:ln w="13550" cap="flat">
+              <a:solidFill>
+                <a:srgbClr val="EBEBEB">
+                  <a:alpha val="100000"/>
+                </a:srgbClr>
+              </a:solidFill>
+              <a:prstDash val="solid"/>
+              <a:round/>
+            </a:ln>
+          </p:spPr>
+          <p:txBody>
+            <a:bodyPr/>
+            <a:lstStyle/>
+            <a:p/>
+          </p:txBody>
+        </p:sp>
+        <p:sp>
+          <p:nvSpPr>
+            <p:cNvPr id="60" name="pl60"/>
+            <p:cNvSpPr/>
+            <p:nvPr/>
+          </p:nvSpPr>
+          <p:spPr>
+            <a:xfrm>
+              <a:off x="3749979" y="4336484"/>
+              <a:ext cx="0" cy="1317069"/>
+            </a:xfrm>
+            <a:custGeom>
+              <a:avLst/>
+              <a:pathLst>
+                <a:path w="0" h="1317069">
+                  <a:moveTo>
+                    <a:pt x="0" y="1317069"/>
+                  </a:moveTo>
+                  <a:lnTo>
+                    <a:pt x="0" y="0"/>
+                  </a:lnTo>
+                  <a:lnTo>
+                    <a:pt x="0" y="0"/>
+                  </a:lnTo>
+                </a:path>
+              </a:pathLst>
+            </a:custGeom>
+            <a:ln w="13550" cap="flat">
+              <a:solidFill>
+                <a:srgbClr val="EBEBEB">
+                  <a:alpha val="100000"/>
+                </a:srgbClr>
+              </a:solidFill>
+              <a:prstDash val="solid"/>
+              <a:round/>
+            </a:ln>
+          </p:spPr>
+          <p:txBody>
+            <a:bodyPr/>
+            <a:lstStyle/>
+            <a:p/>
+          </p:txBody>
+        </p:sp>
+        <p:sp>
+          <p:nvSpPr>
+            <p:cNvPr id="61" name="pl61"/>
+            <p:cNvSpPr/>
+            <p:nvPr/>
+          </p:nvSpPr>
+          <p:spPr>
+            <a:xfrm>
+              <a:off x="4595266" y="4336484"/>
+              <a:ext cx="0" cy="1317069"/>
+            </a:xfrm>
+            <a:custGeom>
+              <a:avLst/>
+              <a:pathLst>
+                <a:path w="0" h="1317069">
+                  <a:moveTo>
+                    <a:pt x="0" y="1317069"/>
+                  </a:moveTo>
+                  <a:lnTo>
+                    <a:pt x="0" y="0"/>
+                  </a:lnTo>
+                  <a:lnTo>
+                    <a:pt x="0" y="0"/>
+                  </a:lnTo>
+                </a:path>
+              </a:pathLst>
+            </a:custGeom>
+            <a:ln w="13550" cap="flat">
+              <a:solidFill>
+                <a:srgbClr val="EBEBEB">
+                  <a:alpha val="100000"/>
+                </a:srgbClr>
+              </a:solidFill>
+              <a:prstDash val="solid"/>
+              <a:round/>
+            </a:ln>
+          </p:spPr>
+          <p:txBody>
+            <a:bodyPr/>
+            <a:lstStyle/>
+            <a:p/>
+          </p:txBody>
+        </p:sp>
+        <p:sp>
+          <p:nvSpPr>
+            <p:cNvPr id="62" name="pl62"/>
+            <p:cNvSpPr/>
+            <p:nvPr/>
+          </p:nvSpPr>
+          <p:spPr>
+            <a:xfrm>
+              <a:off x="5440552" y="4336484"/>
+              <a:ext cx="0" cy="1317069"/>
+            </a:xfrm>
+            <a:custGeom>
+              <a:avLst/>
+              <a:pathLst>
+                <a:path w="0" h="1317069">
+                  <a:moveTo>
+                    <a:pt x="0" y="1317069"/>
+                  </a:moveTo>
+                  <a:lnTo>
+                    <a:pt x="0" y="0"/>
+                  </a:lnTo>
+                  <a:lnTo>
+                    <a:pt x="0" y="0"/>
+                  </a:lnTo>
+                </a:path>
+              </a:pathLst>
+            </a:custGeom>
+            <a:ln w="13550" cap="flat">
+              <a:solidFill>
+                <a:srgbClr val="EBEBEB">
+                  <a:alpha val="100000"/>
+                </a:srgbClr>
+              </a:solidFill>
+              <a:prstDash val="solid"/>
+              <a:round/>
+            </a:ln>
+          </p:spPr>
+          <p:txBody>
+            <a:bodyPr/>
+            <a:lstStyle/>
+            <a:p/>
+          </p:txBody>
+        </p:sp>
+        <p:sp>
+          <p:nvSpPr>
+            <p:cNvPr id="63" name="pl63"/>
+            <p:cNvSpPr/>
+            <p:nvPr/>
+          </p:nvSpPr>
+          <p:spPr>
+            <a:xfrm>
+              <a:off x="6285838" y="4336484"/>
+              <a:ext cx="0" cy="1317069"/>
+            </a:xfrm>
+            <a:custGeom>
+              <a:avLst/>
+              <a:pathLst>
+                <a:path w="0" h="1317069">
+                  <a:moveTo>
+                    <a:pt x="0" y="1317069"/>
+                  </a:moveTo>
+                  <a:lnTo>
+                    <a:pt x="0" y="0"/>
+                  </a:lnTo>
+                  <a:lnTo>
+                    <a:pt x="0" y="0"/>
+                  </a:lnTo>
+                </a:path>
+              </a:pathLst>
+            </a:custGeom>
+            <a:ln w="13550" cap="flat">
+              <a:solidFill>
+                <a:srgbClr val="EBEBEB">
+                  <a:alpha val="100000"/>
+                </a:srgbClr>
+              </a:solidFill>
+              <a:prstDash val="solid"/>
+              <a:round/>
+            </a:ln>
+          </p:spPr>
+          <p:txBody>
+            <a:bodyPr/>
+            <a:lstStyle/>
+            <a:p/>
+          </p:txBody>
+        </p:sp>
+        <p:sp>
+          <p:nvSpPr>
+            <p:cNvPr id="64" name="pl64"/>
+            <p:cNvSpPr/>
+            <p:nvPr/>
+          </p:nvSpPr>
+          <p:spPr>
+            <a:xfrm>
+              <a:off x="7131125" y="4336484"/>
+              <a:ext cx="0" cy="1317069"/>
+            </a:xfrm>
+            <a:custGeom>
+              <a:avLst/>
+              <a:pathLst>
+                <a:path w="0" h="1317069">
+                  <a:moveTo>
+                    <a:pt x="0" y="1317069"/>
+                  </a:moveTo>
+                  <a:lnTo>
+                    <a:pt x="0" y="0"/>
+                  </a:lnTo>
+                  <a:lnTo>
+                    <a:pt x="0" y="0"/>
+                  </a:lnTo>
+                </a:path>
+              </a:pathLst>
+            </a:custGeom>
+            <a:ln w="13550" cap="flat">
+              <a:solidFill>
+                <a:srgbClr val="EBEBEB">
+                  <a:alpha val="100000"/>
+                </a:srgbClr>
+              </a:solidFill>
+              <a:prstDash val="solid"/>
+              <a:round/>
+            </a:ln>
+          </p:spPr>
+          <p:txBody>
+            <a:bodyPr/>
+            <a:lstStyle/>
+            <a:p/>
+          </p:txBody>
+        </p:sp>
+        <p:sp>
+          <p:nvSpPr>
+            <p:cNvPr id="65" name="pl65"/>
+            <p:cNvSpPr/>
+            <p:nvPr/>
+          </p:nvSpPr>
+          <p:spPr>
+            <a:xfrm>
+              <a:off x="7976411" y="4336484"/>
+              <a:ext cx="0" cy="1317069"/>
+            </a:xfrm>
+            <a:custGeom>
+              <a:avLst/>
+              <a:pathLst>
+                <a:path w="0" h="1317069">
+                  <a:moveTo>
+                    <a:pt x="0" y="1317069"/>
+                  </a:moveTo>
+                  <a:lnTo>
+                    <a:pt x="0" y="0"/>
+                  </a:lnTo>
+                  <a:lnTo>
+                    <a:pt x="0" y="0"/>
+                  </a:lnTo>
+                </a:path>
+              </a:pathLst>
+            </a:custGeom>
+            <a:ln w="13550" cap="flat">
+              <a:solidFill>
+                <a:srgbClr val="EBEBEB">
+                  <a:alpha val="100000"/>
+                </a:srgbClr>
+              </a:solidFill>
+              <a:prstDash val="solid"/>
+              <a:round/>
+            </a:ln>
+          </p:spPr>
+          <p:txBody>
+            <a:bodyPr/>
+            <a:lstStyle/>
+            <a:p/>
+          </p:txBody>
+        </p:sp>
+        <p:sp>
+          <p:nvSpPr>
+            <p:cNvPr id="66" name="pg66"/>
+            <p:cNvSpPr/>
+            <p:nvPr/>
+          </p:nvSpPr>
+          <p:spPr>
+            <a:xfrm>
+              <a:off x="1235312" y="4336484"/>
+              <a:ext cx="6964104" cy="1217099"/>
+            </a:xfrm>
+            <a:custGeom>
+              <a:avLst/>
+              <a:pathLst>
+                <a:path w="6964104" h="1217099">
+                  <a:moveTo>
+                    <a:pt x="778688" y="0"/>
+                  </a:moveTo>
+                  <a:lnTo>
+                    <a:pt x="844133" y="45061"/>
+                  </a:lnTo>
+                  <a:lnTo>
+                    <a:pt x="914478" y="91635"/>
+                  </a:lnTo>
+                  <a:lnTo>
+                    <a:pt x="984822" y="136420"/>
+                  </a:lnTo>
+                  <a:lnTo>
+                    <a:pt x="1055167" y="179483"/>
+                  </a:lnTo>
+                  <a:lnTo>
+                    <a:pt x="1125511" y="220892"/>
+                  </a:lnTo>
+                  <a:lnTo>
+                    <a:pt x="1195856" y="260710"/>
+                  </a:lnTo>
+                  <a:lnTo>
+                    <a:pt x="1266200" y="298998"/>
+                  </a:lnTo>
+                  <a:lnTo>
+                    <a:pt x="1336545" y="335815"/>
+                  </a:lnTo>
+                  <a:lnTo>
+                    <a:pt x="1406889" y="371218"/>
+                  </a:lnTo>
+                  <a:lnTo>
+                    <a:pt x="1477234" y="405260"/>
+                  </a:lnTo>
+                  <a:lnTo>
+                    <a:pt x="1547578" y="437994"/>
+                  </a:lnTo>
+                  <a:lnTo>
+                    <a:pt x="1617923" y="469470"/>
+                  </a:lnTo>
+                  <a:lnTo>
+                    <a:pt x="1688267" y="499737"/>
+                  </a:lnTo>
+                  <a:lnTo>
+                    <a:pt x="1758612" y="528841"/>
+                  </a:lnTo>
+                  <a:lnTo>
+                    <a:pt x="1828956" y="556827"/>
+                  </a:lnTo>
+                  <a:lnTo>
+                    <a:pt x="1899301" y="583737"/>
+                  </a:lnTo>
+                  <a:lnTo>
+                    <a:pt x="1969645" y="609613"/>
+                  </a:lnTo>
+                  <a:lnTo>
+                    <a:pt x="2039990" y="634496"/>
+                  </a:lnTo>
+                  <a:lnTo>
+                    <a:pt x="2110334" y="658422"/>
+                  </a:lnTo>
+                  <a:lnTo>
+                    <a:pt x="2180679" y="681429"/>
+                  </a:lnTo>
+                  <a:lnTo>
+                    <a:pt x="2251023" y="703551"/>
+                  </a:lnTo>
+                  <a:lnTo>
+                    <a:pt x="2321368" y="724824"/>
+                  </a:lnTo>
+                  <a:lnTo>
+                    <a:pt x="2391712" y="745280"/>
+                  </a:lnTo>
+                  <a:lnTo>
+                    <a:pt x="2462057" y="764949"/>
+                  </a:lnTo>
+                  <a:lnTo>
+                    <a:pt x="2532401" y="783863"/>
+                  </a:lnTo>
+                  <a:lnTo>
+                    <a:pt x="2602746" y="802050"/>
+                  </a:lnTo>
+                  <a:lnTo>
+                    <a:pt x="2673090" y="819538"/>
+                  </a:lnTo>
+                  <a:lnTo>
+                    <a:pt x="2743435" y="836355"/>
+                  </a:lnTo>
+                  <a:lnTo>
+                    <a:pt x="2813779" y="852525"/>
+                  </a:lnTo>
+                  <a:lnTo>
+                    <a:pt x="2884124" y="868074"/>
+                  </a:lnTo>
+                  <a:lnTo>
+                    <a:pt x="2954468" y="883025"/>
+                  </a:lnTo>
+                  <a:lnTo>
+                    <a:pt x="3024813" y="897402"/>
+                  </a:lnTo>
+                  <a:lnTo>
+                    <a:pt x="3095157" y="911226"/>
+                  </a:lnTo>
+                  <a:lnTo>
+                    <a:pt x="3165502" y="924520"/>
+                  </a:lnTo>
+                  <a:lnTo>
+                    <a:pt x="3235846" y="937302"/>
+                  </a:lnTo>
+                  <a:lnTo>
+                    <a:pt x="3306191" y="949594"/>
+                  </a:lnTo>
+                  <a:lnTo>
+                    <a:pt x="3376535" y="959268"/>
+                  </a:lnTo>
+                  <a:lnTo>
+                    <a:pt x="3446880" y="963827"/>
+                  </a:lnTo>
+                  <a:lnTo>
+                    <a:pt x="3517224" y="968317"/>
+                  </a:lnTo>
+                  <a:lnTo>
+                    <a:pt x="3587569" y="972737"/>
+                  </a:lnTo>
+                  <a:lnTo>
+                    <a:pt x="3657913" y="977090"/>
+                  </a:lnTo>
+                  <a:lnTo>
+                    <a:pt x="3728257" y="981377"/>
+                  </a:lnTo>
+                  <a:lnTo>
+                    <a:pt x="3798602" y="985597"/>
+                  </a:lnTo>
+                  <a:lnTo>
+                    <a:pt x="3868946" y="989754"/>
+                  </a:lnTo>
+                  <a:lnTo>
+                    <a:pt x="3939291" y="993846"/>
+                  </a:lnTo>
+                  <a:lnTo>
+                    <a:pt x="4009635" y="997876"/>
+                  </a:lnTo>
+                  <a:lnTo>
+                    <a:pt x="4079980" y="1001844"/>
+                  </a:lnTo>
+                  <a:lnTo>
+                    <a:pt x="4150324" y="1005752"/>
+                  </a:lnTo>
+                  <a:lnTo>
+                    <a:pt x="4220669" y="1009600"/>
+                  </a:lnTo>
+                  <a:lnTo>
+                    <a:pt x="4291013" y="1013389"/>
+                  </a:lnTo>
+                  <a:lnTo>
+                    <a:pt x="4361358" y="1017120"/>
+                  </a:lnTo>
+                  <a:lnTo>
+                    <a:pt x="4431702" y="1020793"/>
+                  </a:lnTo>
+                  <a:lnTo>
+                    <a:pt x="4502047" y="1024411"/>
+                  </a:lnTo>
+                  <a:lnTo>
+                    <a:pt x="4572391" y="1027973"/>
+                  </a:lnTo>
+                  <a:lnTo>
+                    <a:pt x="4642736" y="1031481"/>
+                  </a:lnTo>
+                  <a:lnTo>
+                    <a:pt x="4713080" y="1034935"/>
+                  </a:lnTo>
+                  <a:lnTo>
+                    <a:pt x="4783425" y="1038336"/>
+                  </a:lnTo>
+                  <a:lnTo>
+                    <a:pt x="4853769" y="1041685"/>
+                  </a:lnTo>
+                  <a:lnTo>
+                    <a:pt x="4924114" y="1044983"/>
+                  </a:lnTo>
+                  <a:lnTo>
+                    <a:pt x="4994458" y="1048231"/>
+                  </a:lnTo>
+                  <a:lnTo>
+                    <a:pt x="5064803" y="1051429"/>
+                  </a:lnTo>
+                  <a:lnTo>
+                    <a:pt x="5135147" y="1054577"/>
+                  </a:lnTo>
+                  <a:lnTo>
+                    <a:pt x="5205492" y="1057678"/>
+                  </a:lnTo>
+                  <a:lnTo>
+                    <a:pt x="5275836" y="1060731"/>
+                  </a:lnTo>
+                  <a:lnTo>
+                    <a:pt x="5346181" y="1063738"/>
+                  </a:lnTo>
+                  <a:lnTo>
+                    <a:pt x="5416525" y="1066698"/>
+                  </a:lnTo>
+                  <a:lnTo>
+                    <a:pt x="5486870" y="1069613"/>
+                  </a:lnTo>
+                  <a:lnTo>
+                    <a:pt x="5557214" y="1072484"/>
+                  </a:lnTo>
+                  <a:lnTo>
+                    <a:pt x="5627559" y="1075310"/>
+                  </a:lnTo>
+                  <a:lnTo>
+                    <a:pt x="5697903" y="1078094"/>
+                  </a:lnTo>
+                  <a:lnTo>
+                    <a:pt x="5768248" y="1080835"/>
+                  </a:lnTo>
+                  <a:lnTo>
+                    <a:pt x="5838592" y="1083533"/>
+                  </a:lnTo>
+                  <a:lnTo>
+                    <a:pt x="5908937" y="1086191"/>
+                  </a:lnTo>
+                  <a:lnTo>
+                    <a:pt x="5979281" y="1088808"/>
+                  </a:lnTo>
+                  <a:lnTo>
+                    <a:pt x="6049626" y="1091385"/>
+                  </a:lnTo>
+                  <a:lnTo>
+                    <a:pt x="6119970" y="1093922"/>
+                  </a:lnTo>
+                  <a:lnTo>
+                    <a:pt x="6190315" y="1096421"/>
+                  </a:lnTo>
+                  <a:lnTo>
+                    <a:pt x="6260659" y="1098881"/>
+                  </a:lnTo>
+                  <a:lnTo>
+                    <a:pt x="6331004" y="1101304"/>
+                  </a:lnTo>
+                  <a:lnTo>
+                    <a:pt x="6401348" y="1103689"/>
+                  </a:lnTo>
+                  <a:lnTo>
+                    <a:pt x="6471693" y="1106038"/>
+                  </a:lnTo>
+                  <a:lnTo>
+                    <a:pt x="6542037" y="1108352"/>
+                  </a:lnTo>
+                  <a:lnTo>
+                    <a:pt x="6612382" y="1110629"/>
+                  </a:lnTo>
+                  <a:lnTo>
+                    <a:pt x="6682726" y="1112872"/>
+                  </a:lnTo>
+                  <a:lnTo>
+                    <a:pt x="6753071" y="1115081"/>
+                  </a:lnTo>
+                  <a:lnTo>
+                    <a:pt x="6823415" y="1117256"/>
+                  </a:lnTo>
+                  <a:lnTo>
+                    <a:pt x="6893760" y="1119397"/>
+                  </a:lnTo>
+                  <a:lnTo>
+                    <a:pt x="6964104" y="1121506"/>
+                  </a:lnTo>
+                  <a:lnTo>
+                    <a:pt x="6964104" y="1217099"/>
+                  </a:lnTo>
+                  <a:lnTo>
+                    <a:pt x="6893760" y="1215497"/>
+                  </a:lnTo>
+                  <a:lnTo>
+                    <a:pt x="6823415" y="1213830"/>
+                  </a:lnTo>
+                  <a:lnTo>
+                    <a:pt x="6753071" y="1212097"/>
+                  </a:lnTo>
+                  <a:lnTo>
+                    <a:pt x="6682726" y="1210295"/>
+                  </a:lnTo>
+                  <a:lnTo>
+                    <a:pt x="6612382" y="1208421"/>
+                  </a:lnTo>
+                  <a:lnTo>
+                    <a:pt x="6542037" y="1206471"/>
+                  </a:lnTo>
+                  <a:lnTo>
+                    <a:pt x="6471693" y="1204444"/>
+                  </a:lnTo>
+                  <a:lnTo>
+                    <a:pt x="6401348" y="1202336"/>
+                  </a:lnTo>
+                  <a:lnTo>
+                    <a:pt x="6331004" y="1200144"/>
+                  </a:lnTo>
+                  <a:lnTo>
+                    <a:pt x="6260659" y="1197864"/>
+                  </a:lnTo>
+                  <a:lnTo>
+                    <a:pt x="6190315" y="1195493"/>
+                  </a:lnTo>
+                  <a:lnTo>
+                    <a:pt x="6119970" y="1193027"/>
+                  </a:lnTo>
+                  <a:lnTo>
+                    <a:pt x="6049626" y="1190463"/>
+                  </a:lnTo>
+                  <a:lnTo>
+                    <a:pt x="5979281" y="1187796"/>
+                  </a:lnTo>
+                  <a:lnTo>
+                    <a:pt x="5908937" y="1185023"/>
+                  </a:lnTo>
+                  <a:lnTo>
+                    <a:pt x="5838592" y="1182139"/>
+                  </a:lnTo>
+                  <a:lnTo>
+                    <a:pt x="5768248" y="1179139"/>
+                  </a:lnTo>
+                  <a:lnTo>
+                    <a:pt x="5697903" y="1176020"/>
+                  </a:lnTo>
+                  <a:lnTo>
+                    <a:pt x="5627559" y="1172776"/>
+                  </a:lnTo>
+                  <a:lnTo>
+                    <a:pt x="5557214" y="1169403"/>
+                  </a:lnTo>
+                  <a:lnTo>
+                    <a:pt x="5486870" y="1165894"/>
+                  </a:lnTo>
+                  <a:lnTo>
+                    <a:pt x="5416525" y="1162246"/>
+                  </a:lnTo>
+                  <a:lnTo>
+                    <a:pt x="5346181" y="1158452"/>
+                  </a:lnTo>
+                  <a:lnTo>
+                    <a:pt x="5275836" y="1154506"/>
+                  </a:lnTo>
+                  <a:lnTo>
+                    <a:pt x="5205492" y="1150402"/>
+                  </a:lnTo>
+                  <a:lnTo>
+                    <a:pt x="5135147" y="1146135"/>
+                  </a:lnTo>
+                  <a:lnTo>
+                    <a:pt x="5064803" y="1141697"/>
+                  </a:lnTo>
+                  <a:lnTo>
+                    <a:pt x="4994458" y="1137081"/>
+                  </a:lnTo>
+                  <a:lnTo>
+                    <a:pt x="4924114" y="1132282"/>
+                  </a:lnTo>
+                  <a:lnTo>
+                    <a:pt x="4853769" y="1127290"/>
+                  </a:lnTo>
+                  <a:lnTo>
+                    <a:pt x="4783425" y="1122099"/>
+                  </a:lnTo>
+                  <a:lnTo>
+                    <a:pt x="4713080" y="1116701"/>
+                  </a:lnTo>
+                  <a:lnTo>
+                    <a:pt x="4642736" y="1111086"/>
+                  </a:lnTo>
+                  <a:lnTo>
+                    <a:pt x="4572391" y="1105248"/>
+                  </a:lnTo>
+                  <a:lnTo>
+                    <a:pt x="4502047" y="1099176"/>
+                  </a:lnTo>
+                  <a:lnTo>
+                    <a:pt x="4431702" y="1092862"/>
+                  </a:lnTo>
+                  <a:lnTo>
+                    <a:pt x="4361358" y="1086295"/>
+                  </a:lnTo>
+                  <a:lnTo>
+                    <a:pt x="4291013" y="1079466"/>
+                  </a:lnTo>
+                  <a:lnTo>
+                    <a:pt x="4220669" y="1072364"/>
+                  </a:lnTo>
+                  <a:lnTo>
+                    <a:pt x="4150324" y="1064978"/>
+                  </a:lnTo>
+                  <a:lnTo>
+                    <a:pt x="4079980" y="1057297"/>
+                  </a:lnTo>
+                  <a:lnTo>
+                    <a:pt x="4009635" y="1049309"/>
+                  </a:lnTo>
+                  <a:lnTo>
+                    <a:pt x="3939291" y="1041002"/>
+                  </a:lnTo>
+                  <a:lnTo>
+                    <a:pt x="3868946" y="1032363"/>
+                  </a:lnTo>
+                  <a:lnTo>
+                    <a:pt x="3798602" y="1023379"/>
+                  </a:lnTo>
+                  <a:lnTo>
+                    <a:pt x="3728257" y="1014036"/>
+                  </a:lnTo>
+                  <a:lnTo>
+                    <a:pt x="3657913" y="1004320"/>
+                  </a:lnTo>
+                  <a:lnTo>
+                    <a:pt x="3587569" y="994215"/>
+                  </a:lnTo>
+                  <a:lnTo>
+                    <a:pt x="3517224" y="983706"/>
+                  </a:lnTo>
+                  <a:lnTo>
+                    <a:pt x="3446880" y="972778"/>
+                  </a:lnTo>
+                  <a:lnTo>
+                    <a:pt x="3376535" y="961413"/>
+                  </a:lnTo>
+                  <a:lnTo>
+                    <a:pt x="3306191" y="954638"/>
+                  </a:lnTo>
+                  <a:lnTo>
+                    <a:pt x="3235846" y="949936"/>
+                  </a:lnTo>
+                  <a:lnTo>
+                    <a:pt x="3165502" y="945161"/>
+                  </a:lnTo>
+                  <a:lnTo>
+                    <a:pt x="3095157" y="940312"/>
+                  </a:lnTo>
+                  <a:lnTo>
+                    <a:pt x="3024813" y="935388"/>
+                  </a:lnTo>
+                  <a:lnTo>
+                    <a:pt x="2954468" y="930387"/>
+                  </a:lnTo>
+                  <a:lnTo>
+                    <a:pt x="2884124" y="925308"/>
+                  </a:lnTo>
+                  <a:lnTo>
+                    <a:pt x="2813779" y="920150"/>
+                  </a:lnTo>
+                  <a:lnTo>
+                    <a:pt x="2743435" y="914912"/>
+                  </a:lnTo>
+                  <a:lnTo>
+                    <a:pt x="2673090" y="909593"/>
+                  </a:lnTo>
+                  <a:lnTo>
+                    <a:pt x="2602746" y="904191"/>
+                  </a:lnTo>
+                  <a:lnTo>
+                    <a:pt x="2532401" y="898705"/>
+                  </a:lnTo>
+                  <a:lnTo>
+                    <a:pt x="2462057" y="893134"/>
+                  </a:lnTo>
+                  <a:lnTo>
+                    <a:pt x="2391712" y="887477"/>
+                  </a:lnTo>
+                  <a:lnTo>
+                    <a:pt x="2321368" y="881731"/>
+                  </a:lnTo>
+                  <a:lnTo>
+                    <a:pt x="2251023" y="875896"/>
+                  </a:lnTo>
+                  <a:lnTo>
+                    <a:pt x="2180679" y="869971"/>
+                  </a:lnTo>
+                  <a:lnTo>
+                    <a:pt x="2110334" y="863953"/>
+                  </a:lnTo>
+                  <a:lnTo>
+                    <a:pt x="2039990" y="857842"/>
+                  </a:lnTo>
+                  <a:lnTo>
+                    <a:pt x="1969645" y="851636"/>
+                  </a:lnTo>
+                  <a:lnTo>
+                    <a:pt x="1899301" y="845333"/>
+                  </a:lnTo>
+                  <a:lnTo>
+                    <a:pt x="1828956" y="838933"/>
+                  </a:lnTo>
+                  <a:lnTo>
+                    <a:pt x="1758612" y="832433"/>
+                  </a:lnTo>
+                  <a:lnTo>
+                    <a:pt x="1688267" y="825832"/>
+                  </a:lnTo>
+                  <a:lnTo>
+                    <a:pt x="1617923" y="819128"/>
+                  </a:lnTo>
+                  <a:lnTo>
+                    <a:pt x="1547578" y="812320"/>
+                  </a:lnTo>
+                  <a:lnTo>
+                    <a:pt x="1477234" y="805407"/>
+                  </a:lnTo>
+                  <a:lnTo>
+                    <a:pt x="1406889" y="798386"/>
+                  </a:lnTo>
+                  <a:lnTo>
+                    <a:pt x="1336545" y="791256"/>
+                  </a:lnTo>
+                  <a:lnTo>
+                    <a:pt x="1266200" y="784015"/>
+                  </a:lnTo>
+                  <a:lnTo>
+                    <a:pt x="1195856" y="776662"/>
+                  </a:lnTo>
+                  <a:lnTo>
+                    <a:pt x="1125511" y="769194"/>
+                  </a:lnTo>
+                  <a:lnTo>
+                    <a:pt x="1055167" y="761610"/>
+                  </a:lnTo>
+                  <a:lnTo>
+                    <a:pt x="984822" y="753909"/>
+                  </a:lnTo>
+                  <a:lnTo>
+                    <a:pt x="914478" y="746087"/>
+                  </a:lnTo>
+                  <a:lnTo>
+                    <a:pt x="844133" y="738144"/>
+                  </a:lnTo>
+                  <a:lnTo>
+                    <a:pt x="773789" y="730078"/>
+                  </a:lnTo>
+                  <a:lnTo>
+                    <a:pt x="703444" y="721887"/>
+                  </a:lnTo>
+                  <a:lnTo>
+                    <a:pt x="633100" y="713568"/>
+                  </a:lnTo>
+                  <a:lnTo>
+                    <a:pt x="562755" y="705120"/>
+                  </a:lnTo>
+                  <a:lnTo>
+                    <a:pt x="492411" y="696540"/>
+                  </a:lnTo>
+                  <a:lnTo>
+                    <a:pt x="422066" y="687827"/>
+                  </a:lnTo>
+                  <a:lnTo>
+                    <a:pt x="351722" y="678979"/>
+                  </a:lnTo>
+                  <a:lnTo>
+                    <a:pt x="281377" y="669994"/>
+                  </a:lnTo>
+                  <a:lnTo>
+                    <a:pt x="211033" y="660868"/>
+                  </a:lnTo>
+                  <a:lnTo>
+                    <a:pt x="140688" y="651601"/>
+                  </a:lnTo>
+                  <a:lnTo>
+                    <a:pt x="70344" y="642190"/>
+                  </a:lnTo>
+                  <a:lnTo>
+                    <a:pt x="0" y="632633"/>
+                  </a:lnTo>
+                  <a:close/>
+                </a:path>
+              </a:pathLst>
+            </a:custGeom>
+            <a:solidFill>
+              <a:srgbClr val="FF8C00">
+                <a:alpha val="20000"/>
+              </a:srgbClr>
+            </a:solidFill>
+          </p:spPr>
+          <p:txBody>
+            <a:bodyPr/>
+            <a:lstStyle/>
+            <a:p/>
+          </p:txBody>
+        </p:sp>
+        <p:sp>
+          <p:nvSpPr>
+            <p:cNvPr id="67" name="pl67"/>
+            <p:cNvSpPr/>
+            <p:nvPr/>
+          </p:nvSpPr>
+          <p:spPr>
+            <a:xfrm>
+              <a:off x="2014000" y="4336484"/>
+              <a:ext cx="6185416" cy="1121506"/>
+            </a:xfrm>
+            <a:custGeom>
+              <a:avLst/>
+              <a:pathLst>
+                <a:path w="6185416" h="1121506">
+                  <a:moveTo>
+                    <a:pt x="0" y="0"/>
+                  </a:moveTo>
+                  <a:lnTo>
+                    <a:pt x="65445" y="45061"/>
+                  </a:lnTo>
+                  <a:lnTo>
+                    <a:pt x="135790" y="91635"/>
+                  </a:lnTo>
+                  <a:lnTo>
+                    <a:pt x="206134" y="136420"/>
+                  </a:lnTo>
+                  <a:lnTo>
+                    <a:pt x="276479" y="179483"/>
+                  </a:lnTo>
+                  <a:lnTo>
+                    <a:pt x="346823" y="220892"/>
+                  </a:lnTo>
+                  <a:lnTo>
+                    <a:pt x="417168" y="260710"/>
+                  </a:lnTo>
+                  <a:lnTo>
+                    <a:pt x="487512" y="298998"/>
+                  </a:lnTo>
+                  <a:lnTo>
+                    <a:pt x="557857" y="335815"/>
+                  </a:lnTo>
+                  <a:lnTo>
+                    <a:pt x="628201" y="371218"/>
+                  </a:lnTo>
+                  <a:lnTo>
+                    <a:pt x="698546" y="405260"/>
+                  </a:lnTo>
+                  <a:lnTo>
+                    <a:pt x="768890" y="437994"/>
+                  </a:lnTo>
+                  <a:lnTo>
+                    <a:pt x="839235" y="469470"/>
+                  </a:lnTo>
+                  <a:lnTo>
+                    <a:pt x="909579" y="499737"/>
+                  </a:lnTo>
+                  <a:lnTo>
+                    <a:pt x="979923" y="528841"/>
+                  </a:lnTo>
+                  <a:lnTo>
+                    <a:pt x="1050268" y="556827"/>
+                  </a:lnTo>
+                  <a:lnTo>
+                    <a:pt x="1120612" y="583737"/>
+                  </a:lnTo>
+                  <a:lnTo>
+                    <a:pt x="1190957" y="609613"/>
+                  </a:lnTo>
+                  <a:lnTo>
+                    <a:pt x="1261301" y="634496"/>
+                  </a:lnTo>
+                  <a:lnTo>
+                    <a:pt x="1331646" y="658422"/>
+                  </a:lnTo>
+                  <a:lnTo>
+                    <a:pt x="1401990" y="681429"/>
+                  </a:lnTo>
+                  <a:lnTo>
+                    <a:pt x="1472335" y="703551"/>
+                  </a:lnTo>
+                  <a:lnTo>
+                    <a:pt x="1542679" y="724824"/>
+                  </a:lnTo>
+                  <a:lnTo>
+                    <a:pt x="1613024" y="745280"/>
+                  </a:lnTo>
+                  <a:lnTo>
+                    <a:pt x="1683368" y="764949"/>
+                  </a:lnTo>
+                  <a:lnTo>
+                    <a:pt x="1753713" y="783863"/>
+                  </a:lnTo>
+                  <a:lnTo>
+                    <a:pt x="1824057" y="802050"/>
+                  </a:lnTo>
+                  <a:lnTo>
+                    <a:pt x="1894402" y="819538"/>
+                  </a:lnTo>
+                  <a:lnTo>
+                    <a:pt x="1964746" y="836355"/>
+                  </a:lnTo>
+                  <a:lnTo>
+                    <a:pt x="2035091" y="852525"/>
+                  </a:lnTo>
+                  <a:lnTo>
+                    <a:pt x="2105435" y="868074"/>
+                  </a:lnTo>
+                  <a:lnTo>
+                    <a:pt x="2175780" y="883025"/>
+                  </a:lnTo>
+                  <a:lnTo>
+                    <a:pt x="2246124" y="897402"/>
+                  </a:lnTo>
+                  <a:lnTo>
+                    <a:pt x="2316469" y="911226"/>
+                  </a:lnTo>
+                  <a:lnTo>
+                    <a:pt x="2386813" y="924520"/>
+                  </a:lnTo>
+                  <a:lnTo>
+                    <a:pt x="2457158" y="937302"/>
+                  </a:lnTo>
+                  <a:lnTo>
+                    <a:pt x="2527502" y="949594"/>
+                  </a:lnTo>
+                  <a:lnTo>
+                    <a:pt x="2597847" y="959268"/>
+                  </a:lnTo>
+                  <a:lnTo>
+                    <a:pt x="2668191" y="963827"/>
+                  </a:lnTo>
+                  <a:lnTo>
+                    <a:pt x="2738536" y="968317"/>
+                  </a:lnTo>
+                  <a:lnTo>
+                    <a:pt x="2808880" y="972737"/>
+                  </a:lnTo>
+                  <a:lnTo>
+                    <a:pt x="2879225" y="977090"/>
+                  </a:lnTo>
+                  <a:lnTo>
+                    <a:pt x="2949569" y="981377"/>
+                  </a:lnTo>
+                  <a:lnTo>
+                    <a:pt x="3019914" y="985597"/>
+                  </a:lnTo>
+                  <a:lnTo>
+                    <a:pt x="3090258" y="989754"/>
+                  </a:lnTo>
+                  <a:lnTo>
+                    <a:pt x="3160603" y="993846"/>
+                  </a:lnTo>
+                  <a:lnTo>
+                    <a:pt x="3230947" y="997876"/>
+                  </a:lnTo>
+                  <a:lnTo>
+                    <a:pt x="3301292" y="1001844"/>
+                  </a:lnTo>
+                  <a:lnTo>
+                    <a:pt x="3371636" y="1005752"/>
+                  </a:lnTo>
+                  <a:lnTo>
+                    <a:pt x="3441981" y="1009600"/>
+                  </a:lnTo>
+                  <a:lnTo>
+                    <a:pt x="3512325" y="1013389"/>
+                  </a:lnTo>
+                  <a:lnTo>
+                    <a:pt x="3582670" y="1017120"/>
+                  </a:lnTo>
+                  <a:lnTo>
+                    <a:pt x="3653014" y="1020793"/>
+                  </a:lnTo>
+                  <a:lnTo>
+                    <a:pt x="3723359" y="1024411"/>
+                  </a:lnTo>
+                  <a:lnTo>
+                    <a:pt x="3793703" y="1027973"/>
+                  </a:lnTo>
+                  <a:lnTo>
+                    <a:pt x="3864048" y="1031481"/>
+                  </a:lnTo>
+                  <a:lnTo>
+                    <a:pt x="3934392" y="1034935"/>
+                  </a:lnTo>
+                  <a:lnTo>
+                    <a:pt x="4004737" y="1038336"/>
+                  </a:lnTo>
+                  <a:lnTo>
+                    <a:pt x="4075081" y="1041685"/>
+                  </a:lnTo>
+                  <a:lnTo>
+                    <a:pt x="4145426" y="1044983"/>
+                  </a:lnTo>
+                  <a:lnTo>
+                    <a:pt x="4215770" y="1048231"/>
+                  </a:lnTo>
+                  <a:lnTo>
+                    <a:pt x="4286115" y="1051429"/>
+                  </a:lnTo>
+                  <a:lnTo>
+                    <a:pt x="4356459" y="1054577"/>
+                  </a:lnTo>
+                  <a:lnTo>
+                    <a:pt x="4426804" y="1057678"/>
+                  </a:lnTo>
+                  <a:lnTo>
+                    <a:pt x="4497148" y="1060731"/>
+                  </a:lnTo>
+                  <a:lnTo>
+                    <a:pt x="4567493" y="1063738"/>
+                  </a:lnTo>
+                  <a:lnTo>
+                    <a:pt x="4637837" y="1066698"/>
+                  </a:lnTo>
+                  <a:lnTo>
+                    <a:pt x="4708181" y="1069613"/>
+                  </a:lnTo>
+                  <a:lnTo>
+                    <a:pt x="4778526" y="1072484"/>
+                  </a:lnTo>
+                  <a:lnTo>
+                    <a:pt x="4848870" y="1075310"/>
+                  </a:lnTo>
+                  <a:lnTo>
+                    <a:pt x="4919215" y="1078094"/>
+                  </a:lnTo>
+                  <a:lnTo>
+                    <a:pt x="4989559" y="1080835"/>
+                  </a:lnTo>
+                  <a:lnTo>
+                    <a:pt x="5059904" y="1083533"/>
+                  </a:lnTo>
+                  <a:lnTo>
+                    <a:pt x="5130248" y="1086191"/>
+                  </a:lnTo>
+                  <a:lnTo>
+                    <a:pt x="5200593" y="1088808"/>
+                  </a:lnTo>
+                  <a:lnTo>
+                    <a:pt x="5270937" y="1091385"/>
+                  </a:lnTo>
+                  <a:lnTo>
+                    <a:pt x="5341282" y="1093922"/>
+                  </a:lnTo>
+                  <a:lnTo>
+                    <a:pt x="5411626" y="1096421"/>
+                  </a:lnTo>
+                  <a:lnTo>
+                    <a:pt x="5481971" y="1098881"/>
+                  </a:lnTo>
+                  <a:lnTo>
+                    <a:pt x="5552315" y="1101304"/>
+                  </a:lnTo>
+                  <a:lnTo>
+                    <a:pt x="5622660" y="1103689"/>
+                  </a:lnTo>
+                  <a:lnTo>
+                    <a:pt x="5693004" y="1106038"/>
+                  </a:lnTo>
+                  <a:lnTo>
+                    <a:pt x="5763349" y="1108352"/>
+                  </a:lnTo>
+                  <a:lnTo>
+                    <a:pt x="5833693" y="1110629"/>
+                  </a:lnTo>
+                  <a:lnTo>
+                    <a:pt x="5904038" y="1112872"/>
+                  </a:lnTo>
+                  <a:lnTo>
+                    <a:pt x="5974382" y="1115081"/>
+                  </a:lnTo>
+                  <a:lnTo>
+                    <a:pt x="6044727" y="1117256"/>
+                  </a:lnTo>
+                  <a:lnTo>
+                    <a:pt x="6115071" y="1119397"/>
+                  </a:lnTo>
+                  <a:lnTo>
+                    <a:pt x="6185416" y="1121506"/>
+                  </a:lnTo>
+                </a:path>
+              </a:pathLst>
+            </a:custGeom>
+          </p:spPr>
+          <p:txBody>
+            <a:bodyPr/>
+            <a:lstStyle/>
+            <a:p/>
+          </p:txBody>
+        </p:sp>
+        <p:sp>
+          <p:nvSpPr>
+            <p:cNvPr id="68" name="pl68"/>
+            <p:cNvSpPr/>
+            <p:nvPr/>
+          </p:nvSpPr>
+          <p:spPr>
+            <a:xfrm>
+              <a:off x="1235312" y="4969117"/>
+              <a:ext cx="6964104" cy="584466"/>
+            </a:xfrm>
+            <a:custGeom>
+              <a:avLst/>
+              <a:pathLst>
+                <a:path w="6964104" h="584466">
+                  <a:moveTo>
+                    <a:pt x="6964104" y="584466"/>
+                  </a:moveTo>
+                  <a:lnTo>
+                    <a:pt x="6893760" y="582864"/>
+                  </a:lnTo>
+                  <a:lnTo>
+                    <a:pt x="6823415" y="581197"/>
+                  </a:lnTo>
+                  <a:lnTo>
+                    <a:pt x="6753071" y="579464"/>
+                  </a:lnTo>
+                  <a:lnTo>
+                    <a:pt x="6682726" y="577662"/>
+                  </a:lnTo>
+                  <a:lnTo>
+                    <a:pt x="6612382" y="575788"/>
+                  </a:lnTo>
+                  <a:lnTo>
+                    <a:pt x="6542037" y="573838"/>
+                  </a:lnTo>
+                  <a:lnTo>
+                    <a:pt x="6471693" y="571811"/>
+                  </a:lnTo>
+                  <a:lnTo>
+                    <a:pt x="6401348" y="569703"/>
+                  </a:lnTo>
+                  <a:lnTo>
+                    <a:pt x="6331004" y="567511"/>
+                  </a:lnTo>
+                  <a:lnTo>
+                    <a:pt x="6260659" y="565231"/>
+                  </a:lnTo>
+                  <a:lnTo>
+                    <a:pt x="6190315" y="562860"/>
+                  </a:lnTo>
+                  <a:lnTo>
+                    <a:pt x="6119970" y="560394"/>
+                  </a:lnTo>
+                  <a:lnTo>
+                    <a:pt x="6049626" y="557830"/>
+                  </a:lnTo>
+                  <a:lnTo>
+                    <a:pt x="5979281" y="555163"/>
+                  </a:lnTo>
+                  <a:lnTo>
+                    <a:pt x="5908937" y="552390"/>
+                  </a:lnTo>
+                  <a:lnTo>
+                    <a:pt x="5838592" y="549506"/>
+                  </a:lnTo>
+                  <a:lnTo>
+                    <a:pt x="5768248" y="546506"/>
+                  </a:lnTo>
+                  <a:lnTo>
+                    <a:pt x="5697903" y="543387"/>
+                  </a:lnTo>
+                  <a:lnTo>
+                    <a:pt x="5627559" y="540143"/>
+                  </a:lnTo>
+                  <a:lnTo>
+                    <a:pt x="5557214" y="536770"/>
+                  </a:lnTo>
+                  <a:lnTo>
+                    <a:pt x="5486870" y="533261"/>
+                  </a:lnTo>
+                  <a:lnTo>
+                    <a:pt x="5416525" y="529613"/>
+                  </a:lnTo>
+                  <a:lnTo>
+                    <a:pt x="5346181" y="525819"/>
+                  </a:lnTo>
+                  <a:lnTo>
+                    <a:pt x="5275836" y="521873"/>
+                  </a:lnTo>
+                  <a:lnTo>
+                    <a:pt x="5205492" y="517769"/>
+                  </a:lnTo>
+                  <a:lnTo>
+                    <a:pt x="5135147" y="513502"/>
+                  </a:lnTo>
+                  <a:lnTo>
+                    <a:pt x="5064803" y="509064"/>
+                  </a:lnTo>
+                  <a:lnTo>
+                    <a:pt x="4994458" y="504448"/>
+                  </a:lnTo>
+                  <a:lnTo>
+                    <a:pt x="4924114" y="499649"/>
+                  </a:lnTo>
+                  <a:lnTo>
+                    <a:pt x="4853769" y="494657"/>
+                  </a:lnTo>
+                  <a:lnTo>
+                    <a:pt x="4783425" y="489466"/>
+                  </a:lnTo>
+                  <a:lnTo>
+                    <a:pt x="4713080" y="484068"/>
+                  </a:lnTo>
+                  <a:lnTo>
+                    <a:pt x="4642736" y="478453"/>
+                  </a:lnTo>
+                  <a:lnTo>
+                    <a:pt x="4572391" y="472615"/>
+                  </a:lnTo>
+                  <a:lnTo>
+                    <a:pt x="4502047" y="466543"/>
+                  </a:lnTo>
+                  <a:lnTo>
+                    <a:pt x="4431702" y="460229"/>
+                  </a:lnTo>
+                  <a:lnTo>
+                    <a:pt x="4361358" y="453662"/>
+                  </a:lnTo>
+                  <a:lnTo>
+                    <a:pt x="4291013" y="446833"/>
+                  </a:lnTo>
+                  <a:lnTo>
+                    <a:pt x="4220669" y="439731"/>
+                  </a:lnTo>
+                  <a:lnTo>
+                    <a:pt x="4150324" y="432345"/>
+                  </a:lnTo>
+                  <a:lnTo>
+                    <a:pt x="4079980" y="424664"/>
+                  </a:lnTo>
+                  <a:lnTo>
+                    <a:pt x="4009635" y="416676"/>
+                  </a:lnTo>
+                  <a:lnTo>
+                    <a:pt x="3939291" y="408369"/>
+                  </a:lnTo>
+                  <a:lnTo>
+                    <a:pt x="3868946" y="399730"/>
+                  </a:lnTo>
+                  <a:lnTo>
+                    <a:pt x="3798602" y="390746"/>
+                  </a:lnTo>
+                  <a:lnTo>
+                    <a:pt x="3728257" y="381403"/>
+                  </a:lnTo>
+                  <a:lnTo>
+                    <a:pt x="3657913" y="371687"/>
+                  </a:lnTo>
+                  <a:lnTo>
+                    <a:pt x="3587569" y="361582"/>
+                  </a:lnTo>
+                  <a:lnTo>
+                    <a:pt x="3517224" y="351073"/>
+                  </a:lnTo>
+                  <a:lnTo>
+                    <a:pt x="3446880" y="340145"/>
+                  </a:lnTo>
+                  <a:lnTo>
+                    <a:pt x="3376535" y="328780"/>
+                  </a:lnTo>
+                  <a:lnTo>
+                    <a:pt x="3306191" y="322005"/>
+                  </a:lnTo>
+                  <a:lnTo>
+                    <a:pt x="3235846" y="317303"/>
+                  </a:lnTo>
+                  <a:lnTo>
+                    <a:pt x="3165502" y="312528"/>
+                  </a:lnTo>
+                  <a:lnTo>
+                    <a:pt x="3095157" y="307679"/>
+                  </a:lnTo>
+                  <a:lnTo>
+                    <a:pt x="3024813" y="302755"/>
+                  </a:lnTo>
+                  <a:lnTo>
+                    <a:pt x="2954468" y="297754"/>
+                  </a:lnTo>
+                  <a:lnTo>
+                    <a:pt x="2884124" y="292675"/>
+                  </a:lnTo>
+                  <a:lnTo>
+                    <a:pt x="2813779" y="287517"/>
+                  </a:lnTo>
+                  <a:lnTo>
+                    <a:pt x="2743435" y="282279"/>
+                  </a:lnTo>
+                  <a:lnTo>
+                    <a:pt x="2673090" y="276960"/>
+                  </a:lnTo>
+                  <a:lnTo>
+                    <a:pt x="2602746" y="271558"/>
+                  </a:lnTo>
+                  <a:lnTo>
+                    <a:pt x="2532401" y="266072"/>
+                  </a:lnTo>
+                  <a:lnTo>
+                    <a:pt x="2462057" y="260501"/>
+                  </a:lnTo>
+                  <a:lnTo>
+                    <a:pt x="2391712" y="254844"/>
+                  </a:lnTo>
+                  <a:lnTo>
+                    <a:pt x="2321368" y="249098"/>
+                  </a:lnTo>
+                  <a:lnTo>
+                    <a:pt x="2251023" y="243263"/>
+                  </a:lnTo>
+                  <a:lnTo>
+                    <a:pt x="2180679" y="237338"/>
+                  </a:lnTo>
+                  <a:lnTo>
+                    <a:pt x="2110334" y="231320"/>
+                  </a:lnTo>
+                  <a:lnTo>
+                    <a:pt x="2039990" y="225209"/>
+                  </a:lnTo>
+                  <a:lnTo>
+                    <a:pt x="1969645" y="219003"/>
+                  </a:lnTo>
+                  <a:lnTo>
+                    <a:pt x="1899301" y="212700"/>
+                  </a:lnTo>
+                  <a:lnTo>
+                    <a:pt x="1828956" y="206300"/>
+                  </a:lnTo>
+                  <a:lnTo>
+                    <a:pt x="1758612" y="199800"/>
+                  </a:lnTo>
+                  <a:lnTo>
+                    <a:pt x="1688267" y="193199"/>
+                  </a:lnTo>
+                  <a:lnTo>
+                    <a:pt x="1617923" y="186495"/>
+                  </a:lnTo>
+                  <a:lnTo>
+                    <a:pt x="1547578" y="179687"/>
+                  </a:lnTo>
+                  <a:lnTo>
+                    <a:pt x="1477234" y="172774"/>
+                  </a:lnTo>
+                  <a:lnTo>
+                    <a:pt x="1406889" y="165753"/>
+                  </a:lnTo>
+                  <a:lnTo>
+                    <a:pt x="1336545" y="158623"/>
+                  </a:lnTo>
+                  <a:lnTo>
+                    <a:pt x="1266200" y="151382"/>
+                  </a:lnTo>
+                  <a:lnTo>
+                    <a:pt x="1195856" y="144029"/>
+                  </a:lnTo>
+                  <a:lnTo>
+                    <a:pt x="1125511" y="136561"/>
+                  </a:lnTo>
+                  <a:lnTo>
+                    <a:pt x="1055167" y="128977"/>
+                  </a:lnTo>
+                  <a:lnTo>
+                    <a:pt x="984822" y="121276"/>
+                  </a:lnTo>
+                  <a:lnTo>
+                    <a:pt x="914478" y="113454"/>
+                  </a:lnTo>
+                  <a:lnTo>
+                    <a:pt x="844133" y="105511"/>
+                  </a:lnTo>
+                  <a:lnTo>
+                    <a:pt x="773789" y="97445"/>
+                  </a:lnTo>
+                  <a:lnTo>
+                    <a:pt x="703444" y="89254"/>
+                  </a:lnTo>
+                  <a:lnTo>
+                    <a:pt x="633100" y="80935"/>
+                  </a:lnTo>
+                  <a:lnTo>
+                    <a:pt x="562755" y="72487"/>
+                  </a:lnTo>
+                  <a:lnTo>
+                    <a:pt x="492411" y="63907"/>
+                  </a:lnTo>
+                  <a:lnTo>
+                    <a:pt x="422066" y="55194"/>
+                  </a:lnTo>
+                  <a:lnTo>
+                    <a:pt x="351722" y="46346"/>
+                  </a:lnTo>
+                  <a:lnTo>
+                    <a:pt x="281377" y="37360"/>
+                  </a:lnTo>
+                  <a:lnTo>
+                    <a:pt x="211033" y="28235"/>
+                  </a:lnTo>
+                  <a:lnTo>
+                    <a:pt x="140688" y="18968"/>
+                  </a:lnTo>
+                  <a:lnTo>
+                    <a:pt x="70344" y="9557"/>
+                  </a:lnTo>
+                  <a:lnTo>
+                    <a:pt x="0" y="0"/>
+                  </a:lnTo>
+                </a:path>
+              </a:pathLst>
+            </a:custGeom>
+          </p:spPr>
+          <p:txBody>
+            <a:bodyPr/>
+            <a:lstStyle/>
+            <a:p/>
+          </p:txBody>
+        </p:sp>
+        <p:sp>
+          <p:nvSpPr>
+            <p:cNvPr id="69" name="pl69"/>
+            <p:cNvSpPr/>
+            <p:nvPr/>
+          </p:nvSpPr>
+          <p:spPr>
+            <a:xfrm>
+              <a:off x="1235312" y="4493004"/>
+              <a:ext cx="6964104" cy="1026914"/>
+            </a:xfrm>
+            <a:custGeom>
+              <a:avLst/>
+              <a:pathLst>
+                <a:path w="6964104" h="1026914">
+                  <a:moveTo>
+                    <a:pt x="0" y="0"/>
+                  </a:moveTo>
+                  <a:lnTo>
+                    <a:pt x="70344" y="29642"/>
+                  </a:lnTo>
+                  <a:lnTo>
+                    <a:pt x="140688" y="58487"/>
+                  </a:lnTo>
+                  <a:lnTo>
+                    <a:pt x="211033" y="86554"/>
+                  </a:lnTo>
+                  <a:lnTo>
+                    <a:pt x="281377" y="113866"/>
+                  </a:lnTo>
+                  <a:lnTo>
+                    <a:pt x="351722" y="140442"/>
+                  </a:lnTo>
+                  <a:lnTo>
+                    <a:pt x="422066" y="166303"/>
+                  </a:lnTo>
+                  <a:lnTo>
+                    <a:pt x="492411" y="191467"/>
+                  </a:lnTo>
+                  <a:lnTo>
+                    <a:pt x="562755" y="215953"/>
+                  </a:lnTo>
+                  <a:lnTo>
+                    <a:pt x="633100" y="239780"/>
+                  </a:lnTo>
+                  <a:lnTo>
+                    <a:pt x="703444" y="262965"/>
+                  </a:lnTo>
+                  <a:lnTo>
+                    <a:pt x="773789" y="285526"/>
+                  </a:lnTo>
+                  <a:lnTo>
+                    <a:pt x="844133" y="307479"/>
+                  </a:lnTo>
+                  <a:lnTo>
+                    <a:pt x="914478" y="328841"/>
+                  </a:lnTo>
+                  <a:lnTo>
+                    <a:pt x="984822" y="349628"/>
+                  </a:lnTo>
+                  <a:lnTo>
+                    <a:pt x="1055167" y="369855"/>
+                  </a:lnTo>
+                  <a:lnTo>
+                    <a:pt x="1125511" y="389537"/>
+                  </a:lnTo>
+                  <a:lnTo>
+                    <a:pt x="1195856" y="408689"/>
+                  </a:lnTo>
+                  <a:lnTo>
+                    <a:pt x="1266200" y="427325"/>
+                  </a:lnTo>
+                  <a:lnTo>
+                    <a:pt x="1336545" y="445459"/>
+                  </a:lnTo>
+                  <a:lnTo>
+                    <a:pt x="1406889" y="463105"/>
+                  </a:lnTo>
+                  <a:lnTo>
+                    <a:pt x="1477234" y="480276"/>
+                  </a:lnTo>
+                  <a:lnTo>
+                    <a:pt x="1547578" y="496984"/>
+                  </a:lnTo>
+                  <a:lnTo>
+                    <a:pt x="1617923" y="513243"/>
+                  </a:lnTo>
+                  <a:lnTo>
+                    <a:pt x="1688267" y="529063"/>
+                  </a:lnTo>
+                  <a:lnTo>
+                    <a:pt x="1758612" y="544458"/>
+                  </a:lnTo>
+                  <a:lnTo>
+                    <a:pt x="1828956" y="559438"/>
+                  </a:lnTo>
+                  <a:lnTo>
+                    <a:pt x="1899301" y="574014"/>
+                  </a:lnTo>
+                  <a:lnTo>
+                    <a:pt x="1969645" y="588198"/>
+                  </a:lnTo>
+                  <a:lnTo>
+                    <a:pt x="2039990" y="602000"/>
+                  </a:lnTo>
+                  <a:lnTo>
+                    <a:pt x="2110334" y="615430"/>
+                  </a:lnTo>
+                  <a:lnTo>
+                    <a:pt x="2180679" y="628498"/>
+                  </a:lnTo>
+                  <a:lnTo>
+                    <a:pt x="2251023" y="641215"/>
+                  </a:lnTo>
+                  <a:lnTo>
+                    <a:pt x="2321368" y="653589"/>
+                  </a:lnTo>
+                  <a:lnTo>
+                    <a:pt x="2391712" y="665630"/>
+                  </a:lnTo>
+                  <a:lnTo>
+                    <a:pt x="2462057" y="677346"/>
+                  </a:lnTo>
+                  <a:lnTo>
+                    <a:pt x="2532401" y="688747"/>
+                  </a:lnTo>
+                  <a:lnTo>
+                    <a:pt x="2602746" y="699841"/>
+                  </a:lnTo>
+                  <a:lnTo>
+                    <a:pt x="2673090" y="710636"/>
+                  </a:lnTo>
+                  <a:lnTo>
+                    <a:pt x="2743435" y="721141"/>
+                  </a:lnTo>
+                  <a:lnTo>
+                    <a:pt x="2813779" y="731362"/>
+                  </a:lnTo>
+                  <a:lnTo>
+                    <a:pt x="2884124" y="741308"/>
+                  </a:lnTo>
+                  <a:lnTo>
+                    <a:pt x="2954468" y="750987"/>
+                  </a:lnTo>
+                  <a:lnTo>
+                    <a:pt x="3024813" y="760405"/>
+                  </a:lnTo>
+                  <a:lnTo>
+                    <a:pt x="3095157" y="769569"/>
+                  </a:lnTo>
+                  <a:lnTo>
+                    <a:pt x="3165502" y="778486"/>
+                  </a:lnTo>
+                  <a:lnTo>
+                    <a:pt x="3235846" y="787163"/>
+                  </a:lnTo>
+                  <a:lnTo>
+                    <a:pt x="3306191" y="795607"/>
+                  </a:lnTo>
+                  <a:lnTo>
+                    <a:pt x="3376535" y="803823"/>
+                  </a:lnTo>
+                  <a:lnTo>
+                    <a:pt x="3446880" y="811817"/>
+                  </a:lnTo>
+                  <a:lnTo>
+                    <a:pt x="3517224" y="819597"/>
+                  </a:lnTo>
+                  <a:lnTo>
+                    <a:pt x="3587569" y="827167"/>
+                  </a:lnTo>
+                  <a:lnTo>
+                    <a:pt x="3657913" y="834533"/>
+                  </a:lnTo>
+                  <a:lnTo>
+                    <a:pt x="3728257" y="841701"/>
+                  </a:lnTo>
+                  <a:lnTo>
+                    <a:pt x="3798602" y="848675"/>
+                  </a:lnTo>
+                  <a:lnTo>
+                    <a:pt x="3868946" y="855462"/>
+                  </a:lnTo>
+                  <a:lnTo>
+                    <a:pt x="3939291" y="862066"/>
+                  </a:lnTo>
+                  <a:lnTo>
+                    <a:pt x="4009635" y="868493"/>
+                  </a:lnTo>
+                  <a:lnTo>
+                    <a:pt x="4079980" y="874746"/>
+                  </a:lnTo>
+                  <a:lnTo>
+                    <a:pt x="4150324" y="880830"/>
+                  </a:lnTo>
+                  <a:lnTo>
+                    <a:pt x="4220669" y="886751"/>
+                  </a:lnTo>
+                  <a:lnTo>
+                    <a:pt x="4291013" y="892513"/>
+                  </a:lnTo>
+                  <a:lnTo>
+                    <a:pt x="4361358" y="898119"/>
+                  </a:lnTo>
+                  <a:lnTo>
+                    <a:pt x="4431702" y="903574"/>
+                  </a:lnTo>
+                  <a:lnTo>
+                    <a:pt x="4502047" y="908883"/>
+                  </a:lnTo>
+                  <a:lnTo>
+                    <a:pt x="4572391" y="914048"/>
+                  </a:lnTo>
+                  <a:lnTo>
+                    <a:pt x="4642736" y="919074"/>
+                  </a:lnTo>
+                  <a:lnTo>
+                    <a:pt x="4713080" y="923965"/>
+                  </a:lnTo>
+                  <a:lnTo>
+                    <a:pt x="4783425" y="928724"/>
+                  </a:lnTo>
+                  <a:lnTo>
+                    <a:pt x="4853769" y="933355"/>
+                  </a:lnTo>
+                  <a:lnTo>
+                    <a:pt x="4924114" y="937862"/>
+                  </a:lnTo>
+                  <a:lnTo>
+                    <a:pt x="4994458" y="942247"/>
+                  </a:lnTo>
+                  <a:lnTo>
+                    <a:pt x="5064803" y="946514"/>
+                  </a:lnTo>
+                  <a:lnTo>
+                    <a:pt x="5135147" y="950666"/>
+                  </a:lnTo>
+                  <a:lnTo>
+                    <a:pt x="5205492" y="954706"/>
+                  </a:lnTo>
+                  <a:lnTo>
+                    <a:pt x="5275836" y="958637"/>
+                  </a:lnTo>
+                  <a:lnTo>
+                    <a:pt x="5346181" y="962462"/>
+                  </a:lnTo>
+                  <a:lnTo>
+                    <a:pt x="5416525" y="966185"/>
+                  </a:lnTo>
+                  <a:lnTo>
+                    <a:pt x="5486870" y="969807"/>
+                  </a:lnTo>
+                  <a:lnTo>
+                    <a:pt x="5557214" y="973332"/>
+                  </a:lnTo>
+                  <a:lnTo>
+                    <a:pt x="5627559" y="976761"/>
+                  </a:lnTo>
+                  <a:lnTo>
+                    <a:pt x="5697903" y="980099"/>
+                  </a:lnTo>
+                  <a:lnTo>
+                    <a:pt x="5768248" y="983346"/>
+                  </a:lnTo>
+                  <a:lnTo>
+                    <a:pt x="5838592" y="986506"/>
+                  </a:lnTo>
+                  <a:lnTo>
+                    <a:pt x="5908937" y="989581"/>
+                  </a:lnTo>
+                  <a:lnTo>
+                    <a:pt x="5979281" y="992573"/>
+                  </a:lnTo>
+                  <a:lnTo>
+                    <a:pt x="6049626" y="995485"/>
+                  </a:lnTo>
+                  <a:lnTo>
+                    <a:pt x="6119970" y="998318"/>
+                  </a:lnTo>
+                  <a:lnTo>
+                    <a:pt x="6190315" y="1001075"/>
+                  </a:lnTo>
+                  <a:lnTo>
+                    <a:pt x="6260659" y="1003757"/>
+                  </a:lnTo>
+                  <a:lnTo>
+                    <a:pt x="6331004" y="1006367"/>
+                  </a:lnTo>
+                  <a:lnTo>
+                    <a:pt x="6401348" y="1008907"/>
+                  </a:lnTo>
+                  <a:lnTo>
+                    <a:pt x="6471693" y="1011379"/>
+                  </a:lnTo>
+                  <a:lnTo>
+                    <a:pt x="6542037" y="1013784"/>
+                  </a:lnTo>
+                  <a:lnTo>
+                    <a:pt x="6612382" y="1016124"/>
+                  </a:lnTo>
+                  <a:lnTo>
+                    <a:pt x="6682726" y="1018402"/>
+                  </a:lnTo>
+                  <a:lnTo>
+                    <a:pt x="6753071" y="1020617"/>
+                  </a:lnTo>
+                  <a:lnTo>
+                    <a:pt x="6823415" y="1022774"/>
+                  </a:lnTo>
+                  <a:lnTo>
+                    <a:pt x="6893760" y="1024872"/>
+                  </a:lnTo>
+                  <a:lnTo>
+                    <a:pt x="6964104" y="1026914"/>
+                  </a:lnTo>
+                </a:path>
+              </a:pathLst>
+            </a:custGeom>
+            <a:ln w="27101" cap="flat">
+              <a:solidFill>
+                <a:srgbClr val="FF8C00">
+                  <a:alpha val="100000"/>
+                </a:srgbClr>
+              </a:solidFill>
+              <a:prstDash val="solid"/>
+              <a:round/>
+            </a:ln>
+          </p:spPr>
+          <p:txBody>
+            <a:bodyPr/>
+            <a:lstStyle/>
+            <a:p/>
+          </p:txBody>
+        </p:sp>
+        <p:sp>
+          <p:nvSpPr>
+            <p:cNvPr id="70" name="pl70"/>
+            <p:cNvSpPr/>
+            <p:nvPr/>
+          </p:nvSpPr>
+          <p:spPr>
+            <a:xfrm>
+              <a:off x="887106" y="5294352"/>
+              <a:ext cx="7660515" cy="0"/>
+            </a:xfrm>
+            <a:custGeom>
+              <a:avLst/>
+              <a:pathLst>
+                <a:path w="7660515" h="0">
+                  <a:moveTo>
+                    <a:pt x="0" y="0"/>
+                  </a:moveTo>
+                  <a:lnTo>
+                    <a:pt x="7660515" y="0"/>
+                  </a:lnTo>
+                  <a:lnTo>
+                    <a:pt x="7660515" y="0"/>
+                  </a:lnTo>
+                </a:path>
+              </a:pathLst>
+            </a:custGeom>
+            <a:ln w="13550" cap="flat">
+              <a:solidFill>
+                <a:srgbClr val="7F7F7F">
+                  <a:alpha val="100000"/>
+                </a:srgbClr>
+              </a:solidFill>
+              <a:prstDash val="dash"/>
+              <a:round/>
+            </a:ln>
+          </p:spPr>
+          <p:txBody>
+            <a:bodyPr/>
+            <a:lstStyle/>
+            <a:p/>
+          </p:txBody>
+        </p:sp>
+        <p:sp>
+          <p:nvSpPr>
+            <p:cNvPr id="71" name="pl71"/>
+            <p:cNvSpPr/>
+            <p:nvPr/>
+          </p:nvSpPr>
+          <p:spPr>
+            <a:xfrm>
+              <a:off x="4590457" y="4336484"/>
+              <a:ext cx="0" cy="1317069"/>
+            </a:xfrm>
+            <a:custGeom>
+              <a:avLst/>
+              <a:pathLst>
+                <a:path w="0" h="1317069">
+                  <a:moveTo>
+                    <a:pt x="0" y="1317069"/>
+                  </a:moveTo>
+                  <a:lnTo>
+                    <a:pt x="0" y="0"/>
+                  </a:lnTo>
+                  <a:lnTo>
+                    <a:pt x="0" y="0"/>
+                  </a:lnTo>
+                </a:path>
+              </a:pathLst>
+            </a:custGeom>
+            <a:ln w="13550" cap="flat">
+              <a:solidFill>
+                <a:srgbClr val="666666">
+                  <a:alpha val="100000"/>
+                </a:srgbClr>
+              </a:solidFill>
+              <a:prstDash val="dot"/>
+              <a:round/>
+            </a:ln>
+          </p:spPr>
+          <p:txBody>
+            <a:bodyPr/>
+            <a:lstStyle/>
+            <a:p/>
+          </p:txBody>
+        </p:sp>
+        <p:sp>
+          <p:nvSpPr>
+            <p:cNvPr id="72" name="tx72"/>
+            <p:cNvSpPr/>
+            <p:nvPr/>
+          </p:nvSpPr>
+          <p:spPr>
+            <a:xfrm>
+              <a:off x="762297" y="5553636"/>
+              <a:ext cx="62179" cy="80101"/>
+            </a:xfrm>
+            <a:prstGeom prst="rect">
+              <a:avLst/>
+            </a:prstGeom>
+            <a:noFill/>
+          </p:spPr>
+          <p:txBody>
+            <a:bodyPr lIns="0" rIns="0" tIns="0" bIns="0" anchorCtr="1" anchor="ctr" wrap="none"/>
+            <a:lstStyle/>
+            <a:p>
+              <a:pPr algn="l" marL="0" marR="0" indent="0">
+                <a:lnSpc>
+                  <a:spcPts val="880"/>
+                </a:lnSpc>
+                <a:spcBef>
+                  <a:spcPts val="0"/>
+                </a:spcBef>
+                <a:spcAft>
+                  <a:spcPts val="0"/>
+                </a:spcAft>
+              </a:pPr>
+              <a:r>
+                <a:rPr sz="880">
+                  <a:solidFill>
+                    <a:srgbClr val="4D4D4D">
+                      <a:alpha val="100000"/>
+                    </a:srgbClr>
+                  </a:solidFill>
+                  <a:latin typeface="Helvetica"/>
+                  <a:cs typeface="Helvetica"/>
+                </a:rPr>
+                <a:t>0</a:t>
+              </a:r>
+            </a:p>
+          </p:txBody>
+        </p:sp>
+        <p:sp>
+          <p:nvSpPr>
+            <p:cNvPr id="73" name="tx73"/>
+            <p:cNvSpPr/>
+            <p:nvPr/>
+          </p:nvSpPr>
+          <p:spPr>
+            <a:xfrm>
+              <a:off x="762297" y="5254302"/>
+              <a:ext cx="62179" cy="80101"/>
+            </a:xfrm>
+            <a:prstGeom prst="rect">
+              <a:avLst/>
+            </a:prstGeom>
+            <a:noFill/>
+          </p:spPr>
+          <p:txBody>
+            <a:bodyPr lIns="0" rIns="0" tIns="0" bIns="0" anchorCtr="1" anchor="ctr" wrap="none"/>
+            <a:lstStyle/>
+            <a:p>
+              <a:pPr algn="l" marL="0" marR="0" indent="0">
+                <a:lnSpc>
+                  <a:spcPts val="880"/>
+                </a:lnSpc>
+                <a:spcBef>
+                  <a:spcPts val="0"/>
+                </a:spcBef>
+                <a:spcAft>
+                  <a:spcPts val="0"/>
+                </a:spcAft>
+              </a:pPr>
+              <a:r>
+                <a:rPr sz="880">
+                  <a:solidFill>
+                    <a:srgbClr val="4D4D4D">
+                      <a:alpha val="100000"/>
+                    </a:srgbClr>
+                  </a:solidFill>
+                  <a:latin typeface="Helvetica"/>
+                  <a:cs typeface="Helvetica"/>
+                </a:rPr>
+                <a:t>1</a:t>
+              </a:r>
+            </a:p>
+          </p:txBody>
+        </p:sp>
+        <p:sp>
+          <p:nvSpPr>
+            <p:cNvPr id="74" name="tx74"/>
+            <p:cNvSpPr/>
+            <p:nvPr/>
+          </p:nvSpPr>
+          <p:spPr>
+            <a:xfrm>
+              <a:off x="762297" y="4954968"/>
+              <a:ext cx="62179" cy="80101"/>
+            </a:xfrm>
+            <a:prstGeom prst="rect">
+              <a:avLst/>
+            </a:prstGeom>
+            <a:noFill/>
+          </p:spPr>
+          <p:txBody>
+            <a:bodyPr lIns="0" rIns="0" tIns="0" bIns="0" anchorCtr="1" anchor="ctr" wrap="none"/>
+            <a:lstStyle/>
+            <a:p>
+              <a:pPr algn="l" marL="0" marR="0" indent="0">
+                <a:lnSpc>
+                  <a:spcPts val="880"/>
+                </a:lnSpc>
+                <a:spcBef>
+                  <a:spcPts val="0"/>
+                </a:spcBef>
+                <a:spcAft>
+                  <a:spcPts val="0"/>
+                </a:spcAft>
+              </a:pPr>
+              <a:r>
+                <a:rPr sz="880">
+                  <a:solidFill>
+                    <a:srgbClr val="4D4D4D">
+                      <a:alpha val="100000"/>
+                    </a:srgbClr>
+                  </a:solidFill>
+                  <a:latin typeface="Helvetica"/>
+                  <a:cs typeface="Helvetica"/>
+                </a:rPr>
+                <a:t>2</a:t>
+              </a:r>
+            </a:p>
+          </p:txBody>
+        </p:sp>
+        <p:sp>
+          <p:nvSpPr>
+            <p:cNvPr id="75" name="tx75"/>
+            <p:cNvSpPr/>
+            <p:nvPr/>
+          </p:nvSpPr>
+          <p:spPr>
+            <a:xfrm>
+              <a:off x="762297" y="4655634"/>
+              <a:ext cx="62179" cy="80101"/>
+            </a:xfrm>
+            <a:prstGeom prst="rect">
+              <a:avLst/>
+            </a:prstGeom>
+            <a:noFill/>
+          </p:spPr>
+          <p:txBody>
+            <a:bodyPr lIns="0" rIns="0" tIns="0" bIns="0" anchorCtr="1" anchor="ctr" wrap="none"/>
+            <a:lstStyle/>
+            <a:p>
+              <a:pPr algn="l" marL="0" marR="0" indent="0">
+                <a:lnSpc>
+                  <a:spcPts val="880"/>
+                </a:lnSpc>
+                <a:spcBef>
+                  <a:spcPts val="0"/>
+                </a:spcBef>
+                <a:spcAft>
+                  <a:spcPts val="0"/>
+                </a:spcAft>
+              </a:pPr>
+              <a:r>
+                <a:rPr sz="880">
+                  <a:solidFill>
+                    <a:srgbClr val="4D4D4D">
+                      <a:alpha val="100000"/>
+                    </a:srgbClr>
+                  </a:solidFill>
+                  <a:latin typeface="Helvetica"/>
+                  <a:cs typeface="Helvetica"/>
+                </a:rPr>
+                <a:t>3</a:t>
+              </a:r>
+            </a:p>
+          </p:txBody>
+        </p:sp>
+        <p:sp>
+          <p:nvSpPr>
+            <p:cNvPr id="76" name="tx76"/>
+            <p:cNvSpPr/>
+            <p:nvPr/>
+          </p:nvSpPr>
+          <p:spPr>
+            <a:xfrm>
+              <a:off x="762297" y="4356300"/>
+              <a:ext cx="62179" cy="80101"/>
+            </a:xfrm>
+            <a:prstGeom prst="rect">
+              <a:avLst/>
+            </a:prstGeom>
+            <a:noFill/>
+          </p:spPr>
+          <p:txBody>
+            <a:bodyPr lIns="0" rIns="0" tIns="0" bIns="0" anchorCtr="1" anchor="ctr" wrap="none"/>
+            <a:lstStyle/>
+            <a:p>
+              <a:pPr algn="l" marL="0" marR="0" indent="0">
+                <a:lnSpc>
+                  <a:spcPts val="880"/>
+                </a:lnSpc>
+                <a:spcBef>
+                  <a:spcPts val="0"/>
+                </a:spcBef>
+                <a:spcAft>
+                  <a:spcPts val="0"/>
+                </a:spcAft>
+              </a:pPr>
+              <a:r>
+                <a:rPr sz="880">
+                  <a:solidFill>
+                    <a:srgbClr val="4D4D4D">
+                      <a:alpha val="100000"/>
+                    </a:srgbClr>
+                  </a:solidFill>
+                  <a:latin typeface="Helvetica"/>
+                  <a:cs typeface="Helvetica"/>
+                </a:rPr>
+                <a:t>4</a:t>
+              </a:r>
+            </a:p>
+          </p:txBody>
+        </p:sp>
+        <p:sp>
+          <p:nvSpPr>
+            <p:cNvPr id="77" name="tx77"/>
+            <p:cNvSpPr/>
+            <p:nvPr/>
+          </p:nvSpPr>
+          <p:spPr>
+            <a:xfrm>
+              <a:off x="1133333" y="5716183"/>
+              <a:ext cx="161574" cy="80101"/>
+            </a:xfrm>
+            <a:prstGeom prst="rect">
+              <a:avLst/>
+            </a:prstGeom>
+            <a:noFill/>
+          </p:spPr>
+          <p:txBody>
+            <a:bodyPr lIns="0" rIns="0" tIns="0" bIns="0" anchorCtr="1" anchor="ctr" wrap="none"/>
+            <a:lstStyle/>
+            <a:p>
+              <a:pPr algn="l" marL="0" marR="0" indent="0">
+                <a:lnSpc>
+                  <a:spcPts val="880"/>
+                </a:lnSpc>
+                <a:spcBef>
+                  <a:spcPts val="0"/>
+                </a:spcBef>
+                <a:spcAft>
+                  <a:spcPts val="0"/>
+                </a:spcAft>
+              </a:pPr>
+              <a:r>
+                <a:rPr sz="880">
+                  <a:solidFill>
+                    <a:srgbClr val="4D4D4D">
+                      <a:alpha val="100000"/>
+                    </a:srgbClr>
+                  </a:solidFill>
+                  <a:latin typeface="Helvetica"/>
+                  <a:cs typeface="Helvetica"/>
+                </a:rPr>
+                <a:t>-40</a:t>
+              </a:r>
+            </a:p>
+          </p:txBody>
+        </p:sp>
+        <p:sp>
+          <p:nvSpPr>
+            <p:cNvPr id="78" name="tx78"/>
+            <p:cNvSpPr/>
+            <p:nvPr/>
+          </p:nvSpPr>
+          <p:spPr>
+            <a:xfrm>
+              <a:off x="1978619" y="5716183"/>
+              <a:ext cx="161574" cy="80101"/>
+            </a:xfrm>
+            <a:prstGeom prst="rect">
+              <a:avLst/>
+            </a:prstGeom>
+            <a:noFill/>
+          </p:spPr>
+          <p:txBody>
+            <a:bodyPr lIns="0" rIns="0" tIns="0" bIns="0" anchorCtr="1" anchor="ctr" wrap="none"/>
+            <a:lstStyle/>
+            <a:p>
+              <a:pPr algn="l" marL="0" marR="0" indent="0">
+                <a:lnSpc>
+                  <a:spcPts val="880"/>
+                </a:lnSpc>
+                <a:spcBef>
+                  <a:spcPts val="0"/>
+                </a:spcBef>
+                <a:spcAft>
+                  <a:spcPts val="0"/>
+                </a:spcAft>
+              </a:pPr>
+              <a:r>
+                <a:rPr sz="880">
+                  <a:solidFill>
+                    <a:srgbClr val="4D4D4D">
+                      <a:alpha val="100000"/>
+                    </a:srgbClr>
+                  </a:solidFill>
+                  <a:latin typeface="Helvetica"/>
+                  <a:cs typeface="Helvetica"/>
+                </a:rPr>
+                <a:t>-30</a:t>
+              </a:r>
+            </a:p>
+          </p:txBody>
+        </p:sp>
+        <p:sp>
+          <p:nvSpPr>
+            <p:cNvPr id="79" name="tx79"/>
+            <p:cNvSpPr/>
+            <p:nvPr/>
+          </p:nvSpPr>
+          <p:spPr>
+            <a:xfrm>
+              <a:off x="2823906" y="5716183"/>
+              <a:ext cx="161574" cy="80101"/>
+            </a:xfrm>
+            <a:prstGeom prst="rect">
+              <a:avLst/>
+            </a:prstGeom>
+            <a:noFill/>
+          </p:spPr>
+          <p:txBody>
+            <a:bodyPr lIns="0" rIns="0" tIns="0" bIns="0" anchorCtr="1" anchor="ctr" wrap="none"/>
+            <a:lstStyle/>
+            <a:p>
+              <a:pPr algn="l" marL="0" marR="0" indent="0">
+                <a:lnSpc>
+                  <a:spcPts val="880"/>
+                </a:lnSpc>
+                <a:spcBef>
+                  <a:spcPts val="0"/>
+                </a:spcBef>
+                <a:spcAft>
+                  <a:spcPts val="0"/>
+                </a:spcAft>
+              </a:pPr>
+              <a:r>
+                <a:rPr sz="880">
+                  <a:solidFill>
+                    <a:srgbClr val="4D4D4D">
+                      <a:alpha val="100000"/>
+                    </a:srgbClr>
+                  </a:solidFill>
+                  <a:latin typeface="Helvetica"/>
+                  <a:cs typeface="Helvetica"/>
+                </a:rPr>
+                <a:t>-20</a:t>
+              </a:r>
+            </a:p>
+          </p:txBody>
+        </p:sp>
+        <p:sp>
+          <p:nvSpPr>
+            <p:cNvPr id="80" name="tx80"/>
+            <p:cNvSpPr/>
+            <p:nvPr/>
+          </p:nvSpPr>
+          <p:spPr>
+            <a:xfrm>
+              <a:off x="3669192" y="5716183"/>
+              <a:ext cx="161574" cy="80101"/>
+            </a:xfrm>
+            <a:prstGeom prst="rect">
+              <a:avLst/>
+            </a:prstGeom>
+            <a:noFill/>
+          </p:spPr>
+          <p:txBody>
+            <a:bodyPr lIns="0" rIns="0" tIns="0" bIns="0" anchorCtr="1" anchor="ctr" wrap="none"/>
+            <a:lstStyle/>
+            <a:p>
+              <a:pPr algn="l" marL="0" marR="0" indent="0">
+                <a:lnSpc>
+                  <a:spcPts val="880"/>
+                </a:lnSpc>
+                <a:spcBef>
+                  <a:spcPts val="0"/>
+                </a:spcBef>
+                <a:spcAft>
+                  <a:spcPts val="0"/>
+                </a:spcAft>
+              </a:pPr>
+              <a:r>
+                <a:rPr sz="880">
+                  <a:solidFill>
+                    <a:srgbClr val="4D4D4D">
+                      <a:alpha val="100000"/>
+                    </a:srgbClr>
+                  </a:solidFill>
+                  <a:latin typeface="Helvetica"/>
+                  <a:cs typeface="Helvetica"/>
+                </a:rPr>
+                <a:t>-10</a:t>
+              </a:r>
+            </a:p>
+          </p:txBody>
+        </p:sp>
+        <p:sp>
+          <p:nvSpPr>
+            <p:cNvPr id="81" name="tx81"/>
+            <p:cNvSpPr/>
+            <p:nvPr/>
+          </p:nvSpPr>
+          <p:spPr>
+            <a:xfrm>
+              <a:off x="4564176" y="5716183"/>
+              <a:ext cx="62179" cy="80101"/>
+            </a:xfrm>
+            <a:prstGeom prst="rect">
+              <a:avLst/>
+            </a:prstGeom>
+            <a:noFill/>
+          </p:spPr>
+          <p:txBody>
+            <a:bodyPr lIns="0" rIns="0" tIns="0" bIns="0" anchorCtr="1" anchor="ctr" wrap="none"/>
+            <a:lstStyle/>
+            <a:p>
+              <a:pPr algn="l" marL="0" marR="0" indent="0">
+                <a:lnSpc>
+                  <a:spcPts val="880"/>
+                </a:lnSpc>
+                <a:spcBef>
+                  <a:spcPts val="0"/>
+                </a:spcBef>
+                <a:spcAft>
+                  <a:spcPts val="0"/>
+                </a:spcAft>
+              </a:pPr>
+              <a:r>
+                <a:rPr sz="880">
+                  <a:solidFill>
+                    <a:srgbClr val="4D4D4D">
+                      <a:alpha val="100000"/>
+                    </a:srgbClr>
+                  </a:solidFill>
+                  <a:latin typeface="Helvetica"/>
+                  <a:cs typeface="Helvetica"/>
+                </a:rPr>
+                <a:t>0</a:t>
+              </a:r>
+            </a:p>
+          </p:txBody>
+        </p:sp>
+        <p:sp>
+          <p:nvSpPr>
+            <p:cNvPr id="82" name="tx82"/>
+            <p:cNvSpPr/>
+            <p:nvPr/>
+          </p:nvSpPr>
+          <p:spPr>
+            <a:xfrm>
+              <a:off x="5378373" y="5716183"/>
+              <a:ext cx="124358" cy="80101"/>
+            </a:xfrm>
+            <a:prstGeom prst="rect">
+              <a:avLst/>
+            </a:prstGeom>
+            <a:noFill/>
+          </p:spPr>
+          <p:txBody>
+            <a:bodyPr lIns="0" rIns="0" tIns="0" bIns="0" anchorCtr="1" anchor="ctr" wrap="none"/>
+            <a:lstStyle/>
+            <a:p>
+              <a:pPr algn="l" marL="0" marR="0" indent="0">
+                <a:lnSpc>
+                  <a:spcPts val="880"/>
+                </a:lnSpc>
+                <a:spcBef>
+                  <a:spcPts val="0"/>
+                </a:spcBef>
+                <a:spcAft>
+                  <a:spcPts val="0"/>
+                </a:spcAft>
+              </a:pPr>
+              <a:r>
+                <a:rPr sz="880">
+                  <a:solidFill>
+                    <a:srgbClr val="4D4D4D">
+                      <a:alpha val="100000"/>
+                    </a:srgbClr>
+                  </a:solidFill>
+                  <a:latin typeface="Helvetica"/>
+                  <a:cs typeface="Helvetica"/>
+                </a:rPr>
+                <a:t>10</a:t>
+              </a:r>
+            </a:p>
+          </p:txBody>
+        </p:sp>
+        <p:sp>
+          <p:nvSpPr>
+            <p:cNvPr id="83" name="tx83"/>
+            <p:cNvSpPr/>
+            <p:nvPr/>
+          </p:nvSpPr>
+          <p:spPr>
+            <a:xfrm>
+              <a:off x="6223659" y="5716183"/>
+              <a:ext cx="124358" cy="80101"/>
+            </a:xfrm>
+            <a:prstGeom prst="rect">
+              <a:avLst/>
+            </a:prstGeom>
+            <a:noFill/>
+          </p:spPr>
+          <p:txBody>
+            <a:bodyPr lIns="0" rIns="0" tIns="0" bIns="0" anchorCtr="1" anchor="ctr" wrap="none"/>
+            <a:lstStyle/>
+            <a:p>
+              <a:pPr algn="l" marL="0" marR="0" indent="0">
+                <a:lnSpc>
+                  <a:spcPts val="880"/>
+                </a:lnSpc>
+                <a:spcBef>
+                  <a:spcPts val="0"/>
+                </a:spcBef>
+                <a:spcAft>
+                  <a:spcPts val="0"/>
+                </a:spcAft>
+              </a:pPr>
+              <a:r>
+                <a:rPr sz="880">
+                  <a:solidFill>
+                    <a:srgbClr val="4D4D4D">
+                      <a:alpha val="100000"/>
+                    </a:srgbClr>
+                  </a:solidFill>
+                  <a:latin typeface="Helvetica"/>
+                  <a:cs typeface="Helvetica"/>
+                </a:rPr>
+                <a:t>20</a:t>
+              </a:r>
+            </a:p>
+          </p:txBody>
+        </p:sp>
+        <p:sp>
+          <p:nvSpPr>
+            <p:cNvPr id="84" name="tx84"/>
+            <p:cNvSpPr/>
+            <p:nvPr/>
+          </p:nvSpPr>
+          <p:spPr>
+            <a:xfrm>
+              <a:off x="7068946" y="5716183"/>
+              <a:ext cx="124358" cy="80101"/>
+            </a:xfrm>
+            <a:prstGeom prst="rect">
+              <a:avLst/>
+            </a:prstGeom>
+            <a:noFill/>
+          </p:spPr>
+          <p:txBody>
+            <a:bodyPr lIns="0" rIns="0" tIns="0" bIns="0" anchorCtr="1" anchor="ctr" wrap="none"/>
+            <a:lstStyle/>
+            <a:p>
+              <a:pPr algn="l" marL="0" marR="0" indent="0">
+                <a:lnSpc>
+                  <a:spcPts val="880"/>
+                </a:lnSpc>
+                <a:spcBef>
+                  <a:spcPts val="0"/>
+                </a:spcBef>
+                <a:spcAft>
+                  <a:spcPts val="0"/>
+                </a:spcAft>
+              </a:pPr>
+              <a:r>
+                <a:rPr sz="880">
+                  <a:solidFill>
+                    <a:srgbClr val="4D4D4D">
+                      <a:alpha val="100000"/>
+                    </a:srgbClr>
+                  </a:solidFill>
+                  <a:latin typeface="Helvetica"/>
+                  <a:cs typeface="Helvetica"/>
+                </a:rPr>
+                <a:t>30</a:t>
+              </a:r>
+            </a:p>
+          </p:txBody>
+        </p:sp>
+        <p:sp>
+          <p:nvSpPr>
+            <p:cNvPr id="85" name="tx85"/>
+            <p:cNvSpPr/>
+            <p:nvPr/>
+          </p:nvSpPr>
+          <p:spPr>
+            <a:xfrm>
+              <a:off x="7914232" y="5716183"/>
+              <a:ext cx="124358" cy="80101"/>
+            </a:xfrm>
+            <a:prstGeom prst="rect">
+              <a:avLst/>
+            </a:prstGeom>
+            <a:noFill/>
+          </p:spPr>
+          <p:txBody>
+            <a:bodyPr lIns="0" rIns="0" tIns="0" bIns="0" anchorCtr="1" anchor="ctr" wrap="none"/>
+            <a:lstStyle/>
+            <a:p>
+              <a:pPr algn="l" marL="0" marR="0" indent="0">
+                <a:lnSpc>
+                  <a:spcPts val="880"/>
+                </a:lnSpc>
+                <a:spcBef>
+                  <a:spcPts val="0"/>
+                </a:spcBef>
+                <a:spcAft>
+                  <a:spcPts val="0"/>
+                </a:spcAft>
+              </a:pPr>
+              <a:r>
+                <a:rPr sz="880">
+                  <a:solidFill>
+                    <a:srgbClr val="4D4D4D">
+                      <a:alpha val="100000"/>
+                    </a:srgbClr>
+                  </a:solidFill>
+                  <a:latin typeface="Helvetica"/>
+                  <a:cs typeface="Helvetica"/>
+                </a:rPr>
+                <a:t>40</a:t>
+              </a:r>
+            </a:p>
+          </p:txBody>
+        </p:sp>
+        <p:sp>
+          <p:nvSpPr>
+            <p:cNvPr id="86" name="tx86"/>
+            <p:cNvSpPr/>
+            <p:nvPr/>
+          </p:nvSpPr>
+          <p:spPr>
+            <a:xfrm>
+              <a:off x="2928340" y="5855859"/>
+              <a:ext cx="3578047" cy="100218"/>
+            </a:xfrm>
+            <a:prstGeom prst="rect">
+              <a:avLst/>
+            </a:prstGeom>
+            <a:noFill/>
+          </p:spPr>
+          <p:txBody>
+            <a:bodyPr lIns="0" rIns="0" tIns="0" bIns="0" anchorCtr="1" anchor="ctr" wrap="none"/>
+            <a:lstStyle/>
+            <a:p>
+              <a:pPr algn="l" marL="0" marR="0" indent="0">
+                <a:lnSpc>
+                  <a:spcPts val="1100"/>
+                </a:lnSpc>
+                <a:spcBef>
+                  <a:spcPts val="0"/>
+                </a:spcBef>
+                <a:spcAft>
+                  <a:spcPts val="0"/>
+                </a:spcAft>
+              </a:pPr>
+              <a:r>
+                <a:rPr sz="1100">
+                  <a:solidFill>
+                    <a:srgbClr val="000000">
+                      <a:alpha val="100000"/>
+                    </a:srgbClr>
+                  </a:solidFill>
+                  <a:latin typeface="Helvetica"/>
+                  <a:cs typeface="Helvetica"/>
+                </a:rPr>
+                <a:t>eGFR difference (%): 100 × (CKD-EPI Cr-Cys − CG) / CG</a:t>
+              </a:r>
+            </a:p>
+          </p:txBody>
+        </p:sp>
+        <p:sp>
+          <p:nvSpPr>
+            <p:cNvPr id="87" name="tx87"/>
+            <p:cNvSpPr/>
+            <p:nvPr/>
+          </p:nvSpPr>
+          <p:spPr>
+            <a:xfrm rot="-5400000">
+              <a:off x="138035" y="4944909"/>
+              <a:ext cx="1016904" cy="100218"/>
+            </a:xfrm>
+            <a:prstGeom prst="rect">
+              <a:avLst/>
+            </a:prstGeom>
+            <a:noFill/>
+          </p:spPr>
+          <p:txBody>
+            <a:bodyPr lIns="0" rIns="0" tIns="0" bIns="0" anchorCtr="1" anchor="ctr" wrap="none"/>
+            <a:lstStyle/>
+            <a:p>
+              <a:pPr algn="l" marL="0" marR="0" indent="0">
+                <a:lnSpc>
+                  <a:spcPts val="1100"/>
+                </a:lnSpc>
+                <a:spcBef>
+                  <a:spcPts val="0"/>
+                </a:spcBef>
+                <a:spcAft>
+                  <a:spcPts val="0"/>
+                </a:spcAft>
+              </a:pPr>
+              <a:r>
+                <a:rPr sz="1100">
+                  <a:solidFill>
+                    <a:srgbClr val="000000">
+                      <a:alpha val="100000"/>
+                    </a:srgbClr>
+                  </a:solidFill>
+                  <a:latin typeface="Helvetica"/>
+                  <a:cs typeface="Helvetica"/>
+                </a:rPr>
+                <a:t>subHR (95% CI)</a:t>
+              </a:r>
+            </a:p>
+          </p:txBody>
+        </p:sp>
+        <p:sp>
+          <p:nvSpPr>
+            <p:cNvPr id="88" name="tx88"/>
+            <p:cNvSpPr/>
+            <p:nvPr/>
+          </p:nvSpPr>
+          <p:spPr>
+            <a:xfrm>
+              <a:off x="887106" y="4159544"/>
+              <a:ext cx="6388364" cy="82021"/>
+            </a:xfrm>
+            <a:prstGeom prst="rect">
+              <a:avLst/>
+            </a:prstGeom>
+            <a:noFill/>
+          </p:spPr>
+          <p:txBody>
+            <a:bodyPr lIns="0" rIns="0" tIns="0" bIns="0" anchorCtr="1" anchor="ctr" wrap="none"/>
+            <a:lstStyle/>
+            <a:p>
+              <a:pPr algn="l" marL="0" marR="0" indent="0">
+                <a:lnSpc>
+                  <a:spcPts val="900"/>
+                </a:lnSpc>
+                <a:spcBef>
+                  <a:spcPts val="0"/>
+                </a:spcBef>
+                <a:spcAft>
+                  <a:spcPts val="0"/>
+                </a:spcAft>
+              </a:pPr>
+              <a:r>
+                <a:rPr sz="900">
+                  <a:solidFill>
+                    <a:srgbClr val="404040">
+                      <a:alpha val="100000"/>
+                    </a:srgbClr>
+                  </a:solidFill>
+                  <a:latin typeface="Helvetica"/>
+                  <a:cs typeface="Helvetica"/>
+                </a:rPr>
+                <a:t>subHR per 10 % decline: 1.39 (1.20-1.60), p = &lt;0.001  |  per IQR decline (Δ = 29.3 %): 2.61 (1.72-3.97)  |  IQR: [-14.6, 14.7] %</a:t>
+              </a:r>
+            </a:p>
+          </p:txBody>
+        </p:sp>
+        <p:sp>
+          <p:nvSpPr>
+            <p:cNvPr id="89" name="tx89"/>
+            <p:cNvSpPr/>
+            <p:nvPr/>
+          </p:nvSpPr>
+          <p:spPr>
+            <a:xfrm>
+              <a:off x="887106" y="3932770"/>
               <a:ext cx="1182684" cy="120152"/>
             </a:xfrm>
             <a:prstGeom prst="rect">
